--- a/decks/Heme_03_Leukocytosis-Cytopenias-Leukemia-Screening.pptx
+++ b/decks/Heme_03_Leukocytosis-Cytopenias-Leukemia-Screening.pptx
@@ -29,9 +29,10 @@
     <p:sldId id="277" r:id="rId23"/>
     <p:sldId id="278" r:id="rId24"/>
     <p:sldId id="279" r:id="rId25"/>
+    <p:sldId id="280" r:id="rId26"/>
   </p:sldIdLst>
   <p:notesMasterIdLst>
-    <p:notesMasterId r:id="rId26"/>
+    <p:notesMasterId r:id="rId27"/>
   </p:notesMasterIdLst>
   <p:sldSz cx="12191695" cy="6858000"/>
   <p:notesSz cx="6858000" cy="12191695"/>
@@ -1957,6 +1958,94 @@
             <a:fld id="{F7021451-1387-4CA6-816F-3879F97B5CBC}" type="slidenum">
               <a:rPr lang="en-US"/>
               <a:t>24</a:t>
+            </a:fld>
+            <a:endParaRPr lang="en-US"/>
+          </a:p>
+        </p:txBody>
+      </p:sp>
+    </p:spTree>
+    <p:extLst>
+      <p:ext uri="{BB962C8B-B14F-4D97-AF65-F5344CB8AC3E}">
+        <p14:creationId xmlns:p14="http://schemas.microsoft.com/office/powerpoint/2010/main" val="1024086991"/>
+      </p:ext>
+    </p:extLst>
+  </p:cSld>
+  <p:clrMapOvr>
+    <a:masterClrMapping/>
+  </p:clrMapOvr>
+</p:notes>
+</file>
+
+<file path=ppt/notesSlides/notesSlide25.xml><?xml version="1.0" encoding="utf-8"?>
+<p:notes xmlns:a="http://schemas.openxmlformats.org/drawingml/2006/main" xmlns:r="http://schemas.openxmlformats.org/officeDocument/2006/relationships" xmlns:p="http://schemas.openxmlformats.org/presentationml/2006/main">
+  <p:cSld>
+    <p:spTree>
+      <p:nvGrpSpPr>
+        <p:cNvPr id="1" name=""/>
+        <p:cNvGrpSpPr/>
+        <p:nvPr/>
+      </p:nvGrpSpPr>
+      <p:grpSpPr>
+        <a:xfrm>
+          <a:off x="0" y="0"/>
+          <a:ext cx="0" cy="0"/>
+          <a:chOff x="0" y="0"/>
+          <a:chExt cx="0" cy="0"/>
+        </a:xfrm>
+      </p:grpSpPr>
+      <p:sp>
+        <p:nvSpPr>
+          <p:cNvPr id="2" name="Slide Image Placeholder 1"/>
+          <p:cNvSpPr>
+            <a:spLocks noGrp="1" noRot="1" noChangeAspect="1"/>
+          </p:cNvSpPr>
+          <p:nvPr>
+            <p:ph type="sldImg"/>
+          </p:nvPr>
+        </p:nvSpPr>
+        <p:spPr/>
+      </p:sp>
+      <p:sp>
+        <p:nvSpPr>
+          <p:cNvPr id="3" name="Notes Placeholder 2"/>
+          <p:cNvSpPr>
+            <a:spLocks noGrp="1"/>
+          </p:cNvSpPr>
+          <p:nvPr>
+            <p:ph type="body" idx="1"/>
+          </p:nvPr>
+        </p:nvSpPr>
+        <p:spPr/>
+        <p:txBody>
+          <a:bodyPr/>
+          <a:lstStyle/>
+          <a:p>
+            <a:r>
+              <a:rPr lang="en-US" dirty="0"/>
+              <a:t/>
+            </a:r>
+            <a:endParaRPr lang="en-US" dirty="0"/>
+          </a:p>
+        </p:txBody>
+      </p:sp>
+      <p:sp>
+        <p:nvSpPr>
+          <p:cNvPr id="4" name="Slide Number Placeholder 3"/>
+          <p:cNvSpPr>
+            <a:spLocks noGrp="1"/>
+          </p:cNvSpPr>
+          <p:nvPr>
+            <p:ph type="sldNum" sz="quarter" idx="10"/>
+          </p:nvPr>
+        </p:nvSpPr>
+        <p:spPr/>
+        <p:txBody>
+          <a:bodyPr/>
+          <a:lstStyle/>
+          <a:p>
+            <a:fld id="{F7021451-1387-4CA6-816F-3879F97B5CBC}" type="slidenum">
+              <a:rPr lang="en-US"/>
+              <a:t>25</a:t>
             </a:fld>
             <a:endParaRPr lang="en-US"/>
           </a:p>
@@ -3121,7 +3210,7 @@
                 <a:ea typeface="Calibri" pitchFamily="34" charset="-122"/>
                 <a:cs typeface="Calibri" pitchFamily="34" charset="-120"/>
               </a:rPr>
-              <a:t>Leukocytosis, Cytopenias &amp; Acute Leukemia Screening</a:t>
+              <a:t>Leukocytosis, Cytopenias &amp; Leukemia Screening</a:t>
             </a:r>
             <a:endParaRPr lang="en-US" sz="4600" dirty="0"/>
           </a:p>
@@ -3160,7 +3249,7 @@
                 <a:ea typeface="Calibri" pitchFamily="34" charset="-122"/>
                 <a:cs typeface="Calibri" pitchFamily="34" charset="-120"/>
               </a:rPr>
-              <a:t>Recognizing the Urgent White-Count and Marrow Findings</a:t>
+              <a:t>Reading the White Cells and Knowing When It’s Urgent</a:t>
             </a:r>
             <a:endParaRPr lang="en-US" sz="1900" dirty="0"/>
           </a:p>
@@ -3352,7 +3441,7 @@
                 <a:ea typeface="Calibri" pitchFamily="34" charset="-122"/>
                 <a:cs typeface="Calibri" pitchFamily="34" charset="-120"/>
               </a:rPr>
-              <a:t>HEMATOLOGY &amp; COAGULATION   ·   CYTOPENIAS</a:t>
+              <a:t>HEMATOLOGY &amp; COAGULATION   ·   MORPHOLOGY</a:t>
             </a:r>
             <a:endParaRPr lang="en-US" sz="1100" dirty="0"/>
           </a:p>
@@ -3391,7 +3480,7 @@
                 <a:ea typeface="Calibri" pitchFamily="34" charset="-122"/>
                 <a:cs typeface="Calibri" pitchFamily="34" charset="-120"/>
               </a:rPr>
-              <a:t>Approaching Cytopenias</a:t>
+              <a:t>Smear Features in Leukemia Screening</a:t>
             </a:r>
             <a:endParaRPr lang="en-US" sz="3000" dirty="0"/>
           </a:p>
@@ -3405,18 +3494,23 @@
         </p:nvSpPr>
         <p:spPr>
           <a:xfrm>
-            <a:off x="566928" y="1517904"/>
-            <a:ext cx="5346040" cy="4114800"/>
+            <a:off x="1066648" y="1481328"/>
+            <a:ext cx="10058400" cy="4187952"/>
           </a:xfrm>
           <a:prstGeom prst="roundRect">
             <a:avLst>
-              <a:gd name="adj" fmla="val 2000"/>
+              <a:gd name="adj" fmla="val 1965"/>
             </a:avLst>
           </a:prstGeom>
           <a:solidFill>
-            <a:srgbClr val="FBEAEC"/>
+            <a:srgbClr val="FFFFFF"/>
           </a:solidFill>
-          <a:ln/>
+          <a:ln w="12700">
+            <a:solidFill>
+              <a:srgbClr val="DCE4EC"/>
+            </a:solidFill>
+            <a:prstDash val="solid"/>
+          </a:ln>
           <a:effectLst>
             <a:outerShdw sx="100000" sy="100000" kx="0" ky="0" algn="bl" rotWithShape="0" blurRad="88900" dist="25400" dir="5400000">
               <a:srgbClr val="22303C">
@@ -3426,55 +3520,40 @@
           </a:effectLst>
         </p:spPr>
       </p:sp>
-      <p:sp>
-        <p:nvSpPr>
-          <p:cNvPr id="5" name="Text 3"/>
-          <p:cNvSpPr/>
-          <p:nvPr/>
-        </p:nvSpPr>
-        <p:spPr>
-          <a:xfrm>
-            <a:off x="804672" y="1682496"/>
-            <a:ext cx="4888840" cy="274320"/>
-          </a:xfrm>
-          <a:prstGeom prst="rect">
-            <a:avLst/>
-          </a:prstGeom>
-          <a:noFill/>
-          <a:ln/>
-        </p:spPr>
-        <p:txBody>
-          <a:bodyPr wrap="square" lIns="0" tIns="0" rIns="0" bIns="0" rtlCol="0" anchor="ctr"/>
-          <a:lstStyle/>
-          <a:p>
-            <a:pPr indent="0" marL="0">
-              <a:buNone/>
-            </a:pPr>
-            <a:r>
-              <a:rPr lang="en-US" sz="1200" b="1" spc="100" kern="0" dirty="0">
-                <a:solidFill>
-                  <a:srgbClr val="8E1622"/>
-                </a:solidFill>
-                <a:latin typeface="Calibri" pitchFamily="34" charset="0"/>
-                <a:ea typeface="Calibri" pitchFamily="34" charset="-122"/>
-                <a:cs typeface="Calibri" pitchFamily="34" charset="-120"/>
-              </a:rPr>
-              <a:t>PANCYTOPENIA</a:t>
-            </a:r>
-            <a:endParaRPr lang="en-US" sz="1200" dirty="0"/>
-          </a:p>
-        </p:txBody>
-      </p:sp>
-      <p:sp>
-        <p:nvSpPr>
-          <p:cNvPr id="6" name="Text 4"/>
-          <p:cNvSpPr/>
-          <p:nvPr/>
-        </p:nvSpPr>
-        <p:spPr>
-          <a:xfrm>
-            <a:off x="804672" y="2029968"/>
-            <a:ext cx="4870552" cy="3474720"/>
+      <p:pic>
+        <p:nvPicPr>
+          <p:cNvPr id="5" name="Image 0" descr="/tmp/cp_work2/art/heme_morph.png">    </p:cNvPr>
+          <p:cNvPicPr>
+            <a:picLocks noChangeAspect="1"/>
+          </p:cNvPicPr>
+          <p:nvPr/>
+        </p:nvPicPr>
+        <p:blipFill>
+          <a:blip r:embed="rId1"/>
+          <a:stretch>
+            <a:fillRect/>
+          </a:stretch>
+        </p:blipFill>
+        <p:spPr>
+          <a:xfrm>
+            <a:off x="1194664" y="1609344"/>
+            <a:ext cx="9802368" cy="3931920"/>
+          </a:xfrm>
+          <a:prstGeom prst="rect">
+            <a:avLst/>
+          </a:prstGeom>
+        </p:spPr>
+      </p:pic>
+      <p:sp>
+        <p:nvSpPr>
+          <p:cNvPr id="6" name="Text 3"/>
+          <p:cNvSpPr/>
+          <p:nvPr/>
+        </p:nvSpPr>
+        <p:spPr>
+          <a:xfrm>
+            <a:off x="566928" y="5742432"/>
+            <a:ext cx="11057839" cy="365760"/>
           </a:xfrm>
           <a:prstGeom prst="rect">
             <a:avLst/>
@@ -3486,226 +3565,27 @@
           <a:bodyPr wrap="square" lIns="0" tIns="0" rIns="0" bIns="0" rtlCol="0" anchor="t"/>
           <a:lstStyle/>
           <a:p>
-            <a:pPr algn="l" marL="177800" indent="-177800">
-              <a:spcAft>
-                <a:spcPts val="900"/>
-              </a:spcAft>
-              <a:buSzPct val="100000"/>
-              <a:buChar char="•"/>
-            </a:pPr>
-            <a:r>
-              <a:rPr lang="en-US" sz="1250" b="1" dirty="0">
-                <a:solidFill>
-                  <a:srgbClr val="1B2A38"/>
-                </a:solidFill>
-                <a:latin typeface="Calibri" pitchFamily="34" charset="0"/>
-                <a:ea typeface="Calibri" pitchFamily="34" charset="-122"/>
-                <a:cs typeface="Calibri" pitchFamily="34" charset="-120"/>
-              </a:rPr>
-              <a:t>Decreased production: aplastic anemia, marrow infiltration (leukemia, metastasis, fibrosis), megaloblastic, MDS.</a:t>
-            </a:r>
-            <a:endParaRPr lang="en-US" sz="1250" dirty="0"/>
-          </a:p>
-          <a:p>
-            <a:pPr algn="l" marL="177800" indent="-177800">
-              <a:spcAft>
-                <a:spcPts val="900"/>
-              </a:spcAft>
-              <a:buSzPct val="100000"/>
-              <a:buChar char="•"/>
-            </a:pPr>
-            <a:r>
-              <a:rPr lang="en-US" sz="1250" dirty="0">
-                <a:solidFill>
-                  <a:srgbClr val="33444F"/>
-                </a:solidFill>
-                <a:latin typeface="Calibri" pitchFamily="34" charset="0"/>
-                <a:ea typeface="Calibri" pitchFamily="34" charset="-122"/>
-                <a:cs typeface="Calibri" pitchFamily="34" charset="-120"/>
-              </a:rPr>
-              <a:t>Increased destruction/sequestration: hypersplenism, severe immune processes.</a:t>
-            </a:r>
-            <a:endParaRPr lang="en-US" sz="1250" dirty="0"/>
-          </a:p>
-          <a:p>
-            <a:pPr algn="l" marL="177800" indent="-177800">
-              <a:spcAft>
-                <a:spcPts val="900"/>
-              </a:spcAft>
-              <a:buSzPct val="100000"/>
-              <a:buChar char="•"/>
-            </a:pPr>
-            <a:r>
-              <a:rPr lang="en-US" sz="1250" dirty="0">
-                <a:solidFill>
-                  <a:srgbClr val="33444F"/>
-                </a:solidFill>
-                <a:latin typeface="Calibri" pitchFamily="34" charset="0"/>
-                <a:ea typeface="Calibri" pitchFamily="34" charset="-122"/>
-                <a:cs typeface="Calibri" pitchFamily="34" charset="-120"/>
-              </a:rPr>
-              <a:t>The smear and reticulocyte count guide the marrow decision.</a:t>
-            </a:r>
-            <a:endParaRPr lang="en-US" sz="1250" dirty="0"/>
-          </a:p>
-        </p:txBody>
-      </p:sp>
-      <p:sp>
-        <p:nvSpPr>
-          <p:cNvPr id="7" name="Shape 5"/>
-          <p:cNvSpPr/>
-          <p:nvPr/>
-        </p:nvSpPr>
-        <p:spPr>
-          <a:xfrm>
-            <a:off x="6278728" y="1517904"/>
-            <a:ext cx="5346040" cy="4114800"/>
-          </a:xfrm>
-          <a:prstGeom prst="roundRect">
-            <a:avLst>
-              <a:gd name="adj" fmla="val 2000"/>
-            </a:avLst>
-          </a:prstGeom>
-          <a:solidFill>
-            <a:srgbClr val="FBEAEC"/>
-          </a:solidFill>
-          <a:ln/>
-          <a:effectLst>
-            <a:outerShdw sx="100000" sy="100000" kx="0" ky="0" algn="bl" rotWithShape="0" blurRad="88900" dist="25400" dir="5400000">
-              <a:srgbClr val="22303C">
-                <a:alpha val="12000"/>
-              </a:srgbClr>
-            </a:outerShdw>
-          </a:effectLst>
-        </p:spPr>
-      </p:sp>
-      <p:sp>
-        <p:nvSpPr>
-          <p:cNvPr id="8" name="Text 6"/>
-          <p:cNvSpPr/>
-          <p:nvPr/>
-        </p:nvSpPr>
-        <p:spPr>
-          <a:xfrm>
-            <a:off x="6516472" y="1682496"/>
-            <a:ext cx="4888840" cy="274320"/>
-          </a:xfrm>
-          <a:prstGeom prst="rect">
-            <a:avLst/>
-          </a:prstGeom>
-          <a:noFill/>
-          <a:ln/>
-        </p:spPr>
-        <p:txBody>
-          <a:bodyPr wrap="square" lIns="0" tIns="0" rIns="0" bIns="0" rtlCol="0" anchor="ctr"/>
-          <a:lstStyle/>
-          <a:p>
-            <a:pPr indent="0" marL="0">
-              <a:buNone/>
-            </a:pPr>
-            <a:r>
-              <a:rPr lang="en-US" sz="1200" b="1" spc="100" kern="0" dirty="0">
-                <a:solidFill>
-                  <a:srgbClr val="8E1622"/>
-                </a:solidFill>
-                <a:latin typeface="Calibri" pitchFamily="34" charset="0"/>
-                <a:ea typeface="Calibri" pitchFamily="34" charset="-122"/>
-                <a:cs typeface="Calibri" pitchFamily="34" charset="-120"/>
-              </a:rPr>
-              <a:t>ISOLATED CYTOPENIAS</a:t>
-            </a:r>
-            <a:endParaRPr lang="en-US" sz="1200" dirty="0"/>
-          </a:p>
-        </p:txBody>
-      </p:sp>
-      <p:sp>
-        <p:nvSpPr>
-          <p:cNvPr id="9" name="Text 7"/>
-          <p:cNvSpPr/>
-          <p:nvPr/>
-        </p:nvSpPr>
-        <p:spPr>
-          <a:xfrm>
-            <a:off x="6516472" y="2029968"/>
-            <a:ext cx="4870552" cy="3474720"/>
-          </a:xfrm>
-          <a:prstGeom prst="rect">
-            <a:avLst/>
-          </a:prstGeom>
-          <a:noFill/>
-          <a:ln/>
-        </p:spPr>
-        <p:txBody>
-          <a:bodyPr wrap="square" lIns="0" tIns="0" rIns="0" bIns="0" rtlCol="0" anchor="t"/>
-          <a:lstStyle/>
-          <a:p>
-            <a:pPr algn="l" marL="177800" indent="-177800">
-              <a:spcAft>
-                <a:spcPts val="900"/>
-              </a:spcAft>
-              <a:buSzPct val="100000"/>
-              <a:buChar char="•"/>
-            </a:pPr>
-            <a:r>
-              <a:rPr lang="en-US" sz="1250" b="1" dirty="0">
-                <a:solidFill>
-                  <a:srgbClr val="1B2A38"/>
-                </a:solidFill>
-                <a:latin typeface="Calibri" pitchFamily="34" charset="0"/>
-                <a:ea typeface="Calibri" pitchFamily="34" charset="-122"/>
-                <a:cs typeface="Calibri" pitchFamily="34" charset="-120"/>
-              </a:rPr>
-              <a:t>Isolated thrombocytopenia: ITP, drugs, consumption (Lecture 4).</a:t>
-            </a:r>
-            <a:endParaRPr lang="en-US" sz="1250" dirty="0"/>
-          </a:p>
-          <a:p>
-            <a:pPr algn="l" marL="177800" indent="-177800">
-              <a:spcAft>
-                <a:spcPts val="900"/>
-              </a:spcAft>
-              <a:buSzPct val="100000"/>
-              <a:buChar char="•"/>
-            </a:pPr>
-            <a:r>
-              <a:rPr lang="en-US" sz="1250" dirty="0">
-                <a:solidFill>
-                  <a:srgbClr val="33444F"/>
-                </a:solidFill>
-                <a:latin typeface="Calibri" pitchFamily="34" charset="0"/>
-                <a:ea typeface="Calibri" pitchFamily="34" charset="-122"/>
-                <a:cs typeface="Calibri" pitchFamily="34" charset="-120"/>
-              </a:rPr>
-              <a:t>Isolated neutropenia: drugs, infection, autoimmune, ethnic.</a:t>
-            </a:r>
-            <a:endParaRPr lang="en-US" sz="1250" dirty="0"/>
-          </a:p>
-          <a:p>
-            <a:pPr algn="l" marL="177800" indent="-177800">
-              <a:spcAft>
-                <a:spcPts val="900"/>
-              </a:spcAft>
-              <a:buSzPct val="100000"/>
-              <a:buChar char="•"/>
-            </a:pPr>
-            <a:r>
-              <a:rPr lang="en-US" sz="1250" dirty="0">
-                <a:solidFill>
-                  <a:srgbClr val="33444F"/>
-                </a:solidFill>
-                <a:latin typeface="Calibri" pitchFamily="34" charset="0"/>
-                <a:ea typeface="Calibri" pitchFamily="34" charset="-122"/>
-                <a:cs typeface="Calibri" pitchFamily="34" charset="-120"/>
-              </a:rPr>
-              <a:t>Unexplained, persistent, or progressive cytopenias warrant marrow evaluation.</a:t>
-            </a:r>
-            <a:endParaRPr lang="en-US" sz="1250" dirty="0"/>
-          </a:p>
-        </p:txBody>
-      </p:sp>
-      <p:sp>
-        <p:nvSpPr>
-          <p:cNvPr id="10" name="Text 8"/>
+            <a:pPr algn="ctr" indent="0" marL="0">
+              <a:buNone/>
+            </a:pPr>
+            <a:r>
+              <a:rPr lang="en-US" sz="1150" i="1" dirty="0">
+                <a:solidFill>
+                  <a:srgbClr val="6B7B8A"/>
+                </a:solidFill>
+                <a:latin typeface="Calibri" pitchFamily="34" charset="0"/>
+                <a:ea typeface="Calibri" pitchFamily="34" charset="-122"/>
+                <a:cs typeface="Calibri" pitchFamily="34" charset="-120"/>
+              </a:rPr>
+              <a:t>Original schematic. Blasts, Auer rods, and abnormal populations on the smear drive urgent flow cytometry and further testing.</a:t>
+            </a:r>
+            <a:endParaRPr lang="en-US" sz="1150" dirty="0"/>
+          </a:p>
+        </p:txBody>
+      </p:sp>
+      <p:sp>
+        <p:nvSpPr>
+          <p:cNvPr id="7" name="Text 4"/>
           <p:cNvSpPr/>
           <p:nvPr/>
         </p:nvSpPr>
@@ -3744,7 +3624,7 @@
       </p:sp>
       <p:sp>
         <p:nvSpPr>
-          <p:cNvPr id="11" name="Text 9"/>
+          <p:cNvPr id="8" name="Text 5"/>
           <p:cNvSpPr/>
           <p:nvPr/>
         </p:nvSpPr>
@@ -3874,7 +3754,7 @@
                 <a:ea typeface="Calibri" pitchFamily="34" charset="-122"/>
                 <a:cs typeface="Calibri" pitchFamily="34" charset="-120"/>
               </a:rPr>
-              <a:t>HEMATOLOGY &amp; COAGULATION   ·   ACUTE LEUKEMIA SCREENING</a:t>
+              <a:t>HEMATOLOGY &amp; COAGULATION   ·   WORKUP</a:t>
             </a:r>
             <a:endParaRPr lang="en-US" sz="1100" dirty="0"/>
           </a:p>
@@ -3913,7 +3793,7 @@
                 <a:ea typeface="Calibri" pitchFamily="34" charset="-122"/>
                 <a:cs typeface="Calibri" pitchFamily="34" charset="-120"/>
               </a:rPr>
-              <a:t>From Blasts to a Diagnosis</a:t>
+              <a:t>Flow Cytometry &amp; Ancillary Testing</a:t>
             </a:r>
             <a:endParaRPr lang="en-US" sz="3000" dirty="0"/>
           </a:p>
@@ -3927,23 +3807,18 @@
         </p:nvSpPr>
         <p:spPr>
           <a:xfrm>
-            <a:off x="566928" y="1828800"/>
-            <a:ext cx="2490140" cy="1188720"/>
+            <a:off x="566928" y="1517904"/>
+            <a:ext cx="5346040" cy="4114800"/>
           </a:xfrm>
           <a:prstGeom prst="roundRect">
             <a:avLst>
-              <a:gd name="adj" fmla="val 5385"/>
+              <a:gd name="adj" fmla="val 2000"/>
             </a:avLst>
           </a:prstGeom>
           <a:solidFill>
-            <a:srgbClr val="C62133"/>
+            <a:srgbClr val="FBEAEC"/>
           </a:solidFill>
-          <a:ln w="15875">
-            <a:solidFill>
-              <a:srgbClr val="C62133"/>
-            </a:solidFill>
-            <a:prstDash val="solid"/>
-          </a:ln>
+          <a:ln/>
           <a:effectLst>
             <a:outerShdw sx="100000" sy="100000" kx="0" ky="0" algn="bl" rotWithShape="0" blurRad="88900" dist="25400" dir="5400000">
               <a:srgbClr val="22303C">
@@ -3961,77 +3836,142 @@
         </p:nvSpPr>
         <p:spPr>
           <a:xfrm>
-            <a:off x="621792" y="1828800"/>
-            <a:ext cx="2380412" cy="1188720"/>
-          </a:xfrm>
-          <a:prstGeom prst="rect">
-            <a:avLst/>
-          </a:prstGeom>
-          <a:noFill/>
-          <a:ln/>
-        </p:spPr>
-        <p:txBody>
-          <a:bodyPr wrap="square" lIns="25400" tIns="25400" rIns="25400" bIns="25400" rtlCol="0" anchor="ctr"/>
-          <a:lstStyle/>
-          <a:p>
-            <a:pPr algn="ctr" indent="0" marL="0">
-              <a:buNone/>
-            </a:pPr>
-            <a:r>
-              <a:rPr lang="en-US" sz="1100" b="1" dirty="0">
-                <a:solidFill>
-                  <a:srgbClr val="FFFFFF"/>
-                </a:solidFill>
-                <a:latin typeface="Calibri" pitchFamily="34" charset="0"/>
-                <a:ea typeface="Calibri" pitchFamily="34" charset="-122"/>
-                <a:cs typeface="Calibri" pitchFamily="34" charset="-120"/>
-              </a:rPr>
-              <a:t>Blasts on smear</a:t>
-            </a:r>
-            <a:endParaRPr lang="en-US" sz="1100" dirty="0"/>
-          </a:p>
-          <a:p>
-            <a:pPr algn="ctr" indent="0" marL="0">
-              <a:buNone/>
-            </a:pPr>
-            <a:r>
-              <a:rPr lang="en-US" sz="1100" b="1" dirty="0">
-                <a:solidFill>
-                  <a:srgbClr val="FFFFFF"/>
-                </a:solidFill>
-                <a:latin typeface="Calibri" pitchFamily="34" charset="0"/>
-                <a:ea typeface="Calibri" pitchFamily="34" charset="-122"/>
-                <a:cs typeface="Calibri" pitchFamily="34" charset="-120"/>
-              </a:rPr>
-              <a:t>(± Auer rods)</a:t>
-            </a:r>
-            <a:endParaRPr lang="en-US" sz="1100" dirty="0"/>
-          </a:p>
-        </p:txBody>
-      </p:sp>
-      <p:sp>
-        <p:nvSpPr>
-          <p:cNvPr id="6" name="Shape 4"/>
-          <p:cNvSpPr/>
-          <p:nvPr/>
-        </p:nvSpPr>
-        <p:spPr>
-          <a:xfrm>
-            <a:off x="3075356" y="2423160"/>
-            <a:ext cx="329184" cy="0"/>
-          </a:xfrm>
-          <a:prstGeom prst="line">
-            <a:avLst/>
-          </a:prstGeom>
-          <a:noFill/>
-          <a:ln w="22225">
-            <a:solidFill>
-              <a:srgbClr val="C62133"/>
-            </a:solidFill>
-            <a:prstDash val="solid"/>
-            <a:tailEnd type="triangle"/>
-          </a:ln>
-        </p:spPr>
+            <a:off x="804672" y="1682496"/>
+            <a:ext cx="4888840" cy="274320"/>
+          </a:xfrm>
+          <a:prstGeom prst="rect">
+            <a:avLst/>
+          </a:prstGeom>
+          <a:noFill/>
+          <a:ln/>
+        </p:spPr>
+        <p:txBody>
+          <a:bodyPr wrap="square" lIns="0" tIns="0" rIns="0" bIns="0" rtlCol="0" anchor="ctr"/>
+          <a:lstStyle/>
+          <a:p>
+            <a:pPr indent="0" marL="0">
+              <a:buNone/>
+            </a:pPr>
+            <a:r>
+              <a:rPr lang="en-US" sz="1200" b="1" spc="100" kern="0" dirty="0">
+                <a:solidFill>
+                  <a:srgbClr val="8E1622"/>
+                </a:solidFill>
+                <a:latin typeface="Calibri" pitchFamily="34" charset="0"/>
+                <a:ea typeface="Calibri" pitchFamily="34" charset="-122"/>
+                <a:cs typeface="Calibri" pitchFamily="34" charset="-120"/>
+              </a:rPr>
+              <a:t>IMMUNOPHENOTYPING</a:t>
+            </a:r>
+            <a:endParaRPr lang="en-US" sz="1200" dirty="0"/>
+          </a:p>
+        </p:txBody>
+      </p:sp>
+      <p:sp>
+        <p:nvSpPr>
+          <p:cNvPr id="6" name="Text 4"/>
+          <p:cNvSpPr/>
+          <p:nvPr/>
+        </p:nvSpPr>
+        <p:spPr>
+          <a:xfrm>
+            <a:off x="804672" y="2029968"/>
+            <a:ext cx="4870552" cy="3474720"/>
+          </a:xfrm>
+          <a:prstGeom prst="rect">
+            <a:avLst/>
+          </a:prstGeom>
+          <a:noFill/>
+          <a:ln/>
+        </p:spPr>
+        <p:txBody>
+          <a:bodyPr wrap="square" lIns="0" tIns="0" rIns="0" bIns="0" rtlCol="0" anchor="t"/>
+          <a:lstStyle/>
+          <a:p>
+            <a:pPr algn="l" marL="177800" indent="-177800">
+              <a:spcAft>
+                <a:spcPts val="900"/>
+              </a:spcAft>
+              <a:buSzPct val="100000"/>
+              <a:buChar char="•"/>
+            </a:pPr>
+            <a:r>
+              <a:rPr lang="en-US" sz="1250" b="1" dirty="0">
+                <a:solidFill>
+                  <a:srgbClr val="1B2A38"/>
+                </a:solidFill>
+                <a:latin typeface="Calibri" pitchFamily="34" charset="0"/>
+                <a:ea typeface="Calibri" pitchFamily="34" charset="-122"/>
+                <a:cs typeface="Calibri" pitchFamily="34" charset="-120"/>
+              </a:rPr>
+              <a:t>Flow cytometry classifies blasts (myeloid vs lymphoid) and detects clonal populations.</a:t>
+            </a:r>
+            <a:endParaRPr lang="en-US" sz="1250" dirty="0"/>
+          </a:p>
+          <a:p>
+            <a:pPr algn="l" marL="177800" indent="-177800">
+              <a:spcAft>
+                <a:spcPts val="900"/>
+              </a:spcAft>
+              <a:buSzPct val="100000"/>
+              <a:buChar char="•"/>
+            </a:pPr>
+            <a:r>
+              <a:rPr lang="en-US" sz="1250" dirty="0">
+                <a:solidFill>
+                  <a:srgbClr val="33444F"/>
+                </a:solidFill>
+                <a:latin typeface="Calibri" pitchFamily="34" charset="0"/>
+                <a:ea typeface="Calibri" pitchFamily="34" charset="-122"/>
+                <a:cs typeface="Calibri" pitchFamily="34" charset="-120"/>
+              </a:rPr>
+              <a:t>Rapidly characterizes acute leukemia lineage.</a:t>
+            </a:r>
+            <a:endParaRPr lang="en-US" sz="1250" dirty="0"/>
+          </a:p>
+          <a:p>
+            <a:pPr algn="l" marL="177800" indent="-177800">
+              <a:spcAft>
+                <a:spcPts val="900"/>
+              </a:spcAft>
+              <a:buSzPct val="100000"/>
+              <a:buChar char="•"/>
+            </a:pPr>
+            <a:r>
+              <a:rPr lang="en-US" sz="1250" dirty="0">
+                <a:solidFill>
+                  <a:srgbClr val="33444F"/>
+                </a:solidFill>
+                <a:latin typeface="Calibri" pitchFamily="34" charset="0"/>
+                <a:ea typeface="Calibri" pitchFamily="34" charset="-122"/>
+                <a:cs typeface="Calibri" pitchFamily="34" charset="-120"/>
+              </a:rPr>
+              <a:t>Detects aberrant antigen expression.</a:t>
+            </a:r>
+            <a:endParaRPr lang="en-US" sz="1250" dirty="0"/>
+          </a:p>
+          <a:p>
+            <a:pPr algn="l" marL="177800" indent="-177800">
+              <a:spcAft>
+                <a:spcPts val="900"/>
+              </a:spcAft>
+              <a:buSzPct val="100000"/>
+              <a:buChar char="•"/>
+            </a:pPr>
+            <a:r>
+              <a:rPr lang="en-US" sz="1250" dirty="0">
+                <a:solidFill>
+                  <a:srgbClr val="33444F"/>
+                </a:solidFill>
+                <a:latin typeface="Calibri" pitchFamily="34" charset="0"/>
+                <a:ea typeface="Calibri" pitchFamily="34" charset="-122"/>
+                <a:cs typeface="Calibri" pitchFamily="34" charset="-120"/>
+              </a:rPr>
+              <a:t>Guides further cytogenetic/molecular testing.</a:t>
+            </a:r>
+            <a:endParaRPr lang="en-US" sz="1250" dirty="0"/>
+          </a:p>
+        </p:txBody>
       </p:sp>
       <p:sp>
         <p:nvSpPr>
@@ -4041,23 +3981,18 @@
         </p:nvSpPr>
         <p:spPr>
           <a:xfrm>
-            <a:off x="3422828" y="1828800"/>
-            <a:ext cx="2490140" cy="1188720"/>
+            <a:off x="6278728" y="1517904"/>
+            <a:ext cx="5346040" cy="4114800"/>
           </a:xfrm>
           <a:prstGeom prst="roundRect">
             <a:avLst>
-              <a:gd name="adj" fmla="val 5385"/>
+              <a:gd name="adj" fmla="val 2000"/>
             </a:avLst>
           </a:prstGeom>
           <a:solidFill>
-            <a:srgbClr val="FFFFFF"/>
+            <a:srgbClr val="FBE7E9"/>
           </a:solidFill>
-          <a:ln w="15875">
-            <a:solidFill>
-              <a:srgbClr val="DCE4EC"/>
-            </a:solidFill>
-            <a:prstDash val="solid"/>
-          </a:ln>
+          <a:ln/>
           <a:effectLst>
             <a:outerShdw sx="100000" sy="100000" kx="0" ky="0" algn="bl" rotWithShape="0" blurRad="88900" dist="25400" dir="5400000">
               <a:srgbClr val="22303C">
@@ -4075,24 +4010,67 @@
         </p:nvSpPr>
         <p:spPr>
           <a:xfrm>
-            <a:off x="3477692" y="1828800"/>
-            <a:ext cx="2380412" cy="1188720"/>
-          </a:xfrm>
-          <a:prstGeom prst="rect">
-            <a:avLst/>
-          </a:prstGeom>
-          <a:noFill/>
-          <a:ln/>
-        </p:spPr>
-        <p:txBody>
-          <a:bodyPr wrap="square" lIns="25400" tIns="25400" rIns="25400" bIns="25400" rtlCol="0" anchor="ctr"/>
-          <a:lstStyle/>
-          <a:p>
-            <a:pPr algn="ctr" indent="0" marL="0">
-              <a:buNone/>
-            </a:pPr>
-            <a:r>
-              <a:rPr lang="en-US" sz="1100" b="1" dirty="0">
+            <a:off x="6516472" y="1682496"/>
+            <a:ext cx="4888840" cy="274320"/>
+          </a:xfrm>
+          <a:prstGeom prst="rect">
+            <a:avLst/>
+          </a:prstGeom>
+          <a:noFill/>
+          <a:ln/>
+        </p:spPr>
+        <p:txBody>
+          <a:bodyPr wrap="square" lIns="0" tIns="0" rIns="0" bIns="0" rtlCol="0" anchor="ctr"/>
+          <a:lstStyle/>
+          <a:p>
+            <a:pPr indent="0" marL="0">
+              <a:buNone/>
+            </a:pPr>
+            <a:r>
+              <a:rPr lang="en-US" sz="1200" b="1" spc="100" kern="0" dirty="0">
+                <a:solidFill>
+                  <a:srgbClr val="8E1622"/>
+                </a:solidFill>
+                <a:latin typeface="Calibri" pitchFamily="34" charset="0"/>
+                <a:ea typeface="Calibri" pitchFamily="34" charset="-122"/>
+                <a:cs typeface="Calibri" pitchFamily="34" charset="-120"/>
+              </a:rPr>
+              <a:t>INTEGRATED DIAGNOSIS</a:t>
+            </a:r>
+            <a:endParaRPr lang="en-US" sz="1200" dirty="0"/>
+          </a:p>
+        </p:txBody>
+      </p:sp>
+      <p:sp>
+        <p:nvSpPr>
+          <p:cNvPr id="9" name="Text 7"/>
+          <p:cNvSpPr/>
+          <p:nvPr/>
+        </p:nvSpPr>
+        <p:spPr>
+          <a:xfrm>
+            <a:off x="6516472" y="2029968"/>
+            <a:ext cx="4870552" cy="3474720"/>
+          </a:xfrm>
+          <a:prstGeom prst="rect">
+            <a:avLst/>
+          </a:prstGeom>
+          <a:noFill/>
+          <a:ln/>
+        </p:spPr>
+        <p:txBody>
+          <a:bodyPr wrap="square" lIns="0" tIns="0" rIns="0" bIns="0" rtlCol="0" anchor="t"/>
+          <a:lstStyle/>
+          <a:p>
+            <a:pPr algn="l" marL="177800" indent="-177800">
+              <a:spcAft>
+                <a:spcPts val="900"/>
+              </a:spcAft>
+              <a:buSzPct val="100000"/>
+              <a:buChar char="•"/>
+            </a:pPr>
+            <a:r>
+              <a:rPr lang="en-US" sz="1250" b="1" dirty="0">
                 <a:solidFill>
                   <a:srgbClr val="1B2A38"/>
                 </a:solidFill>
@@ -4100,315 +4078,20 @@
                 <a:ea typeface="Calibri" pitchFamily="34" charset="-122"/>
                 <a:cs typeface="Calibri" pitchFamily="34" charset="-120"/>
               </a:rPr>
-              <a:t>Notify clinician;</a:t>
-            </a:r>
-            <a:endParaRPr lang="en-US" sz="1100" dirty="0"/>
-          </a:p>
-          <a:p>
-            <a:pPr algn="ctr" indent="0" marL="0">
-              <a:buNone/>
-            </a:pPr>
-            <a:r>
-              <a:rPr lang="en-US" sz="1100" b="1" dirty="0">
-                <a:solidFill>
-                  <a:srgbClr val="1B2A38"/>
-                </a:solidFill>
-                <a:latin typeface="Calibri" pitchFamily="34" charset="0"/>
-                <a:ea typeface="Calibri" pitchFamily="34" charset="-122"/>
-                <a:cs typeface="Calibri" pitchFamily="34" charset="-120"/>
-              </a:rPr>
-              <a:t>check coagulation (?DIC)</a:t>
-            </a:r>
-            <a:endParaRPr lang="en-US" sz="1100" dirty="0"/>
-          </a:p>
-        </p:txBody>
-      </p:sp>
-      <p:sp>
-        <p:nvSpPr>
-          <p:cNvPr id="9" name="Shape 7"/>
-          <p:cNvSpPr/>
-          <p:nvPr/>
-        </p:nvSpPr>
-        <p:spPr>
-          <a:xfrm>
-            <a:off x="5931256" y="2423160"/>
-            <a:ext cx="329184" cy="0"/>
-          </a:xfrm>
-          <a:prstGeom prst="line">
-            <a:avLst/>
-          </a:prstGeom>
-          <a:noFill/>
-          <a:ln w="22225">
-            <a:solidFill>
-              <a:srgbClr val="C62133"/>
-            </a:solidFill>
-            <a:prstDash val="solid"/>
-            <a:tailEnd type="triangle"/>
-          </a:ln>
-        </p:spPr>
-      </p:sp>
-      <p:sp>
-        <p:nvSpPr>
-          <p:cNvPr id="10" name="Shape 8"/>
-          <p:cNvSpPr/>
-          <p:nvPr/>
-        </p:nvSpPr>
-        <p:spPr>
-          <a:xfrm>
-            <a:off x="6278728" y="1828800"/>
-            <a:ext cx="2490140" cy="1188720"/>
-          </a:xfrm>
-          <a:prstGeom prst="roundRect">
-            <a:avLst>
-              <a:gd name="adj" fmla="val 5385"/>
-            </a:avLst>
-          </a:prstGeom>
-          <a:solidFill>
-            <a:srgbClr val="FFFFFF"/>
-          </a:solidFill>
-          <a:ln w="15875">
-            <a:solidFill>
-              <a:srgbClr val="DCE4EC"/>
-            </a:solidFill>
-            <a:prstDash val="solid"/>
-          </a:ln>
-          <a:effectLst>
-            <a:outerShdw sx="100000" sy="100000" kx="0" ky="0" algn="bl" rotWithShape="0" blurRad="88900" dist="25400" dir="5400000">
-              <a:srgbClr val="22303C">
-                <a:alpha val="12000"/>
-              </a:srgbClr>
-            </a:outerShdw>
-          </a:effectLst>
-        </p:spPr>
-      </p:sp>
-      <p:sp>
-        <p:nvSpPr>
-          <p:cNvPr id="11" name="Text 9"/>
-          <p:cNvSpPr/>
-          <p:nvPr/>
-        </p:nvSpPr>
-        <p:spPr>
-          <a:xfrm>
-            <a:off x="6333592" y="1828800"/>
-            <a:ext cx="2380412" cy="1188720"/>
-          </a:xfrm>
-          <a:prstGeom prst="rect">
-            <a:avLst/>
-          </a:prstGeom>
-          <a:noFill/>
-          <a:ln/>
-        </p:spPr>
-        <p:txBody>
-          <a:bodyPr wrap="square" lIns="25400" tIns="25400" rIns="25400" bIns="25400" rtlCol="0" anchor="ctr"/>
-          <a:lstStyle/>
-          <a:p>
-            <a:pPr algn="ctr" indent="0" marL="0">
-              <a:buNone/>
-            </a:pPr>
-            <a:r>
-              <a:rPr lang="en-US" sz="1100" b="1" dirty="0">
-                <a:solidFill>
-                  <a:srgbClr val="1B2A38"/>
-                </a:solidFill>
-                <a:latin typeface="Calibri" pitchFamily="34" charset="0"/>
-                <a:ea typeface="Calibri" pitchFamily="34" charset="-122"/>
-                <a:cs typeface="Calibri" pitchFamily="34" charset="-120"/>
-              </a:rPr>
-              <a:t>Flow cytometry</a:t>
-            </a:r>
-            <a:endParaRPr lang="en-US" sz="1100" dirty="0"/>
-          </a:p>
-          <a:p>
-            <a:pPr algn="ctr" indent="0" marL="0">
-              <a:buNone/>
-            </a:pPr>
-            <a:r>
-              <a:rPr lang="en-US" sz="1100" b="1" dirty="0">
-                <a:solidFill>
-                  <a:srgbClr val="1B2A38"/>
-                </a:solidFill>
-                <a:latin typeface="Calibri" pitchFamily="34" charset="0"/>
-                <a:ea typeface="Calibri" pitchFamily="34" charset="-122"/>
-                <a:cs typeface="Calibri" pitchFamily="34" charset="-120"/>
-              </a:rPr>
-              <a:t>for lineage</a:t>
-            </a:r>
-            <a:endParaRPr lang="en-US" sz="1100" dirty="0"/>
-          </a:p>
-        </p:txBody>
-      </p:sp>
-      <p:sp>
-        <p:nvSpPr>
-          <p:cNvPr id="12" name="Shape 10"/>
-          <p:cNvSpPr/>
-          <p:nvPr/>
-        </p:nvSpPr>
-        <p:spPr>
-          <a:xfrm>
-            <a:off x="8787155" y="2423160"/>
-            <a:ext cx="329184" cy="0"/>
-          </a:xfrm>
-          <a:prstGeom prst="line">
-            <a:avLst/>
-          </a:prstGeom>
-          <a:noFill/>
-          <a:ln w="22225">
-            <a:solidFill>
-              <a:srgbClr val="C62133"/>
-            </a:solidFill>
-            <a:prstDash val="solid"/>
-            <a:tailEnd type="triangle"/>
-          </a:ln>
-        </p:spPr>
-      </p:sp>
-      <p:sp>
-        <p:nvSpPr>
-          <p:cNvPr id="13" name="Shape 11"/>
-          <p:cNvSpPr/>
-          <p:nvPr/>
-        </p:nvSpPr>
-        <p:spPr>
-          <a:xfrm>
-            <a:off x="9134627" y="1828800"/>
-            <a:ext cx="2490140" cy="1188720"/>
-          </a:xfrm>
-          <a:prstGeom prst="roundRect">
-            <a:avLst>
-              <a:gd name="adj" fmla="val 5385"/>
-            </a:avLst>
-          </a:prstGeom>
-          <a:solidFill>
-            <a:srgbClr val="FFFFFF"/>
-          </a:solidFill>
-          <a:ln w="15875">
-            <a:solidFill>
-              <a:srgbClr val="DCE4EC"/>
-            </a:solidFill>
-            <a:prstDash val="solid"/>
-          </a:ln>
-          <a:effectLst>
-            <a:outerShdw sx="100000" sy="100000" kx="0" ky="0" algn="bl" rotWithShape="0" blurRad="88900" dist="25400" dir="5400000">
-              <a:srgbClr val="22303C">
-                <a:alpha val="12000"/>
-              </a:srgbClr>
-            </a:outerShdw>
-          </a:effectLst>
-        </p:spPr>
-      </p:sp>
-      <p:sp>
-        <p:nvSpPr>
-          <p:cNvPr id="14" name="Text 12"/>
-          <p:cNvSpPr/>
-          <p:nvPr/>
-        </p:nvSpPr>
-        <p:spPr>
-          <a:xfrm>
-            <a:off x="9189491" y="1828800"/>
-            <a:ext cx="2380412" cy="1188720"/>
-          </a:xfrm>
-          <a:prstGeom prst="rect">
-            <a:avLst/>
-          </a:prstGeom>
-          <a:noFill/>
-          <a:ln/>
-        </p:spPr>
-        <p:txBody>
-          <a:bodyPr wrap="square" lIns="25400" tIns="25400" rIns="25400" bIns="25400" rtlCol="0" anchor="ctr"/>
-          <a:lstStyle/>
-          <a:p>
-            <a:pPr algn="ctr" indent="0" marL="0">
-              <a:buNone/>
-            </a:pPr>
-            <a:r>
-              <a:rPr lang="en-US" sz="1100" b="1" dirty="0">
-                <a:solidFill>
-                  <a:srgbClr val="1B2A38"/>
-                </a:solidFill>
-                <a:latin typeface="Calibri" pitchFamily="34" charset="0"/>
-                <a:ea typeface="Calibri" pitchFamily="34" charset="-122"/>
-                <a:cs typeface="Calibri" pitchFamily="34" charset="-120"/>
-              </a:rPr>
-              <a:t>Marrow + cytogenetics</a:t>
-            </a:r>
-            <a:endParaRPr lang="en-US" sz="1100" dirty="0"/>
-          </a:p>
-          <a:p>
-            <a:pPr algn="ctr" indent="0" marL="0">
-              <a:buNone/>
-            </a:pPr>
-            <a:r>
-              <a:rPr lang="en-US" sz="1100" b="1" dirty="0">
-                <a:solidFill>
-                  <a:srgbClr val="1B2A38"/>
-                </a:solidFill>
-                <a:latin typeface="Calibri" pitchFamily="34" charset="0"/>
-                <a:ea typeface="Calibri" pitchFamily="34" charset="-122"/>
-                <a:cs typeface="Calibri" pitchFamily="34" charset="-120"/>
-              </a:rPr>
-              <a:t>+ molecular</a:t>
-            </a:r>
-            <a:endParaRPr lang="en-US" sz="1100" dirty="0"/>
-          </a:p>
-        </p:txBody>
-      </p:sp>
-      <p:sp>
-        <p:nvSpPr>
-          <p:cNvPr id="15" name="Shape 13"/>
-          <p:cNvSpPr/>
-          <p:nvPr/>
-        </p:nvSpPr>
-        <p:spPr>
-          <a:xfrm>
-            <a:off x="566928" y="3246120"/>
-            <a:ext cx="11057839" cy="914400"/>
-          </a:xfrm>
-          <a:prstGeom prst="roundRect">
-            <a:avLst>
-              <a:gd name="adj" fmla="val 9000"/>
-            </a:avLst>
-          </a:prstGeom>
-          <a:solidFill>
-            <a:srgbClr val="FBEAEC"/>
-          </a:solidFill>
-          <a:ln/>
-          <a:effectLst>
-            <a:outerShdw sx="100000" sy="100000" kx="0" ky="0" algn="bl" rotWithShape="0" blurRad="88900" dist="25400" dir="5400000">
-              <a:srgbClr val="22303C">
-                <a:alpha val="12000"/>
-              </a:srgbClr>
-            </a:outerShdw>
-          </a:effectLst>
-        </p:spPr>
-      </p:sp>
-      <p:sp>
-        <p:nvSpPr>
-          <p:cNvPr id="16" name="Text 14"/>
-          <p:cNvSpPr/>
-          <p:nvPr/>
-        </p:nvSpPr>
-        <p:spPr>
-          <a:xfrm>
-            <a:off x="841248" y="3246120"/>
-            <a:ext cx="10509199" cy="914400"/>
-          </a:xfrm>
-          <a:prstGeom prst="rect">
-            <a:avLst/>
-          </a:prstGeom>
-          <a:noFill/>
-          <a:ln/>
-        </p:spPr>
-        <p:txBody>
-          <a:bodyPr wrap="square" lIns="0" tIns="0" rIns="0" bIns="0" rtlCol="0" anchor="ctr"/>
-          <a:lstStyle/>
-          <a:p>
-            <a:pPr algn="l" indent="0" marL="0">
-              <a:lnSpc>
-                <a:spcPct val="105000"/>
-              </a:lnSpc>
-              <a:buNone/>
-            </a:pPr>
-            <a:r>
-              <a:rPr lang="en-US" sz="1300" dirty="0">
+              <a:t>Morphology + flow + cytogenetics + molecular define the entity (WHO/ICC).</a:t>
+            </a:r>
+            <a:endParaRPr lang="en-US" sz="1250" dirty="0"/>
+          </a:p>
+          <a:p>
+            <a:pPr algn="l" marL="177800" indent="-177800">
+              <a:spcAft>
+                <a:spcPts val="900"/>
+              </a:spcAft>
+              <a:buSzPct val="100000"/>
+              <a:buChar char="•"/>
+            </a:pPr>
+            <a:r>
+              <a:rPr lang="en-US" sz="1250" dirty="0">
                 <a:solidFill>
                   <a:srgbClr val="33444F"/>
                 </a:solidFill>
@@ -4416,15 +4099,57 @@
                 <a:ea typeface="Calibri" pitchFamily="34" charset="-122"/>
                 <a:cs typeface="Calibri" pitchFamily="34" charset="-120"/>
               </a:rPr>
-              <a:t>Urgent: blasts with a coagulopathy suggest acute promyelocytic leukemia (APL). Flag it immediately — early death is hemorrhagic and treatment is time-critical.</a:t>
-            </a:r>
-            <a:endParaRPr lang="en-US" sz="1300" dirty="0"/>
-          </a:p>
-        </p:txBody>
-      </p:sp>
-      <p:sp>
-        <p:nvSpPr>
-          <p:cNvPr id="17" name="Text 15"/>
+              <a:t>Cytochemistry has a historical/adjunct role.</a:t>
+            </a:r>
+            <a:endParaRPr lang="en-US" sz="1250" dirty="0"/>
+          </a:p>
+          <a:p>
+            <a:pPr algn="l" marL="177800" indent="-177800">
+              <a:spcAft>
+                <a:spcPts val="900"/>
+              </a:spcAft>
+              <a:buSzPct val="100000"/>
+              <a:buChar char="•"/>
+            </a:pPr>
+            <a:r>
+              <a:rPr lang="en-US" sz="1250" dirty="0">
+                <a:solidFill>
+                  <a:srgbClr val="33444F"/>
+                </a:solidFill>
+                <a:latin typeface="Calibri" pitchFamily="34" charset="0"/>
+                <a:ea typeface="Calibri" pitchFamily="34" charset="-122"/>
+                <a:cs typeface="Calibri" pitchFamily="34" charset="-120"/>
+              </a:rPr>
+              <a:t>Correlate with the clinical scenario.</a:t>
+            </a:r>
+            <a:endParaRPr lang="en-US" sz="1250" dirty="0"/>
+          </a:p>
+          <a:p>
+            <a:pPr algn="l" marL="177800" indent="-177800">
+              <a:spcAft>
+                <a:spcPts val="900"/>
+              </a:spcAft>
+              <a:buSzPct val="100000"/>
+              <a:buChar char="•"/>
+            </a:pPr>
+            <a:r>
+              <a:rPr lang="en-US" sz="1250" dirty="0">
+                <a:solidFill>
+                  <a:srgbClr val="33444F"/>
+                </a:solidFill>
+                <a:latin typeface="Calibri" pitchFamily="34" charset="0"/>
+                <a:ea typeface="Calibri" pitchFamily="34" charset="-122"/>
+                <a:cs typeface="Calibri" pitchFamily="34" charset="-120"/>
+              </a:rPr>
+              <a:t>Ensure rapid communication for emergencies.</a:t>
+            </a:r>
+            <a:endParaRPr lang="en-US" sz="1250" dirty="0"/>
+          </a:p>
+        </p:txBody>
+      </p:sp>
+      <p:sp>
+        <p:nvSpPr>
+          <p:cNvPr id="10" name="Text 8"/>
           <p:cNvSpPr/>
           <p:nvPr/>
         </p:nvSpPr>
@@ -4463,7 +4188,7 @@
       </p:sp>
       <p:sp>
         <p:nvSpPr>
-          <p:cNvPr id="18" name="Text 16"/>
+          <p:cNvPr id="11" name="Text 9"/>
           <p:cNvSpPr/>
           <p:nvPr/>
         </p:nvSpPr>
@@ -4539,6 +4264,199 @@
 <file path=ppt/slides/slide12.xml><?xml version="1.0" encoding="utf-8"?>
 <p:sld xmlns:a="http://schemas.openxmlformats.org/drawingml/2006/main" xmlns:r="http://schemas.openxmlformats.org/officeDocument/2006/relationships" xmlns:p="http://schemas.openxmlformats.org/presentationml/2006/main">
   <p:cSld name="Slide 12">
+    <p:bg>
+      <p:bgPr>
+        <a:solidFill>
+          <a:srgbClr val="8E1622"/>
+        </a:solidFill>
+      </p:bgPr>
+    </p:bg>
+    <p:spTree>
+      <p:nvGrpSpPr>
+        <p:cNvPr id="1" name=""/>
+        <p:cNvGrpSpPr/>
+        <p:nvPr/>
+      </p:nvGrpSpPr>
+      <p:grpSpPr>
+        <a:xfrm>
+          <a:off x="0" y="0"/>
+          <a:ext cx="0" cy="0"/>
+          <a:chOff x="0" y="0"/>
+          <a:chExt cx="0" cy="0"/>
+        </a:xfrm>
+      </p:grpSpPr>
+      <p:sp>
+        <p:nvSpPr>
+          <p:cNvPr id="2" name="Shape 0"/>
+          <p:cNvSpPr/>
+          <p:nvPr/>
+        </p:nvSpPr>
+        <p:spPr>
+          <a:xfrm>
+            <a:off x="9509760" y="-1280160"/>
+            <a:ext cx="4754880" cy="4754880"/>
+          </a:xfrm>
+          <a:prstGeom prst="ellipse">
+            <a:avLst/>
+          </a:prstGeom>
+          <a:solidFill>
+            <a:srgbClr val="FFFFFF">
+              <a:alpha val="8000"/>
+            </a:srgbClr>
+          </a:solidFill>
+          <a:ln/>
+        </p:spPr>
+      </p:sp>
+      <p:sp>
+        <p:nvSpPr>
+          <p:cNvPr id="3" name="Shape 1"/>
+          <p:cNvSpPr/>
+          <p:nvPr/>
+        </p:nvSpPr>
+        <p:spPr>
+          <a:xfrm>
+            <a:off x="10607040" y="3931920"/>
+            <a:ext cx="3108960" cy="3108960"/>
+          </a:xfrm>
+          <a:prstGeom prst="ellipse">
+            <a:avLst/>
+          </a:prstGeom>
+          <a:solidFill>
+            <a:srgbClr val="FFFFFF">
+              <a:alpha val="6000"/>
+            </a:srgbClr>
+          </a:solidFill>
+          <a:ln/>
+        </p:spPr>
+      </p:sp>
+      <p:sp>
+        <p:nvSpPr>
+          <p:cNvPr id="4" name="Text 2"/>
+          <p:cNvSpPr/>
+          <p:nvPr/>
+        </p:nvSpPr>
+        <p:spPr>
+          <a:xfrm>
+            <a:off x="566928" y="1783080"/>
+            <a:ext cx="2743200" cy="1463040"/>
+          </a:xfrm>
+          <a:prstGeom prst="rect">
+            <a:avLst/>
+          </a:prstGeom>
+          <a:noFill/>
+          <a:ln/>
+        </p:spPr>
+        <p:txBody>
+          <a:bodyPr wrap="square" lIns="0" tIns="0" rIns="0" bIns="0" rtlCol="0" anchor="ctr"/>
+          <a:lstStyle/>
+          <a:p>
+            <a:pPr algn="l" indent="0" marL="0">
+              <a:buNone/>
+            </a:pPr>
+            <a:r>
+              <a:rPr lang="en-US" sz="6400" b="1" dirty="0">
+                <a:solidFill>
+                  <a:srgbClr val="FBEAEC"/>
+                </a:solidFill>
+                <a:latin typeface="Calibri" pitchFamily="34" charset="0"/>
+                <a:ea typeface="Calibri" pitchFamily="34" charset="-122"/>
+                <a:cs typeface="Calibri" pitchFamily="34" charset="-120"/>
+              </a:rPr>
+              <a:t>03</a:t>
+            </a:r>
+            <a:endParaRPr lang="en-US" sz="6400" dirty="0"/>
+          </a:p>
+        </p:txBody>
+      </p:sp>
+      <p:sp>
+        <p:nvSpPr>
+          <p:cNvPr id="5" name="Text 3"/>
+          <p:cNvSpPr/>
+          <p:nvPr/>
+        </p:nvSpPr>
+        <p:spPr>
+          <a:xfrm>
+            <a:off x="566928" y="3246120"/>
+            <a:ext cx="10058400" cy="365760"/>
+          </a:xfrm>
+          <a:prstGeom prst="rect">
+            <a:avLst/>
+          </a:prstGeom>
+          <a:noFill/>
+          <a:ln/>
+        </p:spPr>
+        <p:txBody>
+          <a:bodyPr wrap="square" lIns="0" tIns="0" rIns="0" bIns="0" rtlCol="0" anchor="ctr"/>
+          <a:lstStyle/>
+          <a:p>
+            <a:pPr algn="l" indent="0" marL="0">
+              <a:buNone/>
+            </a:pPr>
+            <a:r>
+              <a:rPr lang="en-US" sz="1300" b="1" spc="250" kern="0" dirty="0">
+                <a:solidFill>
+                  <a:srgbClr val="F2C9D9"/>
+                </a:solidFill>
+                <a:latin typeface="Calibri" pitchFamily="34" charset="0"/>
+                <a:ea typeface="Calibri" pitchFamily="34" charset="-122"/>
+                <a:cs typeface="Calibri" pitchFamily="34" charset="-120"/>
+              </a:rPr>
+              <a:t>PART THREE</a:t>
+            </a:r>
+            <a:endParaRPr lang="en-US" sz="1300" dirty="0"/>
+          </a:p>
+        </p:txBody>
+      </p:sp>
+      <p:sp>
+        <p:nvSpPr>
+          <p:cNvPr id="6" name="Text 4"/>
+          <p:cNvSpPr/>
+          <p:nvPr/>
+        </p:nvSpPr>
+        <p:spPr>
+          <a:xfrm>
+            <a:off x="566928" y="3611880"/>
+            <a:ext cx="10607040" cy="1463040"/>
+          </a:xfrm>
+          <a:prstGeom prst="rect">
+            <a:avLst/>
+          </a:prstGeom>
+          <a:noFill/>
+          <a:ln/>
+        </p:spPr>
+        <p:txBody>
+          <a:bodyPr wrap="square" lIns="0" tIns="0" rIns="0" bIns="0" rtlCol="0" anchor="t"/>
+          <a:lstStyle/>
+          <a:p>
+            <a:pPr algn="l" indent="0" marL="0">
+              <a:buNone/>
+            </a:pPr>
+            <a:r>
+              <a:rPr lang="en-US" sz="3800" b="1" dirty="0">
+                <a:solidFill>
+                  <a:srgbClr val="FFFFFF"/>
+                </a:solidFill>
+                <a:latin typeface="Calibri" pitchFamily="34" charset="0"/>
+                <a:ea typeface="Calibri" pitchFamily="34" charset="-122"/>
+                <a:cs typeface="Calibri" pitchFamily="34" charset="-120"/>
+              </a:rPr>
+              <a:t>Emergencies, Cases &amp; Board</a:t>
+            </a:r>
+            <a:endParaRPr lang="en-US" sz="3800" dirty="0"/>
+          </a:p>
+        </p:txBody>
+      </p:sp>
+    </p:spTree>
+  </p:cSld>
+  <p:clrMapOvr>
+    <a:masterClrMapping/>
+  </p:clrMapOvr>
+</p:sld>
+</file>
+
+<file path=ppt/slides/slide13.xml><?xml version="1.0" encoding="utf-8"?>
+<p:sld xmlns:a="http://schemas.openxmlformats.org/drawingml/2006/main" xmlns:r="http://schemas.openxmlformats.org/officeDocument/2006/relationships" xmlns:p="http://schemas.openxmlformats.org/presentationml/2006/main">
+  <p:cSld name="Slide 13">
     <p:bg>
       <p:bgPr>
         <a:solidFill>
@@ -4593,7 +4511,7 @@
                 <a:ea typeface="Calibri" pitchFamily="34" charset="-122"/>
                 <a:cs typeface="Calibri" pitchFamily="34" charset="-120"/>
               </a:rPr>
-              <a:t>HEMATOLOGY &amp; COAGULATION   ·   ACUTE LEUKEMIA SCREENING</a:t>
+              <a:t>HEMATOLOGY &amp; COAGULATION   ·   EMERGENCIES</a:t>
             </a:r>
             <a:endParaRPr lang="en-US" sz="1100" dirty="0"/>
           </a:p>
@@ -4632,7 +4550,7 @@
                 <a:ea typeface="Calibri" pitchFamily="34" charset="-122"/>
                 <a:cs typeface="Calibri" pitchFamily="34" charset="-120"/>
               </a:rPr>
-              <a:t>APL: Recognize and Act</a:t>
+              <a:t>Hematologic Emergencies</a:t>
             </a:r>
             <a:endParaRPr lang="en-US" sz="3000" dirty="0"/>
           </a:p>
@@ -4700,7 +4618,7 @@
                 <a:ea typeface="Calibri" pitchFamily="34" charset="-122"/>
                 <a:cs typeface="Calibri" pitchFamily="34" charset="-120"/>
               </a:rPr>
-              <a:t>RECOGNIZE</a:t>
+              <a:t>RECOGNIZE AT ONCE</a:t>
             </a:r>
             <a:endParaRPr lang="en-US" sz="1200" dirty="0"/>
           </a:p>
@@ -4743,7 +4661,7 @@
                 <a:ea typeface="Calibri" pitchFamily="34" charset="-122"/>
                 <a:cs typeface="Calibri" pitchFamily="34" charset="-120"/>
               </a:rPr>
-              <a:t>Promyelocytes with bundles of Auer rods ('faggot cells').</a:t>
+              <a:t>Circulating blasts / suspected acute leukemia — especially suspected APL.</a:t>
             </a:r>
             <a:endParaRPr lang="en-US" sz="1250" dirty="0"/>
           </a:p>
@@ -4764,7 +4682,7 @@
                 <a:ea typeface="Calibri" pitchFamily="34" charset="-122"/>
                 <a:cs typeface="Calibri" pitchFamily="34" charset="-120"/>
               </a:rPr>
-              <a:t>Pancytopenia or leukocytosis with abnormal promyelocytes.</a:t>
+              <a:t>Hyperleukocytosis with leukostasis symptoms.</a:t>
             </a:r>
             <a:endParaRPr lang="en-US" sz="1250" dirty="0"/>
           </a:p>
@@ -4785,7 +4703,7 @@
                 <a:ea typeface="Calibri" pitchFamily="34" charset="-122"/>
                 <a:cs typeface="Calibri" pitchFamily="34" charset="-120"/>
               </a:rPr>
-              <a:t>Coagulopathy: low fibrinogen, prolonged PT/aPTT, high D-dimer.</a:t>
+              <a:t>Severe neutropenia with fever (neutropenic sepsis risk).</a:t>
             </a:r>
             <a:endParaRPr lang="en-US" sz="1250" dirty="0"/>
           </a:p>
@@ -4806,7 +4724,7 @@
                 <a:ea typeface="Calibri" pitchFamily="34" charset="-122"/>
                 <a:cs typeface="Calibri" pitchFamily="34" charset="-120"/>
               </a:rPr>
-              <a:t>PML-RARA / t(15;17) confirms.</a:t>
+              <a:t>Severe thrombocytopenia with bleeding.</a:t>
             </a:r>
             <a:endParaRPr lang="en-US" sz="1250" dirty="0"/>
           </a:p>
@@ -4829,14 +4747,9 @@
             </a:avLst>
           </a:prstGeom>
           <a:solidFill>
-            <a:srgbClr val="FFFFFF"/>
+            <a:srgbClr val="FBE7E9"/>
           </a:solidFill>
-          <a:ln w="12700">
-            <a:solidFill>
-              <a:srgbClr val="DCE4EC"/>
-            </a:solidFill>
-            <a:prstDash val="solid"/>
-          </a:ln>
+          <a:ln/>
           <a:effectLst>
             <a:outerShdw sx="100000" sy="100000" kx="0" ky="0" algn="bl" rotWithShape="0" blurRad="88900" dist="25400" dir="5400000">
               <a:srgbClr val="22303C">
@@ -4879,7 +4792,7 @@
                 <a:ea typeface="Calibri" pitchFamily="34" charset="-122"/>
                 <a:cs typeface="Calibri" pitchFamily="34" charset="-120"/>
               </a:rPr>
-              <a:t>ACT</a:t>
+              <a:t>ACT DECISIVELY</a:t>
             </a:r>
             <a:endParaRPr lang="en-US" sz="1200" dirty="0"/>
           </a:p>
@@ -4922,7 +4835,7 @@
                 <a:ea typeface="Calibri" pitchFamily="34" charset="-122"/>
                 <a:cs typeface="Calibri" pitchFamily="34" charset="-120"/>
               </a:rPr>
-              <a:t>Notify the clinical team and blood bank immediately.</a:t>
+              <a:t>Expedite smear review, flow cytometry, and communication.</a:t>
             </a:r>
             <a:endParaRPr lang="en-US" sz="1250" dirty="0"/>
           </a:p>
@@ -4943,7 +4856,7 @@
                 <a:ea typeface="Calibri" pitchFamily="34" charset="-122"/>
                 <a:cs typeface="Calibri" pitchFamily="34" charset="-120"/>
               </a:rPr>
-              <a:t>Expedite coagulation testing and product support.</a:t>
+              <a:t>Notify the clinical team immediately.</a:t>
             </a:r>
             <a:endParaRPr lang="en-US" sz="1250" dirty="0"/>
           </a:p>
@@ -4964,7 +4877,7 @@
                 <a:ea typeface="Calibri" pitchFamily="34" charset="-122"/>
                 <a:cs typeface="Calibri" pitchFamily="34" charset="-120"/>
               </a:rPr>
-              <a:t>Run flow, cytogenetics (t(15;17)), and PML-RARA urgently.</a:t>
+              <a:t>Suspected APL needs urgent confirmation and treatment.</a:t>
             </a:r>
             <a:endParaRPr lang="en-US" sz="1250" dirty="0"/>
           </a:p>
@@ -4985,7 +4898,7 @@
                 <a:ea typeface="Calibri" pitchFamily="34" charset="-122"/>
                 <a:cs typeface="Calibri" pitchFamily="34" charset="-120"/>
               </a:rPr>
-              <a:t>Laboratory speed directly affects survival.</a:t>
+              <a:t>Document critical-value notification.</a:t>
             </a:r>
             <a:endParaRPr lang="en-US" sz="1250" dirty="0"/>
           </a:p>
@@ -5094,199 +5007,6 @@
               <a:t>10</a:t>
             </a:r>
             <a:endParaRPr lang="en-US" sz="850" dirty="0"/>
-          </a:p>
-        </p:txBody>
-      </p:sp>
-    </p:spTree>
-  </p:cSld>
-  <p:clrMapOvr>
-    <a:masterClrMapping/>
-  </p:clrMapOvr>
-</p:sld>
-</file>
-
-<file path=ppt/slides/slide13.xml><?xml version="1.0" encoding="utf-8"?>
-<p:sld xmlns:a="http://schemas.openxmlformats.org/drawingml/2006/main" xmlns:r="http://schemas.openxmlformats.org/officeDocument/2006/relationships" xmlns:p="http://schemas.openxmlformats.org/presentationml/2006/main">
-  <p:cSld name="Slide 13">
-    <p:bg>
-      <p:bgPr>
-        <a:solidFill>
-          <a:srgbClr val="8E1622"/>
-        </a:solidFill>
-      </p:bgPr>
-    </p:bg>
-    <p:spTree>
-      <p:nvGrpSpPr>
-        <p:cNvPr id="1" name=""/>
-        <p:cNvGrpSpPr/>
-        <p:nvPr/>
-      </p:nvGrpSpPr>
-      <p:grpSpPr>
-        <a:xfrm>
-          <a:off x="0" y="0"/>
-          <a:ext cx="0" cy="0"/>
-          <a:chOff x="0" y="0"/>
-          <a:chExt cx="0" cy="0"/>
-        </a:xfrm>
-      </p:grpSpPr>
-      <p:sp>
-        <p:nvSpPr>
-          <p:cNvPr id="2" name="Shape 0"/>
-          <p:cNvSpPr/>
-          <p:nvPr/>
-        </p:nvSpPr>
-        <p:spPr>
-          <a:xfrm>
-            <a:off x="9509760" y="-1280160"/>
-            <a:ext cx="4754880" cy="4754880"/>
-          </a:xfrm>
-          <a:prstGeom prst="ellipse">
-            <a:avLst/>
-          </a:prstGeom>
-          <a:solidFill>
-            <a:srgbClr val="FFFFFF">
-              <a:alpha val="8000"/>
-            </a:srgbClr>
-          </a:solidFill>
-          <a:ln/>
-        </p:spPr>
-      </p:sp>
-      <p:sp>
-        <p:nvSpPr>
-          <p:cNvPr id="3" name="Shape 1"/>
-          <p:cNvSpPr/>
-          <p:nvPr/>
-        </p:nvSpPr>
-        <p:spPr>
-          <a:xfrm>
-            <a:off x="10607040" y="3931920"/>
-            <a:ext cx="3108960" cy="3108960"/>
-          </a:xfrm>
-          <a:prstGeom prst="ellipse">
-            <a:avLst/>
-          </a:prstGeom>
-          <a:solidFill>
-            <a:srgbClr val="FFFFFF">
-              <a:alpha val="6000"/>
-            </a:srgbClr>
-          </a:solidFill>
-          <a:ln/>
-        </p:spPr>
-      </p:sp>
-      <p:sp>
-        <p:nvSpPr>
-          <p:cNvPr id="4" name="Text 2"/>
-          <p:cNvSpPr/>
-          <p:nvPr/>
-        </p:nvSpPr>
-        <p:spPr>
-          <a:xfrm>
-            <a:off x="566928" y="1783080"/>
-            <a:ext cx="2743200" cy="1463040"/>
-          </a:xfrm>
-          <a:prstGeom prst="rect">
-            <a:avLst/>
-          </a:prstGeom>
-          <a:noFill/>
-          <a:ln/>
-        </p:spPr>
-        <p:txBody>
-          <a:bodyPr wrap="square" lIns="0" tIns="0" rIns="0" bIns="0" rtlCol="0" anchor="ctr"/>
-          <a:lstStyle/>
-          <a:p>
-            <a:pPr algn="l" indent="0" marL="0">
-              <a:buNone/>
-            </a:pPr>
-            <a:r>
-              <a:rPr lang="en-US" sz="6400" b="1" dirty="0">
-                <a:solidFill>
-                  <a:srgbClr val="FBEAEC"/>
-                </a:solidFill>
-                <a:latin typeface="Calibri" pitchFamily="34" charset="0"/>
-                <a:ea typeface="Calibri" pitchFamily="34" charset="-122"/>
-                <a:cs typeface="Calibri" pitchFamily="34" charset="-120"/>
-              </a:rPr>
-              <a:t>03</a:t>
-            </a:r>
-            <a:endParaRPr lang="en-US" sz="6400" dirty="0"/>
-          </a:p>
-        </p:txBody>
-      </p:sp>
-      <p:sp>
-        <p:nvSpPr>
-          <p:cNvPr id="5" name="Text 3"/>
-          <p:cNvSpPr/>
-          <p:nvPr/>
-        </p:nvSpPr>
-        <p:spPr>
-          <a:xfrm>
-            <a:off x="566928" y="3246120"/>
-            <a:ext cx="10058400" cy="365760"/>
-          </a:xfrm>
-          <a:prstGeom prst="rect">
-            <a:avLst/>
-          </a:prstGeom>
-          <a:noFill/>
-          <a:ln/>
-        </p:spPr>
-        <p:txBody>
-          <a:bodyPr wrap="square" lIns="0" tIns="0" rIns="0" bIns="0" rtlCol="0" anchor="ctr"/>
-          <a:lstStyle/>
-          <a:p>
-            <a:pPr algn="l" indent="0" marL="0">
-              <a:buNone/>
-            </a:pPr>
-            <a:r>
-              <a:rPr lang="en-US" sz="1300" b="1" spc="250" kern="0" dirty="0">
-                <a:solidFill>
-                  <a:srgbClr val="F2C9D9"/>
-                </a:solidFill>
-                <a:latin typeface="Calibri" pitchFamily="34" charset="0"/>
-                <a:ea typeface="Calibri" pitchFamily="34" charset="-122"/>
-                <a:cs typeface="Calibri" pitchFamily="34" charset="-120"/>
-              </a:rPr>
-              <a:t>PART THREE</a:t>
-            </a:r>
-            <a:endParaRPr lang="en-US" sz="1300" dirty="0"/>
-          </a:p>
-        </p:txBody>
-      </p:sp>
-      <p:sp>
-        <p:nvSpPr>
-          <p:cNvPr id="6" name="Text 4"/>
-          <p:cNvSpPr/>
-          <p:nvPr/>
-        </p:nvSpPr>
-        <p:spPr>
-          <a:xfrm>
-            <a:off x="566928" y="3611880"/>
-            <a:ext cx="10607040" cy="1463040"/>
-          </a:xfrm>
-          <a:prstGeom prst="rect">
-            <a:avLst/>
-          </a:prstGeom>
-          <a:noFill/>
-          <a:ln/>
-        </p:spPr>
-        <p:txBody>
-          <a:bodyPr wrap="square" lIns="0" tIns="0" rIns="0" bIns="0" rtlCol="0" anchor="t"/>
-          <a:lstStyle/>
-          <a:p>
-            <a:pPr algn="l" indent="0" marL="0">
-              <a:buNone/>
-            </a:pPr>
-            <a:r>
-              <a:rPr lang="en-US" sz="3800" b="1" dirty="0">
-                <a:solidFill>
-                  <a:srgbClr val="FFFFFF"/>
-                </a:solidFill>
-                <a:latin typeface="Calibri" pitchFamily="34" charset="0"/>
-                <a:ea typeface="Calibri" pitchFamily="34" charset="-122"/>
-                <a:cs typeface="Calibri" pitchFamily="34" charset="-120"/>
-              </a:rPr>
-              <a:t>Cases &amp; Board Review</a:t>
-            </a:r>
-            <a:endParaRPr lang="en-US" sz="3800" dirty="0"/>
           </a:p>
         </p:txBody>
       </p:sp>
@@ -5504,7 +5224,7 @@
                 <a:ea typeface="Calibri" pitchFamily="34" charset="-122"/>
                 <a:cs typeface="Calibri" pitchFamily="34" charset="-120"/>
               </a:rPr>
-              <a:t>A 44-year-old woman with bruising: WBC 1.8, Hb 8.0, platelets 18 × 10⁹/L; smear shows abnormal promyelocytes with Auer-rod bundles; fibrinogen low, D-dimer high.</a:t>
+              <a:t>A febrile patient has neutrophilia with toxic granulation, Döhle bodies, and a few bands, but no blasts.</a:t>
             </a:r>
             <a:endParaRPr lang="en-US" sz="1450" dirty="0"/>
           </a:p>
@@ -5611,7 +5331,7 @@
                 <a:ea typeface="Calibri" pitchFamily="34" charset="-122"/>
                 <a:cs typeface="Calibri" pitchFamily="34" charset="-120"/>
               </a:rPr>
-              <a:t>Diagnosis, why an emergency, and which confirmatory tests do you expedite?</a:t>
+              <a:t>Reactive or neoplastic?</a:t>
             </a:r>
             <a:endParaRPr lang="en-US" sz="1500" dirty="0"/>
           </a:p>
@@ -5827,7 +5547,7 @@
                 <a:ea typeface="Calibri" pitchFamily="34" charset="-122"/>
                 <a:cs typeface="Calibri" pitchFamily="34" charset="-120"/>
               </a:rPr>
-              <a:t>Case 1: Acute Promyelocytic Leukemia</a:t>
+              <a:t>Case 1: Leukemoid Reaction</a:t>
             </a:r>
             <a:endParaRPr lang="en-US" sz="3000" dirty="0"/>
           </a:p>
@@ -5870,7 +5590,7 @@
                 <a:ea typeface="Calibri" pitchFamily="34" charset="-122"/>
                 <a:cs typeface="Calibri" pitchFamily="34" charset="-120"/>
               </a:rPr>
-              <a:t>APL — abnormal promyelocytes with faggot cells and a consumptive/fibrinolytic coagulopathy.</a:t>
+              <a:t>Toxic changes with a full maturation spectrum and no blasts indicate a reactive (leukemoid) response to infection.</a:t>
             </a:r>
             <a:endParaRPr lang="en-US" sz="1400" dirty="0"/>
           </a:p>
@@ -5891,7 +5611,7 @@
                 <a:ea typeface="Calibri" pitchFamily="34" charset="-122"/>
                 <a:cs typeface="Calibri" pitchFamily="34" charset="-120"/>
               </a:rPr>
-              <a:t>Emergency because of life-threatening hemorrhage from DIC.</a:t>
+              <a:t>A leukemoid reaction is reactive, not leukemic.</a:t>
             </a:r>
             <a:endParaRPr lang="en-US" sz="1400" dirty="0"/>
           </a:p>
@@ -5912,7 +5632,7 @@
                 <a:ea typeface="Calibri" pitchFamily="34" charset="-122"/>
                 <a:cs typeface="Calibri" pitchFamily="34" charset="-120"/>
               </a:rPr>
-              <a:t>Notify the team and blood bank; support fibrinogen and platelets.</a:t>
+              <a:t>LAP score (historical) is high in reactive states, low in CML.</a:t>
             </a:r>
             <a:endParaRPr lang="en-US" sz="1400" dirty="0"/>
           </a:p>
@@ -5933,7 +5653,7 @@
                 <a:ea typeface="Calibri" pitchFamily="34" charset="-122"/>
                 <a:cs typeface="Calibri" pitchFamily="34" charset="-120"/>
               </a:rPr>
-              <a:t>Confirm with t(15;17) and PML-RARA, expedited.</a:t>
+              <a:t>Treat the underlying infection.</a:t>
             </a:r>
             <a:endParaRPr lang="en-US" sz="1400" dirty="0"/>
           </a:p>
@@ -6043,7 +5763,7 @@
                 <a:ea typeface="Calibri" pitchFamily="34" charset="-122"/>
                 <a:cs typeface="Calibri" pitchFamily="34" charset="-120"/>
               </a:rPr>
-              <a:t>Blasts/promyelocytes + low fibrinogen + high D-dimer = APL until proven otherwise — speed and communication save lives.</a:t>
+              <a:t>A reactive left shift shows the whole maturation spectrum with toxic changes — distinct from the blasts/hiatus of leukemia.</a:t>
             </a:r>
             <a:endParaRPr lang="en-US" sz="1350" dirty="0"/>
           </a:p>
@@ -6369,7 +6089,7 @@
                 <a:ea typeface="Calibri" pitchFamily="34" charset="-122"/>
                 <a:cs typeface="Calibri" pitchFamily="34" charset="-120"/>
               </a:rPr>
-              <a:t>A 68-year-old man has an incidental WBC of 32 × 10⁹/L with absolute lymphocytosis; smear shows small mature lymphocytes and many smudge cells.</a:t>
+              <a:t>An older patient has marked lymphocytosis with numerous smudge cells.</a:t>
             </a:r>
             <a:endParaRPr lang="en-US" sz="1450" dirty="0"/>
           </a:p>
@@ -6476,7 +6196,7 @@
                 <a:ea typeface="Calibri" pitchFamily="34" charset="-122"/>
                 <a:cs typeface="Calibri" pitchFamily="34" charset="-120"/>
               </a:rPr>
-              <a:t>Most likely diagnosis and the single best characterizing test?</a:t>
+              <a:t>What does this suggest and how is it confirmed?</a:t>
             </a:r>
             <a:endParaRPr lang="en-US" sz="1500" dirty="0"/>
           </a:p>
@@ -6692,7 +6412,7 @@
                 <a:ea typeface="Calibri" pitchFamily="34" charset="-122"/>
                 <a:cs typeface="Calibri" pitchFamily="34" charset="-120"/>
               </a:rPr>
-              <a:t>Case 2: Chronic Lymphocytic Leukemia</a:t>
+              <a:t>Case 2: CLL</a:t>
             </a:r>
             <a:endParaRPr lang="en-US" sz="3000" dirty="0"/>
           </a:p>
@@ -6735,7 +6455,7 @@
                 <a:ea typeface="Calibri" pitchFamily="34" charset="-122"/>
                 <a:cs typeface="Calibri" pitchFamily="34" charset="-120"/>
               </a:rPr>
-              <a:t>CLL — mature lymphocytosis with smudge cells in an older adult.</a:t>
+              <a:t>Lymphocytosis with smudge cells suggests chronic lymphocytic leukemia.</a:t>
             </a:r>
             <a:endParaRPr lang="en-US" sz="1400" dirty="0"/>
           </a:p>
@@ -6756,7 +6476,7 @@
                 <a:ea typeface="Calibri" pitchFamily="34" charset="-122"/>
                 <a:cs typeface="Calibri" pitchFamily="34" charset="-120"/>
               </a:rPr>
-              <a:t>Smudge (basket) cells are fragile CLL lymphocytes disrupted on smearing.</a:t>
+              <a:t>Flow cytometry confirms a clonal B-cell population with the characteristic phenotype.</a:t>
             </a:r>
             <a:endParaRPr lang="en-US" sz="1400" dirty="0"/>
           </a:p>
@@ -6777,7 +6497,7 @@
                 <a:ea typeface="Calibri" pitchFamily="34" charset="-122"/>
                 <a:cs typeface="Calibri" pitchFamily="34" charset="-120"/>
               </a:rPr>
-              <a:t>Flow cytometry characterizes the clonal B-cell population (e.g., CD5+/CD23+, dim surface Ig).</a:t>
+              <a:t>Correlate with clinical staging.</a:t>
             </a:r>
             <a:endParaRPr lang="en-US" sz="1400" dirty="0"/>
           </a:p>
@@ -6798,7 +6518,7 @@
                 <a:ea typeface="Calibri" pitchFamily="34" charset="-122"/>
                 <a:cs typeface="Calibri" pitchFamily="34" charset="-120"/>
               </a:rPr>
-              <a:t>Often indolent; staging and clinical correlation guide management.</a:t>
+              <a:t>Distinguish from reactive lymphocytosis.</a:t>
             </a:r>
             <a:endParaRPr lang="en-US" sz="1400" dirty="0"/>
           </a:p>
@@ -6908,7 +6628,7 @@
                 <a:ea typeface="Calibri" pitchFamily="34" charset="-122"/>
                 <a:cs typeface="Calibri" pitchFamily="34" charset="-120"/>
               </a:rPr>
-              <a:t>Mature lymphocytosis with smudge cells in an older patient is CLL until flow says otherwise.</a:t>
+              <a:t>Persistent lymphocytosis with smudge cells points to CLL — flow cytometry confirms the clonal B-cell population.</a:t>
             </a:r>
             <a:endParaRPr lang="en-US" sz="1350" dirty="0"/>
           </a:p>
@@ -7234,7 +6954,7 @@
                 <a:ea typeface="Calibri" pitchFamily="34" charset="-122"/>
                 <a:cs typeface="Calibri" pitchFamily="34" charset="-120"/>
               </a:rPr>
-              <a:t>A 50-year-old man: WBC 95 × 10⁹/L with a full maturing myeloid spectrum, a myelocyte bulge, and basophilia; stable with splenomegaly.</a:t>
+              <a:t>A smear shows numerous blasts; some contain Auer rods. The patient is acutely ill.</a:t>
             </a:r>
             <a:endParaRPr lang="en-US" sz="1450" dirty="0"/>
           </a:p>
@@ -7341,7 +7061,7 @@
                 <a:ea typeface="Calibri" pitchFamily="34" charset="-122"/>
                 <a:cs typeface="Calibri" pitchFamily="34" charset="-120"/>
               </a:rPr>
-              <a:t>Reactive or neoplastic? Strongest clue and confirmatory test?</a:t>
+              <a:t>What is the urgent interpretation and action?</a:t>
             </a:r>
             <a:endParaRPr lang="en-US" sz="1500" dirty="0"/>
           </a:p>
@@ -7557,7 +7277,7 @@
                 <a:ea typeface="Calibri" pitchFamily="34" charset="-122"/>
                 <a:cs typeface="Calibri" pitchFamily="34" charset="-120"/>
               </a:rPr>
-              <a:t>Case 3: Chronic Myeloid Leukemia</a:t>
+              <a:t>Case 3: Acute Myeloid Leukemia</a:t>
             </a:r>
             <a:endParaRPr lang="en-US" sz="3000" dirty="0"/>
           </a:p>
@@ -7600,7 +7320,7 @@
                 <a:ea typeface="Calibri" pitchFamily="34" charset="-122"/>
                 <a:cs typeface="Calibri" pitchFamily="34" charset="-120"/>
               </a:rPr>
-              <a:t>CML — marked neutrophilic leukocytosis with a full myeloid spectrum, myelocyte peak, and basophilia.</a:t>
+              <a:t>Blasts with Auer rods indicate acute myeloid leukemia — a hematologic emergency.</a:t>
             </a:r>
             <a:endParaRPr lang="en-US" sz="1400" dirty="0"/>
           </a:p>
@@ -7621,7 +7341,7 @@
                 <a:ea typeface="Calibri" pitchFamily="34" charset="-122"/>
                 <a:cs typeface="Calibri" pitchFamily="34" charset="-120"/>
               </a:rPr>
-              <a:t>Basophilia and splenomegaly favor a myeloproliferative neoplasm over a leukemoid reaction.</a:t>
+              <a:t>Expedite flow cytometry, cytogenetics, and molecular testing.</a:t>
             </a:r>
             <a:endParaRPr lang="en-US" sz="1400" dirty="0"/>
           </a:p>
@@ -7642,7 +7362,7 @@
                 <a:ea typeface="Calibri" pitchFamily="34" charset="-122"/>
                 <a:cs typeface="Calibri" pitchFamily="34" charset="-120"/>
               </a:rPr>
-              <a:t>Confirm with BCR-ABL1 (FISH/RT-PCR) and t(9;22).</a:t>
+              <a:t>If promyelocytic features/coagulopathy → suspect APL and act urgently.</a:t>
             </a:r>
             <a:endParaRPr lang="en-US" sz="1400" dirty="0"/>
           </a:p>
@@ -7663,7 +7383,7 @@
                 <a:ea typeface="Calibri" pitchFamily="34" charset="-122"/>
                 <a:cs typeface="Calibri" pitchFamily="34" charset="-120"/>
               </a:rPr>
-              <a:t>A leukemoid reaction lacks basophilia and resolves with treatment of the trigger.</a:t>
+              <a:t>Immediate communication with the clinical team.</a:t>
             </a:r>
             <a:endParaRPr lang="en-US" sz="1400" dirty="0"/>
           </a:p>
@@ -7773,7 +7493,7 @@
                 <a:ea typeface="Calibri" pitchFamily="34" charset="-122"/>
                 <a:cs typeface="Calibri" pitchFamily="34" charset="-120"/>
               </a:rPr>
-              <a:t>Basophilia is the high-yield discriminator: characteristic of CML and essentially absent in a reactive leukemoid reaction.</a:t>
+              <a:t>Auer rods confirm myeloid blasts — AML; rapid characterization is urgent, and suspected APL is a true emergency.</a:t>
             </a:r>
             <a:endParaRPr lang="en-US" sz="1350" dirty="0"/>
           </a:p>
@@ -8057,7 +7777,7 @@
                 <a:ea typeface="Calibri" pitchFamily="34" charset="-122"/>
                 <a:cs typeface="Calibri" pitchFamily="34" charset="-120"/>
               </a:rPr>
-              <a:t>Blasts</a:t>
+              <a:t>Absolute</a:t>
             </a:r>
             <a:endParaRPr lang="en-US" sz="3600" dirty="0"/>
           </a:p>
@@ -8096,7 +7816,7 @@
                 <a:ea typeface="Calibri" pitchFamily="34" charset="-122"/>
                 <a:cs typeface="Calibri" pitchFamily="34" charset="-120"/>
               </a:rPr>
-              <a:t>On the smear, blasts reframe the workup as possible acute leukemia</a:t>
+              <a:t>Always interpret absolute, not relative, counts</a:t>
             </a:r>
             <a:endParaRPr lang="en-US" sz="1150" dirty="0"/>
           </a:p>
@@ -8164,7 +7884,7 @@
                 <a:ea typeface="Calibri" pitchFamily="34" charset="-122"/>
                 <a:cs typeface="Calibri" pitchFamily="34" charset="-120"/>
               </a:rPr>
-              <a:t>APL</a:t>
+              <a:t>Left shift</a:t>
             </a:r>
             <a:endParaRPr lang="en-US" sz="3600" dirty="0"/>
           </a:p>
@@ -8203,7 +7923,7 @@
                 <a:ea typeface="Calibri" pitchFamily="34" charset="-122"/>
                 <a:cs typeface="Calibri" pitchFamily="34" charset="-120"/>
               </a:rPr>
-              <a:t>Acute promyelocytic leukemia is a same-hour emergency (DIC)</a:t>
+              <a:t>Immature forms: reactive or neoplastic?</a:t>
             </a:r>
             <a:endParaRPr lang="en-US" sz="1150" dirty="0"/>
           </a:p>
@@ -8271,7 +7991,7 @@
                 <a:ea typeface="Calibri" pitchFamily="34" charset="-122"/>
                 <a:cs typeface="Calibri" pitchFamily="34" charset="-120"/>
               </a:rPr>
-              <a:t>Flow</a:t>
+              <a:t>Blasts</a:t>
             </a:r>
             <a:endParaRPr lang="en-US" sz="3600" dirty="0"/>
           </a:p>
@@ -8310,7 +8030,7 @@
                 <a:ea typeface="Calibri" pitchFamily="34" charset="-122"/>
                 <a:cs typeface="Calibri" pitchFamily="34" charset="-120"/>
               </a:rPr>
-              <a:t>Flow cytometry and marrow turn a screen into a diagnosis</a:t>
+              <a:t>Circulating blasts can be an emergency</a:t>
             </a:r>
             <a:endParaRPr lang="en-US" sz="1150" dirty="0"/>
           </a:p>
@@ -8381,7 +8101,7 @@
                 <a:ea typeface="Calibri" pitchFamily="34" charset="-122"/>
                 <a:cs typeface="Calibri" pitchFamily="34" charset="-120"/>
               </a:rPr>
-              <a:t>Most leukocytosis is reactive — but the laboratory is often the first to see the case that is not. Knowing which findings are urgent, and what to do next, is core on-call CP work.</a:t>
+              <a:t>White-cell abnormalities range from benign reactive changes to acute leukemia. The skill is distinguishing reactive patterns from neoplastic ones and recognizing the findings that demand urgent action.</a:t>
             </a:r>
             <a:endParaRPr lang="en-US" sz="1450" dirty="0"/>
           </a:p>
@@ -8424,7 +8144,7 @@
                 <a:ea typeface="Calibri" pitchFamily="34" charset="-122"/>
                 <a:cs typeface="Calibri" pitchFamily="34" charset="-120"/>
               </a:rPr>
-              <a:t>Blasts with Auer rods and a coagulopathy should make you think APL and pick up the phone.</a:t>
+              <a:t>The question is always the same: is this reactive or neoplastic — and is it urgent? Blasts and severe neutropenia change the timeline.</a:t>
             </a:r>
             <a:endParaRPr lang="en-US" sz="1300" dirty="0"/>
           </a:p>
@@ -8682,7 +8402,7 @@
                 <a:ea typeface="Calibri" pitchFamily="34" charset="-122"/>
                 <a:cs typeface="Calibri" pitchFamily="34" charset="-120"/>
               </a:rPr>
-              <a:t>Circulating abnormal promyelocytes with Auer-rod bundles, low fibrinogen, and high D-dimer require:</a:t>
+              <a:t>White-cell counts should be interpreted as:</a:t>
             </a:r>
             <a:endParaRPr lang="en-US" sz="1450" dirty="0"/>
           </a:p>
@@ -8724,7 +8444,7 @@
                 <a:ea typeface="Calibri" pitchFamily="34" charset="-122"/>
                 <a:cs typeface="Calibri" pitchFamily="34" charset="-120"/>
               </a:rPr>
-              <a:t>A. Routine 48–72 h processing</a:t>
+              <a:t>A. Percentages only</a:t>
             </a:r>
             <a:endParaRPr lang="en-US" sz="1350" dirty="0"/>
           </a:p>
@@ -8744,7 +8464,7 @@
                 <a:ea typeface="Calibri" pitchFamily="34" charset="-122"/>
                 <a:cs typeface="Calibri" pitchFamily="34" charset="-120"/>
               </a:rPr>
-              <a:t>B. Immediate notification + expedited coagulation and PML-RARA / t(15;17) testing</a:t>
+              <a:t>B. Absolute counts</a:t>
             </a:r>
             <a:endParaRPr lang="en-US" sz="1350" dirty="0"/>
           </a:p>
@@ -8764,7 +8484,7 @@
                 <a:ea typeface="Calibri" pitchFamily="34" charset="-122"/>
                 <a:cs typeface="Calibri" pitchFamily="34" charset="-120"/>
               </a:rPr>
-              <a:t>C. Iron studies</a:t>
+              <a:t>C. Ratios only</a:t>
             </a:r>
             <a:endParaRPr lang="en-US" sz="1350" dirty="0"/>
           </a:p>
@@ -8784,7 +8504,7 @@
                 <a:ea typeface="Calibri" pitchFamily="34" charset="-122"/>
                 <a:cs typeface="Calibri" pitchFamily="34" charset="-120"/>
               </a:rPr>
-              <a:t>D. Repeat CBC in a week</a:t>
+              <a:t>D. Relative to platelets</a:t>
             </a:r>
             <a:endParaRPr lang="en-US" sz="1350" dirty="0"/>
           </a:p>
@@ -8804,7 +8524,7 @@
                 <a:ea typeface="Calibri" pitchFamily="34" charset="-122"/>
                 <a:cs typeface="Calibri" pitchFamily="34" charset="-120"/>
               </a:rPr>
-              <a:t>E. Hemoglobin electrophoresis</a:t>
+              <a:t>E. Without the differential</a:t>
             </a:r>
             <a:endParaRPr lang="en-US" sz="1350" dirty="0"/>
           </a:p>
@@ -8886,7 +8606,7 @@
                 <a:ea typeface="Calibri" pitchFamily="34" charset="-122"/>
                 <a:cs typeface="Calibri" pitchFamily="34" charset="-120"/>
               </a:rPr>
-              <a:t>B — Immediate notification + expedited APL workup</a:t>
+              <a:t>B — Absolute counts</a:t>
             </a:r>
             <a:endParaRPr lang="en-US" sz="1500" dirty="0"/>
           </a:p>
@@ -8928,7 +8648,7 @@
                 <a:ea typeface="Calibri" pitchFamily="34" charset="-122"/>
                 <a:cs typeface="Calibri" pitchFamily="34" charset="-120"/>
               </a:rPr>
-              <a:t>This is APL with DIC — a hematologic emergency; rapid communication and confirmatory PML-RARA/t(15;17) testing are essential.</a:t>
+              <a:t>Absolute counts (e.g., ANC, ALC) determine clinical risk; percentages alone can mislead.</a:t>
             </a:r>
             <a:endParaRPr lang="en-US" sz="1250" dirty="0"/>
           </a:p>
@@ -9186,7 +8906,7 @@
                 <a:ea typeface="Calibri" pitchFamily="34" charset="-122"/>
                 <a:cs typeface="Calibri" pitchFamily="34" charset="-120"/>
               </a:rPr>
-              <a:t>Which feature best distinguishes CML from a leukemoid reaction?</a:t>
+              <a:t>Auer rods on a smear indicate:</a:t>
             </a:r>
             <a:endParaRPr lang="en-US" sz="1450" dirty="0"/>
           </a:p>
@@ -9228,7 +8948,7 @@
                 <a:ea typeface="Calibri" pitchFamily="34" charset="-122"/>
                 <a:cs typeface="Calibri" pitchFamily="34" charset="-120"/>
               </a:rPr>
-              <a:t>A. Toxic granulation</a:t>
+              <a:t>A. Reactive neutrophilia</a:t>
             </a:r>
             <a:endParaRPr lang="en-US" sz="1350" dirty="0"/>
           </a:p>
@@ -9248,7 +8968,7 @@
                 <a:ea typeface="Calibri" pitchFamily="34" charset="-122"/>
                 <a:cs typeface="Calibri" pitchFamily="34" charset="-120"/>
               </a:rPr>
-              <a:t>B. Basophilia and BCR-ABL1</a:t>
+              <a:t>B. Myeloid blasts (AML)</a:t>
             </a:r>
             <a:endParaRPr lang="en-US" sz="1350" dirty="0"/>
           </a:p>
@@ -9268,7 +8988,7 @@
                 <a:ea typeface="Calibri" pitchFamily="34" charset="-122"/>
                 <a:cs typeface="Calibri" pitchFamily="34" charset="-120"/>
               </a:rPr>
-              <a:t>C. Elevated CRP</a:t>
+              <a:t>C. CLL</a:t>
             </a:r>
             <a:endParaRPr lang="en-US" sz="1350" dirty="0"/>
           </a:p>
@@ -9288,7 +9008,7 @@
                 <a:ea typeface="Calibri" pitchFamily="34" charset="-122"/>
                 <a:cs typeface="Calibri" pitchFamily="34" charset="-120"/>
               </a:rPr>
-              <a:t>D. A left shift</a:t>
+              <a:t>D. Viral infection</a:t>
             </a:r>
             <a:endParaRPr lang="en-US" sz="1350" dirty="0"/>
           </a:p>
@@ -9308,7 +9028,7 @@
                 <a:ea typeface="Calibri" pitchFamily="34" charset="-122"/>
                 <a:cs typeface="Calibri" pitchFamily="34" charset="-120"/>
               </a:rPr>
-              <a:t>E. Neutrophil count alone</a:t>
+              <a:t>E. Megaloblastic anemia</a:t>
             </a:r>
             <a:endParaRPr lang="en-US" sz="1350" dirty="0"/>
           </a:p>
@@ -9390,7 +9110,7 @@
                 <a:ea typeface="Calibri" pitchFamily="34" charset="-122"/>
                 <a:cs typeface="Calibri" pitchFamily="34" charset="-120"/>
               </a:rPr>
-              <a:t>B — Basophilia and BCR-ABL1</a:t>
+              <a:t>B — Myeloid blasts (AML)</a:t>
             </a:r>
             <a:endParaRPr lang="en-US" sz="1500" dirty="0"/>
           </a:p>
@@ -9432,7 +9152,7 @@
                 <a:ea typeface="Calibri" pitchFamily="34" charset="-122"/>
                 <a:cs typeface="Calibri" pitchFamily="34" charset="-120"/>
               </a:rPr>
-              <a:t>Basophilia is characteristic of CML and absent in leukemoid reactions; BCR-ABL1 / t(9;22) confirms CML.</a:t>
+              <a:t>Auer rods are pathognomonic of myeloid lineage blasts, seen in AML.</a:t>
             </a:r>
             <a:endParaRPr lang="en-US" sz="1250" dirty="0"/>
           </a:p>
@@ -9690,7 +9410,7 @@
                 <a:ea typeface="Calibri" pitchFamily="34" charset="-122"/>
                 <a:cs typeface="Calibri" pitchFamily="34" charset="-120"/>
               </a:rPr>
-              <a:t>An asymptomatic older adult with mature lymphocytosis and abundant smudge cells is best characterized by:</a:t>
+              <a:t>A ‘leukemic hiatus’ (blasts and mature cells without intermediate forms) suggests:</a:t>
             </a:r>
             <a:endParaRPr lang="en-US" sz="1450" dirty="0"/>
           </a:p>
@@ -9732,7 +9452,7 @@
                 <a:ea typeface="Calibri" pitchFamily="34" charset="-122"/>
                 <a:cs typeface="Calibri" pitchFamily="34" charset="-120"/>
               </a:rPr>
-              <a:t>A. Bone marrow biopsy first</a:t>
+              <a:t>A. Reactive left shift</a:t>
             </a:r>
             <a:endParaRPr lang="en-US" sz="1350" dirty="0"/>
           </a:p>
@@ -9752,7 +9472,7 @@
                 <a:ea typeface="Calibri" pitchFamily="34" charset="-122"/>
                 <a:cs typeface="Calibri" pitchFamily="34" charset="-120"/>
               </a:rPr>
-              <a:t>B. Flow cytometry</a:t>
+              <a:t>B. Acute leukemia</a:t>
             </a:r>
             <a:endParaRPr lang="en-US" sz="1350" dirty="0"/>
           </a:p>
@@ -9772,7 +9492,7 @@
                 <a:ea typeface="Calibri" pitchFamily="34" charset="-122"/>
                 <a:cs typeface="Calibri" pitchFamily="34" charset="-120"/>
               </a:rPr>
-              <a:t>C. Hemoglobin electrophoresis</a:t>
+              <a:t>C. CML</a:t>
             </a:r>
             <a:endParaRPr lang="en-US" sz="1350" dirty="0"/>
           </a:p>
@@ -9792,7 +9512,7 @@
                 <a:ea typeface="Calibri" pitchFamily="34" charset="-122"/>
                 <a:cs typeface="Calibri" pitchFamily="34" charset="-120"/>
               </a:rPr>
-              <a:t>D. LDH only</a:t>
+              <a:t>D. Leukemoid reaction</a:t>
             </a:r>
             <a:endParaRPr lang="en-US" sz="1350" dirty="0"/>
           </a:p>
@@ -9812,7 +9532,7 @@
                 <a:ea typeface="Calibri" pitchFamily="34" charset="-122"/>
                 <a:cs typeface="Calibri" pitchFamily="34" charset="-120"/>
               </a:rPr>
-              <a:t>E. Reticulocyte count</a:t>
+              <a:t>E. Normal marrow</a:t>
             </a:r>
             <a:endParaRPr lang="en-US" sz="1350" dirty="0"/>
           </a:p>
@@ -9894,7 +9614,7 @@
                 <a:ea typeface="Calibri" pitchFamily="34" charset="-122"/>
                 <a:cs typeface="Calibri" pitchFamily="34" charset="-120"/>
               </a:rPr>
-              <a:t>B — Flow cytometry</a:t>
+              <a:t>B — Acute leukemia</a:t>
             </a:r>
             <a:endParaRPr lang="en-US" sz="1500" dirty="0"/>
           </a:p>
@@ -9936,7 +9656,7 @@
                 <a:ea typeface="Calibri" pitchFamily="34" charset="-122"/>
                 <a:cs typeface="Calibri" pitchFamily="34" charset="-120"/>
               </a:rPr>
-              <a:t>This suggests CLL; flow cytometry identifies and characterizes the clonal B-cell population and is the key initial test.</a:t>
+              <a:t>The gap between blasts and mature cells (absent intermediates) is characteristic of acute leukemia, unlike a reactive spectrum.</a:t>
             </a:r>
             <a:endParaRPr lang="en-US" sz="1250" dirty="0"/>
           </a:p>
@@ -10059,6 +9779,510 @@
 <file path=ppt/slides/slide23.xml><?xml version="1.0" encoding="utf-8"?>
 <p:sld xmlns:a="http://schemas.openxmlformats.org/drawingml/2006/main" xmlns:r="http://schemas.openxmlformats.org/officeDocument/2006/relationships" xmlns:p="http://schemas.openxmlformats.org/presentationml/2006/main">
   <p:cSld name="Slide 23">
+    <p:bg>
+      <p:bgPr>
+        <a:solidFill>
+          <a:srgbClr val="FFFFFF"/>
+        </a:solidFill>
+      </p:bgPr>
+    </p:bg>
+    <p:spTree>
+      <p:nvGrpSpPr>
+        <p:cNvPr id="1" name=""/>
+        <p:cNvGrpSpPr/>
+        <p:nvPr/>
+      </p:nvGrpSpPr>
+      <p:grpSpPr>
+        <a:xfrm>
+          <a:off x="0" y="0"/>
+          <a:ext cx="0" cy="0"/>
+          <a:chOff x="0" y="0"/>
+          <a:chExt cx="0" cy="0"/>
+        </a:xfrm>
+      </p:grpSpPr>
+      <p:sp>
+        <p:nvSpPr>
+          <p:cNvPr id="2" name="Text 0"/>
+          <p:cNvSpPr/>
+          <p:nvPr/>
+        </p:nvSpPr>
+        <p:spPr>
+          <a:xfrm>
+            <a:off x="566928" y="329184"/>
+            <a:ext cx="10515600" cy="310896"/>
+          </a:xfrm>
+          <a:prstGeom prst="rect">
+            <a:avLst/>
+          </a:prstGeom>
+          <a:noFill/>
+          <a:ln/>
+        </p:spPr>
+        <p:txBody>
+          <a:bodyPr wrap="square" lIns="0" tIns="0" rIns="0" bIns="0" rtlCol="0" anchor="ctr"/>
+          <a:lstStyle/>
+          <a:p>
+            <a:pPr algn="l" indent="0" marL="0">
+              <a:buNone/>
+            </a:pPr>
+            <a:r>
+              <a:rPr lang="en-US" sz="1100" b="1" spc="150" kern="0" dirty="0">
+                <a:solidFill>
+                  <a:srgbClr val="C62133"/>
+                </a:solidFill>
+                <a:latin typeface="Calibri" pitchFamily="34" charset="0"/>
+                <a:ea typeface="Calibri" pitchFamily="34" charset="-122"/>
+                <a:cs typeface="Calibri" pitchFamily="34" charset="-120"/>
+              </a:rPr>
+              <a:t>HEMATOLOGY &amp; COAGULATION   ·   BOARD REVIEW  ·  Q4</a:t>
+            </a:r>
+            <a:endParaRPr lang="en-US" sz="1100" dirty="0"/>
+          </a:p>
+        </p:txBody>
+      </p:sp>
+      <p:sp>
+        <p:nvSpPr>
+          <p:cNvPr id="3" name="Text 1"/>
+          <p:cNvSpPr/>
+          <p:nvPr/>
+        </p:nvSpPr>
+        <p:spPr>
+          <a:xfrm>
+            <a:off x="566928" y="713232"/>
+            <a:ext cx="11064240" cy="749808"/>
+          </a:xfrm>
+          <a:prstGeom prst="rect">
+            <a:avLst/>
+          </a:prstGeom>
+          <a:noFill/>
+          <a:ln/>
+        </p:spPr>
+        <p:txBody>
+          <a:bodyPr wrap="square" lIns="0" tIns="0" rIns="0" bIns="0" rtlCol="0" anchor="ctr"/>
+          <a:lstStyle/>
+          <a:p>
+            <a:pPr algn="l" indent="0" marL="0">
+              <a:buNone/>
+            </a:pPr>
+            <a:r>
+              <a:rPr lang="en-US" sz="2600" b="1" dirty="0">
+                <a:solidFill>
+                  <a:srgbClr val="0E3A5F"/>
+                </a:solidFill>
+                <a:latin typeface="Calibri" pitchFamily="34" charset="0"/>
+                <a:ea typeface="Calibri" pitchFamily="34" charset="-122"/>
+                <a:cs typeface="Calibri" pitchFamily="34" charset="-120"/>
+              </a:rPr>
+              <a:t>Board-Style Review</a:t>
+            </a:r>
+            <a:endParaRPr lang="en-US" sz="2600" dirty="0"/>
+          </a:p>
+        </p:txBody>
+      </p:sp>
+      <p:sp>
+        <p:nvSpPr>
+          <p:cNvPr id="4" name="Text 2"/>
+          <p:cNvSpPr/>
+          <p:nvPr/>
+        </p:nvSpPr>
+        <p:spPr>
+          <a:xfrm>
+            <a:off x="566928" y="1417320"/>
+            <a:ext cx="11057839" cy="914400"/>
+          </a:xfrm>
+          <a:prstGeom prst="rect">
+            <a:avLst/>
+          </a:prstGeom>
+          <a:noFill/>
+          <a:ln/>
+        </p:spPr>
+        <p:txBody>
+          <a:bodyPr wrap="square" lIns="0" tIns="0" rIns="0" bIns="0" rtlCol="0" anchor="t"/>
+          <a:lstStyle/>
+          <a:p>
+            <a:pPr algn="l" indent="0" marL="0">
+              <a:lnSpc>
+                <a:spcPct val="105000"/>
+              </a:lnSpc>
+              <a:buNone/>
+            </a:pPr>
+            <a:r>
+              <a:rPr lang="en-US" sz="1450" b="1" dirty="0">
+                <a:solidFill>
+                  <a:srgbClr val="1B2A38"/>
+                </a:solidFill>
+                <a:latin typeface="Calibri" pitchFamily="34" charset="0"/>
+                <a:ea typeface="Calibri" pitchFamily="34" charset="-122"/>
+                <a:cs typeface="Calibri" pitchFamily="34" charset="-120"/>
+              </a:rPr>
+              <a:t>Smudge cells with marked lymphocytosis in an older adult suggest:</a:t>
+            </a:r>
+            <a:endParaRPr lang="en-US" sz="1450" dirty="0"/>
+          </a:p>
+        </p:txBody>
+      </p:sp>
+      <p:sp>
+        <p:nvSpPr>
+          <p:cNvPr id="5" name="Text 3"/>
+          <p:cNvSpPr/>
+          <p:nvPr/>
+        </p:nvSpPr>
+        <p:spPr>
+          <a:xfrm>
+            <a:off x="658368" y="2395728"/>
+            <a:ext cx="6192390" cy="3017520"/>
+          </a:xfrm>
+          <a:prstGeom prst="rect">
+            <a:avLst/>
+          </a:prstGeom>
+          <a:noFill/>
+          <a:ln/>
+        </p:spPr>
+        <p:txBody>
+          <a:bodyPr wrap="square" lIns="0" tIns="0" rIns="0" bIns="0" rtlCol="0" anchor="t"/>
+          <a:lstStyle/>
+          <a:p>
+            <a:pPr algn="l" indent="0" marL="0">
+              <a:spcAft>
+                <a:spcPts val="600"/>
+              </a:spcAft>
+              <a:buNone/>
+            </a:pPr>
+            <a:r>
+              <a:rPr lang="en-US" sz="1350" dirty="0">
+                <a:solidFill>
+                  <a:srgbClr val="33444F"/>
+                </a:solidFill>
+                <a:latin typeface="Calibri" pitchFamily="34" charset="0"/>
+                <a:ea typeface="Calibri" pitchFamily="34" charset="-122"/>
+                <a:cs typeface="Calibri" pitchFamily="34" charset="-120"/>
+              </a:rPr>
+              <a:t>A. AML</a:t>
+            </a:r>
+            <a:endParaRPr lang="en-US" sz="1350" dirty="0"/>
+          </a:p>
+          <a:p>
+            <a:pPr algn="l" indent="0" marL="0">
+              <a:spcAft>
+                <a:spcPts val="600"/>
+              </a:spcAft>
+              <a:buNone/>
+            </a:pPr>
+            <a:r>
+              <a:rPr lang="en-US" sz="1350" b="1" dirty="0">
+                <a:solidFill>
+                  <a:srgbClr val="8E1622"/>
+                </a:solidFill>
+                <a:latin typeface="Calibri" pitchFamily="34" charset="0"/>
+                <a:ea typeface="Calibri" pitchFamily="34" charset="-122"/>
+                <a:cs typeface="Calibri" pitchFamily="34" charset="-120"/>
+              </a:rPr>
+              <a:t>B. Chronic lymphocytic leukemia</a:t>
+            </a:r>
+            <a:endParaRPr lang="en-US" sz="1350" dirty="0"/>
+          </a:p>
+          <a:p>
+            <a:pPr algn="l" indent="0" marL="0">
+              <a:spcAft>
+                <a:spcPts val="600"/>
+              </a:spcAft>
+              <a:buNone/>
+            </a:pPr>
+            <a:r>
+              <a:rPr lang="en-US" sz="1350" dirty="0">
+                <a:solidFill>
+                  <a:srgbClr val="33444F"/>
+                </a:solidFill>
+                <a:latin typeface="Calibri" pitchFamily="34" charset="0"/>
+                <a:ea typeface="Calibri" pitchFamily="34" charset="-122"/>
+                <a:cs typeface="Calibri" pitchFamily="34" charset="-120"/>
+              </a:rPr>
+              <a:t>C. Reactive neutrophilia</a:t>
+            </a:r>
+            <a:endParaRPr lang="en-US" sz="1350" dirty="0"/>
+          </a:p>
+          <a:p>
+            <a:pPr algn="l" indent="0" marL="0">
+              <a:spcAft>
+                <a:spcPts val="600"/>
+              </a:spcAft>
+              <a:buNone/>
+            </a:pPr>
+            <a:r>
+              <a:rPr lang="en-US" sz="1350" dirty="0">
+                <a:solidFill>
+                  <a:srgbClr val="33444F"/>
+                </a:solidFill>
+                <a:latin typeface="Calibri" pitchFamily="34" charset="0"/>
+                <a:ea typeface="Calibri" pitchFamily="34" charset="-122"/>
+                <a:cs typeface="Calibri" pitchFamily="34" charset="-120"/>
+              </a:rPr>
+              <a:t>D. Myelofibrosis</a:t>
+            </a:r>
+            <a:endParaRPr lang="en-US" sz="1350" dirty="0"/>
+          </a:p>
+          <a:p>
+            <a:pPr algn="l" indent="0" marL="0">
+              <a:spcAft>
+                <a:spcPts val="600"/>
+              </a:spcAft>
+              <a:buNone/>
+            </a:pPr>
+            <a:r>
+              <a:rPr lang="en-US" sz="1350" dirty="0">
+                <a:solidFill>
+                  <a:srgbClr val="33444F"/>
+                </a:solidFill>
+                <a:latin typeface="Calibri" pitchFamily="34" charset="0"/>
+                <a:ea typeface="Calibri" pitchFamily="34" charset="-122"/>
+                <a:cs typeface="Calibri" pitchFamily="34" charset="-120"/>
+              </a:rPr>
+              <a:t>E. Iron deficiency</a:t>
+            </a:r>
+            <a:endParaRPr lang="en-US" sz="1350" dirty="0"/>
+          </a:p>
+        </p:txBody>
+      </p:sp>
+      <p:sp>
+        <p:nvSpPr>
+          <p:cNvPr id="6" name="Shape 4"/>
+          <p:cNvSpPr/>
+          <p:nvPr/>
+        </p:nvSpPr>
+        <p:spPr>
+          <a:xfrm>
+            <a:off x="7201632" y="2395728"/>
+            <a:ext cx="4423136" cy="3246120"/>
+          </a:xfrm>
+          <a:prstGeom prst="roundRect">
+            <a:avLst>
+              <a:gd name="adj" fmla="val 2535"/>
+            </a:avLst>
+          </a:prstGeom>
+          <a:solidFill>
+            <a:srgbClr val="FBEAEC"/>
+          </a:solidFill>
+          <a:ln/>
+          <a:effectLst>
+            <a:outerShdw sx="100000" sy="100000" kx="0" ky="0" algn="bl" rotWithShape="0" blurRad="88900" dist="25400" dir="5400000">
+              <a:srgbClr val="22303C">
+                <a:alpha val="12000"/>
+              </a:srgbClr>
+            </a:outerShdw>
+          </a:effectLst>
+        </p:spPr>
+      </p:sp>
+      <p:sp>
+        <p:nvSpPr>
+          <p:cNvPr id="7" name="Text 5"/>
+          <p:cNvSpPr/>
+          <p:nvPr/>
+        </p:nvSpPr>
+        <p:spPr>
+          <a:xfrm>
+            <a:off x="7439376" y="2578608"/>
+            <a:ext cx="3965936" cy="457200"/>
+          </a:xfrm>
+          <a:prstGeom prst="rect">
+            <a:avLst/>
+          </a:prstGeom>
+          <a:noFill/>
+          <a:ln/>
+        </p:spPr>
+        <p:txBody>
+          <a:bodyPr wrap="square" lIns="0" tIns="0" rIns="0" bIns="0" rtlCol="0" anchor="ctr"/>
+          <a:lstStyle/>
+          <a:p>
+            <a:pPr indent="0" marL="0">
+              <a:buNone/>
+            </a:pPr>
+            <a:r>
+              <a:rPr lang="en-US" sz="1500" b="1" dirty="0">
+                <a:solidFill>
+                  <a:srgbClr val="C62133"/>
+                </a:solidFill>
+                <a:latin typeface="Calibri" pitchFamily="34" charset="0"/>
+                <a:ea typeface="Calibri" pitchFamily="34" charset="-122"/>
+                <a:cs typeface="Calibri" pitchFamily="34" charset="-120"/>
+              </a:rPr>
+              <a:t>ANSWER  </a:t>
+            </a:r>
+            <a:pPr indent="0" marL="0">
+              <a:buNone/>
+            </a:pPr>
+            <a:r>
+              <a:rPr lang="en-US" sz="1500" b="1" dirty="0">
+                <a:solidFill>
+                  <a:srgbClr val="1B2A38"/>
+                </a:solidFill>
+                <a:latin typeface="Calibri" pitchFamily="34" charset="0"/>
+                <a:ea typeface="Calibri" pitchFamily="34" charset="-122"/>
+                <a:cs typeface="Calibri" pitchFamily="34" charset="-120"/>
+              </a:rPr>
+              <a:t>B — CLL</a:t>
+            </a:r>
+            <a:endParaRPr lang="en-US" sz="1500" dirty="0"/>
+          </a:p>
+        </p:txBody>
+      </p:sp>
+      <p:sp>
+        <p:nvSpPr>
+          <p:cNvPr id="8" name="Text 6"/>
+          <p:cNvSpPr/>
+          <p:nvPr/>
+        </p:nvSpPr>
+        <p:spPr>
+          <a:xfrm>
+            <a:off x="7439376" y="3127248"/>
+            <a:ext cx="3947648" cy="2377440"/>
+          </a:xfrm>
+          <a:prstGeom prst="rect">
+            <a:avLst/>
+          </a:prstGeom>
+          <a:noFill/>
+          <a:ln/>
+        </p:spPr>
+        <p:txBody>
+          <a:bodyPr wrap="square" lIns="0" tIns="0" rIns="0" bIns="0" rtlCol="0" anchor="t"/>
+          <a:lstStyle/>
+          <a:p>
+            <a:pPr algn="l" indent="0" marL="0">
+              <a:lnSpc>
+                <a:spcPct val="108000"/>
+              </a:lnSpc>
+              <a:buNone/>
+            </a:pPr>
+            <a:r>
+              <a:rPr lang="en-US" sz="1250" dirty="0">
+                <a:solidFill>
+                  <a:srgbClr val="33444F"/>
+                </a:solidFill>
+                <a:latin typeface="Calibri" pitchFamily="34" charset="0"/>
+                <a:ea typeface="Calibri" pitchFamily="34" charset="-122"/>
+                <a:cs typeface="Calibri" pitchFamily="34" charset="-120"/>
+              </a:rPr>
+              <a:t>Smudge (basket) cells accompany the fragile lymphocytes of CLL; flow cytometry confirms clonality.</a:t>
+            </a:r>
+            <a:endParaRPr lang="en-US" sz="1250" dirty="0"/>
+          </a:p>
+        </p:txBody>
+      </p:sp>
+      <p:sp>
+        <p:nvSpPr>
+          <p:cNvPr id="9" name="Text 7"/>
+          <p:cNvSpPr/>
+          <p:nvPr/>
+        </p:nvSpPr>
+        <p:spPr>
+          <a:xfrm>
+            <a:off x="566928" y="6473952"/>
+            <a:ext cx="7772400" cy="274320"/>
+          </a:xfrm>
+          <a:prstGeom prst="rect">
+            <a:avLst/>
+          </a:prstGeom>
+          <a:noFill/>
+          <a:ln/>
+        </p:spPr>
+        <p:txBody>
+          <a:bodyPr wrap="square" lIns="0" tIns="0" rIns="0" bIns="0" rtlCol="0" anchor="ctr"/>
+          <a:lstStyle/>
+          <a:p>
+            <a:pPr algn="l" indent="0" marL="0">
+              <a:buNone/>
+            </a:pPr>
+            <a:r>
+              <a:rPr lang="en-US" sz="850" dirty="0">
+                <a:solidFill>
+                  <a:srgbClr val="9AA8B4"/>
+                </a:solidFill>
+                <a:latin typeface="Calibri" pitchFamily="34" charset="0"/>
+                <a:ea typeface="Calibri" pitchFamily="34" charset="-122"/>
+                <a:cs typeface="Calibri" pitchFamily="34" charset="-120"/>
+              </a:rPr>
+              <a:t>Makassed General Hospital  ·  Department of Laboratory Medicine</a:t>
+            </a:r>
+            <a:endParaRPr lang="en-US" sz="850" dirty="0"/>
+          </a:p>
+        </p:txBody>
+      </p:sp>
+      <p:sp>
+        <p:nvSpPr>
+          <p:cNvPr id="10" name="Text 8"/>
+          <p:cNvSpPr/>
+          <p:nvPr/>
+        </p:nvSpPr>
+        <p:spPr>
+          <a:xfrm>
+            <a:off x="9814255" y="6473952"/>
+            <a:ext cx="1828800" cy="274320"/>
+          </a:xfrm>
+          <a:prstGeom prst="rect">
+            <a:avLst/>
+          </a:prstGeom>
+          <a:noFill/>
+          <a:ln/>
+        </p:spPr>
+        <p:txBody>
+          <a:bodyPr wrap="square" lIns="0" tIns="0" rIns="0" bIns="0" rtlCol="0" anchor="ctr"/>
+          <a:lstStyle/>
+          <a:p>
+            <a:pPr algn="r" indent="0" marL="0">
+              <a:buNone/>
+            </a:pPr>
+            <a:r>
+              <a:rPr lang="en-US" sz="850" dirty="0">
+                <a:solidFill>
+                  <a:srgbClr val="9AA8B4"/>
+                </a:solidFill>
+                <a:latin typeface="Calibri" pitchFamily="34" charset="0"/>
+                <a:ea typeface="Calibri" pitchFamily="34" charset="-122"/>
+                <a:cs typeface="Calibri" pitchFamily="34" charset="-120"/>
+              </a:rPr>
+              <a:t>CP Lecture Series</a:t>
+            </a:r>
+            <a:pPr algn="r" indent="0" marL="0">
+              <a:buNone/>
+            </a:pPr>
+            <a:r>
+              <a:rPr lang="en-US" sz="850" dirty="0">
+                <a:solidFill>
+                  <a:srgbClr val="DCE4EC"/>
+                </a:solidFill>
+                <a:latin typeface="Calibri" pitchFamily="34" charset="0"/>
+                <a:ea typeface="Calibri" pitchFamily="34" charset="-122"/>
+                <a:cs typeface="Calibri" pitchFamily="34" charset="-120"/>
+              </a:rPr>
+              <a:t>   ·   </a:t>
+            </a:r>
+            <a:pPr algn="r" indent="0" marL="0">
+              <a:buNone/>
+            </a:pPr>
+            <a:r>
+              <a:rPr lang="en-US" sz="850" b="1" dirty="0">
+                <a:solidFill>
+                  <a:srgbClr val="C62133"/>
+                </a:solidFill>
+                <a:latin typeface="Calibri" pitchFamily="34" charset="0"/>
+                <a:ea typeface="Calibri" pitchFamily="34" charset="-122"/>
+                <a:cs typeface="Calibri" pitchFamily="34" charset="-120"/>
+              </a:rPr>
+              <a:t>20</a:t>
+            </a:r>
+            <a:endParaRPr lang="en-US" sz="850" dirty="0"/>
+          </a:p>
+        </p:txBody>
+      </p:sp>
+    </p:spTree>
+  </p:cSld>
+  <p:clrMapOvr>
+    <a:masterClrMapping/>
+  </p:clrMapOvr>
+</p:sld>
+</file>
+
+<file path=ppt/slides/slide24.xml><?xml version="1.0" encoding="utf-8"?>
+<p:sld xmlns:a="http://schemas.openxmlformats.org/drawingml/2006/main" xmlns:r="http://schemas.openxmlformats.org/officeDocument/2006/relationships" xmlns:p="http://schemas.openxmlformats.org/presentationml/2006/main">
+  <p:cSld name="Slide 24">
     <p:bg>
       <p:bgPr>
         <a:solidFill>
@@ -10279,7 +10503,7 @@
                 <a:ea typeface="Calibri" pitchFamily="34" charset="-122"/>
                 <a:cs typeface="Calibri" pitchFamily="34" charset="-120"/>
               </a:rPr>
-              <a:t>Most leukocytosis is reactive — read the smear and absolute counts to catch the case that isn’t.</a:t>
+              <a:t>Interpret white cells by absolute counts; reactive changes show a full maturation spectrum with toxic features.</a:t>
             </a:r>
             <a:endParaRPr lang="en-US" sz="1350" dirty="0"/>
           </a:p>
@@ -10406,7 +10630,7 @@
                 <a:ea typeface="Calibri" pitchFamily="34" charset="-122"/>
                 <a:cs typeface="Calibri" pitchFamily="34" charset="-120"/>
               </a:rPr>
-              <a:t>Left shift is usually reactive; circulating blasts are not.</a:t>
+              <a:t>Neoplastic clues: monomorphic populations, blasts, Auer rods, leukemic hiatus, basophilia, and other-lineage cytopenias.</a:t>
             </a:r>
             <a:endParaRPr lang="en-US" sz="1350" dirty="0"/>
           </a:p>
@@ -10533,7 +10757,7 @@
                 <a:ea typeface="Calibri" pitchFamily="34" charset="-122"/>
                 <a:cs typeface="Calibri" pitchFamily="34" charset="-120"/>
               </a:rPr>
-              <a:t>Basophilia + full myeloid spectrum → think CML; confirm with BCR-ABL1.</a:t>
+              <a:t>Evaluate severe neutropenia (infection risk) and distinguish reactive from clonal lymphocytosis (smudge cells → CLL).</a:t>
             </a:r>
             <a:endParaRPr lang="en-US" sz="1350" dirty="0"/>
           </a:p>
@@ -10660,7 +10884,7 @@
                 <a:ea typeface="Calibri" pitchFamily="34" charset="-122"/>
                 <a:cs typeface="Calibri" pitchFamily="34" charset="-120"/>
               </a:rPr>
-              <a:t>APL (promyelocytes + DIC) is a same-hour emergency — notify and expedite confirmatory testing.</a:t>
+              <a:t>Flow cytometry classifies blasts and clonal populations; diagnosis integrates morphology, flow, cytogenetics, and molecular.</a:t>
             </a:r>
             <a:endParaRPr lang="en-US" sz="1350" dirty="0"/>
           </a:p>
@@ -10787,7 +11011,7 @@
                 <a:ea typeface="Calibri" pitchFamily="34" charset="-122"/>
                 <a:cs typeface="Calibri" pitchFamily="34" charset="-120"/>
               </a:rPr>
-              <a:t>Unexplained/persistent cytopenias and blood blasts warrant flow cytometry and marrow evaluation.</a:t>
+              <a:t>Recognize emergencies: circulating blasts/suspected APL, hyperleukocytosis, neutropenic fever, severe thrombocytopenia.</a:t>
             </a:r>
             <a:endParaRPr lang="en-US" sz="1350" dirty="0"/>
           </a:p>
@@ -10865,7 +11089,7 @@
                 <a:ea typeface="Calibri" pitchFamily="34" charset="-122"/>
                 <a:cs typeface="Calibri" pitchFamily="34" charset="-120"/>
               </a:rPr>
-              <a:t>20</a:t>
+              <a:t>21</a:t>
             </a:r>
             <a:endParaRPr lang="en-US" sz="850" dirty="0"/>
           </a:p>
@@ -10879,9 +11103,9 @@
 </p:sld>
 </file>
 
-<file path=ppt/slides/slide24.xml><?xml version="1.0" encoding="utf-8"?>
+<file path=ppt/slides/slide25.xml><?xml version="1.0" encoding="utf-8"?>
 <p:sld xmlns:a="http://schemas.openxmlformats.org/drawingml/2006/main" xmlns:r="http://schemas.openxmlformats.org/officeDocument/2006/relationships" xmlns:p="http://schemas.openxmlformats.org/presentationml/2006/main">
-  <p:cSld name="Slide 24">
+  <p:cSld name="Slide 25">
     <p:bg>
       <p:bgPr>
         <a:solidFill>
@@ -11017,7 +11241,7 @@
                 <a:ea typeface="Calibri" pitchFamily="34" charset="-122"/>
                 <a:cs typeface="Calibri" pitchFamily="34" charset="-120"/>
               </a:rPr>
-              <a:t>1.   Khoury JD, et al. WHO Classification of Haematolymphoid Tumours, 5th ed. Leukemia. 2022.</a:t>
+              <a:t>1.   Keohane E, et al. Rodak’s Hematology, 6th ed.</a:t>
             </a:r>
             <a:endParaRPr lang="en-US" sz="1150" dirty="0"/>
           </a:p>
@@ -11037,7 +11261,7 @@
                 <a:ea typeface="Calibri" pitchFamily="34" charset="-122"/>
                 <a:cs typeface="Calibri" pitchFamily="34" charset="-120"/>
               </a:rPr>
-              <a:t>2.   Arber DA, et al. International Consensus Classification. Blood. 2022.</a:t>
+              <a:t>2.   Bain BJ. Blood Cells: A Practical Guide, 6th ed.</a:t>
             </a:r>
             <a:endParaRPr lang="en-US" sz="1150" dirty="0"/>
           </a:p>
@@ -11057,7 +11281,7 @@
                 <a:ea typeface="Calibri" pitchFamily="34" charset="-122"/>
                 <a:cs typeface="Calibri" pitchFamily="34" charset="-120"/>
               </a:rPr>
-              <a:t>3.   Keohane EM, et al. Rodak’s Hematology, 6th ed. Elsevier, 2020.</a:t>
+              <a:t>3.   WHO Classification of Haematolymphoid Tumours (current ed.).</a:t>
             </a:r>
             <a:endParaRPr lang="en-US" sz="1150" dirty="0"/>
           </a:p>
@@ -11077,7 +11301,7 @@
                 <a:ea typeface="Calibri" pitchFamily="34" charset="-122"/>
                 <a:cs typeface="Calibri" pitchFamily="34" charset="-120"/>
               </a:rPr>
-              <a:t>4.   CAP/CLSI guidelines for the manual differential and smear review.</a:t>
+              <a:t>4.   Arber DA, et al. International Consensus Classification. Blood. 2022.</a:t>
             </a:r>
             <a:endParaRPr lang="en-US" sz="1150" dirty="0"/>
           </a:p>
@@ -11183,7 +11407,7 @@
                 <a:ea typeface="Calibri" pitchFamily="34" charset="-122"/>
                 <a:cs typeface="Calibri" pitchFamily="34" charset="-120"/>
               </a:rPr>
-              <a:t>21</a:t>
+              <a:t>22</a:t>
             </a:r>
             <a:endParaRPr lang="en-US" sz="850" dirty="0"/>
           </a:p>
@@ -11427,7 +11651,7 @@
                 <a:ea typeface="Calibri" pitchFamily="34" charset="-122"/>
                 <a:cs typeface="Calibri" pitchFamily="34" charset="-120"/>
               </a:rPr>
-              <a:t>Evaluate leukocytosis and leukopenia with a structured differential.</a:t>
+              <a:t>Interpret leukocytosis and the differential using absolute counts.</a:t>
             </a:r>
             <a:endParaRPr lang="en-US" sz="1350" dirty="0"/>
           </a:p>
@@ -11561,7 +11785,7 @@
                 <a:ea typeface="Calibri" pitchFamily="34" charset="-122"/>
                 <a:cs typeface="Calibri" pitchFamily="34" charset="-120"/>
               </a:rPr>
-              <a:t>Distinguish reactive (leukemoid) from neoplastic leukocytosis, including CML.</a:t>
+              <a:t>Distinguish reactive changes from neoplastic populations.</a:t>
             </a:r>
             <a:endParaRPr lang="en-US" sz="1350" dirty="0"/>
           </a:p>
@@ -11695,7 +11919,7 @@
                 <a:ea typeface="Calibri" pitchFamily="34" charset="-122"/>
                 <a:cs typeface="Calibri" pitchFamily="34" charset="-120"/>
               </a:rPr>
-              <a:t>Identify blasts and Auer rods and state the urgent findings.</a:t>
+              <a:t>Evaluate neutropenia and lymphocytosis.</a:t>
             </a:r>
             <a:endParaRPr lang="en-US" sz="1350" dirty="0"/>
           </a:p>
@@ -11829,7 +12053,7 @@
                 <a:ea typeface="Calibri" pitchFamily="34" charset="-122"/>
                 <a:cs typeface="Calibri" pitchFamily="34" charset="-120"/>
               </a:rPr>
-              <a:t>Recognize acute promyelocytic leukemia as an emergency.</a:t>
+              <a:t>Recognize the smear features of acute leukemia.</a:t>
             </a:r>
             <a:endParaRPr lang="en-US" sz="1350" dirty="0"/>
           </a:p>
@@ -11963,7 +12187,7 @@
                 <a:ea typeface="Calibri" pitchFamily="34" charset="-122"/>
                 <a:cs typeface="Calibri" pitchFamily="34" charset="-120"/>
               </a:rPr>
-              <a:t>Approach pancytopenia and isolated cytopenias.</a:t>
+              <a:t>Describe the role of flow cytometry and ancillary testing.</a:t>
             </a:r>
             <a:endParaRPr lang="en-US" sz="1350" dirty="0"/>
           </a:p>
@@ -12097,7 +12321,7 @@
                 <a:ea typeface="Calibri" pitchFamily="34" charset="-122"/>
                 <a:cs typeface="Calibri" pitchFamily="34" charset="-120"/>
               </a:rPr>
-              <a:t>Know when to escalate to flow cytometry and bone marrow.</a:t>
+              <a:t>Identify hematologic emergencies requiring urgent action.</a:t>
             </a:r>
             <a:endParaRPr lang="en-US" sz="1350" dirty="0"/>
           </a:p>
@@ -12447,7 +12671,7 @@
                 <a:ea typeface="Calibri" pitchFamily="34" charset="-122"/>
                 <a:cs typeface="Calibri" pitchFamily="34" charset="-120"/>
               </a:rPr>
-              <a:t>Evaluating the white count</a:t>
+              <a:t>Leukocytosis</a:t>
             </a:r>
             <a:pPr algn="l" indent="0" marL="0">
               <a:buNone/>
@@ -12588,7 +12812,7 @@
                 <a:ea typeface="Calibri" pitchFamily="34" charset="-122"/>
                 <a:cs typeface="Calibri" pitchFamily="34" charset="-120"/>
               </a:rPr>
-              <a:t>Leukemoid vs CML</a:t>
+              <a:t>Neutropenia &amp; lymphocytosis</a:t>
             </a:r>
             <a:pPr algn="l" indent="0" marL="0">
               <a:buNone/>
@@ -12602,7 +12826,7 @@
                 <a:ea typeface="Calibri" pitchFamily="34" charset="-122"/>
                 <a:cs typeface="Calibri" pitchFamily="34" charset="-120"/>
               </a:rPr>
-              <a:t>   —  the high-WBC differential</a:t>
+              <a:t>   —  focused evaluation</a:t>
             </a:r>
             <a:endParaRPr lang="en-US" sz="1400" dirty="0"/>
           </a:p>
@@ -12736,7 +12960,7 @@
                 <a:ea typeface="Calibri" pitchFamily="34" charset="-122"/>
                 <a:cs typeface="Calibri" pitchFamily="34" charset="-120"/>
               </a:rPr>
-              <a:t>Cytopenias</a:t>
+              <a:t>Leukemia screening</a:t>
             </a:r>
             <a:pPr algn="l" indent="0" marL="0">
               <a:buNone/>
@@ -12750,7 +12974,7 @@
                 <a:ea typeface="Calibri" pitchFamily="34" charset="-122"/>
                 <a:cs typeface="Calibri" pitchFamily="34" charset="-120"/>
               </a:rPr>
-              <a:t>   —  pancytopenia and isolated</a:t>
+              <a:t>   —  smear and flow</a:t>
             </a:r>
             <a:endParaRPr lang="en-US" sz="1400" dirty="0"/>
           </a:p>
@@ -12877,7 +13101,7 @@
                 <a:ea typeface="Calibri" pitchFamily="34" charset="-122"/>
                 <a:cs typeface="Calibri" pitchFamily="34" charset="-120"/>
               </a:rPr>
-              <a:t>Acute leukemia screening</a:t>
+              <a:t>Emergencies</a:t>
             </a:r>
             <a:pPr algn="l" indent="0" marL="0">
               <a:buNone/>
@@ -12891,7 +13115,7 @@
                 <a:ea typeface="Calibri" pitchFamily="34" charset="-122"/>
                 <a:cs typeface="Calibri" pitchFamily="34" charset="-120"/>
               </a:rPr>
-              <a:t>   —  blasts, APL, escalation</a:t>
+              <a:t>   —  when to act now</a:t>
             </a:r>
             <a:endParaRPr lang="en-US" sz="1400" dirty="0"/>
           </a:p>
@@ -13324,7 +13548,7 @@
                 <a:ea typeface="Calibri" pitchFamily="34" charset="-122"/>
                 <a:cs typeface="Calibri" pitchFamily="34" charset="-120"/>
               </a:rPr>
-              <a:t>Evaluating the White Count</a:t>
+              <a:t>Reading the White Cells</a:t>
             </a:r>
             <a:endParaRPr lang="en-US" sz="3800" dirty="0"/>
           </a:p>
@@ -13395,7 +13619,7 @@
                 <a:ea typeface="Calibri" pitchFamily="34" charset="-122"/>
                 <a:cs typeface="Calibri" pitchFamily="34" charset="-120"/>
               </a:rPr>
-              <a:t>HEMATOLOGY &amp; COAGULATION   ·   THE WHITE COUNT</a:t>
+              <a:t>HEMATOLOGY &amp; COAGULATION   ·   WHITE CELLS</a:t>
             </a:r>
             <a:endParaRPr lang="en-US" sz="1100" dirty="0"/>
           </a:p>
@@ -13434,7 +13658,7 @@
                 <a:ea typeface="Calibri" pitchFamily="34" charset="-122"/>
                 <a:cs typeface="Calibri" pitchFamily="34" charset="-120"/>
               </a:rPr>
-              <a:t>Reactive vs Neoplastic · Left Shift vs Blasts</a:t>
+              <a:t>Maturation, Left Shift &amp; Concerning Features</a:t>
             </a:r>
             <a:endParaRPr lang="en-US" sz="3000" dirty="0"/>
           </a:p>
@@ -13448,18 +13672,23 @@
         </p:nvSpPr>
         <p:spPr>
           <a:xfrm>
-            <a:off x="566928" y="1517904"/>
-            <a:ext cx="5346040" cy="4114800"/>
+            <a:off x="883768" y="1481328"/>
+            <a:ext cx="10424160" cy="4425696"/>
           </a:xfrm>
           <a:prstGeom prst="roundRect">
             <a:avLst>
-              <a:gd name="adj" fmla="val 2000"/>
+              <a:gd name="adj" fmla="val 1860"/>
             </a:avLst>
           </a:prstGeom>
           <a:solidFill>
-            <a:srgbClr val="FBEAEC"/>
+            <a:srgbClr val="FFFFFF"/>
           </a:solidFill>
-          <a:ln/>
+          <a:ln w="12700">
+            <a:solidFill>
+              <a:srgbClr val="DCE4EC"/>
+            </a:solidFill>
+            <a:prstDash val="solid"/>
+          </a:ln>
           <a:effectLst>
             <a:outerShdw sx="100000" sy="100000" kx="0" ky="0" algn="bl" rotWithShape="0" blurRad="88900" dist="25400" dir="5400000">
               <a:srgbClr val="22303C">
@@ -13469,55 +13698,40 @@
           </a:effectLst>
         </p:spPr>
       </p:sp>
-      <p:sp>
-        <p:nvSpPr>
-          <p:cNvPr id="5" name="Text 3"/>
-          <p:cNvSpPr/>
-          <p:nvPr/>
-        </p:nvSpPr>
-        <p:spPr>
-          <a:xfrm>
-            <a:off x="804672" y="1682496"/>
-            <a:ext cx="4888840" cy="274320"/>
-          </a:xfrm>
-          <a:prstGeom prst="rect">
-            <a:avLst/>
-          </a:prstGeom>
-          <a:noFill/>
-          <a:ln/>
-        </p:spPr>
-        <p:txBody>
-          <a:bodyPr wrap="square" lIns="0" tIns="0" rIns="0" bIns="0" rtlCol="0" anchor="ctr"/>
-          <a:lstStyle/>
-          <a:p>
-            <a:pPr indent="0" marL="0">
-              <a:buNone/>
-            </a:pPr>
-            <a:r>
-              <a:rPr lang="en-US" sz="1200" b="1" spc="100" kern="0" dirty="0">
-                <a:solidFill>
-                  <a:srgbClr val="8E1622"/>
-                </a:solidFill>
-                <a:latin typeface="Calibri" pitchFamily="34" charset="0"/>
-                <a:ea typeface="Calibri" pitchFamily="34" charset="-122"/>
-                <a:cs typeface="Calibri" pitchFamily="34" charset="-120"/>
-              </a:rPr>
-              <a:t>REACTIVE VS NEOPLASTIC</a:t>
-            </a:r>
-            <a:endParaRPr lang="en-US" sz="1200" dirty="0"/>
-          </a:p>
-        </p:txBody>
-      </p:sp>
-      <p:sp>
-        <p:nvSpPr>
-          <p:cNvPr id="6" name="Text 4"/>
-          <p:cNvSpPr/>
-          <p:nvPr/>
-        </p:nvSpPr>
-        <p:spPr>
-          <a:xfrm>
-            <a:off x="804672" y="2029968"/>
-            <a:ext cx="4870552" cy="3474720"/>
+      <p:pic>
+        <p:nvPicPr>
+          <p:cNvPr id="5" name="Image 0" descr="/tmp/cp_work2/art/heme_wbc.png">    </p:cNvPr>
+          <p:cNvPicPr>
+            <a:picLocks noChangeAspect="1"/>
+          </p:cNvPicPr>
+          <p:nvPr/>
+        </p:nvPicPr>
+        <p:blipFill>
+          <a:blip r:embed="rId1"/>
+          <a:stretch>
+            <a:fillRect/>
+          </a:stretch>
+        </p:blipFill>
+        <p:spPr>
+          <a:xfrm>
+            <a:off x="1011784" y="1609344"/>
+            <a:ext cx="10168128" cy="4169664"/>
+          </a:xfrm>
+          <a:prstGeom prst="rect">
+            <a:avLst/>
+          </a:prstGeom>
+        </p:spPr>
+      </p:pic>
+      <p:sp>
+        <p:nvSpPr>
+          <p:cNvPr id="6" name="Text 3"/>
+          <p:cNvSpPr/>
+          <p:nvPr/>
+        </p:nvSpPr>
+        <p:spPr>
+          <a:xfrm>
+            <a:off x="566928" y="5980176"/>
+            <a:ext cx="11057839" cy="365760"/>
           </a:xfrm>
           <a:prstGeom prst="rect">
             <a:avLst/>
@@ -13529,226 +13743,27 @@
           <a:bodyPr wrap="square" lIns="0" tIns="0" rIns="0" bIns="0" rtlCol="0" anchor="t"/>
           <a:lstStyle/>
           <a:p>
-            <a:pPr algn="l" marL="177800" indent="-177800">
-              <a:spcAft>
-                <a:spcPts val="900"/>
-              </a:spcAft>
-              <a:buSzPct val="100000"/>
-              <a:buChar char="•"/>
-            </a:pPr>
-            <a:r>
-              <a:rPr lang="en-US" sz="1250" b="1" dirty="0">
-                <a:solidFill>
-                  <a:srgbClr val="1B2A38"/>
-                </a:solidFill>
-                <a:latin typeface="Calibri" pitchFamily="34" charset="0"/>
-                <a:ea typeface="Calibri" pitchFamily="34" charset="-122"/>
-                <a:cs typeface="Calibri" pitchFamily="34" charset="-120"/>
-              </a:rPr>
-              <a:t>Reactive: mature cells, toxic change, a clinical trigger (infection, stress, steroids).</a:t>
-            </a:r>
-            <a:endParaRPr lang="en-US" sz="1250" dirty="0"/>
-          </a:p>
-          <a:p>
-            <a:pPr algn="l" marL="177800" indent="-177800">
-              <a:spcAft>
-                <a:spcPts val="900"/>
-              </a:spcAft>
-              <a:buSzPct val="100000"/>
-              <a:buChar char="•"/>
-            </a:pPr>
-            <a:r>
-              <a:rPr lang="en-US" sz="1250" dirty="0">
-                <a:solidFill>
-                  <a:srgbClr val="33444F"/>
-                </a:solidFill>
-                <a:latin typeface="Calibri" pitchFamily="34" charset="0"/>
-                <a:ea typeface="Calibri" pitchFamily="34" charset="-122"/>
-                <a:cs typeface="Calibri" pitchFamily="34" charset="-120"/>
-              </a:rPr>
-              <a:t>Neoplastic: immature/abnormal cells, basophilia, persistence, associated cytopenias.</a:t>
-            </a:r>
-            <a:endParaRPr lang="en-US" sz="1250" dirty="0"/>
-          </a:p>
-          <a:p>
-            <a:pPr algn="l" marL="177800" indent="-177800">
-              <a:spcAft>
-                <a:spcPts val="900"/>
-              </a:spcAft>
-              <a:buSzPct val="100000"/>
-              <a:buChar char="•"/>
-            </a:pPr>
-            <a:r>
-              <a:rPr lang="en-US" sz="1250" dirty="0">
-                <a:solidFill>
-                  <a:srgbClr val="33444F"/>
-                </a:solidFill>
-                <a:latin typeface="Calibri" pitchFamily="34" charset="0"/>
-                <a:ea typeface="Calibri" pitchFamily="34" charset="-122"/>
-                <a:cs typeface="Calibri" pitchFamily="34" charset="-120"/>
-              </a:rPr>
-              <a:t>Read absolute counts and the smear, not just percentages.</a:t>
-            </a:r>
-            <a:endParaRPr lang="en-US" sz="1250" dirty="0"/>
-          </a:p>
-        </p:txBody>
-      </p:sp>
-      <p:sp>
-        <p:nvSpPr>
-          <p:cNvPr id="7" name="Shape 5"/>
-          <p:cNvSpPr/>
-          <p:nvPr/>
-        </p:nvSpPr>
-        <p:spPr>
-          <a:xfrm>
-            <a:off x="6278728" y="1517904"/>
-            <a:ext cx="5346040" cy="4114800"/>
-          </a:xfrm>
-          <a:prstGeom prst="roundRect">
-            <a:avLst>
-              <a:gd name="adj" fmla="val 2000"/>
-            </a:avLst>
-          </a:prstGeom>
-          <a:solidFill>
-            <a:srgbClr val="FBEAEC"/>
-          </a:solidFill>
-          <a:ln/>
-          <a:effectLst>
-            <a:outerShdw sx="100000" sy="100000" kx="0" ky="0" algn="bl" rotWithShape="0" blurRad="88900" dist="25400" dir="5400000">
-              <a:srgbClr val="22303C">
-                <a:alpha val="12000"/>
-              </a:srgbClr>
-            </a:outerShdw>
-          </a:effectLst>
-        </p:spPr>
-      </p:sp>
-      <p:sp>
-        <p:nvSpPr>
-          <p:cNvPr id="8" name="Text 6"/>
-          <p:cNvSpPr/>
-          <p:nvPr/>
-        </p:nvSpPr>
-        <p:spPr>
-          <a:xfrm>
-            <a:off x="6516472" y="1682496"/>
-            <a:ext cx="4888840" cy="274320"/>
-          </a:xfrm>
-          <a:prstGeom prst="rect">
-            <a:avLst/>
-          </a:prstGeom>
-          <a:noFill/>
-          <a:ln/>
-        </p:spPr>
-        <p:txBody>
-          <a:bodyPr wrap="square" lIns="0" tIns="0" rIns="0" bIns="0" rtlCol="0" anchor="ctr"/>
-          <a:lstStyle/>
-          <a:p>
-            <a:pPr indent="0" marL="0">
-              <a:buNone/>
-            </a:pPr>
-            <a:r>
-              <a:rPr lang="en-US" sz="1200" b="1" spc="100" kern="0" dirty="0">
-                <a:solidFill>
-                  <a:srgbClr val="8E1622"/>
-                </a:solidFill>
-                <a:latin typeface="Calibri" pitchFamily="34" charset="0"/>
-                <a:ea typeface="Calibri" pitchFamily="34" charset="-122"/>
-                <a:cs typeface="Calibri" pitchFamily="34" charset="-120"/>
-              </a:rPr>
-              <a:t>LEFT SHIFT VS BLASTS</a:t>
-            </a:r>
-            <a:endParaRPr lang="en-US" sz="1200" dirty="0"/>
-          </a:p>
-        </p:txBody>
-      </p:sp>
-      <p:sp>
-        <p:nvSpPr>
-          <p:cNvPr id="9" name="Text 7"/>
-          <p:cNvSpPr/>
-          <p:nvPr/>
-        </p:nvSpPr>
-        <p:spPr>
-          <a:xfrm>
-            <a:off x="6516472" y="2029968"/>
-            <a:ext cx="4870552" cy="3474720"/>
-          </a:xfrm>
-          <a:prstGeom prst="rect">
-            <a:avLst/>
-          </a:prstGeom>
-          <a:noFill/>
-          <a:ln/>
-        </p:spPr>
-        <p:txBody>
-          <a:bodyPr wrap="square" lIns="0" tIns="0" rIns="0" bIns="0" rtlCol="0" anchor="t"/>
-          <a:lstStyle/>
-          <a:p>
-            <a:pPr algn="l" marL="177800" indent="-177800">
-              <a:spcAft>
-                <a:spcPts val="900"/>
-              </a:spcAft>
-              <a:buSzPct val="100000"/>
-              <a:buChar char="•"/>
-            </a:pPr>
-            <a:r>
-              <a:rPr lang="en-US" sz="1250" b="1" dirty="0">
-                <a:solidFill>
-                  <a:srgbClr val="1B2A38"/>
-                </a:solidFill>
-                <a:latin typeface="Calibri" pitchFamily="34" charset="0"/>
-                <a:ea typeface="Calibri" pitchFamily="34" charset="-122"/>
-                <a:cs typeface="Calibri" pitchFamily="34" charset="-120"/>
-              </a:rPr>
-              <a:t>Left shift = bands and metamyelocytes — immature but maturing; usually reactive.</a:t>
-            </a:r>
-            <a:endParaRPr lang="en-US" sz="1250" dirty="0"/>
-          </a:p>
-          <a:p>
-            <a:pPr algn="l" marL="177800" indent="-177800">
-              <a:spcAft>
-                <a:spcPts val="900"/>
-              </a:spcAft>
-              <a:buSzPct val="100000"/>
-              <a:buChar char="•"/>
-            </a:pPr>
-            <a:r>
-              <a:rPr lang="en-US" sz="1250" dirty="0">
-                <a:solidFill>
-                  <a:srgbClr val="33444F"/>
-                </a:solidFill>
-                <a:latin typeface="Calibri" pitchFamily="34" charset="0"/>
-                <a:ea typeface="Calibri" pitchFamily="34" charset="-122"/>
-                <a:cs typeface="Calibri" pitchFamily="34" charset="-120"/>
-              </a:rPr>
-              <a:t>Blasts = earliest precursors; their presence in blood is abnormal.</a:t>
-            </a:r>
-            <a:endParaRPr lang="en-US" sz="1250" dirty="0"/>
-          </a:p>
-          <a:p>
-            <a:pPr algn="l" marL="177800" indent="-177800">
-              <a:spcAft>
-                <a:spcPts val="900"/>
-              </a:spcAft>
-              <a:buSzPct val="100000"/>
-              <a:buChar char="•"/>
-            </a:pPr>
-            <a:r>
-              <a:rPr lang="en-US" sz="1250" dirty="0">
-                <a:solidFill>
-                  <a:srgbClr val="33444F"/>
-                </a:solidFill>
-                <a:latin typeface="Calibri" pitchFamily="34" charset="0"/>
-                <a:ea typeface="Calibri" pitchFamily="34" charset="-122"/>
-                <a:cs typeface="Calibri" pitchFamily="34" charset="-120"/>
-              </a:rPr>
-              <a:t>Auer rods confirm myeloid lineage.</a:t>
-            </a:r>
-            <a:endParaRPr lang="en-US" sz="1250" dirty="0"/>
-          </a:p>
-        </p:txBody>
-      </p:sp>
-      <p:sp>
-        <p:nvSpPr>
-          <p:cNvPr id="10" name="Text 8"/>
+            <a:pPr algn="ctr" indent="0" marL="0">
+              <a:buNone/>
+            </a:pPr>
+            <a:r>
+              <a:rPr lang="en-US" sz="1150" i="1" dirty="0">
+                <a:solidFill>
+                  <a:srgbClr val="6B7B8A"/>
+                </a:solidFill>
+                <a:latin typeface="Calibri" pitchFamily="34" charset="0"/>
+                <a:ea typeface="Calibri" pitchFamily="34" charset="-122"/>
+                <a:cs typeface="Calibri" pitchFamily="34" charset="-120"/>
+              </a:rPr>
+              <a:t>Original schematic. Reactive left shift shows a maturation spectrum; blasts with a ‘leukemic hiatus’ raise concern for malignancy.</a:t>
+            </a:r>
+            <a:endParaRPr lang="en-US" sz="1150" dirty="0"/>
+          </a:p>
+        </p:txBody>
+      </p:sp>
+      <p:sp>
+        <p:nvSpPr>
+          <p:cNvPr id="7" name="Text 4"/>
           <p:cNvSpPr/>
           <p:nvPr/>
         </p:nvSpPr>
@@ -13787,7 +13802,7 @@
       </p:sp>
       <p:sp>
         <p:nvSpPr>
-          <p:cNvPr id="11" name="Text 9"/>
+          <p:cNvPr id="8" name="Text 5"/>
           <p:cNvSpPr/>
           <p:nvPr/>
         </p:nvSpPr>
@@ -13917,7 +13932,7 @@
                 <a:ea typeface="Calibri" pitchFamily="34" charset="-122"/>
                 <a:cs typeface="Calibri" pitchFamily="34" charset="-120"/>
               </a:rPr>
-              <a:t>HEMATOLOGY &amp; COAGULATION   ·   THE WHITE COUNT</a:t>
+              <a:t>HEMATOLOGY &amp; COAGULATION   ·   LEUKOCYTOSIS</a:t>
             </a:r>
             <a:endParaRPr lang="en-US" sz="1100" dirty="0"/>
           </a:p>
@@ -13956,1282 +13971,363 @@
                 <a:ea typeface="Calibri" pitchFamily="34" charset="-122"/>
                 <a:cs typeface="Calibri" pitchFamily="34" charset="-120"/>
               </a:rPr>
-              <a:t>The Differential by Cell Type</a:t>
+              <a:t>Reactive vs Neoplastic</a:t>
             </a:r>
             <a:endParaRPr lang="en-US" sz="3000" dirty="0"/>
           </a:p>
         </p:txBody>
       </p:sp>
-      <p:graphicFrame>
-        <p:nvGraphicFramePr>
-          <p:cNvPr id="8" name="Table 0"/>
-          <p:cNvGraphicFramePr>
-            <a:graphicFrameLocks noGrp="1"/>
-          </p:cNvGraphicFramePr>
-          <p:nvPr>
-            <p:extLst>
-              <p:ext uri="{D42A27DB-BD31-4B8C-83A1-F6EECF244321}">
-                <p14:modId xmlns:p14="http://schemas.microsoft.com/office/powerpoint/2010/main" val="1579011935"/>
-              </p:ext>
-            </p:extLst>
-          </p:nvPr>
-        </p:nvGraphicFramePr>
-        <p:xfrm>
-          <a:off x="566928" y="1463040"/>
-          <a:ext cx="11057839" cy="914400"/>
-        </p:xfrm>
-        <a:graphic>
-          <a:graphicData uri="http://schemas.openxmlformats.org/drawingml/2006/table">
-            <a:tbl>
-              <a:tblPr/>
-              <a:tblGrid>
-                <a:gridCol w="2377440"/>
-                <a:gridCol w="4338828"/>
-                <a:gridCol w="4338828"/>
-              </a:tblGrid>
-              <a:tr h="566928">
-                <a:tc>
-                  <a:txBody>
-                    <a:bodyPr/>
-                    <a:lstStyle/>
-                    <a:p>
-                      <a:pPr algn="ctr" indent="0" marL="0">
-                        <a:buNone/>
-                      </a:pPr>
-                      <a:r>
-                        <a:rPr lang="en-US" sz="1200" b="1" dirty="0">
-                          <a:solidFill>
-                            <a:srgbClr val="FFFFFF"/>
-                          </a:solidFill>
-                          <a:latin typeface="Calibri" pitchFamily="34" charset="0"/>
-                          <a:ea typeface="Calibri" pitchFamily="34" charset="-122"/>
-                          <a:cs typeface="Calibri" pitchFamily="34" charset="-120"/>
-                        </a:rPr>
-                        <a:t>Increased cell</a:t>
-                      </a:r>
-                      <a:endParaRPr lang="en-US" sz="1200" dirty="0">
-                        <a:latin typeface="Calibri" charset="0"/>
-                        <a:ea typeface="Calibri" charset="0"/>
-                        <a:cs typeface="Calibri" charset="0"/>
-                      </a:endParaRPr>
-                    </a:p>
-                  </a:txBody>
-                  <a:tcPr marL="91440" marR="91440" marT="45720" marB="45720" anchor="ctr">
-                    <a:lnL w="9525" cap="flat" cmpd="sng" algn="ctr">
-                      <a:solidFill>
-                        <a:srgbClr val="DCE4EC"/>
-                      </a:solidFill>
-                      <a:prstDash val="solid"/>
-                      <a:round/>
-                      <a:headEnd type="none" w="med" len="med"/>
-                      <a:tailEnd type="none" w="med" len="med"/>
-                    </a:lnL>
-                    <a:lnR w="9525" cap="flat" cmpd="sng" algn="ctr">
-                      <a:solidFill>
-                        <a:srgbClr val="DCE4EC"/>
-                      </a:solidFill>
-                      <a:prstDash val="solid"/>
-                      <a:round/>
-                      <a:headEnd type="none" w="med" len="med"/>
-                      <a:tailEnd type="none" w="med" len="med"/>
-                    </a:lnR>
-                    <a:lnT w="9525" cap="flat" cmpd="sng" algn="ctr">
-                      <a:solidFill>
-                        <a:srgbClr val="DCE4EC"/>
-                      </a:solidFill>
-                      <a:prstDash val="solid"/>
-                      <a:round/>
-                      <a:headEnd type="none" w="med" len="med"/>
-                      <a:tailEnd type="none" w="med" len="med"/>
-                    </a:lnT>
-                    <a:lnB w="9525" cap="flat" cmpd="sng" algn="ctr">
-                      <a:solidFill>
-                        <a:srgbClr val="DCE4EC"/>
-                      </a:solidFill>
-                      <a:prstDash val="solid"/>
-                      <a:round/>
-                      <a:headEnd type="none" w="med" len="med"/>
-                      <a:tailEnd type="none" w="med" len="med"/>
-                    </a:lnB>
-                    <a:solidFill>
-                      <a:srgbClr val="C62133"/>
-                    </a:solidFill>
-                  </a:tcPr>
-                </a:tc>
-                <a:tc>
-                  <a:txBody>
-                    <a:bodyPr/>
-                    <a:lstStyle/>
-                    <a:p>
-                      <a:pPr algn="ctr" indent="0" marL="0">
-                        <a:buNone/>
-                      </a:pPr>
-                      <a:r>
-                        <a:rPr lang="en-US" sz="1200" b="1" dirty="0">
-                          <a:solidFill>
-                            <a:srgbClr val="FFFFFF"/>
-                          </a:solidFill>
-                          <a:latin typeface="Calibri" pitchFamily="34" charset="0"/>
-                          <a:ea typeface="Calibri" pitchFamily="34" charset="-122"/>
-                          <a:cs typeface="Calibri" pitchFamily="34" charset="-120"/>
-                        </a:rPr>
-                        <a:t>Reactive causes</a:t>
-                      </a:r>
-                      <a:endParaRPr lang="en-US" sz="1200" dirty="0">
-                        <a:latin typeface="Calibri" charset="0"/>
-                        <a:ea typeface="Calibri" charset="0"/>
-                        <a:cs typeface="Calibri" charset="0"/>
-                      </a:endParaRPr>
-                    </a:p>
-                  </a:txBody>
-                  <a:tcPr marL="91440" marR="91440" marT="45720" marB="45720" anchor="ctr">
-                    <a:lnL w="9525" cap="flat" cmpd="sng" algn="ctr">
-                      <a:solidFill>
-                        <a:srgbClr val="DCE4EC"/>
-                      </a:solidFill>
-                      <a:prstDash val="solid"/>
-                      <a:round/>
-                      <a:headEnd type="none" w="med" len="med"/>
-                      <a:tailEnd type="none" w="med" len="med"/>
-                    </a:lnL>
-                    <a:lnR w="9525" cap="flat" cmpd="sng" algn="ctr">
-                      <a:solidFill>
-                        <a:srgbClr val="DCE4EC"/>
-                      </a:solidFill>
-                      <a:prstDash val="solid"/>
-                      <a:round/>
-                      <a:headEnd type="none" w="med" len="med"/>
-                      <a:tailEnd type="none" w="med" len="med"/>
-                    </a:lnR>
-                    <a:lnT w="9525" cap="flat" cmpd="sng" algn="ctr">
-                      <a:solidFill>
-                        <a:srgbClr val="DCE4EC"/>
-                      </a:solidFill>
-                      <a:prstDash val="solid"/>
-                      <a:round/>
-                      <a:headEnd type="none" w="med" len="med"/>
-                      <a:tailEnd type="none" w="med" len="med"/>
-                    </a:lnT>
-                    <a:lnB w="9525" cap="flat" cmpd="sng" algn="ctr">
-                      <a:solidFill>
-                        <a:srgbClr val="DCE4EC"/>
-                      </a:solidFill>
-                      <a:prstDash val="solid"/>
-                      <a:round/>
-                      <a:headEnd type="none" w="med" len="med"/>
-                      <a:tailEnd type="none" w="med" len="med"/>
-                    </a:lnB>
-                    <a:solidFill>
-                      <a:srgbClr val="C62133"/>
-                    </a:solidFill>
-                  </a:tcPr>
-                </a:tc>
-                <a:tc>
-                  <a:txBody>
-                    <a:bodyPr/>
-                    <a:lstStyle/>
-                    <a:p>
-                      <a:pPr algn="ctr" indent="0" marL="0">
-                        <a:buNone/>
-                      </a:pPr>
-                      <a:r>
-                        <a:rPr lang="en-US" sz="1200" b="1" dirty="0">
-                          <a:solidFill>
-                            <a:srgbClr val="FFFFFF"/>
-                          </a:solidFill>
-                          <a:latin typeface="Calibri" pitchFamily="34" charset="0"/>
-                          <a:ea typeface="Calibri" pitchFamily="34" charset="-122"/>
-                          <a:cs typeface="Calibri" pitchFamily="34" charset="-120"/>
-                        </a:rPr>
-                        <a:t>Neoplastic / other</a:t>
-                      </a:r>
-                      <a:endParaRPr lang="en-US" sz="1200" dirty="0">
-                        <a:latin typeface="Calibri" charset="0"/>
-                        <a:ea typeface="Calibri" charset="0"/>
-                        <a:cs typeface="Calibri" charset="0"/>
-                      </a:endParaRPr>
-                    </a:p>
-                  </a:txBody>
-                  <a:tcPr marL="91440" marR="91440" marT="45720" marB="45720" anchor="ctr">
-                    <a:lnL w="9525" cap="flat" cmpd="sng" algn="ctr">
-                      <a:solidFill>
-                        <a:srgbClr val="DCE4EC"/>
-                      </a:solidFill>
-                      <a:prstDash val="solid"/>
-                      <a:round/>
-                      <a:headEnd type="none" w="med" len="med"/>
-                      <a:tailEnd type="none" w="med" len="med"/>
-                    </a:lnL>
-                    <a:lnR w="9525" cap="flat" cmpd="sng" algn="ctr">
-                      <a:solidFill>
-                        <a:srgbClr val="DCE4EC"/>
-                      </a:solidFill>
-                      <a:prstDash val="solid"/>
-                      <a:round/>
-                      <a:headEnd type="none" w="med" len="med"/>
-                      <a:tailEnd type="none" w="med" len="med"/>
-                    </a:lnR>
-                    <a:lnT w="9525" cap="flat" cmpd="sng" algn="ctr">
-                      <a:solidFill>
-                        <a:srgbClr val="DCE4EC"/>
-                      </a:solidFill>
-                      <a:prstDash val="solid"/>
-                      <a:round/>
-                      <a:headEnd type="none" w="med" len="med"/>
-                      <a:tailEnd type="none" w="med" len="med"/>
-                    </a:lnT>
-                    <a:lnB w="9525" cap="flat" cmpd="sng" algn="ctr">
-                      <a:solidFill>
-                        <a:srgbClr val="DCE4EC"/>
-                      </a:solidFill>
-                      <a:prstDash val="solid"/>
-                      <a:round/>
-                      <a:headEnd type="none" w="med" len="med"/>
-                      <a:tailEnd type="none" w="med" len="med"/>
-                    </a:lnB>
-                    <a:solidFill>
-                      <a:srgbClr val="C62133"/>
-                    </a:solidFill>
-                  </a:tcPr>
-                </a:tc>
-              </a:tr>
-              <a:tr h="566928">
-                <a:tc>
-                  <a:txBody>
-                    <a:bodyPr/>
-                    <a:lstStyle/>
-                    <a:p>
-                      <a:pPr algn="l" indent="0" marL="0">
-                        <a:buNone/>
-                      </a:pPr>
-                      <a:r>
-                        <a:rPr lang="en-US" sz="1100" b="1" dirty="0">
-                          <a:solidFill>
-                            <a:srgbClr val="1B2A38"/>
-                          </a:solidFill>
-                          <a:latin typeface="Calibri" pitchFamily="34" charset="0"/>
-                          <a:ea typeface="Calibri" pitchFamily="34" charset="-122"/>
-                          <a:cs typeface="Calibri" pitchFamily="34" charset="-120"/>
-                        </a:rPr>
-                        <a:t>Neutrophilia</a:t>
-                      </a:r>
-                      <a:endParaRPr lang="en-US" sz="1100" dirty="0">
-                        <a:latin typeface="Calibri" charset="0"/>
-                        <a:ea typeface="Calibri" charset="0"/>
-                        <a:cs typeface="Calibri" charset="0"/>
-                      </a:endParaRPr>
-                    </a:p>
-                  </a:txBody>
-                  <a:tcPr marL="91440" marR="91440" marT="45720" marB="45720" anchor="ctr">
-                    <a:lnL w="9525" cap="flat" cmpd="sng" algn="ctr">
-                      <a:solidFill>
-                        <a:srgbClr val="DCE4EC"/>
-                      </a:solidFill>
-                      <a:prstDash val="solid"/>
-                      <a:round/>
-                      <a:headEnd type="none" w="med" len="med"/>
-                      <a:tailEnd type="none" w="med" len="med"/>
-                    </a:lnL>
-                    <a:lnR w="9525" cap="flat" cmpd="sng" algn="ctr">
-                      <a:solidFill>
-                        <a:srgbClr val="DCE4EC"/>
-                      </a:solidFill>
-                      <a:prstDash val="solid"/>
-                      <a:round/>
-                      <a:headEnd type="none" w="med" len="med"/>
-                      <a:tailEnd type="none" w="med" len="med"/>
-                    </a:lnR>
-                    <a:lnT w="9525" cap="flat" cmpd="sng" algn="ctr">
-                      <a:solidFill>
-                        <a:srgbClr val="DCE4EC"/>
-                      </a:solidFill>
-                      <a:prstDash val="solid"/>
-                      <a:round/>
-                      <a:headEnd type="none" w="med" len="med"/>
-                      <a:tailEnd type="none" w="med" len="med"/>
-                    </a:lnT>
-                    <a:lnB w="9525" cap="flat" cmpd="sng" algn="ctr">
-                      <a:solidFill>
-                        <a:srgbClr val="DCE4EC"/>
-                      </a:solidFill>
-                      <a:prstDash val="solid"/>
-                      <a:round/>
-                      <a:headEnd type="none" w="med" len="med"/>
-                      <a:tailEnd type="none" w="med" len="med"/>
-                    </a:lnB>
-                    <a:solidFill>
-                      <a:srgbClr val="F3F7FA"/>
-                    </a:solidFill>
-                  </a:tcPr>
-                </a:tc>
-                <a:tc>
-                  <a:txBody>
-                    <a:bodyPr/>
-                    <a:lstStyle/>
-                    <a:p>
-                      <a:pPr algn="ctr" indent="0" marL="0">
-                        <a:buNone/>
-                      </a:pPr>
-                      <a:r>
-                        <a:rPr lang="en-US" sz="1100" dirty="0">
-                          <a:solidFill>
-                            <a:srgbClr val="33444F"/>
-                          </a:solidFill>
-                          <a:latin typeface="Calibri" pitchFamily="34" charset="0"/>
-                          <a:ea typeface="Calibri" pitchFamily="34" charset="-122"/>
-                          <a:cs typeface="Calibri" pitchFamily="34" charset="-120"/>
-                        </a:rPr>
-                        <a:t>Infection, inflammation, steroids, stress</a:t>
-                      </a:r>
-                      <a:endParaRPr lang="en-US" sz="1100" dirty="0">
-                        <a:latin typeface="Calibri" charset="0"/>
-                        <a:ea typeface="Calibri" charset="0"/>
-                        <a:cs typeface="Calibri" charset="0"/>
-                      </a:endParaRPr>
-                    </a:p>
-                  </a:txBody>
-                  <a:tcPr marL="91440" marR="91440" marT="45720" marB="45720" anchor="ctr">
-                    <a:lnL w="9525" cap="flat" cmpd="sng" algn="ctr">
-                      <a:solidFill>
-                        <a:srgbClr val="DCE4EC"/>
-                      </a:solidFill>
-                      <a:prstDash val="solid"/>
-                      <a:round/>
-                      <a:headEnd type="none" w="med" len="med"/>
-                      <a:tailEnd type="none" w="med" len="med"/>
-                    </a:lnL>
-                    <a:lnR w="9525" cap="flat" cmpd="sng" algn="ctr">
-                      <a:solidFill>
-                        <a:srgbClr val="DCE4EC"/>
-                      </a:solidFill>
-                      <a:prstDash val="solid"/>
-                      <a:round/>
-                      <a:headEnd type="none" w="med" len="med"/>
-                      <a:tailEnd type="none" w="med" len="med"/>
-                    </a:lnR>
-                    <a:lnT w="9525" cap="flat" cmpd="sng" algn="ctr">
-                      <a:solidFill>
-                        <a:srgbClr val="DCE4EC"/>
-                      </a:solidFill>
-                      <a:prstDash val="solid"/>
-                      <a:round/>
-                      <a:headEnd type="none" w="med" len="med"/>
-                      <a:tailEnd type="none" w="med" len="med"/>
-                    </a:lnT>
-                    <a:lnB w="9525" cap="flat" cmpd="sng" algn="ctr">
-                      <a:solidFill>
-                        <a:srgbClr val="DCE4EC"/>
-                      </a:solidFill>
-                      <a:prstDash val="solid"/>
-                      <a:round/>
-                      <a:headEnd type="none" w="med" len="med"/>
-                      <a:tailEnd type="none" w="med" len="med"/>
-                    </a:lnB>
-                    <a:solidFill>
-                      <a:srgbClr val="F3F7FA"/>
-                    </a:solidFill>
-                  </a:tcPr>
-                </a:tc>
-                <a:tc>
-                  <a:txBody>
-                    <a:bodyPr/>
-                    <a:lstStyle/>
-                    <a:p>
-                      <a:pPr algn="ctr" indent="0" marL="0">
-                        <a:buNone/>
-                      </a:pPr>
-                      <a:r>
-                        <a:rPr lang="en-US" sz="1100" dirty="0">
-                          <a:solidFill>
-                            <a:srgbClr val="33444F"/>
-                          </a:solidFill>
-                          <a:latin typeface="Calibri" pitchFamily="34" charset="0"/>
-                          <a:ea typeface="Calibri" pitchFamily="34" charset="-122"/>
-                          <a:cs typeface="Calibri" pitchFamily="34" charset="-120"/>
-                        </a:rPr>
-                        <a:t>CML, other myeloproliferative neoplasms</a:t>
-                      </a:r>
-                      <a:endParaRPr lang="en-US" sz="1100" dirty="0">
-                        <a:latin typeface="Calibri" charset="0"/>
-                        <a:ea typeface="Calibri" charset="0"/>
-                        <a:cs typeface="Calibri" charset="0"/>
-                      </a:endParaRPr>
-                    </a:p>
-                  </a:txBody>
-                  <a:tcPr marL="91440" marR="91440" marT="45720" marB="45720" anchor="ctr">
-                    <a:lnL w="9525" cap="flat" cmpd="sng" algn="ctr">
-                      <a:solidFill>
-                        <a:srgbClr val="DCE4EC"/>
-                      </a:solidFill>
-                      <a:prstDash val="solid"/>
-                      <a:round/>
-                      <a:headEnd type="none" w="med" len="med"/>
-                      <a:tailEnd type="none" w="med" len="med"/>
-                    </a:lnL>
-                    <a:lnR w="9525" cap="flat" cmpd="sng" algn="ctr">
-                      <a:solidFill>
-                        <a:srgbClr val="DCE4EC"/>
-                      </a:solidFill>
-                      <a:prstDash val="solid"/>
-                      <a:round/>
-                      <a:headEnd type="none" w="med" len="med"/>
-                      <a:tailEnd type="none" w="med" len="med"/>
-                    </a:lnR>
-                    <a:lnT w="9525" cap="flat" cmpd="sng" algn="ctr">
-                      <a:solidFill>
-                        <a:srgbClr val="DCE4EC"/>
-                      </a:solidFill>
-                      <a:prstDash val="solid"/>
-                      <a:round/>
-                      <a:headEnd type="none" w="med" len="med"/>
-                      <a:tailEnd type="none" w="med" len="med"/>
-                    </a:lnT>
-                    <a:lnB w="9525" cap="flat" cmpd="sng" algn="ctr">
-                      <a:solidFill>
-                        <a:srgbClr val="DCE4EC"/>
-                      </a:solidFill>
-                      <a:prstDash val="solid"/>
-                      <a:round/>
-                      <a:headEnd type="none" w="med" len="med"/>
-                      <a:tailEnd type="none" w="med" len="med"/>
-                    </a:lnB>
-                    <a:solidFill>
-                      <a:srgbClr val="F3F7FA"/>
-                    </a:solidFill>
-                  </a:tcPr>
-                </a:tc>
-              </a:tr>
-              <a:tr h="566928">
-                <a:tc>
-                  <a:txBody>
-                    <a:bodyPr/>
-                    <a:lstStyle/>
-                    <a:p>
-                      <a:pPr algn="l" indent="0" marL="0">
-                        <a:buNone/>
-                      </a:pPr>
-                      <a:r>
-                        <a:rPr lang="en-US" sz="1100" b="1" dirty="0">
-                          <a:solidFill>
-                            <a:srgbClr val="1B2A38"/>
-                          </a:solidFill>
-                          <a:latin typeface="Calibri" pitchFamily="34" charset="0"/>
-                          <a:ea typeface="Calibri" pitchFamily="34" charset="-122"/>
-                          <a:cs typeface="Calibri" pitchFamily="34" charset="-120"/>
-                        </a:rPr>
-                        <a:t>Lymphocytosis</a:t>
-                      </a:r>
-                      <a:endParaRPr lang="en-US" sz="1100" dirty="0">
-                        <a:latin typeface="Calibri" charset="0"/>
-                        <a:ea typeface="Calibri" charset="0"/>
-                        <a:cs typeface="Calibri" charset="0"/>
-                      </a:endParaRPr>
-                    </a:p>
-                  </a:txBody>
-                  <a:tcPr marL="91440" marR="91440" marT="45720" marB="45720" anchor="ctr">
-                    <a:lnL w="9525" cap="flat" cmpd="sng" algn="ctr">
-                      <a:solidFill>
-                        <a:srgbClr val="DCE4EC"/>
-                      </a:solidFill>
-                      <a:prstDash val="solid"/>
-                      <a:round/>
-                      <a:headEnd type="none" w="med" len="med"/>
-                      <a:tailEnd type="none" w="med" len="med"/>
-                    </a:lnL>
-                    <a:lnR w="9525" cap="flat" cmpd="sng" algn="ctr">
-                      <a:solidFill>
-                        <a:srgbClr val="DCE4EC"/>
-                      </a:solidFill>
-                      <a:prstDash val="solid"/>
-                      <a:round/>
-                      <a:headEnd type="none" w="med" len="med"/>
-                      <a:tailEnd type="none" w="med" len="med"/>
-                    </a:lnR>
-                    <a:lnT w="9525" cap="flat" cmpd="sng" algn="ctr">
-                      <a:solidFill>
-                        <a:srgbClr val="DCE4EC"/>
-                      </a:solidFill>
-                      <a:prstDash val="solid"/>
-                      <a:round/>
-                      <a:headEnd type="none" w="med" len="med"/>
-                      <a:tailEnd type="none" w="med" len="med"/>
-                    </a:lnT>
-                    <a:lnB w="9525" cap="flat" cmpd="sng" algn="ctr">
-                      <a:solidFill>
-                        <a:srgbClr val="DCE4EC"/>
-                      </a:solidFill>
-                      <a:prstDash val="solid"/>
-                      <a:round/>
-                      <a:headEnd type="none" w="med" len="med"/>
-                      <a:tailEnd type="none" w="med" len="med"/>
-                    </a:lnB>
-                    <a:solidFill>
-                      <a:srgbClr val="FFFFFF"/>
-                    </a:solidFill>
-                  </a:tcPr>
-                </a:tc>
-                <a:tc>
-                  <a:txBody>
-                    <a:bodyPr/>
-                    <a:lstStyle/>
-                    <a:p>
-                      <a:pPr algn="ctr" indent="0" marL="0">
-                        <a:buNone/>
-                      </a:pPr>
-                      <a:r>
-                        <a:rPr lang="en-US" sz="1100" dirty="0">
-                          <a:solidFill>
-                            <a:srgbClr val="33444F"/>
-                          </a:solidFill>
-                          <a:latin typeface="Calibri" pitchFamily="34" charset="0"/>
-                          <a:ea typeface="Calibri" pitchFamily="34" charset="-122"/>
-                          <a:cs typeface="Calibri" pitchFamily="34" charset="-120"/>
-                        </a:rPr>
-                        <a:t>Viral infection, pertussis</a:t>
-                      </a:r>
-                      <a:endParaRPr lang="en-US" sz="1100" dirty="0">
-                        <a:latin typeface="Calibri" charset="0"/>
-                        <a:ea typeface="Calibri" charset="0"/>
-                        <a:cs typeface="Calibri" charset="0"/>
-                      </a:endParaRPr>
-                    </a:p>
-                  </a:txBody>
-                  <a:tcPr marL="91440" marR="91440" marT="45720" marB="45720" anchor="ctr">
-                    <a:lnL w="9525" cap="flat" cmpd="sng" algn="ctr">
-                      <a:solidFill>
-                        <a:srgbClr val="DCE4EC"/>
-                      </a:solidFill>
-                      <a:prstDash val="solid"/>
-                      <a:round/>
-                      <a:headEnd type="none" w="med" len="med"/>
-                      <a:tailEnd type="none" w="med" len="med"/>
-                    </a:lnL>
-                    <a:lnR w="9525" cap="flat" cmpd="sng" algn="ctr">
-                      <a:solidFill>
-                        <a:srgbClr val="DCE4EC"/>
-                      </a:solidFill>
-                      <a:prstDash val="solid"/>
-                      <a:round/>
-                      <a:headEnd type="none" w="med" len="med"/>
-                      <a:tailEnd type="none" w="med" len="med"/>
-                    </a:lnR>
-                    <a:lnT w="9525" cap="flat" cmpd="sng" algn="ctr">
-                      <a:solidFill>
-                        <a:srgbClr val="DCE4EC"/>
-                      </a:solidFill>
-                      <a:prstDash val="solid"/>
-                      <a:round/>
-                      <a:headEnd type="none" w="med" len="med"/>
-                      <a:tailEnd type="none" w="med" len="med"/>
-                    </a:lnT>
-                    <a:lnB w="9525" cap="flat" cmpd="sng" algn="ctr">
-                      <a:solidFill>
-                        <a:srgbClr val="DCE4EC"/>
-                      </a:solidFill>
-                      <a:prstDash val="solid"/>
-                      <a:round/>
-                      <a:headEnd type="none" w="med" len="med"/>
-                      <a:tailEnd type="none" w="med" len="med"/>
-                    </a:lnB>
-                    <a:solidFill>
-                      <a:srgbClr val="FFFFFF"/>
-                    </a:solidFill>
-                  </a:tcPr>
-                </a:tc>
-                <a:tc>
-                  <a:txBody>
-                    <a:bodyPr/>
-                    <a:lstStyle/>
-                    <a:p>
-                      <a:pPr algn="ctr" indent="0" marL="0">
-                        <a:buNone/>
-                      </a:pPr>
-                      <a:r>
-                        <a:rPr lang="en-US" sz="1100" dirty="0">
-                          <a:solidFill>
-                            <a:srgbClr val="33444F"/>
-                          </a:solidFill>
-                          <a:latin typeface="Calibri" pitchFamily="34" charset="0"/>
-                          <a:ea typeface="Calibri" pitchFamily="34" charset="-122"/>
-                          <a:cs typeface="Calibri" pitchFamily="34" charset="-120"/>
-                        </a:rPr>
-                        <a:t>CLL, lymphoma in leukemic phase</a:t>
-                      </a:r>
-                      <a:endParaRPr lang="en-US" sz="1100" dirty="0">
-                        <a:latin typeface="Calibri" charset="0"/>
-                        <a:ea typeface="Calibri" charset="0"/>
-                        <a:cs typeface="Calibri" charset="0"/>
-                      </a:endParaRPr>
-                    </a:p>
-                  </a:txBody>
-                  <a:tcPr marL="91440" marR="91440" marT="45720" marB="45720" anchor="ctr">
-                    <a:lnL w="9525" cap="flat" cmpd="sng" algn="ctr">
-                      <a:solidFill>
-                        <a:srgbClr val="DCE4EC"/>
-                      </a:solidFill>
-                      <a:prstDash val="solid"/>
-                      <a:round/>
-                      <a:headEnd type="none" w="med" len="med"/>
-                      <a:tailEnd type="none" w="med" len="med"/>
-                    </a:lnL>
-                    <a:lnR w="9525" cap="flat" cmpd="sng" algn="ctr">
-                      <a:solidFill>
-                        <a:srgbClr val="DCE4EC"/>
-                      </a:solidFill>
-                      <a:prstDash val="solid"/>
-                      <a:round/>
-                      <a:headEnd type="none" w="med" len="med"/>
-                      <a:tailEnd type="none" w="med" len="med"/>
-                    </a:lnR>
-                    <a:lnT w="9525" cap="flat" cmpd="sng" algn="ctr">
-                      <a:solidFill>
-                        <a:srgbClr val="DCE4EC"/>
-                      </a:solidFill>
-                      <a:prstDash val="solid"/>
-                      <a:round/>
-                      <a:headEnd type="none" w="med" len="med"/>
-                      <a:tailEnd type="none" w="med" len="med"/>
-                    </a:lnT>
-                    <a:lnB w="9525" cap="flat" cmpd="sng" algn="ctr">
-                      <a:solidFill>
-                        <a:srgbClr val="DCE4EC"/>
-                      </a:solidFill>
-                      <a:prstDash val="solid"/>
-                      <a:round/>
-                      <a:headEnd type="none" w="med" len="med"/>
-                      <a:tailEnd type="none" w="med" len="med"/>
-                    </a:lnB>
-                    <a:solidFill>
-                      <a:srgbClr val="FFFFFF"/>
-                    </a:solidFill>
-                  </a:tcPr>
-                </a:tc>
-              </a:tr>
-              <a:tr h="566928">
-                <a:tc>
-                  <a:txBody>
-                    <a:bodyPr/>
-                    <a:lstStyle/>
-                    <a:p>
-                      <a:pPr algn="l" indent="0" marL="0">
-                        <a:buNone/>
-                      </a:pPr>
-                      <a:r>
-                        <a:rPr lang="en-US" sz="1100" b="1" dirty="0">
-                          <a:solidFill>
-                            <a:srgbClr val="1B2A38"/>
-                          </a:solidFill>
-                          <a:latin typeface="Calibri" pitchFamily="34" charset="0"/>
-                          <a:ea typeface="Calibri" pitchFamily="34" charset="-122"/>
-                          <a:cs typeface="Calibri" pitchFamily="34" charset="-120"/>
-                        </a:rPr>
-                        <a:t>Eosinophilia</a:t>
-                      </a:r>
-                      <a:endParaRPr lang="en-US" sz="1100" dirty="0">
-                        <a:latin typeface="Calibri" charset="0"/>
-                        <a:ea typeface="Calibri" charset="0"/>
-                        <a:cs typeface="Calibri" charset="0"/>
-                      </a:endParaRPr>
-                    </a:p>
-                  </a:txBody>
-                  <a:tcPr marL="91440" marR="91440" marT="45720" marB="45720" anchor="ctr">
-                    <a:lnL w="9525" cap="flat" cmpd="sng" algn="ctr">
-                      <a:solidFill>
-                        <a:srgbClr val="DCE4EC"/>
-                      </a:solidFill>
-                      <a:prstDash val="solid"/>
-                      <a:round/>
-                      <a:headEnd type="none" w="med" len="med"/>
-                      <a:tailEnd type="none" w="med" len="med"/>
-                    </a:lnL>
-                    <a:lnR w="9525" cap="flat" cmpd="sng" algn="ctr">
-                      <a:solidFill>
-                        <a:srgbClr val="DCE4EC"/>
-                      </a:solidFill>
-                      <a:prstDash val="solid"/>
-                      <a:round/>
-                      <a:headEnd type="none" w="med" len="med"/>
-                      <a:tailEnd type="none" w="med" len="med"/>
-                    </a:lnR>
-                    <a:lnT w="9525" cap="flat" cmpd="sng" algn="ctr">
-                      <a:solidFill>
-                        <a:srgbClr val="DCE4EC"/>
-                      </a:solidFill>
-                      <a:prstDash val="solid"/>
-                      <a:round/>
-                      <a:headEnd type="none" w="med" len="med"/>
-                      <a:tailEnd type="none" w="med" len="med"/>
-                    </a:lnT>
-                    <a:lnB w="9525" cap="flat" cmpd="sng" algn="ctr">
-                      <a:solidFill>
-                        <a:srgbClr val="DCE4EC"/>
-                      </a:solidFill>
-                      <a:prstDash val="solid"/>
-                      <a:round/>
-                      <a:headEnd type="none" w="med" len="med"/>
-                      <a:tailEnd type="none" w="med" len="med"/>
-                    </a:lnB>
-                    <a:solidFill>
-                      <a:srgbClr val="F3F7FA"/>
-                    </a:solidFill>
-                  </a:tcPr>
-                </a:tc>
-                <a:tc>
-                  <a:txBody>
-                    <a:bodyPr/>
-                    <a:lstStyle/>
-                    <a:p>
-                      <a:pPr algn="ctr" indent="0" marL="0">
-                        <a:buNone/>
-                      </a:pPr>
-                      <a:r>
-                        <a:rPr lang="en-US" sz="1100" dirty="0">
-                          <a:solidFill>
-                            <a:srgbClr val="33444F"/>
-                          </a:solidFill>
-                          <a:latin typeface="Calibri" pitchFamily="34" charset="0"/>
-                          <a:ea typeface="Calibri" pitchFamily="34" charset="-122"/>
-                          <a:cs typeface="Calibri" pitchFamily="34" charset="-120"/>
-                        </a:rPr>
-                        <a:t>Allergy, parasites, drugs</a:t>
-                      </a:r>
-                      <a:endParaRPr lang="en-US" sz="1100" dirty="0">
-                        <a:latin typeface="Calibri" charset="0"/>
-                        <a:ea typeface="Calibri" charset="0"/>
-                        <a:cs typeface="Calibri" charset="0"/>
-                      </a:endParaRPr>
-                    </a:p>
-                  </a:txBody>
-                  <a:tcPr marL="91440" marR="91440" marT="45720" marB="45720" anchor="ctr">
-                    <a:lnL w="9525" cap="flat" cmpd="sng" algn="ctr">
-                      <a:solidFill>
-                        <a:srgbClr val="DCE4EC"/>
-                      </a:solidFill>
-                      <a:prstDash val="solid"/>
-                      <a:round/>
-                      <a:headEnd type="none" w="med" len="med"/>
-                      <a:tailEnd type="none" w="med" len="med"/>
-                    </a:lnL>
-                    <a:lnR w="9525" cap="flat" cmpd="sng" algn="ctr">
-                      <a:solidFill>
-                        <a:srgbClr val="DCE4EC"/>
-                      </a:solidFill>
-                      <a:prstDash val="solid"/>
-                      <a:round/>
-                      <a:headEnd type="none" w="med" len="med"/>
-                      <a:tailEnd type="none" w="med" len="med"/>
-                    </a:lnR>
-                    <a:lnT w="9525" cap="flat" cmpd="sng" algn="ctr">
-                      <a:solidFill>
-                        <a:srgbClr val="DCE4EC"/>
-                      </a:solidFill>
-                      <a:prstDash val="solid"/>
-                      <a:round/>
-                      <a:headEnd type="none" w="med" len="med"/>
-                      <a:tailEnd type="none" w="med" len="med"/>
-                    </a:lnT>
-                    <a:lnB w="9525" cap="flat" cmpd="sng" algn="ctr">
-                      <a:solidFill>
-                        <a:srgbClr val="DCE4EC"/>
-                      </a:solidFill>
-                      <a:prstDash val="solid"/>
-                      <a:round/>
-                      <a:headEnd type="none" w="med" len="med"/>
-                      <a:tailEnd type="none" w="med" len="med"/>
-                    </a:lnB>
-                    <a:solidFill>
-                      <a:srgbClr val="F3F7FA"/>
-                    </a:solidFill>
-                  </a:tcPr>
-                </a:tc>
-                <a:tc>
-                  <a:txBody>
-                    <a:bodyPr/>
-                    <a:lstStyle/>
-                    <a:p>
-                      <a:pPr algn="ctr" indent="0" marL="0">
-                        <a:buNone/>
-                      </a:pPr>
-                      <a:r>
-                        <a:rPr lang="en-US" sz="1100" dirty="0">
-                          <a:solidFill>
-                            <a:srgbClr val="33444F"/>
-                          </a:solidFill>
-                          <a:latin typeface="Calibri" pitchFamily="34" charset="0"/>
-                          <a:ea typeface="Calibri" pitchFamily="34" charset="-122"/>
-                          <a:cs typeface="Calibri" pitchFamily="34" charset="-120"/>
-                        </a:rPr>
-                        <a:t>Clonal eosinophilia, Hodgkin</a:t>
-                      </a:r>
-                      <a:endParaRPr lang="en-US" sz="1100" dirty="0">
-                        <a:latin typeface="Calibri" charset="0"/>
-                        <a:ea typeface="Calibri" charset="0"/>
-                        <a:cs typeface="Calibri" charset="0"/>
-                      </a:endParaRPr>
-                    </a:p>
-                  </a:txBody>
-                  <a:tcPr marL="91440" marR="91440" marT="45720" marB="45720" anchor="ctr">
-                    <a:lnL w="9525" cap="flat" cmpd="sng" algn="ctr">
-                      <a:solidFill>
-                        <a:srgbClr val="DCE4EC"/>
-                      </a:solidFill>
-                      <a:prstDash val="solid"/>
-                      <a:round/>
-                      <a:headEnd type="none" w="med" len="med"/>
-                      <a:tailEnd type="none" w="med" len="med"/>
-                    </a:lnL>
-                    <a:lnR w="9525" cap="flat" cmpd="sng" algn="ctr">
-                      <a:solidFill>
-                        <a:srgbClr val="DCE4EC"/>
-                      </a:solidFill>
-                      <a:prstDash val="solid"/>
-                      <a:round/>
-                      <a:headEnd type="none" w="med" len="med"/>
-                      <a:tailEnd type="none" w="med" len="med"/>
-                    </a:lnR>
-                    <a:lnT w="9525" cap="flat" cmpd="sng" algn="ctr">
-                      <a:solidFill>
-                        <a:srgbClr val="DCE4EC"/>
-                      </a:solidFill>
-                      <a:prstDash val="solid"/>
-                      <a:round/>
-                      <a:headEnd type="none" w="med" len="med"/>
-                      <a:tailEnd type="none" w="med" len="med"/>
-                    </a:lnT>
-                    <a:lnB w="9525" cap="flat" cmpd="sng" algn="ctr">
-                      <a:solidFill>
-                        <a:srgbClr val="DCE4EC"/>
-                      </a:solidFill>
-                      <a:prstDash val="solid"/>
-                      <a:round/>
-                      <a:headEnd type="none" w="med" len="med"/>
-                      <a:tailEnd type="none" w="med" len="med"/>
-                    </a:lnB>
-                    <a:solidFill>
-                      <a:srgbClr val="F3F7FA"/>
-                    </a:solidFill>
-                  </a:tcPr>
-                </a:tc>
-              </a:tr>
-              <a:tr h="566928">
-                <a:tc>
-                  <a:txBody>
-                    <a:bodyPr/>
-                    <a:lstStyle/>
-                    <a:p>
-                      <a:pPr algn="l" indent="0" marL="0">
-                        <a:buNone/>
-                      </a:pPr>
-                      <a:r>
-                        <a:rPr lang="en-US" sz="1100" b="1" dirty="0">
-                          <a:solidFill>
-                            <a:srgbClr val="1B2A38"/>
-                          </a:solidFill>
-                          <a:latin typeface="Calibri" pitchFamily="34" charset="0"/>
-                          <a:ea typeface="Calibri" pitchFamily="34" charset="-122"/>
-                          <a:cs typeface="Calibri" pitchFamily="34" charset="-120"/>
-                        </a:rPr>
-                        <a:t>Monocytosis</a:t>
-                      </a:r>
-                      <a:endParaRPr lang="en-US" sz="1100" dirty="0">
-                        <a:latin typeface="Calibri" charset="0"/>
-                        <a:ea typeface="Calibri" charset="0"/>
-                        <a:cs typeface="Calibri" charset="0"/>
-                      </a:endParaRPr>
-                    </a:p>
-                  </a:txBody>
-                  <a:tcPr marL="91440" marR="91440" marT="45720" marB="45720" anchor="ctr">
-                    <a:lnL w="9525" cap="flat" cmpd="sng" algn="ctr">
-                      <a:solidFill>
-                        <a:srgbClr val="DCE4EC"/>
-                      </a:solidFill>
-                      <a:prstDash val="solid"/>
-                      <a:round/>
-                      <a:headEnd type="none" w="med" len="med"/>
-                      <a:tailEnd type="none" w="med" len="med"/>
-                    </a:lnL>
-                    <a:lnR w="9525" cap="flat" cmpd="sng" algn="ctr">
-                      <a:solidFill>
-                        <a:srgbClr val="DCE4EC"/>
-                      </a:solidFill>
-                      <a:prstDash val="solid"/>
-                      <a:round/>
-                      <a:headEnd type="none" w="med" len="med"/>
-                      <a:tailEnd type="none" w="med" len="med"/>
-                    </a:lnR>
-                    <a:lnT w="9525" cap="flat" cmpd="sng" algn="ctr">
-                      <a:solidFill>
-                        <a:srgbClr val="DCE4EC"/>
-                      </a:solidFill>
-                      <a:prstDash val="solid"/>
-                      <a:round/>
-                      <a:headEnd type="none" w="med" len="med"/>
-                      <a:tailEnd type="none" w="med" len="med"/>
-                    </a:lnT>
-                    <a:lnB w="9525" cap="flat" cmpd="sng" algn="ctr">
-                      <a:solidFill>
-                        <a:srgbClr val="DCE4EC"/>
-                      </a:solidFill>
-                      <a:prstDash val="solid"/>
-                      <a:round/>
-                      <a:headEnd type="none" w="med" len="med"/>
-                      <a:tailEnd type="none" w="med" len="med"/>
-                    </a:lnB>
-                    <a:solidFill>
-                      <a:srgbClr val="FFFFFF"/>
-                    </a:solidFill>
-                  </a:tcPr>
-                </a:tc>
-                <a:tc>
-                  <a:txBody>
-                    <a:bodyPr/>
-                    <a:lstStyle/>
-                    <a:p>
-                      <a:pPr algn="ctr" indent="0" marL="0">
-                        <a:buNone/>
-                      </a:pPr>
-                      <a:r>
-                        <a:rPr lang="en-US" sz="1100" dirty="0">
-                          <a:solidFill>
-                            <a:srgbClr val="33444F"/>
-                          </a:solidFill>
-                          <a:latin typeface="Calibri" pitchFamily="34" charset="0"/>
-                          <a:ea typeface="Calibri" pitchFamily="34" charset="-122"/>
-                          <a:cs typeface="Calibri" pitchFamily="34" charset="-120"/>
-                        </a:rPr>
-                        <a:t>Recovery, chronic inflammation</a:t>
-                      </a:r>
-                      <a:endParaRPr lang="en-US" sz="1100" dirty="0">
-                        <a:latin typeface="Calibri" charset="0"/>
-                        <a:ea typeface="Calibri" charset="0"/>
-                        <a:cs typeface="Calibri" charset="0"/>
-                      </a:endParaRPr>
-                    </a:p>
-                  </a:txBody>
-                  <a:tcPr marL="91440" marR="91440" marT="45720" marB="45720" anchor="ctr">
-                    <a:lnL w="9525" cap="flat" cmpd="sng" algn="ctr">
-                      <a:solidFill>
-                        <a:srgbClr val="DCE4EC"/>
-                      </a:solidFill>
-                      <a:prstDash val="solid"/>
-                      <a:round/>
-                      <a:headEnd type="none" w="med" len="med"/>
-                      <a:tailEnd type="none" w="med" len="med"/>
-                    </a:lnL>
-                    <a:lnR w="9525" cap="flat" cmpd="sng" algn="ctr">
-                      <a:solidFill>
-                        <a:srgbClr val="DCE4EC"/>
-                      </a:solidFill>
-                      <a:prstDash val="solid"/>
-                      <a:round/>
-                      <a:headEnd type="none" w="med" len="med"/>
-                      <a:tailEnd type="none" w="med" len="med"/>
-                    </a:lnR>
-                    <a:lnT w="9525" cap="flat" cmpd="sng" algn="ctr">
-                      <a:solidFill>
-                        <a:srgbClr val="DCE4EC"/>
-                      </a:solidFill>
-                      <a:prstDash val="solid"/>
-                      <a:round/>
-                      <a:headEnd type="none" w="med" len="med"/>
-                      <a:tailEnd type="none" w="med" len="med"/>
-                    </a:lnT>
-                    <a:lnB w="9525" cap="flat" cmpd="sng" algn="ctr">
-                      <a:solidFill>
-                        <a:srgbClr val="DCE4EC"/>
-                      </a:solidFill>
-                      <a:prstDash val="solid"/>
-                      <a:round/>
-                      <a:headEnd type="none" w="med" len="med"/>
-                      <a:tailEnd type="none" w="med" len="med"/>
-                    </a:lnB>
-                    <a:solidFill>
-                      <a:srgbClr val="FFFFFF"/>
-                    </a:solidFill>
-                  </a:tcPr>
-                </a:tc>
-                <a:tc>
-                  <a:txBody>
-                    <a:bodyPr/>
-                    <a:lstStyle/>
-                    <a:p>
-                      <a:pPr algn="ctr" indent="0" marL="0">
-                        <a:buNone/>
-                      </a:pPr>
-                      <a:r>
-                        <a:rPr lang="en-US" sz="1100" dirty="0">
-                          <a:solidFill>
-                            <a:srgbClr val="33444F"/>
-                          </a:solidFill>
-                          <a:latin typeface="Calibri" pitchFamily="34" charset="0"/>
-                          <a:ea typeface="Calibri" pitchFamily="34" charset="-122"/>
-                          <a:cs typeface="Calibri" pitchFamily="34" charset="-120"/>
-                        </a:rPr>
-                        <a:t>CMML, other myeloid neoplasms</a:t>
-                      </a:r>
-                      <a:endParaRPr lang="en-US" sz="1100" dirty="0">
-                        <a:latin typeface="Calibri" charset="0"/>
-                        <a:ea typeface="Calibri" charset="0"/>
-                        <a:cs typeface="Calibri" charset="0"/>
-                      </a:endParaRPr>
-                    </a:p>
-                  </a:txBody>
-                  <a:tcPr marL="91440" marR="91440" marT="45720" marB="45720" anchor="ctr">
-                    <a:lnL w="9525" cap="flat" cmpd="sng" algn="ctr">
-                      <a:solidFill>
-                        <a:srgbClr val="DCE4EC"/>
-                      </a:solidFill>
-                      <a:prstDash val="solid"/>
-                      <a:round/>
-                      <a:headEnd type="none" w="med" len="med"/>
-                      <a:tailEnd type="none" w="med" len="med"/>
-                    </a:lnL>
-                    <a:lnR w="9525" cap="flat" cmpd="sng" algn="ctr">
-                      <a:solidFill>
-                        <a:srgbClr val="DCE4EC"/>
-                      </a:solidFill>
-                      <a:prstDash val="solid"/>
-                      <a:round/>
-                      <a:headEnd type="none" w="med" len="med"/>
-                      <a:tailEnd type="none" w="med" len="med"/>
-                    </a:lnR>
-                    <a:lnT w="9525" cap="flat" cmpd="sng" algn="ctr">
-                      <a:solidFill>
-                        <a:srgbClr val="DCE4EC"/>
-                      </a:solidFill>
-                      <a:prstDash val="solid"/>
-                      <a:round/>
-                      <a:headEnd type="none" w="med" len="med"/>
-                      <a:tailEnd type="none" w="med" len="med"/>
-                    </a:lnT>
-                    <a:lnB w="9525" cap="flat" cmpd="sng" algn="ctr">
-                      <a:solidFill>
-                        <a:srgbClr val="DCE4EC"/>
-                      </a:solidFill>
-                      <a:prstDash val="solid"/>
-                      <a:round/>
-                      <a:headEnd type="none" w="med" len="med"/>
-                      <a:tailEnd type="none" w="med" len="med"/>
-                    </a:lnB>
-                    <a:solidFill>
-                      <a:srgbClr val="FFFFFF"/>
-                    </a:solidFill>
-                  </a:tcPr>
-                </a:tc>
-              </a:tr>
-              <a:tr h="566928">
-                <a:tc>
-                  <a:txBody>
-                    <a:bodyPr/>
-                    <a:lstStyle/>
-                    <a:p>
-                      <a:pPr algn="l" indent="0" marL="0">
-                        <a:buNone/>
-                      </a:pPr>
-                      <a:r>
-                        <a:rPr lang="en-US" sz="1100" b="1" dirty="0">
-                          <a:solidFill>
-                            <a:srgbClr val="1B2A38"/>
-                          </a:solidFill>
-                          <a:latin typeface="Calibri" pitchFamily="34" charset="0"/>
-                          <a:ea typeface="Calibri" pitchFamily="34" charset="-122"/>
-                          <a:cs typeface="Calibri" pitchFamily="34" charset="-120"/>
-                        </a:rPr>
-                        <a:t>Basophilia</a:t>
-                      </a:r>
-                      <a:endParaRPr lang="en-US" sz="1100" dirty="0">
-                        <a:latin typeface="Calibri" charset="0"/>
-                        <a:ea typeface="Calibri" charset="0"/>
-                        <a:cs typeface="Calibri" charset="0"/>
-                      </a:endParaRPr>
-                    </a:p>
-                  </a:txBody>
-                  <a:tcPr marL="91440" marR="91440" marT="45720" marB="45720" anchor="ctr">
-                    <a:lnL w="9525" cap="flat" cmpd="sng" algn="ctr">
-                      <a:solidFill>
-                        <a:srgbClr val="DCE4EC"/>
-                      </a:solidFill>
-                      <a:prstDash val="solid"/>
-                      <a:round/>
-                      <a:headEnd type="none" w="med" len="med"/>
-                      <a:tailEnd type="none" w="med" len="med"/>
-                    </a:lnL>
-                    <a:lnR w="9525" cap="flat" cmpd="sng" algn="ctr">
-                      <a:solidFill>
-                        <a:srgbClr val="DCE4EC"/>
-                      </a:solidFill>
-                      <a:prstDash val="solid"/>
-                      <a:round/>
-                      <a:headEnd type="none" w="med" len="med"/>
-                      <a:tailEnd type="none" w="med" len="med"/>
-                    </a:lnR>
-                    <a:lnT w="9525" cap="flat" cmpd="sng" algn="ctr">
-                      <a:solidFill>
-                        <a:srgbClr val="DCE4EC"/>
-                      </a:solidFill>
-                      <a:prstDash val="solid"/>
-                      <a:round/>
-                      <a:headEnd type="none" w="med" len="med"/>
-                      <a:tailEnd type="none" w="med" len="med"/>
-                    </a:lnT>
-                    <a:lnB w="9525" cap="flat" cmpd="sng" algn="ctr">
-                      <a:solidFill>
-                        <a:srgbClr val="DCE4EC"/>
-                      </a:solidFill>
-                      <a:prstDash val="solid"/>
-                      <a:round/>
-                      <a:headEnd type="none" w="med" len="med"/>
-                      <a:tailEnd type="none" w="med" len="med"/>
-                    </a:lnB>
-                    <a:solidFill>
-                      <a:srgbClr val="F3F7FA"/>
-                    </a:solidFill>
-                  </a:tcPr>
-                </a:tc>
-                <a:tc>
-                  <a:txBody>
-                    <a:bodyPr/>
-                    <a:lstStyle/>
-                    <a:p>
-                      <a:pPr algn="ctr" indent="0" marL="0">
-                        <a:buNone/>
-                      </a:pPr>
-                      <a:r>
-                        <a:rPr lang="en-US" sz="1100" dirty="0">
-                          <a:solidFill>
-                            <a:srgbClr val="33444F"/>
-                          </a:solidFill>
-                          <a:latin typeface="Calibri" pitchFamily="34" charset="0"/>
-                          <a:ea typeface="Calibri" pitchFamily="34" charset="-122"/>
-                          <a:cs typeface="Calibri" pitchFamily="34" charset="-120"/>
-                        </a:rPr>
-                        <a:t>Uncommon reactive</a:t>
-                      </a:r>
-                      <a:endParaRPr lang="en-US" sz="1100" dirty="0">
-                        <a:latin typeface="Calibri" charset="0"/>
-                        <a:ea typeface="Calibri" charset="0"/>
-                        <a:cs typeface="Calibri" charset="0"/>
-                      </a:endParaRPr>
-                    </a:p>
-                  </a:txBody>
-                  <a:tcPr marL="91440" marR="91440" marT="45720" marB="45720" anchor="ctr">
-                    <a:lnL w="9525" cap="flat" cmpd="sng" algn="ctr">
-                      <a:solidFill>
-                        <a:srgbClr val="DCE4EC"/>
-                      </a:solidFill>
-                      <a:prstDash val="solid"/>
-                      <a:round/>
-                      <a:headEnd type="none" w="med" len="med"/>
-                      <a:tailEnd type="none" w="med" len="med"/>
-                    </a:lnL>
-                    <a:lnR w="9525" cap="flat" cmpd="sng" algn="ctr">
-                      <a:solidFill>
-                        <a:srgbClr val="DCE4EC"/>
-                      </a:solidFill>
-                      <a:prstDash val="solid"/>
-                      <a:round/>
-                      <a:headEnd type="none" w="med" len="med"/>
-                      <a:tailEnd type="none" w="med" len="med"/>
-                    </a:lnR>
-                    <a:lnT w="9525" cap="flat" cmpd="sng" algn="ctr">
-                      <a:solidFill>
-                        <a:srgbClr val="DCE4EC"/>
-                      </a:solidFill>
-                      <a:prstDash val="solid"/>
-                      <a:round/>
-                      <a:headEnd type="none" w="med" len="med"/>
-                      <a:tailEnd type="none" w="med" len="med"/>
-                    </a:lnT>
-                    <a:lnB w="9525" cap="flat" cmpd="sng" algn="ctr">
-                      <a:solidFill>
-                        <a:srgbClr val="DCE4EC"/>
-                      </a:solidFill>
-                      <a:prstDash val="solid"/>
-                      <a:round/>
-                      <a:headEnd type="none" w="med" len="med"/>
-                      <a:tailEnd type="none" w="med" len="med"/>
-                    </a:lnB>
-                    <a:solidFill>
-                      <a:srgbClr val="F3F7FA"/>
-                    </a:solidFill>
-                  </a:tcPr>
-                </a:tc>
-                <a:tc>
-                  <a:txBody>
-                    <a:bodyPr/>
-                    <a:lstStyle/>
-                    <a:p>
-                      <a:pPr algn="ctr" indent="0" marL="0">
-                        <a:buNone/>
-                      </a:pPr>
-                      <a:r>
-                        <a:rPr lang="en-US" sz="1100" dirty="0">
-                          <a:solidFill>
-                            <a:srgbClr val="33444F"/>
-                          </a:solidFill>
-                          <a:latin typeface="Calibri" pitchFamily="34" charset="0"/>
-                          <a:ea typeface="Calibri" pitchFamily="34" charset="-122"/>
-                          <a:cs typeface="Calibri" pitchFamily="34" charset="-120"/>
-                        </a:rPr>
-                        <a:t>CML and other MPNs (a useful clue)</a:t>
-                      </a:r>
-                      <a:endParaRPr lang="en-US" sz="1100" dirty="0">
-                        <a:latin typeface="Calibri" charset="0"/>
-                        <a:ea typeface="Calibri" charset="0"/>
-                        <a:cs typeface="Calibri" charset="0"/>
-                      </a:endParaRPr>
-                    </a:p>
-                  </a:txBody>
-                  <a:tcPr marL="91440" marR="91440" marT="45720" marB="45720" anchor="ctr">
-                    <a:lnL w="9525" cap="flat" cmpd="sng" algn="ctr">
-                      <a:solidFill>
-                        <a:srgbClr val="DCE4EC"/>
-                      </a:solidFill>
-                      <a:prstDash val="solid"/>
-                      <a:round/>
-                      <a:headEnd type="none" w="med" len="med"/>
-                      <a:tailEnd type="none" w="med" len="med"/>
-                    </a:lnL>
-                    <a:lnR w="9525" cap="flat" cmpd="sng" algn="ctr">
-                      <a:solidFill>
-                        <a:srgbClr val="DCE4EC"/>
-                      </a:solidFill>
-                      <a:prstDash val="solid"/>
-                      <a:round/>
-                      <a:headEnd type="none" w="med" len="med"/>
-                      <a:tailEnd type="none" w="med" len="med"/>
-                    </a:lnR>
-                    <a:lnT w="9525" cap="flat" cmpd="sng" algn="ctr">
-                      <a:solidFill>
-                        <a:srgbClr val="DCE4EC"/>
-                      </a:solidFill>
-                      <a:prstDash val="solid"/>
-                      <a:round/>
-                      <a:headEnd type="none" w="med" len="med"/>
-                      <a:tailEnd type="none" w="med" len="med"/>
-                    </a:lnT>
-                    <a:lnB w="9525" cap="flat" cmpd="sng" algn="ctr">
-                      <a:solidFill>
-                        <a:srgbClr val="DCE4EC"/>
-                      </a:solidFill>
-                      <a:prstDash val="solid"/>
-                      <a:round/>
-                      <a:headEnd type="none" w="med" len="med"/>
-                      <a:tailEnd type="none" w="med" len="med"/>
-                    </a:lnB>
-                    <a:solidFill>
-                      <a:srgbClr val="F3F7FA"/>
-                    </a:solidFill>
-                  </a:tcPr>
-                </a:tc>
-              </a:tr>
-            </a:tbl>
-          </a:graphicData>
-        </a:graphic>
-      </p:graphicFrame>
-      <p:sp>
-        <p:nvSpPr>
-          <p:cNvPr id="5" name="Text 2"/>
+      <p:sp>
+        <p:nvSpPr>
+          <p:cNvPr id="4" name="Shape 2"/>
+          <p:cNvSpPr/>
+          <p:nvPr/>
+        </p:nvSpPr>
+        <p:spPr>
+          <a:xfrm>
+            <a:off x="566928" y="1517904"/>
+            <a:ext cx="5346040" cy="4114800"/>
+          </a:xfrm>
+          <a:prstGeom prst="roundRect">
+            <a:avLst>
+              <a:gd name="adj" fmla="val 2000"/>
+            </a:avLst>
+          </a:prstGeom>
+          <a:solidFill>
+            <a:srgbClr val="FBEAEC"/>
+          </a:solidFill>
+          <a:ln/>
+          <a:effectLst>
+            <a:outerShdw sx="100000" sy="100000" kx="0" ky="0" algn="bl" rotWithShape="0" blurRad="88900" dist="25400" dir="5400000">
+              <a:srgbClr val="22303C">
+                <a:alpha val="12000"/>
+              </a:srgbClr>
+            </a:outerShdw>
+          </a:effectLst>
+        </p:spPr>
+      </p:sp>
+      <p:sp>
+        <p:nvSpPr>
+          <p:cNvPr id="5" name="Text 3"/>
+          <p:cNvSpPr/>
+          <p:nvPr/>
+        </p:nvSpPr>
+        <p:spPr>
+          <a:xfrm>
+            <a:off x="804672" y="1682496"/>
+            <a:ext cx="4888840" cy="274320"/>
+          </a:xfrm>
+          <a:prstGeom prst="rect">
+            <a:avLst/>
+          </a:prstGeom>
+          <a:noFill/>
+          <a:ln/>
+        </p:spPr>
+        <p:txBody>
+          <a:bodyPr wrap="square" lIns="0" tIns="0" rIns="0" bIns="0" rtlCol="0" anchor="ctr"/>
+          <a:lstStyle/>
+          <a:p>
+            <a:pPr indent="0" marL="0">
+              <a:buNone/>
+            </a:pPr>
+            <a:r>
+              <a:rPr lang="en-US" sz="1200" b="1" spc="100" kern="0" dirty="0">
+                <a:solidFill>
+                  <a:srgbClr val="8E1622"/>
+                </a:solidFill>
+                <a:latin typeface="Calibri" pitchFamily="34" charset="0"/>
+                <a:ea typeface="Calibri" pitchFamily="34" charset="-122"/>
+                <a:cs typeface="Calibri" pitchFamily="34" charset="-120"/>
+              </a:rPr>
+              <a:t>REACTIVE PATTERNS</a:t>
+            </a:r>
+            <a:endParaRPr lang="en-US" sz="1200" dirty="0"/>
+          </a:p>
+        </p:txBody>
+      </p:sp>
+      <p:sp>
+        <p:nvSpPr>
+          <p:cNvPr id="6" name="Text 4"/>
+          <p:cNvSpPr/>
+          <p:nvPr/>
+        </p:nvSpPr>
+        <p:spPr>
+          <a:xfrm>
+            <a:off x="804672" y="2029968"/>
+            <a:ext cx="4870552" cy="3474720"/>
+          </a:xfrm>
+          <a:prstGeom prst="rect">
+            <a:avLst/>
+          </a:prstGeom>
+          <a:noFill/>
+          <a:ln/>
+        </p:spPr>
+        <p:txBody>
+          <a:bodyPr wrap="square" lIns="0" tIns="0" rIns="0" bIns="0" rtlCol="0" anchor="t"/>
+          <a:lstStyle/>
+          <a:p>
+            <a:pPr algn="l" marL="177800" indent="-177800">
+              <a:spcAft>
+                <a:spcPts val="900"/>
+              </a:spcAft>
+              <a:buSzPct val="100000"/>
+              <a:buChar char="•"/>
+            </a:pPr>
+            <a:r>
+              <a:rPr lang="en-US" sz="1250" b="1" dirty="0">
+                <a:solidFill>
+                  <a:srgbClr val="1B2A38"/>
+                </a:solidFill>
+                <a:latin typeface="Calibri" pitchFamily="34" charset="0"/>
+                <a:ea typeface="Calibri" pitchFamily="34" charset="-122"/>
+                <a:cs typeface="Calibri" pitchFamily="34" charset="-120"/>
+              </a:rPr>
+              <a:t>Neutrophilia with toxic granulation, Döhle bodies, and a full maturation spectrum suggests infection/inflammation.</a:t>
+            </a:r>
+            <a:endParaRPr lang="en-US" sz="1250" dirty="0"/>
+          </a:p>
+          <a:p>
+            <a:pPr algn="l" marL="177800" indent="-177800">
+              <a:spcAft>
+                <a:spcPts val="900"/>
+              </a:spcAft>
+              <a:buSzPct val="100000"/>
+              <a:buChar char="•"/>
+            </a:pPr>
+            <a:r>
+              <a:rPr lang="en-US" sz="1250" dirty="0">
+                <a:solidFill>
+                  <a:srgbClr val="33444F"/>
+                </a:solidFill>
+                <a:latin typeface="Calibri" pitchFamily="34" charset="0"/>
+                <a:ea typeface="Calibri" pitchFamily="34" charset="-122"/>
+                <a:cs typeface="Calibri" pitchFamily="34" charset="-120"/>
+              </a:rPr>
+              <a:t>Reactive lymphocytosis (e.g., viral) shows varied, atypical but mature cells.</a:t>
+            </a:r>
+            <a:endParaRPr lang="en-US" sz="1250" dirty="0"/>
+          </a:p>
+          <a:p>
+            <a:pPr algn="l" marL="177800" indent="-177800">
+              <a:spcAft>
+                <a:spcPts val="900"/>
+              </a:spcAft>
+              <a:buSzPct val="100000"/>
+              <a:buChar char="•"/>
+            </a:pPr>
+            <a:r>
+              <a:rPr lang="en-US" sz="1250" dirty="0">
+                <a:solidFill>
+                  <a:srgbClr val="33444F"/>
+                </a:solidFill>
+                <a:latin typeface="Calibri" pitchFamily="34" charset="0"/>
+                <a:ea typeface="Calibri" pitchFamily="34" charset="-122"/>
+                <a:cs typeface="Calibri" pitchFamily="34" charset="-120"/>
+              </a:rPr>
+              <a:t>Eosinophilia: allergy, parasites, drugs.</a:t>
+            </a:r>
+            <a:endParaRPr lang="en-US" sz="1250" dirty="0"/>
+          </a:p>
+          <a:p>
+            <a:pPr algn="l" marL="177800" indent="-177800">
+              <a:spcAft>
+                <a:spcPts val="900"/>
+              </a:spcAft>
+              <a:buSzPct val="100000"/>
+              <a:buChar char="•"/>
+            </a:pPr>
+            <a:r>
+              <a:rPr lang="en-US" sz="1250" dirty="0">
+                <a:solidFill>
+                  <a:srgbClr val="33444F"/>
+                </a:solidFill>
+                <a:latin typeface="Calibri" pitchFamily="34" charset="0"/>
+                <a:ea typeface="Calibri" pitchFamily="34" charset="-122"/>
+                <a:cs typeface="Calibri" pitchFamily="34" charset="-120"/>
+              </a:rPr>
+              <a:t>Leukemoid reaction is reactive, not leukemic.</a:t>
+            </a:r>
+            <a:endParaRPr lang="en-US" sz="1250" dirty="0"/>
+          </a:p>
+        </p:txBody>
+      </p:sp>
+      <p:sp>
+        <p:nvSpPr>
+          <p:cNvPr id="7" name="Shape 5"/>
+          <p:cNvSpPr/>
+          <p:nvPr/>
+        </p:nvSpPr>
+        <p:spPr>
+          <a:xfrm>
+            <a:off x="6278728" y="1517904"/>
+            <a:ext cx="5346040" cy="4114800"/>
+          </a:xfrm>
+          <a:prstGeom prst="roundRect">
+            <a:avLst>
+              <a:gd name="adj" fmla="val 2000"/>
+            </a:avLst>
+          </a:prstGeom>
+          <a:solidFill>
+            <a:srgbClr val="FBE7E9"/>
+          </a:solidFill>
+          <a:ln/>
+          <a:effectLst>
+            <a:outerShdw sx="100000" sy="100000" kx="0" ky="0" algn="bl" rotWithShape="0" blurRad="88900" dist="25400" dir="5400000">
+              <a:srgbClr val="22303C">
+                <a:alpha val="12000"/>
+              </a:srgbClr>
+            </a:outerShdw>
+          </a:effectLst>
+        </p:spPr>
+      </p:sp>
+      <p:sp>
+        <p:nvSpPr>
+          <p:cNvPr id="8" name="Text 6"/>
+          <p:cNvSpPr/>
+          <p:nvPr/>
+        </p:nvSpPr>
+        <p:spPr>
+          <a:xfrm>
+            <a:off x="6516472" y="1682496"/>
+            <a:ext cx="4888840" cy="274320"/>
+          </a:xfrm>
+          <a:prstGeom prst="rect">
+            <a:avLst/>
+          </a:prstGeom>
+          <a:noFill/>
+          <a:ln/>
+        </p:spPr>
+        <p:txBody>
+          <a:bodyPr wrap="square" lIns="0" tIns="0" rIns="0" bIns="0" rtlCol="0" anchor="ctr"/>
+          <a:lstStyle/>
+          <a:p>
+            <a:pPr indent="0" marL="0">
+              <a:buNone/>
+            </a:pPr>
+            <a:r>
+              <a:rPr lang="en-US" sz="1200" b="1" spc="100" kern="0" dirty="0">
+                <a:solidFill>
+                  <a:srgbClr val="8E1622"/>
+                </a:solidFill>
+                <a:latin typeface="Calibri" pitchFamily="34" charset="0"/>
+                <a:ea typeface="Calibri" pitchFamily="34" charset="-122"/>
+                <a:cs typeface="Calibri" pitchFamily="34" charset="-120"/>
+              </a:rPr>
+              <a:t>NEOPLASTIC CLUES</a:t>
+            </a:r>
+            <a:endParaRPr lang="en-US" sz="1200" dirty="0"/>
+          </a:p>
+        </p:txBody>
+      </p:sp>
+      <p:sp>
+        <p:nvSpPr>
+          <p:cNvPr id="9" name="Text 7"/>
+          <p:cNvSpPr/>
+          <p:nvPr/>
+        </p:nvSpPr>
+        <p:spPr>
+          <a:xfrm>
+            <a:off x="6516472" y="2029968"/>
+            <a:ext cx="4870552" cy="3474720"/>
+          </a:xfrm>
+          <a:prstGeom prst="rect">
+            <a:avLst/>
+          </a:prstGeom>
+          <a:noFill/>
+          <a:ln/>
+        </p:spPr>
+        <p:txBody>
+          <a:bodyPr wrap="square" lIns="0" tIns="0" rIns="0" bIns="0" rtlCol="0" anchor="t"/>
+          <a:lstStyle/>
+          <a:p>
+            <a:pPr algn="l" marL="177800" indent="-177800">
+              <a:spcAft>
+                <a:spcPts val="900"/>
+              </a:spcAft>
+              <a:buSzPct val="100000"/>
+              <a:buChar char="•"/>
+            </a:pPr>
+            <a:r>
+              <a:rPr lang="en-US" sz="1250" b="1" dirty="0">
+                <a:solidFill>
+                  <a:srgbClr val="1B2A38"/>
+                </a:solidFill>
+                <a:latin typeface="Calibri" pitchFamily="34" charset="0"/>
+                <a:ea typeface="Calibri" pitchFamily="34" charset="-122"/>
+                <a:cs typeface="Calibri" pitchFamily="34" charset="-120"/>
+              </a:rPr>
+              <a:t>A monomorphic population, blasts, Auer rods, or a ‘leukemic hiatus’ suggests malignancy.</a:t>
+            </a:r>
+            <a:endParaRPr lang="en-US" sz="1250" dirty="0"/>
+          </a:p>
+          <a:p>
+            <a:pPr algn="l" marL="177800" indent="-177800">
+              <a:spcAft>
+                <a:spcPts val="900"/>
+              </a:spcAft>
+              <a:buSzPct val="100000"/>
+              <a:buChar char="•"/>
+            </a:pPr>
+            <a:r>
+              <a:rPr lang="en-US" sz="1250" dirty="0">
+                <a:solidFill>
+                  <a:srgbClr val="33444F"/>
+                </a:solidFill>
+                <a:latin typeface="Calibri" pitchFamily="34" charset="0"/>
+                <a:ea typeface="Calibri" pitchFamily="34" charset="-122"/>
+                <a:cs typeface="Calibri" pitchFamily="34" charset="-120"/>
+              </a:rPr>
+              <a:t>Basophilia and a left shift may suggest CML.</a:t>
+            </a:r>
+            <a:endParaRPr lang="en-US" sz="1250" dirty="0"/>
+          </a:p>
+          <a:p>
+            <a:pPr algn="l" marL="177800" indent="-177800">
+              <a:spcAft>
+                <a:spcPts val="900"/>
+              </a:spcAft>
+              <a:buSzPct val="100000"/>
+              <a:buChar char="•"/>
+            </a:pPr>
+            <a:r>
+              <a:rPr lang="en-US" sz="1250" dirty="0">
+                <a:solidFill>
+                  <a:srgbClr val="33444F"/>
+                </a:solidFill>
+                <a:latin typeface="Calibri" pitchFamily="34" charset="0"/>
+                <a:ea typeface="Calibri" pitchFamily="34" charset="-122"/>
+                <a:cs typeface="Calibri" pitchFamily="34" charset="-120"/>
+              </a:rPr>
+              <a:t>Cytopenias in other lineages are concerning.</a:t>
+            </a:r>
+            <a:endParaRPr lang="en-US" sz="1250" dirty="0"/>
+          </a:p>
+          <a:p>
+            <a:pPr algn="l" marL="177800" indent="-177800">
+              <a:spcAft>
+                <a:spcPts val="900"/>
+              </a:spcAft>
+              <a:buSzPct val="100000"/>
+              <a:buChar char="•"/>
+            </a:pPr>
+            <a:r>
+              <a:rPr lang="en-US" sz="1250" dirty="0">
+                <a:solidFill>
+                  <a:srgbClr val="33444F"/>
+                </a:solidFill>
+                <a:latin typeface="Calibri" pitchFamily="34" charset="0"/>
+                <a:ea typeface="Calibri" pitchFamily="34" charset="-122"/>
+                <a:cs typeface="Calibri" pitchFamily="34" charset="-120"/>
+              </a:rPr>
+              <a:t>Confirm with flow/cytogenetics/molecular.</a:t>
+            </a:r>
+            <a:endParaRPr lang="en-US" sz="1250" dirty="0"/>
+          </a:p>
+        </p:txBody>
+      </p:sp>
+      <p:sp>
+        <p:nvSpPr>
+          <p:cNvPr id="10" name="Text 8"/>
           <p:cNvSpPr/>
           <p:nvPr/>
         </p:nvSpPr>
@@ -15270,7 +14366,7 @@
       </p:sp>
       <p:sp>
         <p:nvSpPr>
-          <p:cNvPr id="6" name="Text 3"/>
+          <p:cNvPr id="11" name="Text 9"/>
           <p:cNvSpPr/>
           <p:nvPr/>
         </p:nvSpPr>
@@ -15346,6 +14442,199 @@
 <file path=ppt/slides/slide8.xml><?xml version="1.0" encoding="utf-8"?>
 <p:sld xmlns:a="http://schemas.openxmlformats.org/drawingml/2006/main" xmlns:r="http://schemas.openxmlformats.org/officeDocument/2006/relationships" xmlns:p="http://schemas.openxmlformats.org/presentationml/2006/main">
   <p:cSld name="Slide 8">
+    <p:bg>
+      <p:bgPr>
+        <a:solidFill>
+          <a:srgbClr val="8E1622"/>
+        </a:solidFill>
+      </p:bgPr>
+    </p:bg>
+    <p:spTree>
+      <p:nvGrpSpPr>
+        <p:cNvPr id="1" name=""/>
+        <p:cNvGrpSpPr/>
+        <p:nvPr/>
+      </p:nvGrpSpPr>
+      <p:grpSpPr>
+        <a:xfrm>
+          <a:off x="0" y="0"/>
+          <a:ext cx="0" cy="0"/>
+          <a:chOff x="0" y="0"/>
+          <a:chExt cx="0" cy="0"/>
+        </a:xfrm>
+      </p:grpSpPr>
+      <p:sp>
+        <p:nvSpPr>
+          <p:cNvPr id="2" name="Shape 0"/>
+          <p:cNvSpPr/>
+          <p:nvPr/>
+        </p:nvSpPr>
+        <p:spPr>
+          <a:xfrm>
+            <a:off x="9509760" y="-1280160"/>
+            <a:ext cx="4754880" cy="4754880"/>
+          </a:xfrm>
+          <a:prstGeom prst="ellipse">
+            <a:avLst/>
+          </a:prstGeom>
+          <a:solidFill>
+            <a:srgbClr val="FFFFFF">
+              <a:alpha val="8000"/>
+            </a:srgbClr>
+          </a:solidFill>
+          <a:ln/>
+        </p:spPr>
+      </p:sp>
+      <p:sp>
+        <p:nvSpPr>
+          <p:cNvPr id="3" name="Shape 1"/>
+          <p:cNvSpPr/>
+          <p:nvPr/>
+        </p:nvSpPr>
+        <p:spPr>
+          <a:xfrm>
+            <a:off x="10607040" y="3931920"/>
+            <a:ext cx="3108960" cy="3108960"/>
+          </a:xfrm>
+          <a:prstGeom prst="ellipse">
+            <a:avLst/>
+          </a:prstGeom>
+          <a:solidFill>
+            <a:srgbClr val="FFFFFF">
+              <a:alpha val="6000"/>
+            </a:srgbClr>
+          </a:solidFill>
+          <a:ln/>
+        </p:spPr>
+      </p:sp>
+      <p:sp>
+        <p:nvSpPr>
+          <p:cNvPr id="4" name="Text 2"/>
+          <p:cNvSpPr/>
+          <p:nvPr/>
+        </p:nvSpPr>
+        <p:spPr>
+          <a:xfrm>
+            <a:off x="566928" y="1783080"/>
+            <a:ext cx="2743200" cy="1463040"/>
+          </a:xfrm>
+          <a:prstGeom prst="rect">
+            <a:avLst/>
+          </a:prstGeom>
+          <a:noFill/>
+          <a:ln/>
+        </p:spPr>
+        <p:txBody>
+          <a:bodyPr wrap="square" lIns="0" tIns="0" rIns="0" bIns="0" rtlCol="0" anchor="ctr"/>
+          <a:lstStyle/>
+          <a:p>
+            <a:pPr algn="l" indent="0" marL="0">
+              <a:buNone/>
+            </a:pPr>
+            <a:r>
+              <a:rPr lang="en-US" sz="6400" b="1" dirty="0">
+                <a:solidFill>
+                  <a:srgbClr val="FBEAEC"/>
+                </a:solidFill>
+                <a:latin typeface="Calibri" pitchFamily="34" charset="0"/>
+                <a:ea typeface="Calibri" pitchFamily="34" charset="-122"/>
+                <a:cs typeface="Calibri" pitchFamily="34" charset="-120"/>
+              </a:rPr>
+              <a:t>02</a:t>
+            </a:r>
+            <a:endParaRPr lang="en-US" sz="6400" dirty="0"/>
+          </a:p>
+        </p:txBody>
+      </p:sp>
+      <p:sp>
+        <p:nvSpPr>
+          <p:cNvPr id="5" name="Text 3"/>
+          <p:cNvSpPr/>
+          <p:nvPr/>
+        </p:nvSpPr>
+        <p:spPr>
+          <a:xfrm>
+            <a:off x="566928" y="3246120"/>
+            <a:ext cx="10058400" cy="365760"/>
+          </a:xfrm>
+          <a:prstGeom prst="rect">
+            <a:avLst/>
+          </a:prstGeom>
+          <a:noFill/>
+          <a:ln/>
+        </p:spPr>
+        <p:txBody>
+          <a:bodyPr wrap="square" lIns="0" tIns="0" rIns="0" bIns="0" rtlCol="0" anchor="ctr"/>
+          <a:lstStyle/>
+          <a:p>
+            <a:pPr algn="l" indent="0" marL="0">
+              <a:buNone/>
+            </a:pPr>
+            <a:r>
+              <a:rPr lang="en-US" sz="1300" b="1" spc="250" kern="0" dirty="0">
+                <a:solidFill>
+                  <a:srgbClr val="F2C9D9"/>
+                </a:solidFill>
+                <a:latin typeface="Calibri" pitchFamily="34" charset="0"/>
+                <a:ea typeface="Calibri" pitchFamily="34" charset="-122"/>
+                <a:cs typeface="Calibri" pitchFamily="34" charset="-120"/>
+              </a:rPr>
+              <a:t>PART TWO</a:t>
+            </a:r>
+            <a:endParaRPr lang="en-US" sz="1300" dirty="0"/>
+          </a:p>
+        </p:txBody>
+      </p:sp>
+      <p:sp>
+        <p:nvSpPr>
+          <p:cNvPr id="6" name="Text 4"/>
+          <p:cNvSpPr/>
+          <p:nvPr/>
+        </p:nvSpPr>
+        <p:spPr>
+          <a:xfrm>
+            <a:off x="566928" y="3611880"/>
+            <a:ext cx="10607040" cy="1463040"/>
+          </a:xfrm>
+          <a:prstGeom prst="rect">
+            <a:avLst/>
+          </a:prstGeom>
+          <a:noFill/>
+          <a:ln/>
+        </p:spPr>
+        <p:txBody>
+          <a:bodyPr wrap="square" lIns="0" tIns="0" rIns="0" bIns="0" rtlCol="0" anchor="t"/>
+          <a:lstStyle/>
+          <a:p>
+            <a:pPr algn="l" indent="0" marL="0">
+              <a:buNone/>
+            </a:pPr>
+            <a:r>
+              <a:rPr lang="en-US" sz="3800" b="1" dirty="0">
+                <a:solidFill>
+                  <a:srgbClr val="FFFFFF"/>
+                </a:solidFill>
+                <a:latin typeface="Calibri" pitchFamily="34" charset="0"/>
+                <a:ea typeface="Calibri" pitchFamily="34" charset="-122"/>
+                <a:cs typeface="Calibri" pitchFamily="34" charset="-120"/>
+              </a:rPr>
+              <a:t>Cytopenias &amp; Leukemia Screening</a:t>
+            </a:r>
+            <a:endParaRPr lang="en-US" sz="3800" dirty="0"/>
+          </a:p>
+        </p:txBody>
+      </p:sp>
+    </p:spTree>
+  </p:cSld>
+  <p:clrMapOvr>
+    <a:masterClrMapping/>
+  </p:clrMapOvr>
+</p:sld>
+</file>
+
+<file path=ppt/slides/slide9.xml><?xml version="1.0" encoding="utf-8"?>
+<p:sld xmlns:a="http://schemas.openxmlformats.org/drawingml/2006/main" xmlns:r="http://schemas.openxmlformats.org/officeDocument/2006/relationships" xmlns:p="http://schemas.openxmlformats.org/presentationml/2006/main">
+  <p:cSld name="Slide 9">
     <p:bg>
       <p:bgPr>
         <a:solidFill>
@@ -15400,7 +14689,7 @@
                 <a:ea typeface="Calibri" pitchFamily="34" charset="-122"/>
                 <a:cs typeface="Calibri" pitchFamily="34" charset="-120"/>
               </a:rPr>
-              <a:t>HEMATOLOGY &amp; COAGULATION   ·   HIGH WHITE COUNT</a:t>
+              <a:t>HEMATOLOGY &amp; COAGULATION   ·   CYTOPENIAS</a:t>
             </a:r>
             <a:endParaRPr lang="en-US" sz="1100" dirty="0"/>
           </a:p>
@@ -15439,1289 +14728,51 @@
                 <a:ea typeface="Calibri" pitchFamily="34" charset="-122"/>
                 <a:cs typeface="Calibri" pitchFamily="34" charset="-120"/>
               </a:rPr>
-              <a:t>Leukemoid Reaction vs CML</a:t>
+              <a:t>Neutropenia &amp; Lymphocytosis</a:t>
             </a:r>
             <a:endParaRPr lang="en-US" sz="3000" dirty="0"/>
           </a:p>
         </p:txBody>
       </p:sp>
-      <p:graphicFrame>
-        <p:nvGraphicFramePr>
-          <p:cNvPr id="9" name="Table 0"/>
-          <p:cNvGraphicFramePr>
-            <a:graphicFrameLocks noGrp="1"/>
-          </p:cNvGraphicFramePr>
-          <p:nvPr>
-            <p:extLst>
-              <p:ext uri="{D42A27DB-BD31-4B8C-83A1-F6EECF244321}">
-                <p14:modId xmlns:p14="http://schemas.microsoft.com/office/powerpoint/2010/main" val="1579011935"/>
-              </p:ext>
-            </p:extLst>
-          </p:nvPr>
-        </p:nvGraphicFramePr>
-        <p:xfrm>
-          <a:off x="566928" y="1463040"/>
-          <a:ext cx="11057839" cy="914400"/>
-        </p:xfrm>
-        <a:graphic>
-          <a:graphicData uri="http://schemas.openxmlformats.org/drawingml/2006/table">
-            <a:tbl>
-              <a:tblPr/>
-              <a:tblGrid>
-                <a:gridCol w="3108960"/>
-                <a:gridCol w="3973068"/>
-                <a:gridCol w="3973068"/>
-              </a:tblGrid>
-              <a:tr h="566928">
-                <a:tc>
-                  <a:txBody>
-                    <a:bodyPr/>
-                    <a:lstStyle/>
-                    <a:p>
-                      <a:pPr algn="ctr" indent="0" marL="0">
-                        <a:buNone/>
-                      </a:pPr>
-                      <a:r>
-                        <a:rPr lang="en-US" sz="1200" b="1" dirty="0">
-                          <a:solidFill>
-                            <a:srgbClr val="FFFFFF"/>
-                          </a:solidFill>
-                          <a:latin typeface="Calibri" pitchFamily="34" charset="0"/>
-                          <a:ea typeface="Calibri" pitchFamily="34" charset="-122"/>
-                          <a:cs typeface="Calibri" pitchFamily="34" charset="-120"/>
-                        </a:rPr>
-                        <a:t>Feature</a:t>
-                      </a:r>
-                      <a:endParaRPr lang="en-US" sz="1200" dirty="0">
-                        <a:latin typeface="Calibri" charset="0"/>
-                        <a:ea typeface="Calibri" charset="0"/>
-                        <a:cs typeface="Calibri" charset="0"/>
-                      </a:endParaRPr>
-                    </a:p>
-                  </a:txBody>
-                  <a:tcPr marL="91440" marR="91440" marT="45720" marB="45720" anchor="ctr">
-                    <a:lnL w="9525" cap="flat" cmpd="sng" algn="ctr">
-                      <a:solidFill>
-                        <a:srgbClr val="DCE4EC"/>
-                      </a:solidFill>
-                      <a:prstDash val="solid"/>
-                      <a:round/>
-                      <a:headEnd type="none" w="med" len="med"/>
-                      <a:tailEnd type="none" w="med" len="med"/>
-                    </a:lnL>
-                    <a:lnR w="9525" cap="flat" cmpd="sng" algn="ctr">
-                      <a:solidFill>
-                        <a:srgbClr val="DCE4EC"/>
-                      </a:solidFill>
-                      <a:prstDash val="solid"/>
-                      <a:round/>
-                      <a:headEnd type="none" w="med" len="med"/>
-                      <a:tailEnd type="none" w="med" len="med"/>
-                    </a:lnR>
-                    <a:lnT w="9525" cap="flat" cmpd="sng" algn="ctr">
-                      <a:solidFill>
-                        <a:srgbClr val="DCE4EC"/>
-                      </a:solidFill>
-                      <a:prstDash val="solid"/>
-                      <a:round/>
-                      <a:headEnd type="none" w="med" len="med"/>
-                      <a:tailEnd type="none" w="med" len="med"/>
-                    </a:lnT>
-                    <a:lnB w="9525" cap="flat" cmpd="sng" algn="ctr">
-                      <a:solidFill>
-                        <a:srgbClr val="DCE4EC"/>
-                      </a:solidFill>
-                      <a:prstDash val="solid"/>
-                      <a:round/>
-                      <a:headEnd type="none" w="med" len="med"/>
-                      <a:tailEnd type="none" w="med" len="med"/>
-                    </a:lnB>
-                    <a:solidFill>
-                      <a:srgbClr val="C62133"/>
-                    </a:solidFill>
-                  </a:tcPr>
-                </a:tc>
-                <a:tc>
-                  <a:txBody>
-                    <a:bodyPr/>
-                    <a:lstStyle/>
-                    <a:p>
-                      <a:pPr algn="ctr" indent="0" marL="0">
-                        <a:buNone/>
-                      </a:pPr>
-                      <a:r>
-                        <a:rPr lang="en-US" sz="1200" b="1" dirty="0">
-                          <a:solidFill>
-                            <a:srgbClr val="FFFFFF"/>
-                          </a:solidFill>
-                          <a:latin typeface="Calibri" pitchFamily="34" charset="0"/>
-                          <a:ea typeface="Calibri" pitchFamily="34" charset="-122"/>
-                          <a:cs typeface="Calibri" pitchFamily="34" charset="-120"/>
-                        </a:rPr>
-                        <a:t>Leukemoid reaction</a:t>
-                      </a:r>
-                      <a:endParaRPr lang="en-US" sz="1200" dirty="0">
-                        <a:latin typeface="Calibri" charset="0"/>
-                        <a:ea typeface="Calibri" charset="0"/>
-                        <a:cs typeface="Calibri" charset="0"/>
-                      </a:endParaRPr>
-                    </a:p>
-                  </a:txBody>
-                  <a:tcPr marL="91440" marR="91440" marT="45720" marB="45720" anchor="ctr">
-                    <a:lnL w="9525" cap="flat" cmpd="sng" algn="ctr">
-                      <a:solidFill>
-                        <a:srgbClr val="DCE4EC"/>
-                      </a:solidFill>
-                      <a:prstDash val="solid"/>
-                      <a:round/>
-                      <a:headEnd type="none" w="med" len="med"/>
-                      <a:tailEnd type="none" w="med" len="med"/>
-                    </a:lnL>
-                    <a:lnR w="9525" cap="flat" cmpd="sng" algn="ctr">
-                      <a:solidFill>
-                        <a:srgbClr val="DCE4EC"/>
-                      </a:solidFill>
-                      <a:prstDash val="solid"/>
-                      <a:round/>
-                      <a:headEnd type="none" w="med" len="med"/>
-                      <a:tailEnd type="none" w="med" len="med"/>
-                    </a:lnR>
-                    <a:lnT w="9525" cap="flat" cmpd="sng" algn="ctr">
-                      <a:solidFill>
-                        <a:srgbClr val="DCE4EC"/>
-                      </a:solidFill>
-                      <a:prstDash val="solid"/>
-                      <a:round/>
-                      <a:headEnd type="none" w="med" len="med"/>
-                      <a:tailEnd type="none" w="med" len="med"/>
-                    </a:lnT>
-                    <a:lnB w="9525" cap="flat" cmpd="sng" algn="ctr">
-                      <a:solidFill>
-                        <a:srgbClr val="DCE4EC"/>
-                      </a:solidFill>
-                      <a:prstDash val="solid"/>
-                      <a:round/>
-                      <a:headEnd type="none" w="med" len="med"/>
-                      <a:tailEnd type="none" w="med" len="med"/>
-                    </a:lnB>
-                    <a:solidFill>
-                      <a:srgbClr val="C62133"/>
-                    </a:solidFill>
-                  </a:tcPr>
-                </a:tc>
-                <a:tc>
-                  <a:txBody>
-                    <a:bodyPr/>
-                    <a:lstStyle/>
-                    <a:p>
-                      <a:pPr algn="ctr" indent="0" marL="0">
-                        <a:buNone/>
-                      </a:pPr>
-                      <a:r>
-                        <a:rPr lang="en-US" sz="1200" b="1" dirty="0">
-                          <a:solidFill>
-                            <a:srgbClr val="FFFFFF"/>
-                          </a:solidFill>
-                          <a:latin typeface="Calibri" pitchFamily="34" charset="0"/>
-                          <a:ea typeface="Calibri" pitchFamily="34" charset="-122"/>
-                          <a:cs typeface="Calibri" pitchFamily="34" charset="-120"/>
-                        </a:rPr>
-                        <a:t>Chronic myeloid leukemia</a:t>
-                      </a:r>
-                      <a:endParaRPr lang="en-US" sz="1200" dirty="0">
-                        <a:latin typeface="Calibri" charset="0"/>
-                        <a:ea typeface="Calibri" charset="0"/>
-                        <a:cs typeface="Calibri" charset="0"/>
-                      </a:endParaRPr>
-                    </a:p>
-                  </a:txBody>
-                  <a:tcPr marL="91440" marR="91440" marT="45720" marB="45720" anchor="ctr">
-                    <a:lnL w="9525" cap="flat" cmpd="sng" algn="ctr">
-                      <a:solidFill>
-                        <a:srgbClr val="DCE4EC"/>
-                      </a:solidFill>
-                      <a:prstDash val="solid"/>
-                      <a:round/>
-                      <a:headEnd type="none" w="med" len="med"/>
-                      <a:tailEnd type="none" w="med" len="med"/>
-                    </a:lnL>
-                    <a:lnR w="9525" cap="flat" cmpd="sng" algn="ctr">
-                      <a:solidFill>
-                        <a:srgbClr val="DCE4EC"/>
-                      </a:solidFill>
-                      <a:prstDash val="solid"/>
-                      <a:round/>
-                      <a:headEnd type="none" w="med" len="med"/>
-                      <a:tailEnd type="none" w="med" len="med"/>
-                    </a:lnR>
-                    <a:lnT w="9525" cap="flat" cmpd="sng" algn="ctr">
-                      <a:solidFill>
-                        <a:srgbClr val="DCE4EC"/>
-                      </a:solidFill>
-                      <a:prstDash val="solid"/>
-                      <a:round/>
-                      <a:headEnd type="none" w="med" len="med"/>
-                      <a:tailEnd type="none" w="med" len="med"/>
-                    </a:lnT>
-                    <a:lnB w="9525" cap="flat" cmpd="sng" algn="ctr">
-                      <a:solidFill>
-                        <a:srgbClr val="DCE4EC"/>
-                      </a:solidFill>
-                      <a:prstDash val="solid"/>
-                      <a:round/>
-                      <a:headEnd type="none" w="med" len="med"/>
-                      <a:tailEnd type="none" w="med" len="med"/>
-                    </a:lnB>
-                    <a:solidFill>
-                      <a:srgbClr val="C62133"/>
-                    </a:solidFill>
-                  </a:tcPr>
-                </a:tc>
-              </a:tr>
-              <a:tr h="566928">
-                <a:tc>
-                  <a:txBody>
-                    <a:bodyPr/>
-                    <a:lstStyle/>
-                    <a:p>
-                      <a:pPr algn="l" indent="0" marL="0">
-                        <a:buNone/>
-                      </a:pPr>
-                      <a:r>
-                        <a:rPr lang="en-US" sz="1100" b="1" dirty="0">
-                          <a:solidFill>
-                            <a:srgbClr val="1B2A38"/>
-                          </a:solidFill>
-                          <a:latin typeface="Calibri" pitchFamily="34" charset="0"/>
-                          <a:ea typeface="Calibri" pitchFamily="34" charset="-122"/>
-                          <a:cs typeface="Calibri" pitchFamily="34" charset="-120"/>
-                        </a:rPr>
-                        <a:t>Trigger</a:t>
-                      </a:r>
-                      <a:endParaRPr lang="en-US" sz="1100" dirty="0">
-                        <a:latin typeface="Calibri" charset="0"/>
-                        <a:ea typeface="Calibri" charset="0"/>
-                        <a:cs typeface="Calibri" charset="0"/>
-                      </a:endParaRPr>
-                    </a:p>
-                  </a:txBody>
-                  <a:tcPr marL="91440" marR="91440" marT="45720" marB="45720" anchor="ctr">
-                    <a:lnL w="9525" cap="flat" cmpd="sng" algn="ctr">
-                      <a:solidFill>
-                        <a:srgbClr val="DCE4EC"/>
-                      </a:solidFill>
-                      <a:prstDash val="solid"/>
-                      <a:round/>
-                      <a:headEnd type="none" w="med" len="med"/>
-                      <a:tailEnd type="none" w="med" len="med"/>
-                    </a:lnL>
-                    <a:lnR w="9525" cap="flat" cmpd="sng" algn="ctr">
-                      <a:solidFill>
-                        <a:srgbClr val="DCE4EC"/>
-                      </a:solidFill>
-                      <a:prstDash val="solid"/>
-                      <a:round/>
-                      <a:headEnd type="none" w="med" len="med"/>
-                      <a:tailEnd type="none" w="med" len="med"/>
-                    </a:lnR>
-                    <a:lnT w="9525" cap="flat" cmpd="sng" algn="ctr">
-                      <a:solidFill>
-                        <a:srgbClr val="DCE4EC"/>
-                      </a:solidFill>
-                      <a:prstDash val="solid"/>
-                      <a:round/>
-                      <a:headEnd type="none" w="med" len="med"/>
-                      <a:tailEnd type="none" w="med" len="med"/>
-                    </a:lnT>
-                    <a:lnB w="9525" cap="flat" cmpd="sng" algn="ctr">
-                      <a:solidFill>
-                        <a:srgbClr val="DCE4EC"/>
-                      </a:solidFill>
-                      <a:prstDash val="solid"/>
-                      <a:round/>
-                      <a:headEnd type="none" w="med" len="med"/>
-                      <a:tailEnd type="none" w="med" len="med"/>
-                    </a:lnB>
-                    <a:solidFill>
-                      <a:srgbClr val="F3F7FA"/>
-                    </a:solidFill>
-                  </a:tcPr>
-                </a:tc>
-                <a:tc>
-                  <a:txBody>
-                    <a:bodyPr/>
-                    <a:lstStyle/>
-                    <a:p>
-                      <a:pPr algn="ctr" indent="0" marL="0">
-                        <a:buNone/>
-                      </a:pPr>
-                      <a:r>
-                        <a:rPr lang="en-US" sz="1100" dirty="0">
-                          <a:solidFill>
-                            <a:srgbClr val="33444F"/>
-                          </a:solidFill>
-                          <a:latin typeface="Calibri" pitchFamily="34" charset="0"/>
-                          <a:ea typeface="Calibri" pitchFamily="34" charset="-122"/>
-                          <a:cs typeface="Calibri" pitchFamily="34" charset="-120"/>
-                        </a:rPr>
-                        <a:t>Severe infection / inflammation</a:t>
-                      </a:r>
-                      <a:endParaRPr lang="en-US" sz="1100" dirty="0">
-                        <a:latin typeface="Calibri" charset="0"/>
-                        <a:ea typeface="Calibri" charset="0"/>
-                        <a:cs typeface="Calibri" charset="0"/>
-                      </a:endParaRPr>
-                    </a:p>
-                  </a:txBody>
-                  <a:tcPr marL="91440" marR="91440" marT="45720" marB="45720" anchor="ctr">
-                    <a:lnL w="9525" cap="flat" cmpd="sng" algn="ctr">
-                      <a:solidFill>
-                        <a:srgbClr val="DCE4EC"/>
-                      </a:solidFill>
-                      <a:prstDash val="solid"/>
-                      <a:round/>
-                      <a:headEnd type="none" w="med" len="med"/>
-                      <a:tailEnd type="none" w="med" len="med"/>
-                    </a:lnL>
-                    <a:lnR w="9525" cap="flat" cmpd="sng" algn="ctr">
-                      <a:solidFill>
-                        <a:srgbClr val="DCE4EC"/>
-                      </a:solidFill>
-                      <a:prstDash val="solid"/>
-                      <a:round/>
-                      <a:headEnd type="none" w="med" len="med"/>
-                      <a:tailEnd type="none" w="med" len="med"/>
-                    </a:lnR>
-                    <a:lnT w="9525" cap="flat" cmpd="sng" algn="ctr">
-                      <a:solidFill>
-                        <a:srgbClr val="DCE4EC"/>
-                      </a:solidFill>
-                      <a:prstDash val="solid"/>
-                      <a:round/>
-                      <a:headEnd type="none" w="med" len="med"/>
-                      <a:tailEnd type="none" w="med" len="med"/>
-                    </a:lnT>
-                    <a:lnB w="9525" cap="flat" cmpd="sng" algn="ctr">
-                      <a:solidFill>
-                        <a:srgbClr val="DCE4EC"/>
-                      </a:solidFill>
-                      <a:prstDash val="solid"/>
-                      <a:round/>
-                      <a:headEnd type="none" w="med" len="med"/>
-                      <a:tailEnd type="none" w="med" len="med"/>
-                    </a:lnB>
-                    <a:solidFill>
-                      <a:srgbClr val="F3F7FA"/>
-                    </a:solidFill>
-                  </a:tcPr>
-                </a:tc>
-                <a:tc>
-                  <a:txBody>
-                    <a:bodyPr/>
-                    <a:lstStyle/>
-                    <a:p>
-                      <a:pPr algn="ctr" indent="0" marL="0">
-                        <a:buNone/>
-                      </a:pPr>
-                      <a:r>
-                        <a:rPr lang="en-US" sz="1100" dirty="0">
-                          <a:solidFill>
-                            <a:srgbClr val="33444F"/>
-                          </a:solidFill>
-                          <a:latin typeface="Calibri" pitchFamily="34" charset="0"/>
-                          <a:ea typeface="Calibri" pitchFamily="34" charset="-122"/>
-                          <a:cs typeface="Calibri" pitchFamily="34" charset="-120"/>
-                        </a:rPr>
-                        <a:t>Clonal (BCR-ABL1)</a:t>
-                      </a:r>
-                      <a:endParaRPr lang="en-US" sz="1100" dirty="0">
-                        <a:latin typeface="Calibri" charset="0"/>
-                        <a:ea typeface="Calibri" charset="0"/>
-                        <a:cs typeface="Calibri" charset="0"/>
-                      </a:endParaRPr>
-                    </a:p>
-                  </a:txBody>
-                  <a:tcPr marL="91440" marR="91440" marT="45720" marB="45720" anchor="ctr">
-                    <a:lnL w="9525" cap="flat" cmpd="sng" algn="ctr">
-                      <a:solidFill>
-                        <a:srgbClr val="DCE4EC"/>
-                      </a:solidFill>
-                      <a:prstDash val="solid"/>
-                      <a:round/>
-                      <a:headEnd type="none" w="med" len="med"/>
-                      <a:tailEnd type="none" w="med" len="med"/>
-                    </a:lnL>
-                    <a:lnR w="9525" cap="flat" cmpd="sng" algn="ctr">
-                      <a:solidFill>
-                        <a:srgbClr val="DCE4EC"/>
-                      </a:solidFill>
-                      <a:prstDash val="solid"/>
-                      <a:round/>
-                      <a:headEnd type="none" w="med" len="med"/>
-                      <a:tailEnd type="none" w="med" len="med"/>
-                    </a:lnR>
-                    <a:lnT w="9525" cap="flat" cmpd="sng" algn="ctr">
-                      <a:solidFill>
-                        <a:srgbClr val="DCE4EC"/>
-                      </a:solidFill>
-                      <a:prstDash val="solid"/>
-                      <a:round/>
-                      <a:headEnd type="none" w="med" len="med"/>
-                      <a:tailEnd type="none" w="med" len="med"/>
-                    </a:lnT>
-                    <a:lnB w="9525" cap="flat" cmpd="sng" algn="ctr">
-                      <a:solidFill>
-                        <a:srgbClr val="DCE4EC"/>
-                      </a:solidFill>
-                      <a:prstDash val="solid"/>
-                      <a:round/>
-                      <a:headEnd type="none" w="med" len="med"/>
-                      <a:tailEnd type="none" w="med" len="med"/>
-                    </a:lnB>
-                    <a:solidFill>
-                      <a:srgbClr val="F3F7FA"/>
-                    </a:solidFill>
-                  </a:tcPr>
-                </a:tc>
-              </a:tr>
-              <a:tr h="566928">
-                <a:tc>
-                  <a:txBody>
-                    <a:bodyPr/>
-                    <a:lstStyle/>
-                    <a:p>
-                      <a:pPr algn="l" indent="0" marL="0">
-                        <a:buNone/>
-                      </a:pPr>
-                      <a:r>
-                        <a:rPr lang="en-US" sz="1100" b="1" dirty="0">
-                          <a:solidFill>
-                            <a:srgbClr val="1B2A38"/>
-                          </a:solidFill>
-                          <a:latin typeface="Calibri" pitchFamily="34" charset="0"/>
-                          <a:ea typeface="Calibri" pitchFamily="34" charset="-122"/>
-                          <a:cs typeface="Calibri" pitchFamily="34" charset="-120"/>
-                        </a:rPr>
-                        <a:t>Basophilia</a:t>
-                      </a:r>
-                      <a:endParaRPr lang="en-US" sz="1100" dirty="0">
-                        <a:latin typeface="Calibri" charset="0"/>
-                        <a:ea typeface="Calibri" charset="0"/>
-                        <a:cs typeface="Calibri" charset="0"/>
-                      </a:endParaRPr>
-                    </a:p>
-                  </a:txBody>
-                  <a:tcPr marL="91440" marR="91440" marT="45720" marB="45720" anchor="ctr">
-                    <a:lnL w="9525" cap="flat" cmpd="sng" algn="ctr">
-                      <a:solidFill>
-                        <a:srgbClr val="DCE4EC"/>
-                      </a:solidFill>
-                      <a:prstDash val="solid"/>
-                      <a:round/>
-                      <a:headEnd type="none" w="med" len="med"/>
-                      <a:tailEnd type="none" w="med" len="med"/>
-                    </a:lnL>
-                    <a:lnR w="9525" cap="flat" cmpd="sng" algn="ctr">
-                      <a:solidFill>
-                        <a:srgbClr val="DCE4EC"/>
-                      </a:solidFill>
-                      <a:prstDash val="solid"/>
-                      <a:round/>
-                      <a:headEnd type="none" w="med" len="med"/>
-                      <a:tailEnd type="none" w="med" len="med"/>
-                    </a:lnR>
-                    <a:lnT w="9525" cap="flat" cmpd="sng" algn="ctr">
-                      <a:solidFill>
-                        <a:srgbClr val="DCE4EC"/>
-                      </a:solidFill>
-                      <a:prstDash val="solid"/>
-                      <a:round/>
-                      <a:headEnd type="none" w="med" len="med"/>
-                      <a:tailEnd type="none" w="med" len="med"/>
-                    </a:lnT>
-                    <a:lnB w="9525" cap="flat" cmpd="sng" algn="ctr">
-                      <a:solidFill>
-                        <a:srgbClr val="DCE4EC"/>
-                      </a:solidFill>
-                      <a:prstDash val="solid"/>
-                      <a:round/>
-                      <a:headEnd type="none" w="med" len="med"/>
-                      <a:tailEnd type="none" w="med" len="med"/>
-                    </a:lnB>
-                    <a:solidFill>
-                      <a:srgbClr val="FFFFFF"/>
-                    </a:solidFill>
-                  </a:tcPr>
-                </a:tc>
-                <a:tc>
-                  <a:txBody>
-                    <a:bodyPr/>
-                    <a:lstStyle/>
-                    <a:p>
-                      <a:pPr algn="ctr" indent="0" marL="0">
-                        <a:buNone/>
-                      </a:pPr>
-                      <a:r>
-                        <a:rPr lang="en-US" sz="1100" dirty="0">
-                          <a:solidFill>
-                            <a:srgbClr val="33444F"/>
-                          </a:solidFill>
-                          <a:latin typeface="Calibri" pitchFamily="34" charset="0"/>
-                          <a:ea typeface="Calibri" pitchFamily="34" charset="-122"/>
-                          <a:cs typeface="Calibri" pitchFamily="34" charset="-120"/>
-                        </a:rPr>
-                        <a:t>Absent</a:t>
-                      </a:r>
-                      <a:endParaRPr lang="en-US" sz="1100" dirty="0">
-                        <a:latin typeface="Calibri" charset="0"/>
-                        <a:ea typeface="Calibri" charset="0"/>
-                        <a:cs typeface="Calibri" charset="0"/>
-                      </a:endParaRPr>
-                    </a:p>
-                  </a:txBody>
-                  <a:tcPr marL="91440" marR="91440" marT="45720" marB="45720" anchor="ctr">
-                    <a:lnL w="9525" cap="flat" cmpd="sng" algn="ctr">
-                      <a:solidFill>
-                        <a:srgbClr val="DCE4EC"/>
-                      </a:solidFill>
-                      <a:prstDash val="solid"/>
-                      <a:round/>
-                      <a:headEnd type="none" w="med" len="med"/>
-                      <a:tailEnd type="none" w="med" len="med"/>
-                    </a:lnL>
-                    <a:lnR w="9525" cap="flat" cmpd="sng" algn="ctr">
-                      <a:solidFill>
-                        <a:srgbClr val="DCE4EC"/>
-                      </a:solidFill>
-                      <a:prstDash val="solid"/>
-                      <a:round/>
-                      <a:headEnd type="none" w="med" len="med"/>
-                      <a:tailEnd type="none" w="med" len="med"/>
-                    </a:lnR>
-                    <a:lnT w="9525" cap="flat" cmpd="sng" algn="ctr">
-                      <a:solidFill>
-                        <a:srgbClr val="DCE4EC"/>
-                      </a:solidFill>
-                      <a:prstDash val="solid"/>
-                      <a:round/>
-                      <a:headEnd type="none" w="med" len="med"/>
-                      <a:tailEnd type="none" w="med" len="med"/>
-                    </a:lnT>
-                    <a:lnB w="9525" cap="flat" cmpd="sng" algn="ctr">
-                      <a:solidFill>
-                        <a:srgbClr val="DCE4EC"/>
-                      </a:solidFill>
-                      <a:prstDash val="solid"/>
-                      <a:round/>
-                      <a:headEnd type="none" w="med" len="med"/>
-                      <a:tailEnd type="none" w="med" len="med"/>
-                    </a:lnB>
-                    <a:solidFill>
-                      <a:srgbClr val="FFFFFF"/>
-                    </a:solidFill>
-                  </a:tcPr>
-                </a:tc>
-                <a:tc>
-                  <a:txBody>
-                    <a:bodyPr/>
-                    <a:lstStyle/>
-                    <a:p>
-                      <a:pPr algn="ctr" indent="0" marL="0">
-                        <a:buNone/>
-                      </a:pPr>
-                      <a:r>
-                        <a:rPr lang="en-US" sz="1100" dirty="0">
-                          <a:solidFill>
-                            <a:srgbClr val="33444F"/>
-                          </a:solidFill>
-                          <a:latin typeface="Calibri" pitchFamily="34" charset="0"/>
-                          <a:ea typeface="Calibri" pitchFamily="34" charset="-122"/>
-                          <a:cs typeface="Calibri" pitchFamily="34" charset="-120"/>
-                        </a:rPr>
-                        <a:t>Present (characteristic)</a:t>
-                      </a:r>
-                      <a:endParaRPr lang="en-US" sz="1100" dirty="0">
-                        <a:latin typeface="Calibri" charset="0"/>
-                        <a:ea typeface="Calibri" charset="0"/>
-                        <a:cs typeface="Calibri" charset="0"/>
-                      </a:endParaRPr>
-                    </a:p>
-                  </a:txBody>
-                  <a:tcPr marL="91440" marR="91440" marT="45720" marB="45720" anchor="ctr">
-                    <a:lnL w="9525" cap="flat" cmpd="sng" algn="ctr">
-                      <a:solidFill>
-                        <a:srgbClr val="DCE4EC"/>
-                      </a:solidFill>
-                      <a:prstDash val="solid"/>
-                      <a:round/>
-                      <a:headEnd type="none" w="med" len="med"/>
-                      <a:tailEnd type="none" w="med" len="med"/>
-                    </a:lnL>
-                    <a:lnR w="9525" cap="flat" cmpd="sng" algn="ctr">
-                      <a:solidFill>
-                        <a:srgbClr val="DCE4EC"/>
-                      </a:solidFill>
-                      <a:prstDash val="solid"/>
-                      <a:round/>
-                      <a:headEnd type="none" w="med" len="med"/>
-                      <a:tailEnd type="none" w="med" len="med"/>
-                    </a:lnR>
-                    <a:lnT w="9525" cap="flat" cmpd="sng" algn="ctr">
-                      <a:solidFill>
-                        <a:srgbClr val="DCE4EC"/>
-                      </a:solidFill>
-                      <a:prstDash val="solid"/>
-                      <a:round/>
-                      <a:headEnd type="none" w="med" len="med"/>
-                      <a:tailEnd type="none" w="med" len="med"/>
-                    </a:lnT>
-                    <a:lnB w="9525" cap="flat" cmpd="sng" algn="ctr">
-                      <a:solidFill>
-                        <a:srgbClr val="DCE4EC"/>
-                      </a:solidFill>
-                      <a:prstDash val="solid"/>
-                      <a:round/>
-                      <a:headEnd type="none" w="med" len="med"/>
-                      <a:tailEnd type="none" w="med" len="med"/>
-                    </a:lnB>
-                    <a:solidFill>
-                      <a:srgbClr val="FFFFFF"/>
-                    </a:solidFill>
-                  </a:tcPr>
-                </a:tc>
-              </a:tr>
-              <a:tr h="566928">
-                <a:tc>
-                  <a:txBody>
-                    <a:bodyPr/>
-                    <a:lstStyle/>
-                    <a:p>
-                      <a:pPr algn="l" indent="0" marL="0">
-                        <a:buNone/>
-                      </a:pPr>
-                      <a:r>
-                        <a:rPr lang="en-US" sz="1100" b="1" dirty="0">
-                          <a:solidFill>
-                            <a:srgbClr val="1B2A38"/>
-                          </a:solidFill>
-                          <a:latin typeface="Calibri" pitchFamily="34" charset="0"/>
-                          <a:ea typeface="Calibri" pitchFamily="34" charset="-122"/>
-                          <a:cs typeface="Calibri" pitchFamily="34" charset="-120"/>
-                        </a:rPr>
-                        <a:t>Myeloid spectrum</a:t>
-                      </a:r>
-                      <a:endParaRPr lang="en-US" sz="1100" dirty="0">
-                        <a:latin typeface="Calibri" charset="0"/>
-                        <a:ea typeface="Calibri" charset="0"/>
-                        <a:cs typeface="Calibri" charset="0"/>
-                      </a:endParaRPr>
-                    </a:p>
-                  </a:txBody>
-                  <a:tcPr marL="91440" marR="91440" marT="45720" marB="45720" anchor="ctr">
-                    <a:lnL w="9525" cap="flat" cmpd="sng" algn="ctr">
-                      <a:solidFill>
-                        <a:srgbClr val="DCE4EC"/>
-                      </a:solidFill>
-                      <a:prstDash val="solid"/>
-                      <a:round/>
-                      <a:headEnd type="none" w="med" len="med"/>
-                      <a:tailEnd type="none" w="med" len="med"/>
-                    </a:lnL>
-                    <a:lnR w="9525" cap="flat" cmpd="sng" algn="ctr">
-                      <a:solidFill>
-                        <a:srgbClr val="DCE4EC"/>
-                      </a:solidFill>
-                      <a:prstDash val="solid"/>
-                      <a:round/>
-                      <a:headEnd type="none" w="med" len="med"/>
-                      <a:tailEnd type="none" w="med" len="med"/>
-                    </a:lnR>
-                    <a:lnT w="9525" cap="flat" cmpd="sng" algn="ctr">
-                      <a:solidFill>
-                        <a:srgbClr val="DCE4EC"/>
-                      </a:solidFill>
-                      <a:prstDash val="solid"/>
-                      <a:round/>
-                      <a:headEnd type="none" w="med" len="med"/>
-                      <a:tailEnd type="none" w="med" len="med"/>
-                    </a:lnT>
-                    <a:lnB w="9525" cap="flat" cmpd="sng" algn="ctr">
-                      <a:solidFill>
-                        <a:srgbClr val="DCE4EC"/>
-                      </a:solidFill>
-                      <a:prstDash val="solid"/>
-                      <a:round/>
-                      <a:headEnd type="none" w="med" len="med"/>
-                      <a:tailEnd type="none" w="med" len="med"/>
-                    </a:lnB>
-                    <a:solidFill>
-                      <a:srgbClr val="F3F7FA"/>
-                    </a:solidFill>
-                  </a:tcPr>
-                </a:tc>
-                <a:tc>
-                  <a:txBody>
-                    <a:bodyPr/>
-                    <a:lstStyle/>
-                    <a:p>
-                      <a:pPr algn="ctr" indent="0" marL="0">
-                        <a:buNone/>
-                      </a:pPr>
-                      <a:r>
-                        <a:rPr lang="en-US" sz="1100" dirty="0">
-                          <a:solidFill>
-                            <a:srgbClr val="33444F"/>
-                          </a:solidFill>
-                          <a:latin typeface="Calibri" pitchFamily="34" charset="0"/>
-                          <a:ea typeface="Calibri" pitchFamily="34" charset="-122"/>
-                          <a:cs typeface="Calibri" pitchFamily="34" charset="-120"/>
-                        </a:rPr>
-                        <a:t>Mature, toxic change</a:t>
-                      </a:r>
-                      <a:endParaRPr lang="en-US" sz="1100" dirty="0">
-                        <a:latin typeface="Calibri" charset="0"/>
-                        <a:ea typeface="Calibri" charset="0"/>
-                        <a:cs typeface="Calibri" charset="0"/>
-                      </a:endParaRPr>
-                    </a:p>
-                  </a:txBody>
-                  <a:tcPr marL="91440" marR="91440" marT="45720" marB="45720" anchor="ctr">
-                    <a:lnL w="9525" cap="flat" cmpd="sng" algn="ctr">
-                      <a:solidFill>
-                        <a:srgbClr val="DCE4EC"/>
-                      </a:solidFill>
-                      <a:prstDash val="solid"/>
-                      <a:round/>
-                      <a:headEnd type="none" w="med" len="med"/>
-                      <a:tailEnd type="none" w="med" len="med"/>
-                    </a:lnL>
-                    <a:lnR w="9525" cap="flat" cmpd="sng" algn="ctr">
-                      <a:solidFill>
-                        <a:srgbClr val="DCE4EC"/>
-                      </a:solidFill>
-                      <a:prstDash val="solid"/>
-                      <a:round/>
-                      <a:headEnd type="none" w="med" len="med"/>
-                      <a:tailEnd type="none" w="med" len="med"/>
-                    </a:lnR>
-                    <a:lnT w="9525" cap="flat" cmpd="sng" algn="ctr">
-                      <a:solidFill>
-                        <a:srgbClr val="DCE4EC"/>
-                      </a:solidFill>
-                      <a:prstDash val="solid"/>
-                      <a:round/>
-                      <a:headEnd type="none" w="med" len="med"/>
-                      <a:tailEnd type="none" w="med" len="med"/>
-                    </a:lnT>
-                    <a:lnB w="9525" cap="flat" cmpd="sng" algn="ctr">
-                      <a:solidFill>
-                        <a:srgbClr val="DCE4EC"/>
-                      </a:solidFill>
-                      <a:prstDash val="solid"/>
-                      <a:round/>
-                      <a:headEnd type="none" w="med" len="med"/>
-                      <a:tailEnd type="none" w="med" len="med"/>
-                    </a:lnB>
-                    <a:solidFill>
-                      <a:srgbClr val="F3F7FA"/>
-                    </a:solidFill>
-                  </a:tcPr>
-                </a:tc>
-                <a:tc>
-                  <a:txBody>
-                    <a:bodyPr/>
-                    <a:lstStyle/>
-                    <a:p>
-                      <a:pPr algn="ctr" indent="0" marL="0">
-                        <a:buNone/>
-                      </a:pPr>
-                      <a:r>
-                        <a:rPr lang="en-US" sz="1100" dirty="0">
-                          <a:solidFill>
-                            <a:srgbClr val="33444F"/>
-                          </a:solidFill>
-                          <a:latin typeface="Calibri" pitchFamily="34" charset="0"/>
-                          <a:ea typeface="Calibri" pitchFamily="34" charset="-122"/>
-                          <a:cs typeface="Calibri" pitchFamily="34" charset="-120"/>
-                        </a:rPr>
-                        <a:t>Full spectrum with myelocyte peak</a:t>
-                      </a:r>
-                      <a:endParaRPr lang="en-US" sz="1100" dirty="0">
-                        <a:latin typeface="Calibri" charset="0"/>
-                        <a:ea typeface="Calibri" charset="0"/>
-                        <a:cs typeface="Calibri" charset="0"/>
-                      </a:endParaRPr>
-                    </a:p>
-                  </a:txBody>
-                  <a:tcPr marL="91440" marR="91440" marT="45720" marB="45720" anchor="ctr">
-                    <a:lnL w="9525" cap="flat" cmpd="sng" algn="ctr">
-                      <a:solidFill>
-                        <a:srgbClr val="DCE4EC"/>
-                      </a:solidFill>
-                      <a:prstDash val="solid"/>
-                      <a:round/>
-                      <a:headEnd type="none" w="med" len="med"/>
-                      <a:tailEnd type="none" w="med" len="med"/>
-                    </a:lnL>
-                    <a:lnR w="9525" cap="flat" cmpd="sng" algn="ctr">
-                      <a:solidFill>
-                        <a:srgbClr val="DCE4EC"/>
-                      </a:solidFill>
-                      <a:prstDash val="solid"/>
-                      <a:round/>
-                      <a:headEnd type="none" w="med" len="med"/>
-                      <a:tailEnd type="none" w="med" len="med"/>
-                    </a:lnR>
-                    <a:lnT w="9525" cap="flat" cmpd="sng" algn="ctr">
-                      <a:solidFill>
-                        <a:srgbClr val="DCE4EC"/>
-                      </a:solidFill>
-                      <a:prstDash val="solid"/>
-                      <a:round/>
-                      <a:headEnd type="none" w="med" len="med"/>
-                      <a:tailEnd type="none" w="med" len="med"/>
-                    </a:lnT>
-                    <a:lnB w="9525" cap="flat" cmpd="sng" algn="ctr">
-                      <a:solidFill>
-                        <a:srgbClr val="DCE4EC"/>
-                      </a:solidFill>
-                      <a:prstDash val="solid"/>
-                      <a:round/>
-                      <a:headEnd type="none" w="med" len="med"/>
-                      <a:tailEnd type="none" w="med" len="med"/>
-                    </a:lnB>
-                    <a:solidFill>
-                      <a:srgbClr val="F3F7FA"/>
-                    </a:solidFill>
-                  </a:tcPr>
-                </a:tc>
-              </a:tr>
-              <a:tr h="566928">
-                <a:tc>
-                  <a:txBody>
-                    <a:bodyPr/>
-                    <a:lstStyle/>
-                    <a:p>
-                      <a:pPr algn="l" indent="0" marL="0">
-                        <a:buNone/>
-                      </a:pPr>
-                      <a:r>
-                        <a:rPr lang="en-US" sz="1100" b="1" dirty="0">
-                          <a:solidFill>
-                            <a:srgbClr val="1B2A38"/>
-                          </a:solidFill>
-                          <a:latin typeface="Calibri" pitchFamily="34" charset="0"/>
-                          <a:ea typeface="Calibri" pitchFamily="34" charset="-122"/>
-                          <a:cs typeface="Calibri" pitchFamily="34" charset="-120"/>
-                        </a:rPr>
-                        <a:t>LAP (historical)</a:t>
-                      </a:r>
-                      <a:endParaRPr lang="en-US" sz="1100" dirty="0">
-                        <a:latin typeface="Calibri" charset="0"/>
-                        <a:ea typeface="Calibri" charset="0"/>
-                        <a:cs typeface="Calibri" charset="0"/>
-                      </a:endParaRPr>
-                    </a:p>
-                  </a:txBody>
-                  <a:tcPr marL="91440" marR="91440" marT="45720" marB="45720" anchor="ctr">
-                    <a:lnL w="9525" cap="flat" cmpd="sng" algn="ctr">
-                      <a:solidFill>
-                        <a:srgbClr val="DCE4EC"/>
-                      </a:solidFill>
-                      <a:prstDash val="solid"/>
-                      <a:round/>
-                      <a:headEnd type="none" w="med" len="med"/>
-                      <a:tailEnd type="none" w="med" len="med"/>
-                    </a:lnL>
-                    <a:lnR w="9525" cap="flat" cmpd="sng" algn="ctr">
-                      <a:solidFill>
-                        <a:srgbClr val="DCE4EC"/>
-                      </a:solidFill>
-                      <a:prstDash val="solid"/>
-                      <a:round/>
-                      <a:headEnd type="none" w="med" len="med"/>
-                      <a:tailEnd type="none" w="med" len="med"/>
-                    </a:lnR>
-                    <a:lnT w="9525" cap="flat" cmpd="sng" algn="ctr">
-                      <a:solidFill>
-                        <a:srgbClr val="DCE4EC"/>
-                      </a:solidFill>
-                      <a:prstDash val="solid"/>
-                      <a:round/>
-                      <a:headEnd type="none" w="med" len="med"/>
-                      <a:tailEnd type="none" w="med" len="med"/>
-                    </a:lnT>
-                    <a:lnB w="9525" cap="flat" cmpd="sng" algn="ctr">
-                      <a:solidFill>
-                        <a:srgbClr val="DCE4EC"/>
-                      </a:solidFill>
-                      <a:prstDash val="solid"/>
-                      <a:round/>
-                      <a:headEnd type="none" w="med" len="med"/>
-                      <a:tailEnd type="none" w="med" len="med"/>
-                    </a:lnB>
-                    <a:solidFill>
-                      <a:srgbClr val="FFFFFF"/>
-                    </a:solidFill>
-                  </a:tcPr>
-                </a:tc>
-                <a:tc>
-                  <a:txBody>
-                    <a:bodyPr/>
-                    <a:lstStyle/>
-                    <a:p>
-                      <a:pPr algn="ctr" indent="0" marL="0">
-                        <a:buNone/>
-                      </a:pPr>
-                      <a:r>
-                        <a:rPr lang="en-US" sz="1100" dirty="0">
-                          <a:solidFill>
-                            <a:srgbClr val="33444F"/>
-                          </a:solidFill>
-                          <a:latin typeface="Calibri" pitchFamily="34" charset="0"/>
-                          <a:ea typeface="Calibri" pitchFamily="34" charset="-122"/>
-                          <a:cs typeface="Calibri" pitchFamily="34" charset="-120"/>
-                        </a:rPr>
-                        <a:t>High</a:t>
-                      </a:r>
-                      <a:endParaRPr lang="en-US" sz="1100" dirty="0">
-                        <a:latin typeface="Calibri" charset="0"/>
-                        <a:ea typeface="Calibri" charset="0"/>
-                        <a:cs typeface="Calibri" charset="0"/>
-                      </a:endParaRPr>
-                    </a:p>
-                  </a:txBody>
-                  <a:tcPr marL="91440" marR="91440" marT="45720" marB="45720" anchor="ctr">
-                    <a:lnL w="9525" cap="flat" cmpd="sng" algn="ctr">
-                      <a:solidFill>
-                        <a:srgbClr val="DCE4EC"/>
-                      </a:solidFill>
-                      <a:prstDash val="solid"/>
-                      <a:round/>
-                      <a:headEnd type="none" w="med" len="med"/>
-                      <a:tailEnd type="none" w="med" len="med"/>
-                    </a:lnL>
-                    <a:lnR w="9525" cap="flat" cmpd="sng" algn="ctr">
-                      <a:solidFill>
-                        <a:srgbClr val="DCE4EC"/>
-                      </a:solidFill>
-                      <a:prstDash val="solid"/>
-                      <a:round/>
-                      <a:headEnd type="none" w="med" len="med"/>
-                      <a:tailEnd type="none" w="med" len="med"/>
-                    </a:lnR>
-                    <a:lnT w="9525" cap="flat" cmpd="sng" algn="ctr">
-                      <a:solidFill>
-                        <a:srgbClr val="DCE4EC"/>
-                      </a:solidFill>
-                      <a:prstDash val="solid"/>
-                      <a:round/>
-                      <a:headEnd type="none" w="med" len="med"/>
-                      <a:tailEnd type="none" w="med" len="med"/>
-                    </a:lnT>
-                    <a:lnB w="9525" cap="flat" cmpd="sng" algn="ctr">
-                      <a:solidFill>
-                        <a:srgbClr val="DCE4EC"/>
-                      </a:solidFill>
-                      <a:prstDash val="solid"/>
-                      <a:round/>
-                      <a:headEnd type="none" w="med" len="med"/>
-                      <a:tailEnd type="none" w="med" len="med"/>
-                    </a:lnB>
-                    <a:solidFill>
-                      <a:srgbClr val="FFFFFF"/>
-                    </a:solidFill>
-                  </a:tcPr>
-                </a:tc>
-                <a:tc>
-                  <a:txBody>
-                    <a:bodyPr/>
-                    <a:lstStyle/>
-                    <a:p>
-                      <a:pPr algn="ctr" indent="0" marL="0">
-                        <a:buNone/>
-                      </a:pPr>
-                      <a:r>
-                        <a:rPr lang="en-US" sz="1100" dirty="0">
-                          <a:solidFill>
-                            <a:srgbClr val="33444F"/>
-                          </a:solidFill>
-                          <a:latin typeface="Calibri" pitchFamily="34" charset="0"/>
-                          <a:ea typeface="Calibri" pitchFamily="34" charset="-122"/>
-                          <a:cs typeface="Calibri" pitchFamily="34" charset="-120"/>
-                        </a:rPr>
-                        <a:t>Low</a:t>
-                      </a:r>
-                      <a:endParaRPr lang="en-US" sz="1100" dirty="0">
-                        <a:latin typeface="Calibri" charset="0"/>
-                        <a:ea typeface="Calibri" charset="0"/>
-                        <a:cs typeface="Calibri" charset="0"/>
-                      </a:endParaRPr>
-                    </a:p>
-                  </a:txBody>
-                  <a:tcPr marL="91440" marR="91440" marT="45720" marB="45720" anchor="ctr">
-                    <a:lnL w="9525" cap="flat" cmpd="sng" algn="ctr">
-                      <a:solidFill>
-                        <a:srgbClr val="DCE4EC"/>
-                      </a:solidFill>
-                      <a:prstDash val="solid"/>
-                      <a:round/>
-                      <a:headEnd type="none" w="med" len="med"/>
-                      <a:tailEnd type="none" w="med" len="med"/>
-                    </a:lnL>
-                    <a:lnR w="9525" cap="flat" cmpd="sng" algn="ctr">
-                      <a:solidFill>
-                        <a:srgbClr val="DCE4EC"/>
-                      </a:solidFill>
-                      <a:prstDash val="solid"/>
-                      <a:round/>
-                      <a:headEnd type="none" w="med" len="med"/>
-                      <a:tailEnd type="none" w="med" len="med"/>
-                    </a:lnR>
-                    <a:lnT w="9525" cap="flat" cmpd="sng" algn="ctr">
-                      <a:solidFill>
-                        <a:srgbClr val="DCE4EC"/>
-                      </a:solidFill>
-                      <a:prstDash val="solid"/>
-                      <a:round/>
-                      <a:headEnd type="none" w="med" len="med"/>
-                      <a:tailEnd type="none" w="med" len="med"/>
-                    </a:lnT>
-                    <a:lnB w="9525" cap="flat" cmpd="sng" algn="ctr">
-                      <a:solidFill>
-                        <a:srgbClr val="DCE4EC"/>
-                      </a:solidFill>
-                      <a:prstDash val="solid"/>
-                      <a:round/>
-                      <a:headEnd type="none" w="med" len="med"/>
-                      <a:tailEnd type="none" w="med" len="med"/>
-                    </a:lnB>
-                    <a:solidFill>
-                      <a:srgbClr val="FFFFFF"/>
-                    </a:solidFill>
-                  </a:tcPr>
-                </a:tc>
-              </a:tr>
-              <a:tr h="566928">
-                <a:tc>
-                  <a:txBody>
-                    <a:bodyPr/>
-                    <a:lstStyle/>
-                    <a:p>
-                      <a:pPr algn="l" indent="0" marL="0">
-                        <a:buNone/>
-                      </a:pPr>
-                      <a:r>
-                        <a:rPr lang="en-US" sz="1100" b="1" dirty="0">
-                          <a:solidFill>
-                            <a:srgbClr val="1B2A38"/>
-                          </a:solidFill>
-                          <a:latin typeface="Calibri" pitchFamily="34" charset="0"/>
-                          <a:ea typeface="Calibri" pitchFamily="34" charset="-122"/>
-                          <a:cs typeface="Calibri" pitchFamily="34" charset="-120"/>
-                        </a:rPr>
-                        <a:t>Confirmatory test</a:t>
-                      </a:r>
-                      <a:endParaRPr lang="en-US" sz="1100" dirty="0">
-                        <a:latin typeface="Calibri" charset="0"/>
-                        <a:ea typeface="Calibri" charset="0"/>
-                        <a:cs typeface="Calibri" charset="0"/>
-                      </a:endParaRPr>
-                    </a:p>
-                  </a:txBody>
-                  <a:tcPr marL="91440" marR="91440" marT="45720" marB="45720" anchor="ctr">
-                    <a:lnL w="9525" cap="flat" cmpd="sng" algn="ctr">
-                      <a:solidFill>
-                        <a:srgbClr val="DCE4EC"/>
-                      </a:solidFill>
-                      <a:prstDash val="solid"/>
-                      <a:round/>
-                      <a:headEnd type="none" w="med" len="med"/>
-                      <a:tailEnd type="none" w="med" len="med"/>
-                    </a:lnL>
-                    <a:lnR w="9525" cap="flat" cmpd="sng" algn="ctr">
-                      <a:solidFill>
-                        <a:srgbClr val="DCE4EC"/>
-                      </a:solidFill>
-                      <a:prstDash val="solid"/>
-                      <a:round/>
-                      <a:headEnd type="none" w="med" len="med"/>
-                      <a:tailEnd type="none" w="med" len="med"/>
-                    </a:lnR>
-                    <a:lnT w="9525" cap="flat" cmpd="sng" algn="ctr">
-                      <a:solidFill>
-                        <a:srgbClr val="DCE4EC"/>
-                      </a:solidFill>
-                      <a:prstDash val="solid"/>
-                      <a:round/>
-                      <a:headEnd type="none" w="med" len="med"/>
-                      <a:tailEnd type="none" w="med" len="med"/>
-                    </a:lnT>
-                    <a:lnB w="9525" cap="flat" cmpd="sng" algn="ctr">
-                      <a:solidFill>
-                        <a:srgbClr val="DCE4EC"/>
-                      </a:solidFill>
-                      <a:prstDash val="solid"/>
-                      <a:round/>
-                      <a:headEnd type="none" w="med" len="med"/>
-                      <a:tailEnd type="none" w="med" len="med"/>
-                    </a:lnB>
-                    <a:solidFill>
-                      <a:srgbClr val="F3F7FA"/>
-                    </a:solidFill>
-                  </a:tcPr>
-                </a:tc>
-                <a:tc>
-                  <a:txBody>
-                    <a:bodyPr/>
-                    <a:lstStyle/>
-                    <a:p>
-                      <a:pPr algn="ctr" indent="0" marL="0">
-                        <a:buNone/>
-                      </a:pPr>
-                      <a:r>
-                        <a:rPr lang="en-US" sz="1100" dirty="0">
-                          <a:solidFill>
-                            <a:srgbClr val="33444F"/>
-                          </a:solidFill>
-                          <a:latin typeface="Calibri" pitchFamily="34" charset="0"/>
-                          <a:ea typeface="Calibri" pitchFamily="34" charset="-122"/>
-                          <a:cs typeface="Calibri" pitchFamily="34" charset="-120"/>
-                        </a:rPr>
-                        <a:t>Resolves with treatment of cause</a:t>
-                      </a:r>
-                      <a:endParaRPr lang="en-US" sz="1100" dirty="0">
-                        <a:latin typeface="Calibri" charset="0"/>
-                        <a:ea typeface="Calibri" charset="0"/>
-                        <a:cs typeface="Calibri" charset="0"/>
-                      </a:endParaRPr>
-                    </a:p>
-                  </a:txBody>
-                  <a:tcPr marL="91440" marR="91440" marT="45720" marB="45720" anchor="ctr">
-                    <a:lnL w="9525" cap="flat" cmpd="sng" algn="ctr">
-                      <a:solidFill>
-                        <a:srgbClr val="DCE4EC"/>
-                      </a:solidFill>
-                      <a:prstDash val="solid"/>
-                      <a:round/>
-                      <a:headEnd type="none" w="med" len="med"/>
-                      <a:tailEnd type="none" w="med" len="med"/>
-                    </a:lnL>
-                    <a:lnR w="9525" cap="flat" cmpd="sng" algn="ctr">
-                      <a:solidFill>
-                        <a:srgbClr val="DCE4EC"/>
-                      </a:solidFill>
-                      <a:prstDash val="solid"/>
-                      <a:round/>
-                      <a:headEnd type="none" w="med" len="med"/>
-                      <a:tailEnd type="none" w="med" len="med"/>
-                    </a:lnR>
-                    <a:lnT w="9525" cap="flat" cmpd="sng" algn="ctr">
-                      <a:solidFill>
-                        <a:srgbClr val="DCE4EC"/>
-                      </a:solidFill>
-                      <a:prstDash val="solid"/>
-                      <a:round/>
-                      <a:headEnd type="none" w="med" len="med"/>
-                      <a:tailEnd type="none" w="med" len="med"/>
-                    </a:lnT>
-                    <a:lnB w="9525" cap="flat" cmpd="sng" algn="ctr">
-                      <a:solidFill>
-                        <a:srgbClr val="DCE4EC"/>
-                      </a:solidFill>
-                      <a:prstDash val="solid"/>
-                      <a:round/>
-                      <a:headEnd type="none" w="med" len="med"/>
-                      <a:tailEnd type="none" w="med" len="med"/>
-                    </a:lnB>
-                    <a:solidFill>
-                      <a:srgbClr val="F3F7FA"/>
-                    </a:solidFill>
-                  </a:tcPr>
-                </a:tc>
-                <a:tc>
-                  <a:txBody>
-                    <a:bodyPr/>
-                    <a:lstStyle/>
-                    <a:p>
-                      <a:pPr algn="ctr" indent="0" marL="0">
-                        <a:buNone/>
-                      </a:pPr>
-                      <a:r>
-                        <a:rPr lang="en-US" sz="1100" dirty="0">
-                          <a:solidFill>
-                            <a:srgbClr val="33444F"/>
-                          </a:solidFill>
-                          <a:latin typeface="Calibri" pitchFamily="34" charset="0"/>
-                          <a:ea typeface="Calibri" pitchFamily="34" charset="-122"/>
-                          <a:cs typeface="Calibri" pitchFamily="34" charset="-120"/>
-                        </a:rPr>
-                        <a:t>BCR-ABL1 (FISH/RT-PCR); t(9;22)</a:t>
-                      </a:r>
-                      <a:endParaRPr lang="en-US" sz="1100" dirty="0">
-                        <a:latin typeface="Calibri" charset="0"/>
-                        <a:ea typeface="Calibri" charset="0"/>
-                        <a:cs typeface="Calibri" charset="0"/>
-                      </a:endParaRPr>
-                    </a:p>
-                  </a:txBody>
-                  <a:tcPr marL="91440" marR="91440" marT="45720" marB="45720" anchor="ctr">
-                    <a:lnL w="9525" cap="flat" cmpd="sng" algn="ctr">
-                      <a:solidFill>
-                        <a:srgbClr val="DCE4EC"/>
-                      </a:solidFill>
-                      <a:prstDash val="solid"/>
-                      <a:round/>
-                      <a:headEnd type="none" w="med" len="med"/>
-                      <a:tailEnd type="none" w="med" len="med"/>
-                    </a:lnL>
-                    <a:lnR w="9525" cap="flat" cmpd="sng" algn="ctr">
-                      <a:solidFill>
-                        <a:srgbClr val="DCE4EC"/>
-                      </a:solidFill>
-                      <a:prstDash val="solid"/>
-                      <a:round/>
-                      <a:headEnd type="none" w="med" len="med"/>
-                      <a:tailEnd type="none" w="med" len="med"/>
-                    </a:lnR>
-                    <a:lnT w="9525" cap="flat" cmpd="sng" algn="ctr">
-                      <a:solidFill>
-                        <a:srgbClr val="DCE4EC"/>
-                      </a:solidFill>
-                      <a:prstDash val="solid"/>
-                      <a:round/>
-                      <a:headEnd type="none" w="med" len="med"/>
-                      <a:tailEnd type="none" w="med" len="med"/>
-                    </a:lnT>
-                    <a:lnB w="9525" cap="flat" cmpd="sng" algn="ctr">
-                      <a:solidFill>
-                        <a:srgbClr val="DCE4EC"/>
-                      </a:solidFill>
-                      <a:prstDash val="solid"/>
-                      <a:round/>
-                      <a:headEnd type="none" w="med" len="med"/>
-                      <a:tailEnd type="none" w="med" len="med"/>
-                    </a:lnB>
-                    <a:solidFill>
-                      <a:srgbClr val="F3F7FA"/>
-                    </a:solidFill>
-                  </a:tcPr>
-                </a:tc>
-              </a:tr>
-            </a:tbl>
-          </a:graphicData>
-        </a:graphic>
-      </p:graphicFrame>
-      <p:sp>
-        <p:nvSpPr>
-          <p:cNvPr id="5" name="Text 2"/>
-          <p:cNvSpPr/>
-          <p:nvPr/>
-        </p:nvSpPr>
-        <p:spPr>
-          <a:xfrm>
-            <a:off x="566928" y="6016752"/>
-            <a:ext cx="11057839" cy="365760"/>
+      <p:sp>
+        <p:nvSpPr>
+          <p:cNvPr id="4" name="Shape 2"/>
+          <p:cNvSpPr/>
+          <p:nvPr/>
+        </p:nvSpPr>
+        <p:spPr>
+          <a:xfrm>
+            <a:off x="566928" y="1517904"/>
+            <a:ext cx="5346040" cy="4114800"/>
+          </a:xfrm>
+          <a:prstGeom prst="roundRect">
+            <a:avLst>
+              <a:gd name="adj" fmla="val 2000"/>
+            </a:avLst>
+          </a:prstGeom>
+          <a:solidFill>
+            <a:srgbClr val="FBEAEC"/>
+          </a:solidFill>
+          <a:ln/>
+          <a:effectLst>
+            <a:outerShdw sx="100000" sy="100000" kx="0" ky="0" algn="bl" rotWithShape="0" blurRad="88900" dist="25400" dir="5400000">
+              <a:srgbClr val="22303C">
+                <a:alpha val="12000"/>
+              </a:srgbClr>
+            </a:outerShdw>
+          </a:effectLst>
+        </p:spPr>
+      </p:sp>
+      <p:sp>
+        <p:nvSpPr>
+          <p:cNvPr id="5" name="Text 3"/>
+          <p:cNvSpPr/>
+          <p:nvPr/>
+        </p:nvSpPr>
+        <p:spPr>
+          <a:xfrm>
+            <a:off x="804672" y="1682496"/>
+            <a:ext cx="4888840" cy="274320"/>
           </a:xfrm>
           <a:prstGeom prst="rect">
             <a:avLst/>
@@ -16733,27 +14784,307 @@
           <a:bodyPr wrap="square" lIns="0" tIns="0" rIns="0" bIns="0" rtlCol="0" anchor="ctr"/>
           <a:lstStyle/>
           <a:p>
-            <a:pPr algn="l" indent="0" marL="0">
-              <a:buNone/>
-            </a:pPr>
-            <a:r>
-              <a:rPr lang="en-US" sz="1050" i="1" dirty="0">
-                <a:solidFill>
-                  <a:srgbClr val="6B7B8A"/>
-                </a:solidFill>
-                <a:latin typeface="Calibri" pitchFamily="34" charset="0"/>
-                <a:ea typeface="Calibri" pitchFamily="34" charset="-122"/>
-                <a:cs typeface="Calibri" pitchFamily="34" charset="-120"/>
-              </a:rPr>
-              <a:t>Basophilia plus a full left-shifted myeloid spectrum in a stable patient should prompt BCR-ABL1 testing.</a:t>
-            </a:r>
-            <a:endParaRPr lang="en-US" sz="1050" dirty="0"/>
-          </a:p>
-        </p:txBody>
-      </p:sp>
-      <p:sp>
-        <p:nvSpPr>
-          <p:cNvPr id="6" name="Text 3"/>
+            <a:pPr indent="0" marL="0">
+              <a:buNone/>
+            </a:pPr>
+            <a:r>
+              <a:rPr lang="en-US" sz="1200" b="1" spc="100" kern="0" dirty="0">
+                <a:solidFill>
+                  <a:srgbClr val="8E1622"/>
+                </a:solidFill>
+                <a:latin typeface="Calibri" pitchFamily="34" charset="0"/>
+                <a:ea typeface="Calibri" pitchFamily="34" charset="-122"/>
+                <a:cs typeface="Calibri" pitchFamily="34" charset="-120"/>
+              </a:rPr>
+              <a:t>NEUTROPENIA</a:t>
+            </a:r>
+            <a:endParaRPr lang="en-US" sz="1200" dirty="0"/>
+          </a:p>
+        </p:txBody>
+      </p:sp>
+      <p:sp>
+        <p:nvSpPr>
+          <p:cNvPr id="6" name="Text 4"/>
+          <p:cNvSpPr/>
+          <p:nvPr/>
+        </p:nvSpPr>
+        <p:spPr>
+          <a:xfrm>
+            <a:off x="804672" y="2029968"/>
+            <a:ext cx="4870552" cy="3474720"/>
+          </a:xfrm>
+          <a:prstGeom prst="rect">
+            <a:avLst/>
+          </a:prstGeom>
+          <a:noFill/>
+          <a:ln/>
+        </p:spPr>
+        <p:txBody>
+          <a:bodyPr wrap="square" lIns="0" tIns="0" rIns="0" bIns="0" rtlCol="0" anchor="t"/>
+          <a:lstStyle/>
+          <a:p>
+            <a:pPr algn="l" marL="177800" indent="-177800">
+              <a:spcAft>
+                <a:spcPts val="900"/>
+              </a:spcAft>
+              <a:buSzPct val="100000"/>
+              <a:buChar char="•"/>
+            </a:pPr>
+            <a:r>
+              <a:rPr lang="en-US" sz="1250" b="1" dirty="0">
+                <a:solidFill>
+                  <a:srgbClr val="1B2A38"/>
+                </a:solidFill>
+                <a:latin typeface="Calibri" pitchFamily="34" charset="0"/>
+                <a:ea typeface="Calibri" pitchFamily="34" charset="-122"/>
+                <a:cs typeface="Calibri" pitchFamily="34" charset="-120"/>
+              </a:rPr>
+              <a:t>Severe neutropenia (very low ANC) risks serious infection — a clinical urgency.</a:t>
+            </a:r>
+            <a:endParaRPr lang="en-US" sz="1250" dirty="0"/>
+          </a:p>
+          <a:p>
+            <a:pPr algn="l" marL="177800" indent="-177800">
+              <a:spcAft>
+                <a:spcPts val="900"/>
+              </a:spcAft>
+              <a:buSzPct val="100000"/>
+              <a:buChar char="•"/>
+            </a:pPr>
+            <a:r>
+              <a:rPr lang="en-US" sz="1250" dirty="0">
+                <a:solidFill>
+                  <a:srgbClr val="33444F"/>
+                </a:solidFill>
+                <a:latin typeface="Calibri" pitchFamily="34" charset="0"/>
+                <a:ea typeface="Calibri" pitchFamily="34" charset="-122"/>
+                <a:cs typeface="Calibri" pitchFamily="34" charset="-120"/>
+              </a:rPr>
+              <a:t>Causes: drugs, infection, immune, marrow failure.</a:t>
+            </a:r>
+            <a:endParaRPr lang="en-US" sz="1250" dirty="0"/>
+          </a:p>
+          <a:p>
+            <a:pPr algn="l" marL="177800" indent="-177800">
+              <a:spcAft>
+                <a:spcPts val="900"/>
+              </a:spcAft>
+              <a:buSzPct val="100000"/>
+              <a:buChar char="•"/>
+            </a:pPr>
+            <a:r>
+              <a:rPr lang="en-US" sz="1250" dirty="0">
+                <a:solidFill>
+                  <a:srgbClr val="33444F"/>
+                </a:solidFill>
+                <a:latin typeface="Calibri" pitchFamily="34" charset="0"/>
+                <a:ea typeface="Calibri" pitchFamily="34" charset="-122"/>
+                <a:cs typeface="Calibri" pitchFamily="34" charset="-120"/>
+              </a:rPr>
+              <a:t>Assess other lineages for marrow involvement.</a:t>
+            </a:r>
+            <a:endParaRPr lang="en-US" sz="1250" dirty="0"/>
+          </a:p>
+          <a:p>
+            <a:pPr algn="l" marL="177800" indent="-177800">
+              <a:spcAft>
+                <a:spcPts val="900"/>
+              </a:spcAft>
+              <a:buSzPct val="100000"/>
+              <a:buChar char="•"/>
+            </a:pPr>
+            <a:r>
+              <a:rPr lang="en-US" sz="1250" dirty="0">
+                <a:solidFill>
+                  <a:srgbClr val="33444F"/>
+                </a:solidFill>
+                <a:latin typeface="Calibri" pitchFamily="34" charset="0"/>
+                <a:ea typeface="Calibri" pitchFamily="34" charset="-122"/>
+                <a:cs typeface="Calibri" pitchFamily="34" charset="-120"/>
+              </a:rPr>
+              <a:t>Communicate critically low counts promptly.</a:t>
+            </a:r>
+            <a:endParaRPr lang="en-US" sz="1250" dirty="0"/>
+          </a:p>
+        </p:txBody>
+      </p:sp>
+      <p:sp>
+        <p:nvSpPr>
+          <p:cNvPr id="7" name="Shape 5"/>
+          <p:cNvSpPr/>
+          <p:nvPr/>
+        </p:nvSpPr>
+        <p:spPr>
+          <a:xfrm>
+            <a:off x="6278728" y="1517904"/>
+            <a:ext cx="5346040" cy="4114800"/>
+          </a:xfrm>
+          <a:prstGeom prst="roundRect">
+            <a:avLst>
+              <a:gd name="adj" fmla="val 2000"/>
+            </a:avLst>
+          </a:prstGeom>
+          <a:solidFill>
+            <a:srgbClr val="FBE7E9"/>
+          </a:solidFill>
+          <a:ln/>
+          <a:effectLst>
+            <a:outerShdw sx="100000" sy="100000" kx="0" ky="0" algn="bl" rotWithShape="0" blurRad="88900" dist="25400" dir="5400000">
+              <a:srgbClr val="22303C">
+                <a:alpha val="12000"/>
+              </a:srgbClr>
+            </a:outerShdw>
+          </a:effectLst>
+        </p:spPr>
+      </p:sp>
+      <p:sp>
+        <p:nvSpPr>
+          <p:cNvPr id="8" name="Text 6"/>
+          <p:cNvSpPr/>
+          <p:nvPr/>
+        </p:nvSpPr>
+        <p:spPr>
+          <a:xfrm>
+            <a:off x="6516472" y="1682496"/>
+            <a:ext cx="4888840" cy="274320"/>
+          </a:xfrm>
+          <a:prstGeom prst="rect">
+            <a:avLst/>
+          </a:prstGeom>
+          <a:noFill/>
+          <a:ln/>
+        </p:spPr>
+        <p:txBody>
+          <a:bodyPr wrap="square" lIns="0" tIns="0" rIns="0" bIns="0" rtlCol="0" anchor="ctr"/>
+          <a:lstStyle/>
+          <a:p>
+            <a:pPr indent="0" marL="0">
+              <a:buNone/>
+            </a:pPr>
+            <a:r>
+              <a:rPr lang="en-US" sz="1200" b="1" spc="100" kern="0" dirty="0">
+                <a:solidFill>
+                  <a:srgbClr val="8E1622"/>
+                </a:solidFill>
+                <a:latin typeface="Calibri" pitchFamily="34" charset="0"/>
+                <a:ea typeface="Calibri" pitchFamily="34" charset="-122"/>
+                <a:cs typeface="Calibri" pitchFamily="34" charset="-120"/>
+              </a:rPr>
+              <a:t>LYMPHOCYTOSIS</a:t>
+            </a:r>
+            <a:endParaRPr lang="en-US" sz="1200" dirty="0"/>
+          </a:p>
+        </p:txBody>
+      </p:sp>
+      <p:sp>
+        <p:nvSpPr>
+          <p:cNvPr id="9" name="Text 7"/>
+          <p:cNvSpPr/>
+          <p:nvPr/>
+        </p:nvSpPr>
+        <p:spPr>
+          <a:xfrm>
+            <a:off x="6516472" y="2029968"/>
+            <a:ext cx="4870552" cy="3474720"/>
+          </a:xfrm>
+          <a:prstGeom prst="rect">
+            <a:avLst/>
+          </a:prstGeom>
+          <a:noFill/>
+          <a:ln/>
+        </p:spPr>
+        <p:txBody>
+          <a:bodyPr wrap="square" lIns="0" tIns="0" rIns="0" bIns="0" rtlCol="0" anchor="t"/>
+          <a:lstStyle/>
+          <a:p>
+            <a:pPr algn="l" marL="177800" indent="-177800">
+              <a:spcAft>
+                <a:spcPts val="900"/>
+              </a:spcAft>
+              <a:buSzPct val="100000"/>
+              <a:buChar char="•"/>
+            </a:pPr>
+            <a:r>
+              <a:rPr lang="en-US" sz="1250" b="1" dirty="0">
+                <a:solidFill>
+                  <a:srgbClr val="1B2A38"/>
+                </a:solidFill>
+                <a:latin typeface="Calibri" pitchFamily="34" charset="0"/>
+                <a:ea typeface="Calibri" pitchFamily="34" charset="-122"/>
+                <a:cs typeface="Calibri" pitchFamily="34" charset="-120"/>
+              </a:rPr>
+              <a:t>Reactive (viral) vs clonal (e.g., CLL) — smear and flow distinguish them.</a:t>
+            </a:r>
+            <a:endParaRPr lang="en-US" sz="1250" dirty="0"/>
+          </a:p>
+          <a:p>
+            <a:pPr algn="l" marL="177800" indent="-177800">
+              <a:spcAft>
+                <a:spcPts val="900"/>
+              </a:spcAft>
+              <a:buSzPct val="100000"/>
+              <a:buChar char="•"/>
+            </a:pPr>
+            <a:r>
+              <a:rPr lang="en-US" sz="1250" dirty="0">
+                <a:solidFill>
+                  <a:srgbClr val="33444F"/>
+                </a:solidFill>
+                <a:latin typeface="Calibri" pitchFamily="34" charset="0"/>
+                <a:ea typeface="Calibri" pitchFamily="34" charset="-122"/>
+                <a:cs typeface="Calibri" pitchFamily="34" charset="-120"/>
+              </a:rPr>
+              <a:t>Smudge cells suggest CLL.</a:t>
+            </a:r>
+            <a:endParaRPr lang="en-US" sz="1250" dirty="0"/>
+          </a:p>
+          <a:p>
+            <a:pPr algn="l" marL="177800" indent="-177800">
+              <a:spcAft>
+                <a:spcPts val="900"/>
+              </a:spcAft>
+              <a:buSzPct val="100000"/>
+              <a:buChar char="•"/>
+            </a:pPr>
+            <a:r>
+              <a:rPr lang="en-US" sz="1250" dirty="0">
+                <a:solidFill>
+                  <a:srgbClr val="33444F"/>
+                </a:solidFill>
+                <a:latin typeface="Calibri" pitchFamily="34" charset="0"/>
+                <a:ea typeface="Calibri" pitchFamily="34" charset="-122"/>
+                <a:cs typeface="Calibri" pitchFamily="34" charset="-120"/>
+              </a:rPr>
+              <a:t>Persistent unexplained lymphocytosis warrants flow.</a:t>
+            </a:r>
+            <a:endParaRPr lang="en-US" sz="1250" dirty="0"/>
+          </a:p>
+          <a:p>
+            <a:pPr algn="l" marL="177800" indent="-177800">
+              <a:spcAft>
+                <a:spcPts val="900"/>
+              </a:spcAft>
+              <a:buSzPct val="100000"/>
+              <a:buChar char="•"/>
+            </a:pPr>
+            <a:r>
+              <a:rPr lang="en-US" sz="1250" dirty="0">
+                <a:solidFill>
+                  <a:srgbClr val="33444F"/>
+                </a:solidFill>
+                <a:latin typeface="Calibri" pitchFamily="34" charset="0"/>
+                <a:ea typeface="Calibri" pitchFamily="34" charset="-122"/>
+                <a:cs typeface="Calibri" pitchFamily="34" charset="-120"/>
+              </a:rPr>
+              <a:t>Correlate with age and clinical picture.</a:t>
+            </a:r>
+            <a:endParaRPr lang="en-US" sz="1250" dirty="0"/>
+          </a:p>
+        </p:txBody>
+      </p:sp>
+      <p:sp>
+        <p:nvSpPr>
+          <p:cNvPr id="10" name="Text 8"/>
           <p:cNvSpPr/>
           <p:nvPr/>
         </p:nvSpPr>
@@ -16792,7 +15123,7 @@
       </p:sp>
       <p:sp>
         <p:nvSpPr>
-          <p:cNvPr id="7" name="Text 4"/>
+          <p:cNvPr id="11" name="Text 9"/>
           <p:cNvSpPr/>
           <p:nvPr/>
         </p:nvSpPr>
@@ -16854,199 +15185,6 @@
               <a:t>7</a:t>
             </a:r>
             <a:endParaRPr lang="en-US" sz="850" dirty="0"/>
-          </a:p>
-        </p:txBody>
-      </p:sp>
-    </p:spTree>
-  </p:cSld>
-  <p:clrMapOvr>
-    <a:masterClrMapping/>
-  </p:clrMapOvr>
-</p:sld>
-</file>
-
-<file path=ppt/slides/slide9.xml><?xml version="1.0" encoding="utf-8"?>
-<p:sld xmlns:a="http://schemas.openxmlformats.org/drawingml/2006/main" xmlns:r="http://schemas.openxmlformats.org/officeDocument/2006/relationships" xmlns:p="http://schemas.openxmlformats.org/presentationml/2006/main">
-  <p:cSld name="Slide 9">
-    <p:bg>
-      <p:bgPr>
-        <a:solidFill>
-          <a:srgbClr val="8E1622"/>
-        </a:solidFill>
-      </p:bgPr>
-    </p:bg>
-    <p:spTree>
-      <p:nvGrpSpPr>
-        <p:cNvPr id="1" name=""/>
-        <p:cNvGrpSpPr/>
-        <p:nvPr/>
-      </p:nvGrpSpPr>
-      <p:grpSpPr>
-        <a:xfrm>
-          <a:off x="0" y="0"/>
-          <a:ext cx="0" cy="0"/>
-          <a:chOff x="0" y="0"/>
-          <a:chExt cx="0" cy="0"/>
-        </a:xfrm>
-      </p:grpSpPr>
-      <p:sp>
-        <p:nvSpPr>
-          <p:cNvPr id="2" name="Shape 0"/>
-          <p:cNvSpPr/>
-          <p:nvPr/>
-        </p:nvSpPr>
-        <p:spPr>
-          <a:xfrm>
-            <a:off x="9509760" y="-1280160"/>
-            <a:ext cx="4754880" cy="4754880"/>
-          </a:xfrm>
-          <a:prstGeom prst="ellipse">
-            <a:avLst/>
-          </a:prstGeom>
-          <a:solidFill>
-            <a:srgbClr val="FFFFFF">
-              <a:alpha val="8000"/>
-            </a:srgbClr>
-          </a:solidFill>
-          <a:ln/>
-        </p:spPr>
-      </p:sp>
-      <p:sp>
-        <p:nvSpPr>
-          <p:cNvPr id="3" name="Shape 1"/>
-          <p:cNvSpPr/>
-          <p:nvPr/>
-        </p:nvSpPr>
-        <p:spPr>
-          <a:xfrm>
-            <a:off x="10607040" y="3931920"/>
-            <a:ext cx="3108960" cy="3108960"/>
-          </a:xfrm>
-          <a:prstGeom prst="ellipse">
-            <a:avLst/>
-          </a:prstGeom>
-          <a:solidFill>
-            <a:srgbClr val="FFFFFF">
-              <a:alpha val="6000"/>
-            </a:srgbClr>
-          </a:solidFill>
-          <a:ln/>
-        </p:spPr>
-      </p:sp>
-      <p:sp>
-        <p:nvSpPr>
-          <p:cNvPr id="4" name="Text 2"/>
-          <p:cNvSpPr/>
-          <p:nvPr/>
-        </p:nvSpPr>
-        <p:spPr>
-          <a:xfrm>
-            <a:off x="566928" y="1783080"/>
-            <a:ext cx="2743200" cy="1463040"/>
-          </a:xfrm>
-          <a:prstGeom prst="rect">
-            <a:avLst/>
-          </a:prstGeom>
-          <a:noFill/>
-          <a:ln/>
-        </p:spPr>
-        <p:txBody>
-          <a:bodyPr wrap="square" lIns="0" tIns="0" rIns="0" bIns="0" rtlCol="0" anchor="ctr"/>
-          <a:lstStyle/>
-          <a:p>
-            <a:pPr algn="l" indent="0" marL="0">
-              <a:buNone/>
-            </a:pPr>
-            <a:r>
-              <a:rPr lang="en-US" sz="6400" b="1" dirty="0">
-                <a:solidFill>
-                  <a:srgbClr val="FBEAEC"/>
-                </a:solidFill>
-                <a:latin typeface="Calibri" pitchFamily="34" charset="0"/>
-                <a:ea typeface="Calibri" pitchFamily="34" charset="-122"/>
-                <a:cs typeface="Calibri" pitchFamily="34" charset="-120"/>
-              </a:rPr>
-              <a:t>02</a:t>
-            </a:r>
-            <a:endParaRPr lang="en-US" sz="6400" dirty="0"/>
-          </a:p>
-        </p:txBody>
-      </p:sp>
-      <p:sp>
-        <p:nvSpPr>
-          <p:cNvPr id="5" name="Text 3"/>
-          <p:cNvSpPr/>
-          <p:nvPr/>
-        </p:nvSpPr>
-        <p:spPr>
-          <a:xfrm>
-            <a:off x="566928" y="3246120"/>
-            <a:ext cx="10058400" cy="365760"/>
-          </a:xfrm>
-          <a:prstGeom prst="rect">
-            <a:avLst/>
-          </a:prstGeom>
-          <a:noFill/>
-          <a:ln/>
-        </p:spPr>
-        <p:txBody>
-          <a:bodyPr wrap="square" lIns="0" tIns="0" rIns="0" bIns="0" rtlCol="0" anchor="ctr"/>
-          <a:lstStyle/>
-          <a:p>
-            <a:pPr algn="l" indent="0" marL="0">
-              <a:buNone/>
-            </a:pPr>
-            <a:r>
-              <a:rPr lang="en-US" sz="1300" b="1" spc="250" kern="0" dirty="0">
-                <a:solidFill>
-                  <a:srgbClr val="F2C9D9"/>
-                </a:solidFill>
-                <a:latin typeface="Calibri" pitchFamily="34" charset="0"/>
-                <a:ea typeface="Calibri" pitchFamily="34" charset="-122"/>
-                <a:cs typeface="Calibri" pitchFamily="34" charset="-120"/>
-              </a:rPr>
-              <a:t>PART TWO</a:t>
-            </a:r>
-            <a:endParaRPr lang="en-US" sz="1300" dirty="0"/>
-          </a:p>
-        </p:txBody>
-      </p:sp>
-      <p:sp>
-        <p:nvSpPr>
-          <p:cNvPr id="6" name="Text 4"/>
-          <p:cNvSpPr/>
-          <p:nvPr/>
-        </p:nvSpPr>
-        <p:spPr>
-          <a:xfrm>
-            <a:off x="566928" y="3611880"/>
-            <a:ext cx="10607040" cy="1463040"/>
-          </a:xfrm>
-          <a:prstGeom prst="rect">
-            <a:avLst/>
-          </a:prstGeom>
-          <a:noFill/>
-          <a:ln/>
-        </p:spPr>
-        <p:txBody>
-          <a:bodyPr wrap="square" lIns="0" tIns="0" rIns="0" bIns="0" rtlCol="0" anchor="t"/>
-          <a:lstStyle/>
-          <a:p>
-            <a:pPr algn="l" indent="0" marL="0">
-              <a:buNone/>
-            </a:pPr>
-            <a:r>
-              <a:rPr lang="en-US" sz="3800" b="1" dirty="0">
-                <a:solidFill>
-                  <a:srgbClr val="FFFFFF"/>
-                </a:solidFill>
-                <a:latin typeface="Calibri" pitchFamily="34" charset="0"/>
-                <a:ea typeface="Calibri" pitchFamily="34" charset="-122"/>
-                <a:cs typeface="Calibri" pitchFamily="34" charset="-120"/>
-              </a:rPr>
-              <a:t>Cytopenias &amp; Acute Leukemia</a:t>
-            </a:r>
-            <a:endParaRPr lang="en-US" sz="3800" dirty="0"/>
           </a:p>
         </p:txBody>
       </p:sp>

--- a/decks/Heme_03_Leukocytosis-Cytopenias-Leukemia-Screening.pptx
+++ b/decks/Heme_03_Leukocytosis-Cytopenias-Leukemia-Screening.pptx
@@ -25,9 +25,13 @@
     <p:sldId id="273" r:id="rId19"/>
     <p:sldId id="274" r:id="rId20"/>
     <p:sldId id="275" r:id="rId21"/>
+    <p:sldId id="284" r:id="rId35"/>
     <p:sldId id="276" r:id="rId22"/>
+    <p:sldId id="283" r:id="rId34"/>
     <p:sldId id="277" r:id="rId23"/>
+    <p:sldId id="282" r:id="rId33"/>
     <p:sldId id="278" r:id="rId24"/>
+    <p:sldId id="281" r:id="rId32"/>
     <p:sldId id="279" r:id="rId25"/>
     <p:sldId id="280" r:id="rId26"/>
   </p:sldIdLst>
@@ -3032,6 +3036,10 @@
           </a:solidFill>
           <a:ln/>
         </p:spPr>
+        <p:txBody>
+          <a:bodyPr/>
+          <a:p/>
+        </p:txBody>
       </p:sp>
       <p:sp>
         <p:nvSpPr>
@@ -3054,6 +3062,10 @@
           </a:solidFill>
           <a:ln/>
         </p:spPr>
+        <p:txBody>
+          <a:bodyPr/>
+          <a:p/>
+        </p:txBody>
       </p:sp>
       <p:sp>
         <p:nvSpPr>
@@ -3076,6 +3088,10 @@
           </a:solidFill>
           <a:ln/>
         </p:spPr>
+        <p:txBody>
+          <a:bodyPr/>
+          <a:p/>
+        </p:txBody>
       </p:sp>
       <p:sp>
         <p:nvSpPr>
@@ -3098,6 +3114,10 @@
           </a:solidFill>
           <a:ln/>
         </p:spPr>
+        <p:txBody>
+          <a:bodyPr/>
+          <a:p/>
+        </p:txBody>
       </p:sp>
       <p:sp>
         <p:nvSpPr>
@@ -3519,6 +3539,10 @@
             </a:outerShdw>
           </a:effectLst>
         </p:spPr>
+        <p:txBody>
+          <a:bodyPr/>
+          <a:p/>
+        </p:txBody>
       </p:sp>
       <p:pic>
         <p:nvPicPr>
@@ -3827,6 +3851,10 @@
             </a:outerShdw>
           </a:effectLst>
         </p:spPr>
+        <p:txBody>
+          <a:bodyPr/>
+          <a:p/>
+        </p:txBody>
       </p:sp>
       <p:sp>
         <p:nvSpPr>
@@ -4001,6 +4029,10 @@
             </a:outerShdw>
           </a:effectLst>
         </p:spPr>
+        <p:txBody>
+          <a:bodyPr/>
+          <a:p/>
+        </p:txBody>
       </p:sp>
       <p:sp>
         <p:nvSpPr>
@@ -4306,6 +4338,10 @@
           </a:solidFill>
           <a:ln/>
         </p:spPr>
+        <p:txBody>
+          <a:bodyPr/>
+          <a:p/>
+        </p:txBody>
       </p:sp>
       <p:sp>
         <p:nvSpPr>
@@ -4328,6 +4364,10 @@
           </a:solidFill>
           <a:ln/>
         </p:spPr>
+        <p:txBody>
+          <a:bodyPr/>
+          <a:p/>
+        </p:txBody>
       </p:sp>
       <p:sp>
         <p:nvSpPr>
@@ -4584,6 +4624,10 @@
             </a:outerShdw>
           </a:effectLst>
         </p:spPr>
+        <p:txBody>
+          <a:bodyPr/>
+          <a:p/>
+        </p:txBody>
       </p:sp>
       <p:sp>
         <p:nvSpPr>
@@ -4758,6 +4802,10 @@
             </a:outerShdw>
           </a:effectLst>
         </p:spPr>
+        <p:txBody>
+          <a:bodyPr/>
+          <a:p/>
+        </p:txBody>
       </p:sp>
       <p:sp>
         <p:nvSpPr>
@@ -5148,6 +5196,10 @@
             </a:outerShdw>
           </a:effectLst>
         </p:spPr>
+        <p:txBody>
+          <a:bodyPr/>
+          <a:p/>
+        </p:txBody>
       </p:sp>
       <p:sp>
         <p:nvSpPr>
@@ -5258,6 +5310,10 @@
             </a:outerShdw>
           </a:effectLst>
         </p:spPr>
+        <p:txBody>
+          <a:bodyPr/>
+          <a:p/>
+        </p:txBody>
       </p:sp>
       <p:sp>
         <p:nvSpPr>
@@ -5687,6 +5743,10 @@
             </a:outerShdw>
           </a:effectLst>
         </p:spPr>
+        <p:txBody>
+          <a:bodyPr/>
+          <a:p/>
+        </p:txBody>
       </p:sp>
       <p:sp>
         <p:nvSpPr>
@@ -6013,6 +6073,10 @@
             </a:outerShdw>
           </a:effectLst>
         </p:spPr>
+        <p:txBody>
+          <a:bodyPr/>
+          <a:p/>
+        </p:txBody>
       </p:sp>
       <p:sp>
         <p:nvSpPr>
@@ -6123,6 +6187,10 @@
             </a:outerShdw>
           </a:effectLst>
         </p:spPr>
+        <p:txBody>
+          <a:bodyPr/>
+          <a:p/>
+        </p:txBody>
       </p:sp>
       <p:sp>
         <p:nvSpPr>
@@ -6552,6 +6620,10 @@
             </a:outerShdw>
           </a:effectLst>
         </p:spPr>
+        <p:txBody>
+          <a:bodyPr/>
+          <a:p/>
+        </p:txBody>
       </p:sp>
       <p:sp>
         <p:nvSpPr>
@@ -6878,6 +6950,10 @@
             </a:outerShdw>
           </a:effectLst>
         </p:spPr>
+        <p:txBody>
+          <a:bodyPr/>
+          <a:p/>
+        </p:txBody>
       </p:sp>
       <p:sp>
         <p:nvSpPr>
@@ -6988,6 +7064,10 @@
             </a:outerShdw>
           </a:effectLst>
         </p:spPr>
+        <p:txBody>
+          <a:bodyPr/>
+          <a:p/>
+        </p:txBody>
       </p:sp>
       <p:sp>
         <p:nvSpPr>
@@ -7417,6 +7497,10 @@
             </a:outerShdw>
           </a:effectLst>
         </p:spPr>
+        <p:txBody>
+          <a:bodyPr/>
+          <a:p/>
+        </p:txBody>
       </p:sp>
       <p:sp>
         <p:nvSpPr>
@@ -7743,6 +7827,10 @@
             </a:outerShdw>
           </a:effectLst>
         </p:spPr>
+        <p:txBody>
+          <a:bodyPr/>
+          <a:p/>
+        </p:txBody>
       </p:sp>
       <p:sp>
         <p:nvSpPr>
@@ -7850,6 +7938,10 @@
             </a:outerShdw>
           </a:effectLst>
         </p:spPr>
+        <p:txBody>
+          <a:bodyPr/>
+          <a:p/>
+        </p:txBody>
       </p:sp>
       <p:sp>
         <p:nvSpPr>
@@ -7957,6 +8049,10 @@
             </a:outerShdw>
           </a:effectLst>
         </p:spPr>
+        <p:txBody>
+          <a:bodyPr/>
+          <a:p/>
+        </p:txBody>
       </p:sp>
       <p:sp>
         <p:nvSpPr>
@@ -8064,6 +8160,10 @@
             </a:outerShdw>
           </a:effectLst>
         </p:spPr>
+        <p:txBody>
+          <a:bodyPr/>
+          <a:p/>
+        </p:txBody>
       </p:sp>
       <p:sp>
         <p:nvSpPr>
@@ -8456,9 +8556,9 @@
               <a:buNone/>
             </a:pPr>
             <a:r>
-              <a:rPr lang="en-US" sz="1350" b="1" dirty="0">
-                <a:solidFill>
-                  <a:srgbClr val="8E1622"/>
+              <a:rPr lang="en-US" sz="1350" b="0" dirty="0">
+                <a:solidFill>
+                  <a:srgbClr val="33444F"/>
                 </a:solidFill>
                 <a:latin typeface="Calibri" pitchFamily="34" charset="0"/>
                 <a:ea typeface="Calibri" pitchFamily="34" charset="-122"/>
@@ -8527,130 +8627,6 @@
               <a:t>E. Without the differential</a:t>
             </a:r>
             <a:endParaRPr lang="en-US" sz="1350" dirty="0"/>
-          </a:p>
-        </p:txBody>
-      </p:sp>
-      <p:sp>
-        <p:nvSpPr>
-          <p:cNvPr id="6" name="Shape 4"/>
-          <p:cNvSpPr/>
-          <p:nvPr/>
-        </p:nvSpPr>
-        <p:spPr>
-          <a:xfrm>
-            <a:off x="7201632" y="2395728"/>
-            <a:ext cx="4423136" cy="3246120"/>
-          </a:xfrm>
-          <a:prstGeom prst="roundRect">
-            <a:avLst>
-              <a:gd name="adj" fmla="val 2535"/>
-            </a:avLst>
-          </a:prstGeom>
-          <a:solidFill>
-            <a:srgbClr val="FBEAEC"/>
-          </a:solidFill>
-          <a:ln/>
-          <a:effectLst>
-            <a:outerShdw sx="100000" sy="100000" kx="0" ky="0" algn="bl" rotWithShape="0" blurRad="88900" dist="25400" dir="5400000">
-              <a:srgbClr val="22303C">
-                <a:alpha val="12000"/>
-              </a:srgbClr>
-            </a:outerShdw>
-          </a:effectLst>
-        </p:spPr>
-      </p:sp>
-      <p:sp>
-        <p:nvSpPr>
-          <p:cNvPr id="7" name="Text 5"/>
-          <p:cNvSpPr/>
-          <p:nvPr/>
-        </p:nvSpPr>
-        <p:spPr>
-          <a:xfrm>
-            <a:off x="7439376" y="2578608"/>
-            <a:ext cx="3965936" cy="457200"/>
-          </a:xfrm>
-          <a:prstGeom prst="rect">
-            <a:avLst/>
-          </a:prstGeom>
-          <a:noFill/>
-          <a:ln/>
-        </p:spPr>
-        <p:txBody>
-          <a:bodyPr wrap="square" lIns="0" tIns="0" rIns="0" bIns="0" rtlCol="0" anchor="ctr"/>
-          <a:lstStyle/>
-          <a:p>
-            <a:pPr indent="0" marL="0">
-              <a:buNone/>
-            </a:pPr>
-            <a:r>
-              <a:rPr lang="en-US" sz="1500" b="1" dirty="0">
-                <a:solidFill>
-                  <a:srgbClr val="C62133"/>
-                </a:solidFill>
-                <a:latin typeface="Calibri" pitchFamily="34" charset="0"/>
-                <a:ea typeface="Calibri" pitchFamily="34" charset="-122"/>
-                <a:cs typeface="Calibri" pitchFamily="34" charset="-120"/>
-              </a:rPr>
-              <a:t>ANSWER  </a:t>
-            </a:r>
-            <a:pPr indent="0" marL="0">
-              <a:buNone/>
-            </a:pPr>
-            <a:r>
-              <a:rPr lang="en-US" sz="1500" b="1" dirty="0">
-                <a:solidFill>
-                  <a:srgbClr val="1B2A38"/>
-                </a:solidFill>
-                <a:latin typeface="Calibri" pitchFamily="34" charset="0"/>
-                <a:ea typeface="Calibri" pitchFamily="34" charset="-122"/>
-                <a:cs typeface="Calibri" pitchFamily="34" charset="-120"/>
-              </a:rPr>
-              <a:t>B — Absolute counts</a:t>
-            </a:r>
-            <a:endParaRPr lang="en-US" sz="1500" dirty="0"/>
-          </a:p>
-        </p:txBody>
-      </p:sp>
-      <p:sp>
-        <p:nvSpPr>
-          <p:cNvPr id="8" name="Text 6"/>
-          <p:cNvSpPr/>
-          <p:nvPr/>
-        </p:nvSpPr>
-        <p:spPr>
-          <a:xfrm>
-            <a:off x="7439376" y="3127248"/>
-            <a:ext cx="3947648" cy="2377440"/>
-          </a:xfrm>
-          <a:prstGeom prst="rect">
-            <a:avLst/>
-          </a:prstGeom>
-          <a:noFill/>
-          <a:ln/>
-        </p:spPr>
-        <p:txBody>
-          <a:bodyPr wrap="square" lIns="0" tIns="0" rIns="0" bIns="0" rtlCol="0" anchor="t"/>
-          <a:lstStyle/>
-          <a:p>
-            <a:pPr algn="l" indent="0" marL="0">
-              <a:lnSpc>
-                <a:spcPct val="108000"/>
-              </a:lnSpc>
-              <a:buNone/>
-            </a:pPr>
-            <a:r>
-              <a:rPr lang="en-US" sz="1250" dirty="0">
-                <a:solidFill>
-                  <a:srgbClr val="33444F"/>
-                </a:solidFill>
-                <a:latin typeface="Calibri" pitchFamily="34" charset="0"/>
-                <a:ea typeface="Calibri" pitchFamily="34" charset="-122"/>
-                <a:cs typeface="Calibri" pitchFamily="34" charset="-120"/>
-              </a:rPr>
-              <a:t>Absolute counts (e.g., ANC, ALC) determine clinical risk; percentages alone can mislead.</a:t>
-            </a:r>
-            <a:endParaRPr lang="en-US" sz="1250" dirty="0"/>
           </a:p>
         </p:txBody>
       </p:sp>
@@ -8960,9 +8936,9 @@
               <a:buNone/>
             </a:pPr>
             <a:r>
-              <a:rPr lang="en-US" sz="1350" b="1" dirty="0">
-                <a:solidFill>
-                  <a:srgbClr val="8E1622"/>
+              <a:rPr lang="en-US" sz="1350" b="0" dirty="0">
+                <a:solidFill>
+                  <a:srgbClr val="33444F"/>
                 </a:solidFill>
                 <a:latin typeface="Calibri" pitchFamily="34" charset="0"/>
                 <a:ea typeface="Calibri" pitchFamily="34" charset="-122"/>
@@ -9031,130 +9007,6 @@
               <a:t>E. Megaloblastic anemia</a:t>
             </a:r>
             <a:endParaRPr lang="en-US" sz="1350" dirty="0"/>
-          </a:p>
-        </p:txBody>
-      </p:sp>
-      <p:sp>
-        <p:nvSpPr>
-          <p:cNvPr id="6" name="Shape 4"/>
-          <p:cNvSpPr/>
-          <p:nvPr/>
-        </p:nvSpPr>
-        <p:spPr>
-          <a:xfrm>
-            <a:off x="7201632" y="2395728"/>
-            <a:ext cx="4423136" cy="3246120"/>
-          </a:xfrm>
-          <a:prstGeom prst="roundRect">
-            <a:avLst>
-              <a:gd name="adj" fmla="val 2535"/>
-            </a:avLst>
-          </a:prstGeom>
-          <a:solidFill>
-            <a:srgbClr val="FBEAEC"/>
-          </a:solidFill>
-          <a:ln/>
-          <a:effectLst>
-            <a:outerShdw sx="100000" sy="100000" kx="0" ky="0" algn="bl" rotWithShape="0" blurRad="88900" dist="25400" dir="5400000">
-              <a:srgbClr val="22303C">
-                <a:alpha val="12000"/>
-              </a:srgbClr>
-            </a:outerShdw>
-          </a:effectLst>
-        </p:spPr>
-      </p:sp>
-      <p:sp>
-        <p:nvSpPr>
-          <p:cNvPr id="7" name="Text 5"/>
-          <p:cNvSpPr/>
-          <p:nvPr/>
-        </p:nvSpPr>
-        <p:spPr>
-          <a:xfrm>
-            <a:off x="7439376" y="2578608"/>
-            <a:ext cx="3965936" cy="457200"/>
-          </a:xfrm>
-          <a:prstGeom prst="rect">
-            <a:avLst/>
-          </a:prstGeom>
-          <a:noFill/>
-          <a:ln/>
-        </p:spPr>
-        <p:txBody>
-          <a:bodyPr wrap="square" lIns="0" tIns="0" rIns="0" bIns="0" rtlCol="0" anchor="ctr"/>
-          <a:lstStyle/>
-          <a:p>
-            <a:pPr indent="0" marL="0">
-              <a:buNone/>
-            </a:pPr>
-            <a:r>
-              <a:rPr lang="en-US" sz="1500" b="1" dirty="0">
-                <a:solidFill>
-                  <a:srgbClr val="C62133"/>
-                </a:solidFill>
-                <a:latin typeface="Calibri" pitchFamily="34" charset="0"/>
-                <a:ea typeface="Calibri" pitchFamily="34" charset="-122"/>
-                <a:cs typeface="Calibri" pitchFamily="34" charset="-120"/>
-              </a:rPr>
-              <a:t>ANSWER  </a:t>
-            </a:r>
-            <a:pPr indent="0" marL="0">
-              <a:buNone/>
-            </a:pPr>
-            <a:r>
-              <a:rPr lang="en-US" sz="1500" b="1" dirty="0">
-                <a:solidFill>
-                  <a:srgbClr val="1B2A38"/>
-                </a:solidFill>
-                <a:latin typeface="Calibri" pitchFamily="34" charset="0"/>
-                <a:ea typeface="Calibri" pitchFamily="34" charset="-122"/>
-                <a:cs typeface="Calibri" pitchFamily="34" charset="-120"/>
-              </a:rPr>
-              <a:t>B — Myeloid blasts (AML)</a:t>
-            </a:r>
-            <a:endParaRPr lang="en-US" sz="1500" dirty="0"/>
-          </a:p>
-        </p:txBody>
-      </p:sp>
-      <p:sp>
-        <p:nvSpPr>
-          <p:cNvPr id="8" name="Text 6"/>
-          <p:cNvSpPr/>
-          <p:nvPr/>
-        </p:nvSpPr>
-        <p:spPr>
-          <a:xfrm>
-            <a:off x="7439376" y="3127248"/>
-            <a:ext cx="3947648" cy="2377440"/>
-          </a:xfrm>
-          <a:prstGeom prst="rect">
-            <a:avLst/>
-          </a:prstGeom>
-          <a:noFill/>
-          <a:ln/>
-        </p:spPr>
-        <p:txBody>
-          <a:bodyPr wrap="square" lIns="0" tIns="0" rIns="0" bIns="0" rtlCol="0" anchor="t"/>
-          <a:lstStyle/>
-          <a:p>
-            <a:pPr algn="l" indent="0" marL="0">
-              <a:lnSpc>
-                <a:spcPct val="108000"/>
-              </a:lnSpc>
-              <a:buNone/>
-            </a:pPr>
-            <a:r>
-              <a:rPr lang="en-US" sz="1250" dirty="0">
-                <a:solidFill>
-                  <a:srgbClr val="33444F"/>
-                </a:solidFill>
-                <a:latin typeface="Calibri" pitchFamily="34" charset="0"/>
-                <a:ea typeface="Calibri" pitchFamily="34" charset="-122"/>
-                <a:cs typeface="Calibri" pitchFamily="34" charset="-120"/>
-              </a:rPr>
-              <a:t>Auer rods are pathognomonic of myeloid lineage blasts, seen in AML.</a:t>
-            </a:r>
-            <a:endParaRPr lang="en-US" sz="1250" dirty="0"/>
           </a:p>
         </p:txBody>
       </p:sp>
@@ -9464,9 +9316,9 @@
               <a:buNone/>
             </a:pPr>
             <a:r>
-              <a:rPr lang="en-US" sz="1350" b="1" dirty="0">
-                <a:solidFill>
-                  <a:srgbClr val="8E1622"/>
+              <a:rPr lang="en-US" sz="1350" b="0" dirty="0">
+                <a:solidFill>
+                  <a:srgbClr val="33444F"/>
                 </a:solidFill>
                 <a:latin typeface="Calibri" pitchFamily="34" charset="0"/>
                 <a:ea typeface="Calibri" pitchFamily="34" charset="-122"/>
@@ -9535,130 +9387,6 @@
               <a:t>E. Normal marrow</a:t>
             </a:r>
             <a:endParaRPr lang="en-US" sz="1350" dirty="0"/>
-          </a:p>
-        </p:txBody>
-      </p:sp>
-      <p:sp>
-        <p:nvSpPr>
-          <p:cNvPr id="6" name="Shape 4"/>
-          <p:cNvSpPr/>
-          <p:nvPr/>
-        </p:nvSpPr>
-        <p:spPr>
-          <a:xfrm>
-            <a:off x="7201632" y="2395728"/>
-            <a:ext cx="4423136" cy="3246120"/>
-          </a:xfrm>
-          <a:prstGeom prst="roundRect">
-            <a:avLst>
-              <a:gd name="adj" fmla="val 2535"/>
-            </a:avLst>
-          </a:prstGeom>
-          <a:solidFill>
-            <a:srgbClr val="FBEAEC"/>
-          </a:solidFill>
-          <a:ln/>
-          <a:effectLst>
-            <a:outerShdw sx="100000" sy="100000" kx="0" ky="0" algn="bl" rotWithShape="0" blurRad="88900" dist="25400" dir="5400000">
-              <a:srgbClr val="22303C">
-                <a:alpha val="12000"/>
-              </a:srgbClr>
-            </a:outerShdw>
-          </a:effectLst>
-        </p:spPr>
-      </p:sp>
-      <p:sp>
-        <p:nvSpPr>
-          <p:cNvPr id="7" name="Text 5"/>
-          <p:cNvSpPr/>
-          <p:nvPr/>
-        </p:nvSpPr>
-        <p:spPr>
-          <a:xfrm>
-            <a:off x="7439376" y="2578608"/>
-            <a:ext cx="3965936" cy="457200"/>
-          </a:xfrm>
-          <a:prstGeom prst="rect">
-            <a:avLst/>
-          </a:prstGeom>
-          <a:noFill/>
-          <a:ln/>
-        </p:spPr>
-        <p:txBody>
-          <a:bodyPr wrap="square" lIns="0" tIns="0" rIns="0" bIns="0" rtlCol="0" anchor="ctr"/>
-          <a:lstStyle/>
-          <a:p>
-            <a:pPr indent="0" marL="0">
-              <a:buNone/>
-            </a:pPr>
-            <a:r>
-              <a:rPr lang="en-US" sz="1500" b="1" dirty="0">
-                <a:solidFill>
-                  <a:srgbClr val="C62133"/>
-                </a:solidFill>
-                <a:latin typeface="Calibri" pitchFamily="34" charset="0"/>
-                <a:ea typeface="Calibri" pitchFamily="34" charset="-122"/>
-                <a:cs typeface="Calibri" pitchFamily="34" charset="-120"/>
-              </a:rPr>
-              <a:t>ANSWER  </a:t>
-            </a:r>
-            <a:pPr indent="0" marL="0">
-              <a:buNone/>
-            </a:pPr>
-            <a:r>
-              <a:rPr lang="en-US" sz="1500" b="1" dirty="0">
-                <a:solidFill>
-                  <a:srgbClr val="1B2A38"/>
-                </a:solidFill>
-                <a:latin typeface="Calibri" pitchFamily="34" charset="0"/>
-                <a:ea typeface="Calibri" pitchFamily="34" charset="-122"/>
-                <a:cs typeface="Calibri" pitchFamily="34" charset="-120"/>
-              </a:rPr>
-              <a:t>B — Acute leukemia</a:t>
-            </a:r>
-            <a:endParaRPr lang="en-US" sz="1500" dirty="0"/>
-          </a:p>
-        </p:txBody>
-      </p:sp>
-      <p:sp>
-        <p:nvSpPr>
-          <p:cNvPr id="8" name="Text 6"/>
-          <p:cNvSpPr/>
-          <p:nvPr/>
-        </p:nvSpPr>
-        <p:spPr>
-          <a:xfrm>
-            <a:off x="7439376" y="3127248"/>
-            <a:ext cx="3947648" cy="2377440"/>
-          </a:xfrm>
-          <a:prstGeom prst="rect">
-            <a:avLst/>
-          </a:prstGeom>
-          <a:noFill/>
-          <a:ln/>
-        </p:spPr>
-        <p:txBody>
-          <a:bodyPr wrap="square" lIns="0" tIns="0" rIns="0" bIns="0" rtlCol="0" anchor="t"/>
-          <a:lstStyle/>
-          <a:p>
-            <a:pPr algn="l" indent="0" marL="0">
-              <a:lnSpc>
-                <a:spcPct val="108000"/>
-              </a:lnSpc>
-              <a:buNone/>
-            </a:pPr>
-            <a:r>
-              <a:rPr lang="en-US" sz="1250" dirty="0">
-                <a:solidFill>
-                  <a:srgbClr val="33444F"/>
-                </a:solidFill>
-                <a:latin typeface="Calibri" pitchFamily="34" charset="0"/>
-                <a:ea typeface="Calibri" pitchFamily="34" charset="-122"/>
-                <a:cs typeface="Calibri" pitchFamily="34" charset="-120"/>
-              </a:rPr>
-              <a:t>The gap between blasts and mature cells (absent intermediates) is characteristic of acute leukemia, unlike a reactive spectrum.</a:t>
-            </a:r>
-            <a:endParaRPr lang="en-US" sz="1250" dirty="0"/>
           </a:p>
         </p:txBody>
       </p:sp>
@@ -9968,9 +9696,9 @@
               <a:buNone/>
             </a:pPr>
             <a:r>
-              <a:rPr lang="en-US" sz="1350" b="1" dirty="0">
-                <a:solidFill>
-                  <a:srgbClr val="8E1622"/>
+              <a:rPr lang="en-US" sz="1350" b="0" dirty="0">
+                <a:solidFill>
+                  <a:srgbClr val="33444F"/>
                 </a:solidFill>
                 <a:latin typeface="Calibri" pitchFamily="34" charset="0"/>
                 <a:ea typeface="Calibri" pitchFamily="34" charset="-122"/>
@@ -10039,130 +9767,6 @@
               <a:t>E. Iron deficiency</a:t>
             </a:r>
             <a:endParaRPr lang="en-US" sz="1350" dirty="0"/>
-          </a:p>
-        </p:txBody>
-      </p:sp>
-      <p:sp>
-        <p:nvSpPr>
-          <p:cNvPr id="6" name="Shape 4"/>
-          <p:cNvSpPr/>
-          <p:nvPr/>
-        </p:nvSpPr>
-        <p:spPr>
-          <a:xfrm>
-            <a:off x="7201632" y="2395728"/>
-            <a:ext cx="4423136" cy="3246120"/>
-          </a:xfrm>
-          <a:prstGeom prst="roundRect">
-            <a:avLst>
-              <a:gd name="adj" fmla="val 2535"/>
-            </a:avLst>
-          </a:prstGeom>
-          <a:solidFill>
-            <a:srgbClr val="FBEAEC"/>
-          </a:solidFill>
-          <a:ln/>
-          <a:effectLst>
-            <a:outerShdw sx="100000" sy="100000" kx="0" ky="0" algn="bl" rotWithShape="0" blurRad="88900" dist="25400" dir="5400000">
-              <a:srgbClr val="22303C">
-                <a:alpha val="12000"/>
-              </a:srgbClr>
-            </a:outerShdw>
-          </a:effectLst>
-        </p:spPr>
-      </p:sp>
-      <p:sp>
-        <p:nvSpPr>
-          <p:cNvPr id="7" name="Text 5"/>
-          <p:cNvSpPr/>
-          <p:nvPr/>
-        </p:nvSpPr>
-        <p:spPr>
-          <a:xfrm>
-            <a:off x="7439376" y="2578608"/>
-            <a:ext cx="3965936" cy="457200"/>
-          </a:xfrm>
-          <a:prstGeom prst="rect">
-            <a:avLst/>
-          </a:prstGeom>
-          <a:noFill/>
-          <a:ln/>
-        </p:spPr>
-        <p:txBody>
-          <a:bodyPr wrap="square" lIns="0" tIns="0" rIns="0" bIns="0" rtlCol="0" anchor="ctr"/>
-          <a:lstStyle/>
-          <a:p>
-            <a:pPr indent="0" marL="0">
-              <a:buNone/>
-            </a:pPr>
-            <a:r>
-              <a:rPr lang="en-US" sz="1500" b="1" dirty="0">
-                <a:solidFill>
-                  <a:srgbClr val="C62133"/>
-                </a:solidFill>
-                <a:latin typeface="Calibri" pitchFamily="34" charset="0"/>
-                <a:ea typeface="Calibri" pitchFamily="34" charset="-122"/>
-                <a:cs typeface="Calibri" pitchFamily="34" charset="-120"/>
-              </a:rPr>
-              <a:t>ANSWER  </a:t>
-            </a:r>
-            <a:pPr indent="0" marL="0">
-              <a:buNone/>
-            </a:pPr>
-            <a:r>
-              <a:rPr lang="en-US" sz="1500" b="1" dirty="0">
-                <a:solidFill>
-                  <a:srgbClr val="1B2A38"/>
-                </a:solidFill>
-                <a:latin typeface="Calibri" pitchFamily="34" charset="0"/>
-                <a:ea typeface="Calibri" pitchFamily="34" charset="-122"/>
-                <a:cs typeface="Calibri" pitchFamily="34" charset="-120"/>
-              </a:rPr>
-              <a:t>B — CLL</a:t>
-            </a:r>
-            <a:endParaRPr lang="en-US" sz="1500" dirty="0"/>
-          </a:p>
-        </p:txBody>
-      </p:sp>
-      <p:sp>
-        <p:nvSpPr>
-          <p:cNvPr id="8" name="Text 6"/>
-          <p:cNvSpPr/>
-          <p:nvPr/>
-        </p:nvSpPr>
-        <p:spPr>
-          <a:xfrm>
-            <a:off x="7439376" y="3127248"/>
-            <a:ext cx="3947648" cy="2377440"/>
-          </a:xfrm>
-          <a:prstGeom prst="rect">
-            <a:avLst/>
-          </a:prstGeom>
-          <a:noFill/>
-          <a:ln/>
-        </p:spPr>
-        <p:txBody>
-          <a:bodyPr wrap="square" lIns="0" tIns="0" rIns="0" bIns="0" rtlCol="0" anchor="t"/>
-          <a:lstStyle/>
-          <a:p>
-            <a:pPr algn="l" indent="0" marL="0">
-              <a:lnSpc>
-                <a:spcPct val="108000"/>
-              </a:lnSpc>
-              <a:buNone/>
-            </a:pPr>
-            <a:r>
-              <a:rPr lang="en-US" sz="1250" dirty="0">
-                <a:solidFill>
-                  <a:srgbClr val="33444F"/>
-                </a:solidFill>
-                <a:latin typeface="Calibri" pitchFamily="34" charset="0"/>
-                <a:ea typeface="Calibri" pitchFamily="34" charset="-122"/>
-                <a:cs typeface="Calibri" pitchFamily="34" charset="-120"/>
-              </a:rPr>
-              <a:t>Smudge (basket) cells accompany the fragile lymphocytes of CLL; flow cytometry confirms clonality.</a:t>
-            </a:r>
-            <a:endParaRPr lang="en-US" sz="1250" dirty="0"/>
           </a:p>
         </p:txBody>
       </p:sp>
@@ -10403,6 +10007,10 @@
           </a:solidFill>
           <a:ln/>
         </p:spPr>
+        <p:txBody>
+          <a:bodyPr/>
+          <a:p/>
+        </p:txBody>
       </p:sp>
       <p:sp>
         <p:nvSpPr>
@@ -10430,6 +10038,10 @@
             </a:outerShdw>
           </a:effectLst>
         </p:spPr>
+        <p:txBody>
+          <a:bodyPr/>
+          <a:p/>
+        </p:txBody>
       </p:sp>
       <p:sp>
         <p:nvSpPr>
@@ -10530,6 +10142,10 @@
           </a:solidFill>
           <a:ln/>
         </p:spPr>
+        <p:txBody>
+          <a:bodyPr/>
+          <a:p/>
+        </p:txBody>
       </p:sp>
       <p:sp>
         <p:nvSpPr>
@@ -10557,6 +10173,10 @@
             </a:outerShdw>
           </a:effectLst>
         </p:spPr>
+        <p:txBody>
+          <a:bodyPr/>
+          <a:p/>
+        </p:txBody>
       </p:sp>
       <p:sp>
         <p:nvSpPr>
@@ -10657,6 +10277,10 @@
           </a:solidFill>
           <a:ln/>
         </p:spPr>
+        <p:txBody>
+          <a:bodyPr/>
+          <a:p/>
+        </p:txBody>
       </p:sp>
       <p:sp>
         <p:nvSpPr>
@@ -10684,6 +10308,10 @@
             </a:outerShdw>
           </a:effectLst>
         </p:spPr>
+        <p:txBody>
+          <a:bodyPr/>
+          <a:p/>
+        </p:txBody>
       </p:sp>
       <p:sp>
         <p:nvSpPr>
@@ -10784,6 +10412,10 @@
           </a:solidFill>
           <a:ln/>
         </p:spPr>
+        <p:txBody>
+          <a:bodyPr/>
+          <a:p/>
+        </p:txBody>
       </p:sp>
       <p:sp>
         <p:nvSpPr>
@@ -10811,6 +10443,10 @@
             </a:outerShdw>
           </a:effectLst>
         </p:spPr>
+        <p:txBody>
+          <a:bodyPr/>
+          <a:p/>
+        </p:txBody>
       </p:sp>
       <p:sp>
         <p:nvSpPr>
@@ -10911,6 +10547,10 @@
           </a:solidFill>
           <a:ln/>
         </p:spPr>
+        <p:txBody>
+          <a:bodyPr/>
+          <a:p/>
+        </p:txBody>
       </p:sp>
       <p:sp>
         <p:nvSpPr>
@@ -10938,6 +10578,10 @@
             </a:outerShdw>
           </a:effectLst>
         </p:spPr>
+        <p:txBody>
+          <a:bodyPr/>
+          <a:p/>
+        </p:txBody>
       </p:sp>
       <p:sp>
         <p:nvSpPr>
@@ -11421,6 +11065,1982 @@
 </p:sld>
 </file>
 
+<file path=ppt/slides/slide26.xml><?xml version="1.0" encoding="utf-8"?>
+<p:sld xmlns:a="http://schemas.openxmlformats.org/drawingml/2006/main" xmlns:p="http://schemas.openxmlformats.org/presentationml/2006/main" xmlns:r="http://schemas.openxmlformats.org/officeDocument/2006/relationships">
+  <p:cSld>
+    <p:spTree>
+      <p:nvGrpSpPr>
+        <p:cNvPr id="1" name=""/>
+        <p:cNvGrpSpPr/>
+        <p:nvPr/>
+      </p:nvGrpSpPr>
+      <p:grpSpPr/>
+      <p:sp>
+        <p:nvSpPr>
+          <p:cNvPr id="2" name="Text 0"/>
+          <p:cNvSpPr/>
+          <p:nvPr/>
+        </p:nvSpPr>
+        <p:spPr>
+          <a:xfrm>
+            <a:off x="566928" y="329184"/>
+            <a:ext cx="10515600" cy="310896"/>
+          </a:xfrm>
+          <a:prstGeom prst="rect">
+            <a:avLst/>
+          </a:prstGeom>
+          <a:noFill/>
+          <a:ln/>
+        </p:spPr>
+        <p:txBody>
+          <a:bodyPr wrap="square" lIns="0" tIns="0" rIns="0" bIns="0" rtlCol="0" anchor="ctr"/>
+          <a:lstStyle/>
+          <a:p>
+            <a:pPr algn="l" indent="0" marL="0">
+              <a:buNone/>
+            </a:pPr>
+            <a:r>
+              <a:rPr lang="en-US" sz="1100" b="1" spc="150" kern="0" dirty="0">
+                <a:solidFill>
+                  <a:srgbClr val="C62133"/>
+                </a:solidFill>
+                <a:latin typeface="Calibri" pitchFamily="34" charset="0"/>
+                <a:ea typeface="Calibri" pitchFamily="34" charset="-122"/>
+                <a:cs typeface="Calibri" pitchFamily="34" charset="-120"/>
+              </a:rPr>
+              <a:t>HEMATOLOGY &amp; COAGULATION   ·   BOARD REVIEW  ·  Q4</a:t>
+            </a:r>
+            <a:endParaRPr lang="en-US" sz="1100" dirty="0"/>
+          </a:p>
+        </p:txBody>
+      </p:sp>
+      <p:sp>
+        <p:nvSpPr>
+          <p:cNvPr id="3" name="Text 1"/>
+          <p:cNvSpPr/>
+          <p:nvPr/>
+        </p:nvSpPr>
+        <p:spPr>
+          <a:xfrm>
+            <a:off x="566928" y="713232"/>
+            <a:ext cx="11064240" cy="749808"/>
+          </a:xfrm>
+          <a:prstGeom prst="rect">
+            <a:avLst/>
+          </a:prstGeom>
+          <a:noFill/>
+          <a:ln/>
+        </p:spPr>
+        <p:txBody>
+          <a:bodyPr wrap="square" lIns="0" tIns="0" rIns="0" bIns="0" rtlCol="0" anchor="ctr"/>
+          <a:lstStyle/>
+          <a:p>
+            <a:pPr algn="l" indent="0" marL="0">
+              <a:buNone/>
+            </a:pPr>
+            <a:r>
+              <a:rPr lang="en-US" sz="2600" b="1" dirty="0">
+                <a:solidFill>
+                  <a:srgbClr val="0E3A5F"/>
+                </a:solidFill>
+                <a:latin typeface="Calibri" pitchFamily="34" charset="0"/>
+                <a:ea typeface="Calibri" pitchFamily="34" charset="-122"/>
+                <a:cs typeface="Calibri" pitchFamily="34" charset="-120"/>
+              </a:rPr>
+              <a:t>Board-Style Review</a:t>
+            </a:r>
+            <a:endParaRPr lang="en-US" sz="2600" dirty="0"/>
+          </a:p>
+        </p:txBody>
+      </p:sp>
+      <p:sp>
+        <p:nvSpPr>
+          <p:cNvPr id="4" name="Text 2"/>
+          <p:cNvSpPr/>
+          <p:nvPr/>
+        </p:nvSpPr>
+        <p:spPr>
+          <a:xfrm>
+            <a:off x="566928" y="1417320"/>
+            <a:ext cx="11057839" cy="914400"/>
+          </a:xfrm>
+          <a:prstGeom prst="rect">
+            <a:avLst/>
+          </a:prstGeom>
+          <a:noFill/>
+          <a:ln/>
+        </p:spPr>
+        <p:txBody>
+          <a:bodyPr wrap="square" lIns="0" tIns="0" rIns="0" bIns="0" rtlCol="0" anchor="t"/>
+          <a:lstStyle/>
+          <a:p>
+            <a:pPr algn="l" indent="0" marL="0">
+              <a:lnSpc>
+                <a:spcPct val="105000"/>
+              </a:lnSpc>
+              <a:buNone/>
+            </a:pPr>
+            <a:r>
+              <a:rPr lang="en-US" sz="1450" b="1" dirty="0">
+                <a:solidFill>
+                  <a:srgbClr val="1B2A38"/>
+                </a:solidFill>
+                <a:latin typeface="Calibri" pitchFamily="34" charset="0"/>
+                <a:ea typeface="Calibri" pitchFamily="34" charset="-122"/>
+                <a:cs typeface="Calibri" pitchFamily="34" charset="-120"/>
+              </a:rPr>
+              <a:t>Smudge cells with marked lymphocytosis in an older adult suggest:</a:t>
+            </a:r>
+            <a:endParaRPr lang="en-US" sz="1450" dirty="0"/>
+          </a:p>
+        </p:txBody>
+      </p:sp>
+      <p:sp>
+        <p:nvSpPr>
+          <p:cNvPr id="5" name="Text 3"/>
+          <p:cNvSpPr/>
+          <p:nvPr/>
+        </p:nvSpPr>
+        <p:spPr>
+          <a:xfrm>
+            <a:off x="658368" y="2395728"/>
+            <a:ext cx="6192390" cy="3017520"/>
+          </a:xfrm>
+          <a:prstGeom prst="rect">
+            <a:avLst/>
+          </a:prstGeom>
+          <a:noFill/>
+          <a:ln/>
+        </p:spPr>
+        <p:txBody>
+          <a:bodyPr wrap="square" lIns="0" tIns="0" rIns="0" bIns="0" rtlCol="0" anchor="t"/>
+          <a:lstStyle/>
+          <a:p>
+            <a:pPr algn="l" indent="0" marL="0">
+              <a:spcAft>
+                <a:spcPts val="600"/>
+              </a:spcAft>
+              <a:buNone/>
+            </a:pPr>
+            <a:r>
+              <a:rPr lang="en-US" sz="1350" dirty="0">
+                <a:solidFill>
+                  <a:srgbClr val="33444F"/>
+                </a:solidFill>
+                <a:latin typeface="Calibri" pitchFamily="34" charset="0"/>
+                <a:ea typeface="Calibri" pitchFamily="34" charset="-122"/>
+                <a:cs typeface="Calibri" pitchFamily="34" charset="-120"/>
+              </a:rPr>
+              <a:t>A. AML</a:t>
+            </a:r>
+            <a:endParaRPr lang="en-US" sz="1350" dirty="0"/>
+          </a:p>
+          <a:p>
+            <a:pPr algn="l" indent="0" marL="0">
+              <a:spcAft>
+                <a:spcPts val="600"/>
+              </a:spcAft>
+              <a:buNone/>
+            </a:pPr>
+            <a:r>
+              <a:rPr lang="en-US" sz="1350" b="1" dirty="0">
+                <a:solidFill>
+                  <a:srgbClr val="8E1622"/>
+                </a:solidFill>
+                <a:latin typeface="Calibri" pitchFamily="34" charset="0"/>
+                <a:ea typeface="Calibri" pitchFamily="34" charset="-122"/>
+                <a:cs typeface="Calibri" pitchFamily="34" charset="-120"/>
+              </a:rPr>
+              <a:t>B. Chronic lymphocytic leukemia</a:t>
+            </a:r>
+            <a:endParaRPr lang="en-US" sz="1350" dirty="0"/>
+          </a:p>
+          <a:p>
+            <a:pPr algn="l" indent="0" marL="0">
+              <a:spcAft>
+                <a:spcPts val="600"/>
+              </a:spcAft>
+              <a:buNone/>
+            </a:pPr>
+            <a:r>
+              <a:rPr lang="en-US" sz="1350" dirty="0">
+                <a:solidFill>
+                  <a:srgbClr val="33444F"/>
+                </a:solidFill>
+                <a:latin typeface="Calibri" pitchFamily="34" charset="0"/>
+                <a:ea typeface="Calibri" pitchFamily="34" charset="-122"/>
+                <a:cs typeface="Calibri" pitchFamily="34" charset="-120"/>
+              </a:rPr>
+              <a:t>C. Reactive neutrophilia</a:t>
+            </a:r>
+            <a:endParaRPr lang="en-US" sz="1350" dirty="0"/>
+          </a:p>
+          <a:p>
+            <a:pPr algn="l" indent="0" marL="0">
+              <a:spcAft>
+                <a:spcPts val="600"/>
+              </a:spcAft>
+              <a:buNone/>
+            </a:pPr>
+            <a:r>
+              <a:rPr lang="en-US" sz="1350" dirty="0">
+                <a:solidFill>
+                  <a:srgbClr val="33444F"/>
+                </a:solidFill>
+                <a:latin typeface="Calibri" pitchFamily="34" charset="0"/>
+                <a:ea typeface="Calibri" pitchFamily="34" charset="-122"/>
+                <a:cs typeface="Calibri" pitchFamily="34" charset="-120"/>
+              </a:rPr>
+              <a:t>D. Myelofibrosis</a:t>
+            </a:r>
+            <a:endParaRPr lang="en-US" sz="1350" dirty="0"/>
+          </a:p>
+          <a:p>
+            <a:pPr algn="l" indent="0" marL="0">
+              <a:spcAft>
+                <a:spcPts val="600"/>
+              </a:spcAft>
+              <a:buNone/>
+            </a:pPr>
+            <a:r>
+              <a:rPr lang="en-US" sz="1350" dirty="0">
+                <a:solidFill>
+                  <a:srgbClr val="33444F"/>
+                </a:solidFill>
+                <a:latin typeface="Calibri" pitchFamily="34" charset="0"/>
+                <a:ea typeface="Calibri" pitchFamily="34" charset="-122"/>
+                <a:cs typeface="Calibri" pitchFamily="34" charset="-120"/>
+              </a:rPr>
+              <a:t>E. Iron deficiency</a:t>
+            </a:r>
+            <a:endParaRPr lang="en-US" sz="1350" dirty="0"/>
+          </a:p>
+        </p:txBody>
+      </p:sp>
+      <p:sp>
+        <p:nvSpPr>
+          <p:cNvPr id="6" name="Shape 4"/>
+          <p:cNvSpPr/>
+          <p:nvPr/>
+        </p:nvSpPr>
+        <p:spPr>
+          <a:xfrm>
+            <a:off x="7201632" y="2395728"/>
+            <a:ext cx="4423136" cy="3246120"/>
+          </a:xfrm>
+          <a:prstGeom prst="roundRect">
+            <a:avLst>
+              <a:gd name="adj" fmla="val 2535"/>
+            </a:avLst>
+          </a:prstGeom>
+          <a:solidFill>
+            <a:srgbClr val="FBEAEC"/>
+          </a:solidFill>
+          <a:ln/>
+          <a:effectLst>
+            <a:outerShdw sx="100000" sy="100000" kx="0" ky="0" algn="bl" rotWithShape="0" blurRad="88900" dist="25400" dir="5400000">
+              <a:srgbClr val="22303C">
+                <a:alpha val="12000"/>
+              </a:srgbClr>
+            </a:outerShdw>
+          </a:effectLst>
+        </p:spPr>
+        <p:txBody>
+          <a:bodyPr/>
+          <a:p/>
+        </p:txBody>
+      </p:sp>
+      <p:sp>
+        <p:nvSpPr>
+          <p:cNvPr id="7" name="Text 5"/>
+          <p:cNvSpPr/>
+          <p:nvPr/>
+        </p:nvSpPr>
+        <p:spPr>
+          <a:xfrm>
+            <a:off x="7439376" y="2578608"/>
+            <a:ext cx="3965936" cy="457200"/>
+          </a:xfrm>
+          <a:prstGeom prst="rect">
+            <a:avLst/>
+          </a:prstGeom>
+          <a:noFill/>
+          <a:ln/>
+        </p:spPr>
+        <p:txBody>
+          <a:bodyPr wrap="square" lIns="0" tIns="0" rIns="0" bIns="0" rtlCol="0" anchor="ctr"/>
+          <a:lstStyle/>
+          <a:p>
+            <a:pPr indent="0" marL="0">
+              <a:buNone/>
+            </a:pPr>
+            <a:r>
+              <a:rPr lang="en-US" sz="1500" b="1" dirty="0">
+                <a:solidFill>
+                  <a:srgbClr val="C62133"/>
+                </a:solidFill>
+                <a:latin typeface="Calibri" pitchFamily="34" charset="0"/>
+                <a:ea typeface="Calibri" pitchFamily="34" charset="-122"/>
+                <a:cs typeface="Calibri" pitchFamily="34" charset="-120"/>
+              </a:rPr>
+              <a:t>ANSWER  </a:t>
+            </a:r>
+            <a:pPr indent="0" marL="0">
+              <a:buNone/>
+            </a:pPr>
+            <a:r>
+              <a:rPr lang="en-US" sz="1500" b="1" dirty="0">
+                <a:solidFill>
+                  <a:srgbClr val="1B2A38"/>
+                </a:solidFill>
+                <a:latin typeface="Calibri" pitchFamily="34" charset="0"/>
+                <a:ea typeface="Calibri" pitchFamily="34" charset="-122"/>
+                <a:cs typeface="Calibri" pitchFamily="34" charset="-120"/>
+              </a:rPr>
+              <a:t>B — CLL</a:t>
+            </a:r>
+            <a:endParaRPr lang="en-US" sz="1500" dirty="0"/>
+          </a:p>
+        </p:txBody>
+      </p:sp>
+      <p:sp>
+        <p:nvSpPr>
+          <p:cNvPr id="8" name="Text 6"/>
+          <p:cNvSpPr/>
+          <p:nvPr/>
+        </p:nvSpPr>
+        <p:spPr>
+          <a:xfrm>
+            <a:off x="7439376" y="3127248"/>
+            <a:ext cx="3947648" cy="2377440"/>
+          </a:xfrm>
+          <a:prstGeom prst="rect">
+            <a:avLst/>
+          </a:prstGeom>
+          <a:noFill/>
+          <a:ln/>
+        </p:spPr>
+        <p:txBody>
+          <a:bodyPr wrap="square" lIns="0" tIns="0" rIns="0" bIns="0" rtlCol="0" anchor="t"/>
+          <a:lstStyle/>
+          <a:p>
+            <a:pPr algn="l" indent="0" marL="0">
+              <a:lnSpc>
+                <a:spcPct val="108000"/>
+              </a:lnSpc>
+              <a:buNone/>
+            </a:pPr>
+            <a:r>
+              <a:rPr lang="en-US" sz="1250" dirty="0">
+                <a:solidFill>
+                  <a:srgbClr val="33444F"/>
+                </a:solidFill>
+                <a:latin typeface="Calibri" pitchFamily="34" charset="0"/>
+                <a:ea typeface="Calibri" pitchFamily="34" charset="-122"/>
+                <a:cs typeface="Calibri" pitchFamily="34" charset="-120"/>
+              </a:rPr>
+              <a:t>Smudge (basket) cells accompany the fragile lymphocytes of CLL; flow cytometry confirms clonality.</a:t>
+            </a:r>
+            <a:endParaRPr lang="en-US" sz="1250" dirty="0"/>
+          </a:p>
+        </p:txBody>
+      </p:sp>
+      <p:sp>
+        <p:nvSpPr>
+          <p:cNvPr id="9" name="Text 7"/>
+          <p:cNvSpPr/>
+          <p:nvPr/>
+        </p:nvSpPr>
+        <p:spPr>
+          <a:xfrm>
+            <a:off x="566928" y="6473952"/>
+            <a:ext cx="7772400" cy="274320"/>
+          </a:xfrm>
+          <a:prstGeom prst="rect">
+            <a:avLst/>
+          </a:prstGeom>
+          <a:noFill/>
+          <a:ln/>
+        </p:spPr>
+        <p:txBody>
+          <a:bodyPr wrap="square" lIns="0" tIns="0" rIns="0" bIns="0" rtlCol="0" anchor="ctr"/>
+          <a:lstStyle/>
+          <a:p>
+            <a:pPr algn="l" indent="0" marL="0">
+              <a:buNone/>
+            </a:pPr>
+            <a:r>
+              <a:rPr lang="en-US" sz="850" dirty="0">
+                <a:solidFill>
+                  <a:srgbClr val="9AA8B4"/>
+                </a:solidFill>
+                <a:latin typeface="Calibri" pitchFamily="34" charset="0"/>
+                <a:ea typeface="Calibri" pitchFamily="34" charset="-122"/>
+                <a:cs typeface="Calibri" pitchFamily="34" charset="-120"/>
+              </a:rPr>
+              <a:t>Makassed General Hospital  ·  Department of Laboratory Medicine</a:t>
+            </a:r>
+            <a:endParaRPr lang="en-US" sz="850" dirty="0"/>
+          </a:p>
+        </p:txBody>
+      </p:sp>
+      <p:sp>
+        <p:nvSpPr>
+          <p:cNvPr id="10" name="Text 8"/>
+          <p:cNvSpPr/>
+          <p:nvPr/>
+        </p:nvSpPr>
+        <p:spPr>
+          <a:xfrm>
+            <a:off x="9814255" y="6473952"/>
+            <a:ext cx="1828800" cy="274320"/>
+          </a:xfrm>
+          <a:prstGeom prst="rect">
+            <a:avLst/>
+          </a:prstGeom>
+          <a:noFill/>
+          <a:ln/>
+        </p:spPr>
+        <p:txBody>
+          <a:bodyPr wrap="square" lIns="0" tIns="0" rIns="0" bIns="0" rtlCol="0" anchor="ctr"/>
+          <a:lstStyle/>
+          <a:p>
+            <a:pPr algn="r" indent="0" marL="0">
+              <a:buNone/>
+            </a:pPr>
+            <a:r>
+              <a:rPr lang="en-US" sz="850" dirty="0">
+                <a:solidFill>
+                  <a:srgbClr val="9AA8B4"/>
+                </a:solidFill>
+                <a:latin typeface="Calibri" pitchFamily="34" charset="0"/>
+                <a:ea typeface="Calibri" pitchFamily="34" charset="-122"/>
+                <a:cs typeface="Calibri" pitchFamily="34" charset="-120"/>
+              </a:rPr>
+              <a:t>CP Lecture Series</a:t>
+            </a:r>
+            <a:pPr algn="r" indent="0" marL="0">
+              <a:buNone/>
+            </a:pPr>
+            <a:r>
+              <a:rPr lang="en-US" sz="850" dirty="0">
+                <a:solidFill>
+                  <a:srgbClr val="DCE4EC"/>
+                </a:solidFill>
+                <a:latin typeface="Calibri" pitchFamily="34" charset="0"/>
+                <a:ea typeface="Calibri" pitchFamily="34" charset="-122"/>
+                <a:cs typeface="Calibri" pitchFamily="34" charset="-120"/>
+              </a:rPr>
+              <a:t>   ·   </a:t>
+            </a:r>
+            <a:pPr algn="r" indent="0" marL="0">
+              <a:buNone/>
+            </a:pPr>
+            <a:r>
+              <a:rPr lang="en-US" sz="850" b="1" dirty="0">
+                <a:solidFill>
+                  <a:srgbClr val="C62133"/>
+                </a:solidFill>
+                <a:latin typeface="Calibri" pitchFamily="34" charset="0"/>
+                <a:ea typeface="Calibri" pitchFamily="34" charset="-122"/>
+                <a:cs typeface="Calibri" pitchFamily="34" charset="-120"/>
+              </a:rPr>
+              <a:t>20</a:t>
+            </a:r>
+            <a:endParaRPr lang="en-US" sz="850" dirty="0"/>
+          </a:p>
+        </p:txBody>
+      </p:sp>
+    </p:spTree>
+  </p:cSld>
+  <p:clrMapOvr>
+    <a:masterClrMapping/>
+  </p:clrMapOvr>
+</p:sld>
+</file>
+
+<file path=ppt/slides/slide27.xml><?xml version="1.0" encoding="utf-8"?>
+<p:sld xmlns:a="http://schemas.openxmlformats.org/drawingml/2006/main" xmlns:p="http://schemas.openxmlformats.org/presentationml/2006/main" xmlns:r="http://schemas.openxmlformats.org/officeDocument/2006/relationships">
+  <p:cSld>
+    <p:spTree>
+      <p:nvGrpSpPr>
+        <p:cNvPr id="1" name=""/>
+        <p:cNvGrpSpPr/>
+        <p:nvPr/>
+      </p:nvGrpSpPr>
+      <p:grpSpPr/>
+      <p:sp>
+        <p:nvSpPr>
+          <p:cNvPr id="2" name="Text 0"/>
+          <p:cNvSpPr/>
+          <p:nvPr/>
+        </p:nvSpPr>
+        <p:spPr>
+          <a:xfrm>
+            <a:off x="566928" y="329184"/>
+            <a:ext cx="10515600" cy="310896"/>
+          </a:xfrm>
+          <a:prstGeom prst="rect">
+            <a:avLst/>
+          </a:prstGeom>
+          <a:noFill/>
+          <a:ln/>
+        </p:spPr>
+        <p:txBody>
+          <a:bodyPr wrap="square" lIns="0" tIns="0" rIns="0" bIns="0" rtlCol="0" anchor="ctr"/>
+          <a:lstStyle/>
+          <a:p>
+            <a:pPr algn="l" indent="0" marL="0">
+              <a:buNone/>
+            </a:pPr>
+            <a:r>
+              <a:rPr lang="en-US" sz="1100" b="1" spc="150" kern="0" dirty="0">
+                <a:solidFill>
+                  <a:srgbClr val="C62133"/>
+                </a:solidFill>
+                <a:latin typeface="Calibri" pitchFamily="34" charset="0"/>
+                <a:ea typeface="Calibri" pitchFamily="34" charset="-122"/>
+                <a:cs typeface="Calibri" pitchFamily="34" charset="-120"/>
+              </a:rPr>
+              <a:t>HEMATOLOGY &amp; COAGULATION   ·   BOARD REVIEW  ·  Q3</a:t>
+            </a:r>
+            <a:endParaRPr lang="en-US" sz="1100" dirty="0"/>
+          </a:p>
+        </p:txBody>
+      </p:sp>
+      <p:sp>
+        <p:nvSpPr>
+          <p:cNvPr id="3" name="Text 1"/>
+          <p:cNvSpPr/>
+          <p:nvPr/>
+        </p:nvSpPr>
+        <p:spPr>
+          <a:xfrm>
+            <a:off x="566928" y="713232"/>
+            <a:ext cx="11064240" cy="749808"/>
+          </a:xfrm>
+          <a:prstGeom prst="rect">
+            <a:avLst/>
+          </a:prstGeom>
+          <a:noFill/>
+          <a:ln/>
+        </p:spPr>
+        <p:txBody>
+          <a:bodyPr wrap="square" lIns="0" tIns="0" rIns="0" bIns="0" rtlCol="0" anchor="ctr"/>
+          <a:lstStyle/>
+          <a:p>
+            <a:pPr algn="l" indent="0" marL="0">
+              <a:buNone/>
+            </a:pPr>
+            <a:r>
+              <a:rPr lang="en-US" sz="2600" b="1" dirty="0">
+                <a:solidFill>
+                  <a:srgbClr val="0E3A5F"/>
+                </a:solidFill>
+                <a:latin typeface="Calibri" pitchFamily="34" charset="0"/>
+                <a:ea typeface="Calibri" pitchFamily="34" charset="-122"/>
+                <a:cs typeface="Calibri" pitchFamily="34" charset="-120"/>
+              </a:rPr>
+              <a:t>Board-Style Review</a:t>
+            </a:r>
+            <a:endParaRPr lang="en-US" sz="2600" dirty="0"/>
+          </a:p>
+        </p:txBody>
+      </p:sp>
+      <p:sp>
+        <p:nvSpPr>
+          <p:cNvPr id="4" name="Text 2"/>
+          <p:cNvSpPr/>
+          <p:nvPr/>
+        </p:nvSpPr>
+        <p:spPr>
+          <a:xfrm>
+            <a:off x="566928" y="1417320"/>
+            <a:ext cx="11057839" cy="914400"/>
+          </a:xfrm>
+          <a:prstGeom prst="rect">
+            <a:avLst/>
+          </a:prstGeom>
+          <a:noFill/>
+          <a:ln/>
+        </p:spPr>
+        <p:txBody>
+          <a:bodyPr wrap="square" lIns="0" tIns="0" rIns="0" bIns="0" rtlCol="0" anchor="t"/>
+          <a:lstStyle/>
+          <a:p>
+            <a:pPr algn="l" indent="0" marL="0">
+              <a:lnSpc>
+                <a:spcPct val="105000"/>
+              </a:lnSpc>
+              <a:buNone/>
+            </a:pPr>
+            <a:r>
+              <a:rPr lang="en-US" sz="1450" b="1" dirty="0">
+                <a:solidFill>
+                  <a:srgbClr val="1B2A38"/>
+                </a:solidFill>
+                <a:latin typeface="Calibri" pitchFamily="34" charset="0"/>
+                <a:ea typeface="Calibri" pitchFamily="34" charset="-122"/>
+                <a:cs typeface="Calibri" pitchFamily="34" charset="-120"/>
+              </a:rPr>
+              <a:t>A ‘leukemic hiatus’ (blasts and mature cells without intermediate forms) suggests:</a:t>
+            </a:r>
+            <a:endParaRPr lang="en-US" sz="1450" dirty="0"/>
+          </a:p>
+        </p:txBody>
+      </p:sp>
+      <p:sp>
+        <p:nvSpPr>
+          <p:cNvPr id="5" name="Text 3"/>
+          <p:cNvSpPr/>
+          <p:nvPr/>
+        </p:nvSpPr>
+        <p:spPr>
+          <a:xfrm>
+            <a:off x="658368" y="2395728"/>
+            <a:ext cx="6192390" cy="3017520"/>
+          </a:xfrm>
+          <a:prstGeom prst="rect">
+            <a:avLst/>
+          </a:prstGeom>
+          <a:noFill/>
+          <a:ln/>
+        </p:spPr>
+        <p:txBody>
+          <a:bodyPr wrap="square" lIns="0" tIns="0" rIns="0" bIns="0" rtlCol="0" anchor="t"/>
+          <a:lstStyle/>
+          <a:p>
+            <a:pPr algn="l" indent="0" marL="0">
+              <a:spcAft>
+                <a:spcPts val="600"/>
+              </a:spcAft>
+              <a:buNone/>
+            </a:pPr>
+            <a:r>
+              <a:rPr lang="en-US" sz="1350" dirty="0">
+                <a:solidFill>
+                  <a:srgbClr val="33444F"/>
+                </a:solidFill>
+                <a:latin typeface="Calibri" pitchFamily="34" charset="0"/>
+                <a:ea typeface="Calibri" pitchFamily="34" charset="-122"/>
+                <a:cs typeface="Calibri" pitchFamily="34" charset="-120"/>
+              </a:rPr>
+              <a:t>A. Reactive left shift</a:t>
+            </a:r>
+            <a:endParaRPr lang="en-US" sz="1350" dirty="0"/>
+          </a:p>
+          <a:p>
+            <a:pPr algn="l" indent="0" marL="0">
+              <a:spcAft>
+                <a:spcPts val="600"/>
+              </a:spcAft>
+              <a:buNone/>
+            </a:pPr>
+            <a:r>
+              <a:rPr lang="en-US" sz="1350" b="1" dirty="0">
+                <a:solidFill>
+                  <a:srgbClr val="8E1622"/>
+                </a:solidFill>
+                <a:latin typeface="Calibri" pitchFamily="34" charset="0"/>
+                <a:ea typeface="Calibri" pitchFamily="34" charset="-122"/>
+                <a:cs typeface="Calibri" pitchFamily="34" charset="-120"/>
+              </a:rPr>
+              <a:t>B. Acute leukemia</a:t>
+            </a:r>
+            <a:endParaRPr lang="en-US" sz="1350" dirty="0"/>
+          </a:p>
+          <a:p>
+            <a:pPr algn="l" indent="0" marL="0">
+              <a:spcAft>
+                <a:spcPts val="600"/>
+              </a:spcAft>
+              <a:buNone/>
+            </a:pPr>
+            <a:r>
+              <a:rPr lang="en-US" sz="1350" dirty="0">
+                <a:solidFill>
+                  <a:srgbClr val="33444F"/>
+                </a:solidFill>
+                <a:latin typeface="Calibri" pitchFamily="34" charset="0"/>
+                <a:ea typeface="Calibri" pitchFamily="34" charset="-122"/>
+                <a:cs typeface="Calibri" pitchFamily="34" charset="-120"/>
+              </a:rPr>
+              <a:t>C. CML</a:t>
+            </a:r>
+            <a:endParaRPr lang="en-US" sz="1350" dirty="0"/>
+          </a:p>
+          <a:p>
+            <a:pPr algn="l" indent="0" marL="0">
+              <a:spcAft>
+                <a:spcPts val="600"/>
+              </a:spcAft>
+              <a:buNone/>
+            </a:pPr>
+            <a:r>
+              <a:rPr lang="en-US" sz="1350" dirty="0">
+                <a:solidFill>
+                  <a:srgbClr val="33444F"/>
+                </a:solidFill>
+                <a:latin typeface="Calibri" pitchFamily="34" charset="0"/>
+                <a:ea typeface="Calibri" pitchFamily="34" charset="-122"/>
+                <a:cs typeface="Calibri" pitchFamily="34" charset="-120"/>
+              </a:rPr>
+              <a:t>D. Leukemoid reaction</a:t>
+            </a:r>
+            <a:endParaRPr lang="en-US" sz="1350" dirty="0"/>
+          </a:p>
+          <a:p>
+            <a:pPr algn="l" indent="0" marL="0">
+              <a:spcAft>
+                <a:spcPts val="600"/>
+              </a:spcAft>
+              <a:buNone/>
+            </a:pPr>
+            <a:r>
+              <a:rPr lang="en-US" sz="1350" dirty="0">
+                <a:solidFill>
+                  <a:srgbClr val="33444F"/>
+                </a:solidFill>
+                <a:latin typeface="Calibri" pitchFamily="34" charset="0"/>
+                <a:ea typeface="Calibri" pitchFamily="34" charset="-122"/>
+                <a:cs typeface="Calibri" pitchFamily="34" charset="-120"/>
+              </a:rPr>
+              <a:t>E. Normal marrow</a:t>
+            </a:r>
+            <a:endParaRPr lang="en-US" sz="1350" dirty="0"/>
+          </a:p>
+        </p:txBody>
+      </p:sp>
+      <p:sp>
+        <p:nvSpPr>
+          <p:cNvPr id="6" name="Shape 4"/>
+          <p:cNvSpPr/>
+          <p:nvPr/>
+        </p:nvSpPr>
+        <p:spPr>
+          <a:xfrm>
+            <a:off x="7201632" y="2395728"/>
+            <a:ext cx="4423136" cy="3246120"/>
+          </a:xfrm>
+          <a:prstGeom prst="roundRect">
+            <a:avLst>
+              <a:gd name="adj" fmla="val 2535"/>
+            </a:avLst>
+          </a:prstGeom>
+          <a:solidFill>
+            <a:srgbClr val="FBEAEC"/>
+          </a:solidFill>
+          <a:ln/>
+          <a:effectLst>
+            <a:outerShdw sx="100000" sy="100000" kx="0" ky="0" algn="bl" rotWithShape="0" blurRad="88900" dist="25400" dir="5400000">
+              <a:srgbClr val="22303C">
+                <a:alpha val="12000"/>
+              </a:srgbClr>
+            </a:outerShdw>
+          </a:effectLst>
+        </p:spPr>
+        <p:txBody>
+          <a:bodyPr/>
+          <a:p/>
+        </p:txBody>
+      </p:sp>
+      <p:sp>
+        <p:nvSpPr>
+          <p:cNvPr id="7" name="Text 5"/>
+          <p:cNvSpPr/>
+          <p:nvPr/>
+        </p:nvSpPr>
+        <p:spPr>
+          <a:xfrm>
+            <a:off x="7439376" y="2578608"/>
+            <a:ext cx="3965936" cy="457200"/>
+          </a:xfrm>
+          <a:prstGeom prst="rect">
+            <a:avLst/>
+          </a:prstGeom>
+          <a:noFill/>
+          <a:ln/>
+        </p:spPr>
+        <p:txBody>
+          <a:bodyPr wrap="square" lIns="0" tIns="0" rIns="0" bIns="0" rtlCol="0" anchor="ctr"/>
+          <a:lstStyle/>
+          <a:p>
+            <a:pPr indent="0" marL="0">
+              <a:buNone/>
+            </a:pPr>
+            <a:r>
+              <a:rPr lang="en-US" sz="1500" b="1" dirty="0">
+                <a:solidFill>
+                  <a:srgbClr val="C62133"/>
+                </a:solidFill>
+                <a:latin typeface="Calibri" pitchFamily="34" charset="0"/>
+                <a:ea typeface="Calibri" pitchFamily="34" charset="-122"/>
+                <a:cs typeface="Calibri" pitchFamily="34" charset="-120"/>
+              </a:rPr>
+              <a:t>ANSWER  </a:t>
+            </a:r>
+            <a:pPr indent="0" marL="0">
+              <a:buNone/>
+            </a:pPr>
+            <a:r>
+              <a:rPr lang="en-US" sz="1500" b="1" dirty="0">
+                <a:solidFill>
+                  <a:srgbClr val="1B2A38"/>
+                </a:solidFill>
+                <a:latin typeface="Calibri" pitchFamily="34" charset="0"/>
+                <a:ea typeface="Calibri" pitchFamily="34" charset="-122"/>
+                <a:cs typeface="Calibri" pitchFamily="34" charset="-120"/>
+              </a:rPr>
+              <a:t>B — Acute leukemia</a:t>
+            </a:r>
+            <a:endParaRPr lang="en-US" sz="1500" dirty="0"/>
+          </a:p>
+        </p:txBody>
+      </p:sp>
+      <p:sp>
+        <p:nvSpPr>
+          <p:cNvPr id="8" name="Text 6"/>
+          <p:cNvSpPr/>
+          <p:nvPr/>
+        </p:nvSpPr>
+        <p:spPr>
+          <a:xfrm>
+            <a:off x="7439376" y="3127248"/>
+            <a:ext cx="3947648" cy="2377440"/>
+          </a:xfrm>
+          <a:prstGeom prst="rect">
+            <a:avLst/>
+          </a:prstGeom>
+          <a:noFill/>
+          <a:ln/>
+        </p:spPr>
+        <p:txBody>
+          <a:bodyPr wrap="square" lIns="0" tIns="0" rIns="0" bIns="0" rtlCol="0" anchor="t"/>
+          <a:lstStyle/>
+          <a:p>
+            <a:pPr algn="l" indent="0" marL="0">
+              <a:lnSpc>
+                <a:spcPct val="108000"/>
+              </a:lnSpc>
+              <a:buNone/>
+            </a:pPr>
+            <a:r>
+              <a:rPr lang="en-US" sz="1250" dirty="0">
+                <a:solidFill>
+                  <a:srgbClr val="33444F"/>
+                </a:solidFill>
+                <a:latin typeface="Calibri" pitchFamily="34" charset="0"/>
+                <a:ea typeface="Calibri" pitchFamily="34" charset="-122"/>
+                <a:cs typeface="Calibri" pitchFamily="34" charset="-120"/>
+              </a:rPr>
+              <a:t>The gap between blasts and mature cells (absent intermediates) is characteristic of acute leukemia, unlike a reactive spectrum.</a:t>
+            </a:r>
+            <a:endParaRPr lang="en-US" sz="1250" dirty="0"/>
+          </a:p>
+        </p:txBody>
+      </p:sp>
+      <p:sp>
+        <p:nvSpPr>
+          <p:cNvPr id="9" name="Text 7"/>
+          <p:cNvSpPr/>
+          <p:nvPr/>
+        </p:nvSpPr>
+        <p:spPr>
+          <a:xfrm>
+            <a:off x="566928" y="6473952"/>
+            <a:ext cx="7772400" cy="274320"/>
+          </a:xfrm>
+          <a:prstGeom prst="rect">
+            <a:avLst/>
+          </a:prstGeom>
+          <a:noFill/>
+          <a:ln/>
+        </p:spPr>
+        <p:txBody>
+          <a:bodyPr wrap="square" lIns="0" tIns="0" rIns="0" bIns="0" rtlCol="0" anchor="ctr"/>
+          <a:lstStyle/>
+          <a:p>
+            <a:pPr algn="l" indent="0" marL="0">
+              <a:buNone/>
+            </a:pPr>
+            <a:r>
+              <a:rPr lang="en-US" sz="850" dirty="0">
+                <a:solidFill>
+                  <a:srgbClr val="9AA8B4"/>
+                </a:solidFill>
+                <a:latin typeface="Calibri" pitchFamily="34" charset="0"/>
+                <a:ea typeface="Calibri" pitchFamily="34" charset="-122"/>
+                <a:cs typeface="Calibri" pitchFamily="34" charset="-120"/>
+              </a:rPr>
+              <a:t>Makassed General Hospital  ·  Department of Laboratory Medicine</a:t>
+            </a:r>
+            <a:endParaRPr lang="en-US" sz="850" dirty="0"/>
+          </a:p>
+        </p:txBody>
+      </p:sp>
+      <p:sp>
+        <p:nvSpPr>
+          <p:cNvPr id="10" name="Text 8"/>
+          <p:cNvSpPr/>
+          <p:nvPr/>
+        </p:nvSpPr>
+        <p:spPr>
+          <a:xfrm>
+            <a:off x="9814255" y="6473952"/>
+            <a:ext cx="1828800" cy="274320"/>
+          </a:xfrm>
+          <a:prstGeom prst="rect">
+            <a:avLst/>
+          </a:prstGeom>
+          <a:noFill/>
+          <a:ln/>
+        </p:spPr>
+        <p:txBody>
+          <a:bodyPr wrap="square" lIns="0" tIns="0" rIns="0" bIns="0" rtlCol="0" anchor="ctr"/>
+          <a:lstStyle/>
+          <a:p>
+            <a:pPr algn="r" indent="0" marL="0">
+              <a:buNone/>
+            </a:pPr>
+            <a:r>
+              <a:rPr lang="en-US" sz="850" dirty="0">
+                <a:solidFill>
+                  <a:srgbClr val="9AA8B4"/>
+                </a:solidFill>
+                <a:latin typeface="Calibri" pitchFamily="34" charset="0"/>
+                <a:ea typeface="Calibri" pitchFamily="34" charset="-122"/>
+                <a:cs typeface="Calibri" pitchFamily="34" charset="-120"/>
+              </a:rPr>
+              <a:t>CP Lecture Series</a:t>
+            </a:r>
+            <a:pPr algn="r" indent="0" marL="0">
+              <a:buNone/>
+            </a:pPr>
+            <a:r>
+              <a:rPr lang="en-US" sz="850" dirty="0">
+                <a:solidFill>
+                  <a:srgbClr val="DCE4EC"/>
+                </a:solidFill>
+                <a:latin typeface="Calibri" pitchFamily="34" charset="0"/>
+                <a:ea typeface="Calibri" pitchFamily="34" charset="-122"/>
+                <a:cs typeface="Calibri" pitchFamily="34" charset="-120"/>
+              </a:rPr>
+              <a:t>   ·   </a:t>
+            </a:r>
+            <a:pPr algn="r" indent="0" marL="0">
+              <a:buNone/>
+            </a:pPr>
+            <a:r>
+              <a:rPr lang="en-US" sz="850" b="1" dirty="0">
+                <a:solidFill>
+                  <a:srgbClr val="C62133"/>
+                </a:solidFill>
+                <a:latin typeface="Calibri" pitchFamily="34" charset="0"/>
+                <a:ea typeface="Calibri" pitchFamily="34" charset="-122"/>
+                <a:cs typeface="Calibri" pitchFamily="34" charset="-120"/>
+              </a:rPr>
+              <a:t>19</a:t>
+            </a:r>
+            <a:endParaRPr lang="en-US" sz="850" dirty="0"/>
+          </a:p>
+        </p:txBody>
+      </p:sp>
+    </p:spTree>
+  </p:cSld>
+  <p:clrMapOvr>
+    <a:masterClrMapping/>
+  </p:clrMapOvr>
+</p:sld>
+</file>
+
+<file path=ppt/slides/slide28.xml><?xml version="1.0" encoding="utf-8"?>
+<p:sld xmlns:a="http://schemas.openxmlformats.org/drawingml/2006/main" xmlns:p="http://schemas.openxmlformats.org/presentationml/2006/main" xmlns:r="http://schemas.openxmlformats.org/officeDocument/2006/relationships">
+  <p:cSld>
+    <p:spTree>
+      <p:nvGrpSpPr>
+        <p:cNvPr id="1" name=""/>
+        <p:cNvGrpSpPr/>
+        <p:nvPr/>
+      </p:nvGrpSpPr>
+      <p:grpSpPr/>
+      <p:sp>
+        <p:nvSpPr>
+          <p:cNvPr id="2" name="Text 0"/>
+          <p:cNvSpPr/>
+          <p:nvPr/>
+        </p:nvSpPr>
+        <p:spPr>
+          <a:xfrm>
+            <a:off x="566928" y="329184"/>
+            <a:ext cx="10515600" cy="310896"/>
+          </a:xfrm>
+          <a:prstGeom prst="rect">
+            <a:avLst/>
+          </a:prstGeom>
+          <a:noFill/>
+          <a:ln/>
+        </p:spPr>
+        <p:txBody>
+          <a:bodyPr wrap="square" lIns="0" tIns="0" rIns="0" bIns="0" rtlCol="0" anchor="ctr"/>
+          <a:lstStyle/>
+          <a:p>
+            <a:pPr algn="l" indent="0" marL="0">
+              <a:buNone/>
+            </a:pPr>
+            <a:r>
+              <a:rPr lang="en-US" sz="1100" b="1" spc="150" kern="0" dirty="0">
+                <a:solidFill>
+                  <a:srgbClr val="C62133"/>
+                </a:solidFill>
+                <a:latin typeface="Calibri" pitchFamily="34" charset="0"/>
+                <a:ea typeface="Calibri" pitchFamily="34" charset="-122"/>
+                <a:cs typeface="Calibri" pitchFamily="34" charset="-120"/>
+              </a:rPr>
+              <a:t>HEMATOLOGY &amp; COAGULATION   ·   BOARD REVIEW  ·  Q2</a:t>
+            </a:r>
+            <a:endParaRPr lang="en-US" sz="1100" dirty="0"/>
+          </a:p>
+        </p:txBody>
+      </p:sp>
+      <p:sp>
+        <p:nvSpPr>
+          <p:cNvPr id="3" name="Text 1"/>
+          <p:cNvSpPr/>
+          <p:nvPr/>
+        </p:nvSpPr>
+        <p:spPr>
+          <a:xfrm>
+            <a:off x="566928" y="713232"/>
+            <a:ext cx="11064240" cy="749808"/>
+          </a:xfrm>
+          <a:prstGeom prst="rect">
+            <a:avLst/>
+          </a:prstGeom>
+          <a:noFill/>
+          <a:ln/>
+        </p:spPr>
+        <p:txBody>
+          <a:bodyPr wrap="square" lIns="0" tIns="0" rIns="0" bIns="0" rtlCol="0" anchor="ctr"/>
+          <a:lstStyle/>
+          <a:p>
+            <a:pPr algn="l" indent="0" marL="0">
+              <a:buNone/>
+            </a:pPr>
+            <a:r>
+              <a:rPr lang="en-US" sz="2600" b="1" dirty="0">
+                <a:solidFill>
+                  <a:srgbClr val="0E3A5F"/>
+                </a:solidFill>
+                <a:latin typeface="Calibri" pitchFamily="34" charset="0"/>
+                <a:ea typeface="Calibri" pitchFamily="34" charset="-122"/>
+                <a:cs typeface="Calibri" pitchFamily="34" charset="-120"/>
+              </a:rPr>
+              <a:t>Board-Style Review</a:t>
+            </a:r>
+            <a:endParaRPr lang="en-US" sz="2600" dirty="0"/>
+          </a:p>
+        </p:txBody>
+      </p:sp>
+      <p:sp>
+        <p:nvSpPr>
+          <p:cNvPr id="4" name="Text 2"/>
+          <p:cNvSpPr/>
+          <p:nvPr/>
+        </p:nvSpPr>
+        <p:spPr>
+          <a:xfrm>
+            <a:off x="566928" y="1417320"/>
+            <a:ext cx="11057839" cy="914400"/>
+          </a:xfrm>
+          <a:prstGeom prst="rect">
+            <a:avLst/>
+          </a:prstGeom>
+          <a:noFill/>
+          <a:ln/>
+        </p:spPr>
+        <p:txBody>
+          <a:bodyPr wrap="square" lIns="0" tIns="0" rIns="0" bIns="0" rtlCol="0" anchor="t"/>
+          <a:lstStyle/>
+          <a:p>
+            <a:pPr algn="l" indent="0" marL="0">
+              <a:lnSpc>
+                <a:spcPct val="105000"/>
+              </a:lnSpc>
+              <a:buNone/>
+            </a:pPr>
+            <a:r>
+              <a:rPr lang="en-US" sz="1450" b="1" dirty="0">
+                <a:solidFill>
+                  <a:srgbClr val="1B2A38"/>
+                </a:solidFill>
+                <a:latin typeface="Calibri" pitchFamily="34" charset="0"/>
+                <a:ea typeface="Calibri" pitchFamily="34" charset="-122"/>
+                <a:cs typeface="Calibri" pitchFamily="34" charset="-120"/>
+              </a:rPr>
+              <a:t>Auer rods on a smear indicate:</a:t>
+            </a:r>
+            <a:endParaRPr lang="en-US" sz="1450" dirty="0"/>
+          </a:p>
+        </p:txBody>
+      </p:sp>
+      <p:sp>
+        <p:nvSpPr>
+          <p:cNvPr id="5" name="Text 3"/>
+          <p:cNvSpPr/>
+          <p:nvPr/>
+        </p:nvSpPr>
+        <p:spPr>
+          <a:xfrm>
+            <a:off x="658368" y="2395728"/>
+            <a:ext cx="6192390" cy="3017520"/>
+          </a:xfrm>
+          <a:prstGeom prst="rect">
+            <a:avLst/>
+          </a:prstGeom>
+          <a:noFill/>
+          <a:ln/>
+        </p:spPr>
+        <p:txBody>
+          <a:bodyPr wrap="square" lIns="0" tIns="0" rIns="0" bIns="0" rtlCol="0" anchor="t"/>
+          <a:lstStyle/>
+          <a:p>
+            <a:pPr algn="l" indent="0" marL="0">
+              <a:spcAft>
+                <a:spcPts val="600"/>
+              </a:spcAft>
+              <a:buNone/>
+            </a:pPr>
+            <a:r>
+              <a:rPr lang="en-US" sz="1350" dirty="0">
+                <a:solidFill>
+                  <a:srgbClr val="33444F"/>
+                </a:solidFill>
+                <a:latin typeface="Calibri" pitchFamily="34" charset="0"/>
+                <a:ea typeface="Calibri" pitchFamily="34" charset="-122"/>
+                <a:cs typeface="Calibri" pitchFamily="34" charset="-120"/>
+              </a:rPr>
+              <a:t>A. Reactive neutrophilia</a:t>
+            </a:r>
+            <a:endParaRPr lang="en-US" sz="1350" dirty="0"/>
+          </a:p>
+          <a:p>
+            <a:pPr algn="l" indent="0" marL="0">
+              <a:spcAft>
+                <a:spcPts val="600"/>
+              </a:spcAft>
+              <a:buNone/>
+            </a:pPr>
+            <a:r>
+              <a:rPr lang="en-US" sz="1350" b="1" dirty="0">
+                <a:solidFill>
+                  <a:srgbClr val="8E1622"/>
+                </a:solidFill>
+                <a:latin typeface="Calibri" pitchFamily="34" charset="0"/>
+                <a:ea typeface="Calibri" pitchFamily="34" charset="-122"/>
+                <a:cs typeface="Calibri" pitchFamily="34" charset="-120"/>
+              </a:rPr>
+              <a:t>B. Myeloid blasts (AML)</a:t>
+            </a:r>
+            <a:endParaRPr lang="en-US" sz="1350" dirty="0"/>
+          </a:p>
+          <a:p>
+            <a:pPr algn="l" indent="0" marL="0">
+              <a:spcAft>
+                <a:spcPts val="600"/>
+              </a:spcAft>
+              <a:buNone/>
+            </a:pPr>
+            <a:r>
+              <a:rPr lang="en-US" sz="1350" dirty="0">
+                <a:solidFill>
+                  <a:srgbClr val="33444F"/>
+                </a:solidFill>
+                <a:latin typeface="Calibri" pitchFamily="34" charset="0"/>
+                <a:ea typeface="Calibri" pitchFamily="34" charset="-122"/>
+                <a:cs typeface="Calibri" pitchFamily="34" charset="-120"/>
+              </a:rPr>
+              <a:t>C. CLL</a:t>
+            </a:r>
+            <a:endParaRPr lang="en-US" sz="1350" dirty="0"/>
+          </a:p>
+          <a:p>
+            <a:pPr algn="l" indent="0" marL="0">
+              <a:spcAft>
+                <a:spcPts val="600"/>
+              </a:spcAft>
+              <a:buNone/>
+            </a:pPr>
+            <a:r>
+              <a:rPr lang="en-US" sz="1350" dirty="0">
+                <a:solidFill>
+                  <a:srgbClr val="33444F"/>
+                </a:solidFill>
+                <a:latin typeface="Calibri" pitchFamily="34" charset="0"/>
+                <a:ea typeface="Calibri" pitchFamily="34" charset="-122"/>
+                <a:cs typeface="Calibri" pitchFamily="34" charset="-120"/>
+              </a:rPr>
+              <a:t>D. Viral infection</a:t>
+            </a:r>
+            <a:endParaRPr lang="en-US" sz="1350" dirty="0"/>
+          </a:p>
+          <a:p>
+            <a:pPr algn="l" indent="0" marL="0">
+              <a:spcAft>
+                <a:spcPts val="600"/>
+              </a:spcAft>
+              <a:buNone/>
+            </a:pPr>
+            <a:r>
+              <a:rPr lang="en-US" sz="1350" dirty="0">
+                <a:solidFill>
+                  <a:srgbClr val="33444F"/>
+                </a:solidFill>
+                <a:latin typeface="Calibri" pitchFamily="34" charset="0"/>
+                <a:ea typeface="Calibri" pitchFamily="34" charset="-122"/>
+                <a:cs typeface="Calibri" pitchFamily="34" charset="-120"/>
+              </a:rPr>
+              <a:t>E. Megaloblastic anemia</a:t>
+            </a:r>
+            <a:endParaRPr lang="en-US" sz="1350" dirty="0"/>
+          </a:p>
+        </p:txBody>
+      </p:sp>
+      <p:sp>
+        <p:nvSpPr>
+          <p:cNvPr id="6" name="Shape 4"/>
+          <p:cNvSpPr/>
+          <p:nvPr/>
+        </p:nvSpPr>
+        <p:spPr>
+          <a:xfrm>
+            <a:off x="7201632" y="2395728"/>
+            <a:ext cx="4423136" cy="3246120"/>
+          </a:xfrm>
+          <a:prstGeom prst="roundRect">
+            <a:avLst>
+              <a:gd name="adj" fmla="val 2535"/>
+            </a:avLst>
+          </a:prstGeom>
+          <a:solidFill>
+            <a:srgbClr val="FBEAEC"/>
+          </a:solidFill>
+          <a:ln/>
+          <a:effectLst>
+            <a:outerShdw sx="100000" sy="100000" kx="0" ky="0" algn="bl" rotWithShape="0" blurRad="88900" dist="25400" dir="5400000">
+              <a:srgbClr val="22303C">
+                <a:alpha val="12000"/>
+              </a:srgbClr>
+            </a:outerShdw>
+          </a:effectLst>
+        </p:spPr>
+        <p:txBody>
+          <a:bodyPr/>
+          <a:p/>
+        </p:txBody>
+      </p:sp>
+      <p:sp>
+        <p:nvSpPr>
+          <p:cNvPr id="7" name="Text 5"/>
+          <p:cNvSpPr/>
+          <p:nvPr/>
+        </p:nvSpPr>
+        <p:spPr>
+          <a:xfrm>
+            <a:off x="7439376" y="2578608"/>
+            <a:ext cx="3965936" cy="457200"/>
+          </a:xfrm>
+          <a:prstGeom prst="rect">
+            <a:avLst/>
+          </a:prstGeom>
+          <a:noFill/>
+          <a:ln/>
+        </p:spPr>
+        <p:txBody>
+          <a:bodyPr wrap="square" lIns="0" tIns="0" rIns="0" bIns="0" rtlCol="0" anchor="ctr"/>
+          <a:lstStyle/>
+          <a:p>
+            <a:pPr indent="0" marL="0">
+              <a:buNone/>
+            </a:pPr>
+            <a:r>
+              <a:rPr lang="en-US" sz="1500" b="1" dirty="0">
+                <a:solidFill>
+                  <a:srgbClr val="C62133"/>
+                </a:solidFill>
+                <a:latin typeface="Calibri" pitchFamily="34" charset="0"/>
+                <a:ea typeface="Calibri" pitchFamily="34" charset="-122"/>
+                <a:cs typeface="Calibri" pitchFamily="34" charset="-120"/>
+              </a:rPr>
+              <a:t>ANSWER  </a:t>
+            </a:r>
+            <a:pPr indent="0" marL="0">
+              <a:buNone/>
+            </a:pPr>
+            <a:r>
+              <a:rPr lang="en-US" sz="1500" b="1" dirty="0">
+                <a:solidFill>
+                  <a:srgbClr val="1B2A38"/>
+                </a:solidFill>
+                <a:latin typeface="Calibri" pitchFamily="34" charset="0"/>
+                <a:ea typeface="Calibri" pitchFamily="34" charset="-122"/>
+                <a:cs typeface="Calibri" pitchFamily="34" charset="-120"/>
+              </a:rPr>
+              <a:t>B — Myeloid blasts (AML)</a:t>
+            </a:r>
+            <a:endParaRPr lang="en-US" sz="1500" dirty="0"/>
+          </a:p>
+        </p:txBody>
+      </p:sp>
+      <p:sp>
+        <p:nvSpPr>
+          <p:cNvPr id="8" name="Text 6"/>
+          <p:cNvSpPr/>
+          <p:nvPr/>
+        </p:nvSpPr>
+        <p:spPr>
+          <a:xfrm>
+            <a:off x="7439376" y="3127248"/>
+            <a:ext cx="3947648" cy="2377440"/>
+          </a:xfrm>
+          <a:prstGeom prst="rect">
+            <a:avLst/>
+          </a:prstGeom>
+          <a:noFill/>
+          <a:ln/>
+        </p:spPr>
+        <p:txBody>
+          <a:bodyPr wrap="square" lIns="0" tIns="0" rIns="0" bIns="0" rtlCol="0" anchor="t"/>
+          <a:lstStyle/>
+          <a:p>
+            <a:pPr algn="l" indent="0" marL="0">
+              <a:lnSpc>
+                <a:spcPct val="108000"/>
+              </a:lnSpc>
+              <a:buNone/>
+            </a:pPr>
+            <a:r>
+              <a:rPr lang="en-US" sz="1250" dirty="0">
+                <a:solidFill>
+                  <a:srgbClr val="33444F"/>
+                </a:solidFill>
+                <a:latin typeface="Calibri" pitchFamily="34" charset="0"/>
+                <a:ea typeface="Calibri" pitchFamily="34" charset="-122"/>
+                <a:cs typeface="Calibri" pitchFamily="34" charset="-120"/>
+              </a:rPr>
+              <a:t>Auer rods are pathognomonic of myeloid lineage blasts, seen in AML.</a:t>
+            </a:r>
+            <a:endParaRPr lang="en-US" sz="1250" dirty="0"/>
+          </a:p>
+        </p:txBody>
+      </p:sp>
+      <p:sp>
+        <p:nvSpPr>
+          <p:cNvPr id="9" name="Text 7"/>
+          <p:cNvSpPr/>
+          <p:nvPr/>
+        </p:nvSpPr>
+        <p:spPr>
+          <a:xfrm>
+            <a:off x="566928" y="6473952"/>
+            <a:ext cx="7772400" cy="274320"/>
+          </a:xfrm>
+          <a:prstGeom prst="rect">
+            <a:avLst/>
+          </a:prstGeom>
+          <a:noFill/>
+          <a:ln/>
+        </p:spPr>
+        <p:txBody>
+          <a:bodyPr wrap="square" lIns="0" tIns="0" rIns="0" bIns="0" rtlCol="0" anchor="ctr"/>
+          <a:lstStyle/>
+          <a:p>
+            <a:pPr algn="l" indent="0" marL="0">
+              <a:buNone/>
+            </a:pPr>
+            <a:r>
+              <a:rPr lang="en-US" sz="850" dirty="0">
+                <a:solidFill>
+                  <a:srgbClr val="9AA8B4"/>
+                </a:solidFill>
+                <a:latin typeface="Calibri" pitchFamily="34" charset="0"/>
+                <a:ea typeface="Calibri" pitchFamily="34" charset="-122"/>
+                <a:cs typeface="Calibri" pitchFamily="34" charset="-120"/>
+              </a:rPr>
+              <a:t>Makassed General Hospital  ·  Department of Laboratory Medicine</a:t>
+            </a:r>
+            <a:endParaRPr lang="en-US" sz="850" dirty="0"/>
+          </a:p>
+        </p:txBody>
+      </p:sp>
+      <p:sp>
+        <p:nvSpPr>
+          <p:cNvPr id="10" name="Text 8"/>
+          <p:cNvSpPr/>
+          <p:nvPr/>
+        </p:nvSpPr>
+        <p:spPr>
+          <a:xfrm>
+            <a:off x="9814255" y="6473952"/>
+            <a:ext cx="1828800" cy="274320"/>
+          </a:xfrm>
+          <a:prstGeom prst="rect">
+            <a:avLst/>
+          </a:prstGeom>
+          <a:noFill/>
+          <a:ln/>
+        </p:spPr>
+        <p:txBody>
+          <a:bodyPr wrap="square" lIns="0" tIns="0" rIns="0" bIns="0" rtlCol="0" anchor="ctr"/>
+          <a:lstStyle/>
+          <a:p>
+            <a:pPr algn="r" indent="0" marL="0">
+              <a:buNone/>
+            </a:pPr>
+            <a:r>
+              <a:rPr lang="en-US" sz="850" dirty="0">
+                <a:solidFill>
+                  <a:srgbClr val="9AA8B4"/>
+                </a:solidFill>
+                <a:latin typeface="Calibri" pitchFamily="34" charset="0"/>
+                <a:ea typeface="Calibri" pitchFamily="34" charset="-122"/>
+                <a:cs typeface="Calibri" pitchFamily="34" charset="-120"/>
+              </a:rPr>
+              <a:t>CP Lecture Series</a:t>
+            </a:r>
+            <a:pPr algn="r" indent="0" marL="0">
+              <a:buNone/>
+            </a:pPr>
+            <a:r>
+              <a:rPr lang="en-US" sz="850" dirty="0">
+                <a:solidFill>
+                  <a:srgbClr val="DCE4EC"/>
+                </a:solidFill>
+                <a:latin typeface="Calibri" pitchFamily="34" charset="0"/>
+                <a:ea typeface="Calibri" pitchFamily="34" charset="-122"/>
+                <a:cs typeface="Calibri" pitchFamily="34" charset="-120"/>
+              </a:rPr>
+              <a:t>   ·   </a:t>
+            </a:r>
+            <a:pPr algn="r" indent="0" marL="0">
+              <a:buNone/>
+            </a:pPr>
+            <a:r>
+              <a:rPr lang="en-US" sz="850" b="1" dirty="0">
+                <a:solidFill>
+                  <a:srgbClr val="C62133"/>
+                </a:solidFill>
+                <a:latin typeface="Calibri" pitchFamily="34" charset="0"/>
+                <a:ea typeface="Calibri" pitchFamily="34" charset="-122"/>
+                <a:cs typeface="Calibri" pitchFamily="34" charset="-120"/>
+              </a:rPr>
+              <a:t>18</a:t>
+            </a:r>
+            <a:endParaRPr lang="en-US" sz="850" dirty="0"/>
+          </a:p>
+        </p:txBody>
+      </p:sp>
+    </p:spTree>
+  </p:cSld>
+  <p:clrMapOvr>
+    <a:masterClrMapping/>
+  </p:clrMapOvr>
+</p:sld>
+</file>
+
+<file path=ppt/slides/slide29.xml><?xml version="1.0" encoding="utf-8"?>
+<p:sld xmlns:a="http://schemas.openxmlformats.org/drawingml/2006/main" xmlns:p="http://schemas.openxmlformats.org/presentationml/2006/main" xmlns:r="http://schemas.openxmlformats.org/officeDocument/2006/relationships">
+  <p:cSld>
+    <p:spTree>
+      <p:nvGrpSpPr>
+        <p:cNvPr id="1" name=""/>
+        <p:cNvGrpSpPr/>
+        <p:nvPr/>
+      </p:nvGrpSpPr>
+      <p:grpSpPr/>
+      <p:sp>
+        <p:nvSpPr>
+          <p:cNvPr id="2" name="Text 0"/>
+          <p:cNvSpPr/>
+          <p:nvPr/>
+        </p:nvSpPr>
+        <p:spPr>
+          <a:xfrm>
+            <a:off x="566928" y="329184"/>
+            <a:ext cx="10515600" cy="310896"/>
+          </a:xfrm>
+          <a:prstGeom prst="rect">
+            <a:avLst/>
+          </a:prstGeom>
+          <a:noFill/>
+          <a:ln/>
+        </p:spPr>
+        <p:txBody>
+          <a:bodyPr wrap="square" lIns="0" tIns="0" rIns="0" bIns="0" rtlCol="0" anchor="ctr"/>
+          <a:lstStyle/>
+          <a:p>
+            <a:pPr algn="l" indent="0" marL="0">
+              <a:buNone/>
+            </a:pPr>
+            <a:r>
+              <a:rPr lang="en-US" sz="1100" b="1" spc="150" kern="0" dirty="0">
+                <a:solidFill>
+                  <a:srgbClr val="C62133"/>
+                </a:solidFill>
+                <a:latin typeface="Calibri" pitchFamily="34" charset="0"/>
+                <a:ea typeface="Calibri" pitchFamily="34" charset="-122"/>
+                <a:cs typeface="Calibri" pitchFamily="34" charset="-120"/>
+              </a:rPr>
+              <a:t>HEMATOLOGY &amp; COAGULATION   ·   BOARD REVIEW  ·  Q1</a:t>
+            </a:r>
+            <a:endParaRPr lang="en-US" sz="1100" dirty="0"/>
+          </a:p>
+        </p:txBody>
+      </p:sp>
+      <p:sp>
+        <p:nvSpPr>
+          <p:cNvPr id="3" name="Text 1"/>
+          <p:cNvSpPr/>
+          <p:nvPr/>
+        </p:nvSpPr>
+        <p:spPr>
+          <a:xfrm>
+            <a:off x="566928" y="713232"/>
+            <a:ext cx="11064240" cy="749808"/>
+          </a:xfrm>
+          <a:prstGeom prst="rect">
+            <a:avLst/>
+          </a:prstGeom>
+          <a:noFill/>
+          <a:ln/>
+        </p:spPr>
+        <p:txBody>
+          <a:bodyPr wrap="square" lIns="0" tIns="0" rIns="0" bIns="0" rtlCol="0" anchor="ctr"/>
+          <a:lstStyle/>
+          <a:p>
+            <a:pPr algn="l" indent="0" marL="0">
+              <a:buNone/>
+            </a:pPr>
+            <a:r>
+              <a:rPr lang="en-US" sz="2600" b="1" dirty="0">
+                <a:solidFill>
+                  <a:srgbClr val="0E3A5F"/>
+                </a:solidFill>
+                <a:latin typeface="Calibri" pitchFamily="34" charset="0"/>
+                <a:ea typeface="Calibri" pitchFamily="34" charset="-122"/>
+                <a:cs typeface="Calibri" pitchFamily="34" charset="-120"/>
+              </a:rPr>
+              <a:t>Board-Style Review</a:t>
+            </a:r>
+            <a:endParaRPr lang="en-US" sz="2600" dirty="0"/>
+          </a:p>
+        </p:txBody>
+      </p:sp>
+      <p:sp>
+        <p:nvSpPr>
+          <p:cNvPr id="4" name="Text 2"/>
+          <p:cNvSpPr/>
+          <p:nvPr/>
+        </p:nvSpPr>
+        <p:spPr>
+          <a:xfrm>
+            <a:off x="566928" y="1417320"/>
+            <a:ext cx="11057839" cy="914400"/>
+          </a:xfrm>
+          <a:prstGeom prst="rect">
+            <a:avLst/>
+          </a:prstGeom>
+          <a:noFill/>
+          <a:ln/>
+        </p:spPr>
+        <p:txBody>
+          <a:bodyPr wrap="square" lIns="0" tIns="0" rIns="0" bIns="0" rtlCol="0" anchor="t"/>
+          <a:lstStyle/>
+          <a:p>
+            <a:pPr algn="l" indent="0" marL="0">
+              <a:lnSpc>
+                <a:spcPct val="105000"/>
+              </a:lnSpc>
+              <a:buNone/>
+            </a:pPr>
+            <a:r>
+              <a:rPr lang="en-US" sz="1450" b="1" dirty="0">
+                <a:solidFill>
+                  <a:srgbClr val="1B2A38"/>
+                </a:solidFill>
+                <a:latin typeface="Calibri" pitchFamily="34" charset="0"/>
+                <a:ea typeface="Calibri" pitchFamily="34" charset="-122"/>
+                <a:cs typeface="Calibri" pitchFamily="34" charset="-120"/>
+              </a:rPr>
+              <a:t>White-cell counts should be interpreted as:</a:t>
+            </a:r>
+            <a:endParaRPr lang="en-US" sz="1450" dirty="0"/>
+          </a:p>
+        </p:txBody>
+      </p:sp>
+      <p:sp>
+        <p:nvSpPr>
+          <p:cNvPr id="5" name="Text 3"/>
+          <p:cNvSpPr/>
+          <p:nvPr/>
+        </p:nvSpPr>
+        <p:spPr>
+          <a:xfrm>
+            <a:off x="658368" y="2395728"/>
+            <a:ext cx="6192390" cy="3017520"/>
+          </a:xfrm>
+          <a:prstGeom prst="rect">
+            <a:avLst/>
+          </a:prstGeom>
+          <a:noFill/>
+          <a:ln/>
+        </p:spPr>
+        <p:txBody>
+          <a:bodyPr wrap="square" lIns="0" tIns="0" rIns="0" bIns="0" rtlCol="0" anchor="t"/>
+          <a:lstStyle/>
+          <a:p>
+            <a:pPr algn="l" indent="0" marL="0">
+              <a:spcAft>
+                <a:spcPts val="600"/>
+              </a:spcAft>
+              <a:buNone/>
+            </a:pPr>
+            <a:r>
+              <a:rPr lang="en-US" sz="1350" dirty="0">
+                <a:solidFill>
+                  <a:srgbClr val="33444F"/>
+                </a:solidFill>
+                <a:latin typeface="Calibri" pitchFamily="34" charset="0"/>
+                <a:ea typeface="Calibri" pitchFamily="34" charset="-122"/>
+                <a:cs typeface="Calibri" pitchFamily="34" charset="-120"/>
+              </a:rPr>
+              <a:t>A. Percentages only</a:t>
+            </a:r>
+            <a:endParaRPr lang="en-US" sz="1350" dirty="0"/>
+          </a:p>
+          <a:p>
+            <a:pPr algn="l" indent="0" marL="0">
+              <a:spcAft>
+                <a:spcPts val="600"/>
+              </a:spcAft>
+              <a:buNone/>
+            </a:pPr>
+            <a:r>
+              <a:rPr lang="en-US" sz="1350" b="1" dirty="0">
+                <a:solidFill>
+                  <a:srgbClr val="8E1622"/>
+                </a:solidFill>
+                <a:latin typeface="Calibri" pitchFamily="34" charset="0"/>
+                <a:ea typeface="Calibri" pitchFamily="34" charset="-122"/>
+                <a:cs typeface="Calibri" pitchFamily="34" charset="-120"/>
+              </a:rPr>
+              <a:t>B. Absolute counts</a:t>
+            </a:r>
+            <a:endParaRPr lang="en-US" sz="1350" dirty="0"/>
+          </a:p>
+          <a:p>
+            <a:pPr algn="l" indent="0" marL="0">
+              <a:spcAft>
+                <a:spcPts val="600"/>
+              </a:spcAft>
+              <a:buNone/>
+            </a:pPr>
+            <a:r>
+              <a:rPr lang="en-US" sz="1350" dirty="0">
+                <a:solidFill>
+                  <a:srgbClr val="33444F"/>
+                </a:solidFill>
+                <a:latin typeface="Calibri" pitchFamily="34" charset="0"/>
+                <a:ea typeface="Calibri" pitchFamily="34" charset="-122"/>
+                <a:cs typeface="Calibri" pitchFamily="34" charset="-120"/>
+              </a:rPr>
+              <a:t>C. Ratios only</a:t>
+            </a:r>
+            <a:endParaRPr lang="en-US" sz="1350" dirty="0"/>
+          </a:p>
+          <a:p>
+            <a:pPr algn="l" indent="0" marL="0">
+              <a:spcAft>
+                <a:spcPts val="600"/>
+              </a:spcAft>
+              <a:buNone/>
+            </a:pPr>
+            <a:r>
+              <a:rPr lang="en-US" sz="1350" dirty="0">
+                <a:solidFill>
+                  <a:srgbClr val="33444F"/>
+                </a:solidFill>
+                <a:latin typeface="Calibri" pitchFamily="34" charset="0"/>
+                <a:ea typeface="Calibri" pitchFamily="34" charset="-122"/>
+                <a:cs typeface="Calibri" pitchFamily="34" charset="-120"/>
+              </a:rPr>
+              <a:t>D. Relative to platelets</a:t>
+            </a:r>
+            <a:endParaRPr lang="en-US" sz="1350" dirty="0"/>
+          </a:p>
+          <a:p>
+            <a:pPr algn="l" indent="0" marL="0">
+              <a:spcAft>
+                <a:spcPts val="600"/>
+              </a:spcAft>
+              <a:buNone/>
+            </a:pPr>
+            <a:r>
+              <a:rPr lang="en-US" sz="1350" dirty="0">
+                <a:solidFill>
+                  <a:srgbClr val="33444F"/>
+                </a:solidFill>
+                <a:latin typeface="Calibri" pitchFamily="34" charset="0"/>
+                <a:ea typeface="Calibri" pitchFamily="34" charset="-122"/>
+                <a:cs typeface="Calibri" pitchFamily="34" charset="-120"/>
+              </a:rPr>
+              <a:t>E. Without the differential</a:t>
+            </a:r>
+            <a:endParaRPr lang="en-US" sz="1350" dirty="0"/>
+          </a:p>
+        </p:txBody>
+      </p:sp>
+      <p:sp>
+        <p:nvSpPr>
+          <p:cNvPr id="6" name="Shape 4"/>
+          <p:cNvSpPr/>
+          <p:nvPr/>
+        </p:nvSpPr>
+        <p:spPr>
+          <a:xfrm>
+            <a:off x="7201632" y="2395728"/>
+            <a:ext cx="4423136" cy="3246120"/>
+          </a:xfrm>
+          <a:prstGeom prst="roundRect">
+            <a:avLst>
+              <a:gd name="adj" fmla="val 2535"/>
+            </a:avLst>
+          </a:prstGeom>
+          <a:solidFill>
+            <a:srgbClr val="FBEAEC"/>
+          </a:solidFill>
+          <a:ln/>
+          <a:effectLst>
+            <a:outerShdw sx="100000" sy="100000" kx="0" ky="0" algn="bl" rotWithShape="0" blurRad="88900" dist="25400" dir="5400000">
+              <a:srgbClr val="22303C">
+                <a:alpha val="12000"/>
+              </a:srgbClr>
+            </a:outerShdw>
+          </a:effectLst>
+        </p:spPr>
+        <p:txBody>
+          <a:bodyPr/>
+          <a:p/>
+        </p:txBody>
+      </p:sp>
+      <p:sp>
+        <p:nvSpPr>
+          <p:cNvPr id="7" name="Text 5"/>
+          <p:cNvSpPr/>
+          <p:nvPr/>
+        </p:nvSpPr>
+        <p:spPr>
+          <a:xfrm>
+            <a:off x="7439376" y="2578608"/>
+            <a:ext cx="3965936" cy="457200"/>
+          </a:xfrm>
+          <a:prstGeom prst="rect">
+            <a:avLst/>
+          </a:prstGeom>
+          <a:noFill/>
+          <a:ln/>
+        </p:spPr>
+        <p:txBody>
+          <a:bodyPr wrap="square" lIns="0" tIns="0" rIns="0" bIns="0" rtlCol="0" anchor="ctr"/>
+          <a:lstStyle/>
+          <a:p>
+            <a:pPr indent="0" marL="0">
+              <a:buNone/>
+            </a:pPr>
+            <a:r>
+              <a:rPr lang="en-US" sz="1500" b="1" dirty="0">
+                <a:solidFill>
+                  <a:srgbClr val="C62133"/>
+                </a:solidFill>
+                <a:latin typeface="Calibri" pitchFamily="34" charset="0"/>
+                <a:ea typeface="Calibri" pitchFamily="34" charset="-122"/>
+                <a:cs typeface="Calibri" pitchFamily="34" charset="-120"/>
+              </a:rPr>
+              <a:t>ANSWER  </a:t>
+            </a:r>
+            <a:pPr indent="0" marL="0">
+              <a:buNone/>
+            </a:pPr>
+            <a:r>
+              <a:rPr lang="en-US" sz="1500" b="1" dirty="0">
+                <a:solidFill>
+                  <a:srgbClr val="1B2A38"/>
+                </a:solidFill>
+                <a:latin typeface="Calibri" pitchFamily="34" charset="0"/>
+                <a:ea typeface="Calibri" pitchFamily="34" charset="-122"/>
+                <a:cs typeface="Calibri" pitchFamily="34" charset="-120"/>
+              </a:rPr>
+              <a:t>B — Absolute counts</a:t>
+            </a:r>
+            <a:endParaRPr lang="en-US" sz="1500" dirty="0"/>
+          </a:p>
+        </p:txBody>
+      </p:sp>
+      <p:sp>
+        <p:nvSpPr>
+          <p:cNvPr id="8" name="Text 6"/>
+          <p:cNvSpPr/>
+          <p:nvPr/>
+        </p:nvSpPr>
+        <p:spPr>
+          <a:xfrm>
+            <a:off x="7439376" y="3127248"/>
+            <a:ext cx="3947648" cy="2377440"/>
+          </a:xfrm>
+          <a:prstGeom prst="rect">
+            <a:avLst/>
+          </a:prstGeom>
+          <a:noFill/>
+          <a:ln/>
+        </p:spPr>
+        <p:txBody>
+          <a:bodyPr wrap="square" lIns="0" tIns="0" rIns="0" bIns="0" rtlCol="0" anchor="t"/>
+          <a:lstStyle/>
+          <a:p>
+            <a:pPr algn="l" indent="0" marL="0">
+              <a:lnSpc>
+                <a:spcPct val="108000"/>
+              </a:lnSpc>
+              <a:buNone/>
+            </a:pPr>
+            <a:r>
+              <a:rPr lang="en-US" sz="1250" dirty="0">
+                <a:solidFill>
+                  <a:srgbClr val="33444F"/>
+                </a:solidFill>
+                <a:latin typeface="Calibri" pitchFamily="34" charset="0"/>
+                <a:ea typeface="Calibri" pitchFamily="34" charset="-122"/>
+                <a:cs typeface="Calibri" pitchFamily="34" charset="-120"/>
+              </a:rPr>
+              <a:t>Absolute counts (e.g., ANC, ALC) determine clinical risk; percentages alone can mislead.</a:t>
+            </a:r>
+            <a:endParaRPr lang="en-US" sz="1250" dirty="0"/>
+          </a:p>
+        </p:txBody>
+      </p:sp>
+      <p:sp>
+        <p:nvSpPr>
+          <p:cNvPr id="9" name="Text 7"/>
+          <p:cNvSpPr/>
+          <p:nvPr/>
+        </p:nvSpPr>
+        <p:spPr>
+          <a:xfrm>
+            <a:off x="566928" y="6473952"/>
+            <a:ext cx="7772400" cy="274320"/>
+          </a:xfrm>
+          <a:prstGeom prst="rect">
+            <a:avLst/>
+          </a:prstGeom>
+          <a:noFill/>
+          <a:ln/>
+        </p:spPr>
+        <p:txBody>
+          <a:bodyPr wrap="square" lIns="0" tIns="0" rIns="0" bIns="0" rtlCol="0" anchor="ctr"/>
+          <a:lstStyle/>
+          <a:p>
+            <a:pPr algn="l" indent="0" marL="0">
+              <a:buNone/>
+            </a:pPr>
+            <a:r>
+              <a:rPr lang="en-US" sz="850" dirty="0">
+                <a:solidFill>
+                  <a:srgbClr val="9AA8B4"/>
+                </a:solidFill>
+                <a:latin typeface="Calibri" pitchFamily="34" charset="0"/>
+                <a:ea typeface="Calibri" pitchFamily="34" charset="-122"/>
+                <a:cs typeface="Calibri" pitchFamily="34" charset="-120"/>
+              </a:rPr>
+              <a:t>Makassed General Hospital  ·  Department of Laboratory Medicine</a:t>
+            </a:r>
+            <a:endParaRPr lang="en-US" sz="850" dirty="0"/>
+          </a:p>
+        </p:txBody>
+      </p:sp>
+      <p:sp>
+        <p:nvSpPr>
+          <p:cNvPr id="10" name="Text 8"/>
+          <p:cNvSpPr/>
+          <p:nvPr/>
+        </p:nvSpPr>
+        <p:spPr>
+          <a:xfrm>
+            <a:off x="9814255" y="6473952"/>
+            <a:ext cx="1828800" cy="274320"/>
+          </a:xfrm>
+          <a:prstGeom prst="rect">
+            <a:avLst/>
+          </a:prstGeom>
+          <a:noFill/>
+          <a:ln/>
+        </p:spPr>
+        <p:txBody>
+          <a:bodyPr wrap="square" lIns="0" tIns="0" rIns="0" bIns="0" rtlCol="0" anchor="ctr"/>
+          <a:lstStyle/>
+          <a:p>
+            <a:pPr algn="r" indent="0" marL="0">
+              <a:buNone/>
+            </a:pPr>
+            <a:r>
+              <a:rPr lang="en-US" sz="850" dirty="0">
+                <a:solidFill>
+                  <a:srgbClr val="9AA8B4"/>
+                </a:solidFill>
+                <a:latin typeface="Calibri" pitchFamily="34" charset="0"/>
+                <a:ea typeface="Calibri" pitchFamily="34" charset="-122"/>
+                <a:cs typeface="Calibri" pitchFamily="34" charset="-120"/>
+              </a:rPr>
+              <a:t>CP Lecture Series</a:t>
+            </a:r>
+            <a:pPr algn="r" indent="0" marL="0">
+              <a:buNone/>
+            </a:pPr>
+            <a:r>
+              <a:rPr lang="en-US" sz="850" dirty="0">
+                <a:solidFill>
+                  <a:srgbClr val="DCE4EC"/>
+                </a:solidFill>
+                <a:latin typeface="Calibri" pitchFamily="34" charset="0"/>
+                <a:ea typeface="Calibri" pitchFamily="34" charset="-122"/>
+                <a:cs typeface="Calibri" pitchFamily="34" charset="-120"/>
+              </a:rPr>
+              <a:t>   ·   </a:t>
+            </a:r>
+            <a:pPr algn="r" indent="0" marL="0">
+              <a:buNone/>
+            </a:pPr>
+            <a:r>
+              <a:rPr lang="en-US" sz="850" b="1" dirty="0">
+                <a:solidFill>
+                  <a:srgbClr val="C62133"/>
+                </a:solidFill>
+                <a:latin typeface="Calibri" pitchFamily="34" charset="0"/>
+                <a:ea typeface="Calibri" pitchFamily="34" charset="-122"/>
+                <a:cs typeface="Calibri" pitchFamily="34" charset="-120"/>
+              </a:rPr>
+              <a:t>17</a:t>
+            </a:r>
+            <a:endParaRPr lang="en-US" sz="850" dirty="0"/>
+          </a:p>
+        </p:txBody>
+      </p:sp>
+    </p:spTree>
+  </p:cSld>
+  <p:clrMapOvr>
+    <a:masterClrMapping/>
+  </p:clrMapOvr>
+</p:sld>
+</file>
+
 <file path=ppt/slides/slide3.xml><?xml version="1.0" encoding="utf-8"?>
 <p:sld xmlns:a="http://schemas.openxmlformats.org/drawingml/2006/main" xmlns:r="http://schemas.openxmlformats.org/officeDocument/2006/relationships" xmlns:p="http://schemas.openxmlformats.org/presentationml/2006/main">
   <p:cSld name="Slide 3">
@@ -11551,6 +13171,10 @@
             </a:outerShdw>
           </a:effectLst>
         </p:spPr>
+        <p:txBody>
+          <a:bodyPr/>
+          <a:p/>
+        </p:txBody>
       </p:sp>
       <p:sp>
         <p:nvSpPr>
@@ -11578,6 +13202,10 @@
             </a:outerShdw>
           </a:effectLst>
         </p:spPr>
+        <p:txBody>
+          <a:bodyPr/>
+          <a:p/>
+        </p:txBody>
       </p:sp>
       <p:sp>
         <p:nvSpPr>
@@ -11685,6 +13313,10 @@
             </a:outerShdw>
           </a:effectLst>
         </p:spPr>
+        <p:txBody>
+          <a:bodyPr/>
+          <a:p/>
+        </p:txBody>
       </p:sp>
       <p:sp>
         <p:nvSpPr>
@@ -11712,6 +13344,10 @@
             </a:outerShdw>
           </a:effectLst>
         </p:spPr>
+        <p:txBody>
+          <a:bodyPr/>
+          <a:p/>
+        </p:txBody>
       </p:sp>
       <p:sp>
         <p:nvSpPr>
@@ -11819,6 +13455,10 @@
             </a:outerShdw>
           </a:effectLst>
         </p:spPr>
+        <p:txBody>
+          <a:bodyPr/>
+          <a:p/>
+        </p:txBody>
       </p:sp>
       <p:sp>
         <p:nvSpPr>
@@ -11846,6 +13486,10 @@
             </a:outerShdw>
           </a:effectLst>
         </p:spPr>
+        <p:txBody>
+          <a:bodyPr/>
+          <a:p/>
+        </p:txBody>
       </p:sp>
       <p:sp>
         <p:nvSpPr>
@@ -11953,6 +13597,10 @@
             </a:outerShdw>
           </a:effectLst>
         </p:spPr>
+        <p:txBody>
+          <a:bodyPr/>
+          <a:p/>
+        </p:txBody>
       </p:sp>
       <p:sp>
         <p:nvSpPr>
@@ -11980,6 +13628,10 @@
             </a:outerShdw>
           </a:effectLst>
         </p:spPr>
+        <p:txBody>
+          <a:bodyPr/>
+          <a:p/>
+        </p:txBody>
       </p:sp>
       <p:sp>
         <p:nvSpPr>
@@ -12087,6 +13739,10 @@
             </a:outerShdw>
           </a:effectLst>
         </p:spPr>
+        <p:txBody>
+          <a:bodyPr/>
+          <a:p/>
+        </p:txBody>
       </p:sp>
       <p:sp>
         <p:nvSpPr>
@@ -12114,6 +13770,10 @@
             </a:outerShdw>
           </a:effectLst>
         </p:spPr>
+        <p:txBody>
+          <a:bodyPr/>
+          <a:p/>
+        </p:txBody>
       </p:sp>
       <p:sp>
         <p:nvSpPr>
@@ -12221,6 +13881,10 @@
             </a:outerShdw>
           </a:effectLst>
         </p:spPr>
+        <p:txBody>
+          <a:bodyPr/>
+          <a:p/>
+        </p:txBody>
       </p:sp>
       <p:sp>
         <p:nvSpPr>
@@ -12248,6 +13912,10 @@
             </a:outerShdw>
           </a:effectLst>
         </p:spPr>
+        <p:txBody>
+          <a:bodyPr/>
+          <a:p/>
+        </p:txBody>
       </p:sp>
       <p:sp>
         <p:nvSpPr>
@@ -12571,6 +14239,10 @@
             </a:outerShdw>
           </a:effectLst>
         </p:spPr>
+        <p:txBody>
+          <a:bodyPr/>
+          <a:p/>
+        </p:txBody>
       </p:sp>
       <p:sp>
         <p:nvSpPr>
@@ -12598,6 +14270,10 @@
             </a:outerShdw>
           </a:effectLst>
         </p:spPr>
+        <p:txBody>
+          <a:bodyPr/>
+          <a:p/>
+        </p:txBody>
       </p:sp>
       <p:sp>
         <p:nvSpPr>
@@ -12712,6 +14388,10 @@
           </a:solidFill>
           <a:ln/>
         </p:spPr>
+        <p:txBody>
+          <a:bodyPr/>
+          <a:p/>
+        </p:txBody>
       </p:sp>
       <p:sp>
         <p:nvSpPr>
@@ -12739,6 +14419,10 @@
             </a:outerShdw>
           </a:effectLst>
         </p:spPr>
+        <p:txBody>
+          <a:bodyPr/>
+          <a:p/>
+        </p:txBody>
       </p:sp>
       <p:sp>
         <p:nvSpPr>
@@ -12860,6 +14544,10 @@
             </a:outerShdw>
           </a:effectLst>
         </p:spPr>
+        <p:txBody>
+          <a:bodyPr/>
+          <a:p/>
+        </p:txBody>
       </p:sp>
       <p:sp>
         <p:nvSpPr>
@@ -12887,6 +14575,10 @@
             </a:outerShdw>
           </a:effectLst>
         </p:spPr>
+        <p:txBody>
+          <a:bodyPr/>
+          <a:p/>
+        </p:txBody>
       </p:sp>
       <p:sp>
         <p:nvSpPr>
@@ -13001,6 +14693,10 @@
           </a:solidFill>
           <a:ln/>
         </p:spPr>
+        <p:txBody>
+          <a:bodyPr/>
+          <a:p/>
+        </p:txBody>
       </p:sp>
       <p:sp>
         <p:nvSpPr>
@@ -13028,6 +14724,10 @@
             </a:outerShdw>
           </a:effectLst>
         </p:spPr>
+        <p:txBody>
+          <a:bodyPr/>
+          <a:p/>
+        </p:txBody>
       </p:sp>
       <p:sp>
         <p:nvSpPr>
@@ -13149,6 +14849,10 @@
             </a:outerShdw>
           </a:effectLst>
         </p:spPr>
+        <p:txBody>
+          <a:bodyPr/>
+          <a:p/>
+        </p:txBody>
       </p:sp>
       <p:sp>
         <p:nvSpPr>
@@ -13176,6 +14880,10 @@
             </a:outerShdw>
           </a:effectLst>
         </p:spPr>
+        <p:txBody>
+          <a:bodyPr/>
+          <a:p/>
+        </p:txBody>
       </p:sp>
       <p:sp>
         <p:nvSpPr>
@@ -13414,6 +15122,10 @@
           </a:solidFill>
           <a:ln/>
         </p:spPr>
+        <p:txBody>
+          <a:bodyPr/>
+          <a:p/>
+        </p:txBody>
       </p:sp>
       <p:sp>
         <p:nvSpPr>
@@ -13436,6 +15148,10 @@
           </a:solidFill>
           <a:ln/>
         </p:spPr>
+        <p:txBody>
+          <a:bodyPr/>
+          <a:p/>
+        </p:txBody>
       </p:sp>
       <p:sp>
         <p:nvSpPr>
@@ -13697,6 +15413,10 @@
             </a:outerShdw>
           </a:effectLst>
         </p:spPr>
+        <p:txBody>
+          <a:bodyPr/>
+          <a:p/>
+        </p:txBody>
       </p:sp>
       <p:pic>
         <p:nvPicPr>
@@ -14005,6 +15725,10 @@
             </a:outerShdw>
           </a:effectLst>
         </p:spPr>
+        <p:txBody>
+          <a:bodyPr/>
+          <a:p/>
+        </p:txBody>
       </p:sp>
       <p:sp>
         <p:nvSpPr>
@@ -14179,6 +15903,10 @@
             </a:outerShdw>
           </a:effectLst>
         </p:spPr>
+        <p:txBody>
+          <a:bodyPr/>
+          <a:p/>
+        </p:txBody>
       </p:sp>
       <p:sp>
         <p:nvSpPr>
@@ -14484,6 +16212,10 @@
           </a:solidFill>
           <a:ln/>
         </p:spPr>
+        <p:txBody>
+          <a:bodyPr/>
+          <a:p/>
+        </p:txBody>
       </p:sp>
       <p:sp>
         <p:nvSpPr>
@@ -14506,6 +16238,10 @@
           </a:solidFill>
           <a:ln/>
         </p:spPr>
+        <p:txBody>
+          <a:bodyPr/>
+          <a:p/>
+        </p:txBody>
       </p:sp>
       <p:sp>
         <p:nvSpPr>
@@ -14762,6 +16498,10 @@
             </a:outerShdw>
           </a:effectLst>
         </p:spPr>
+        <p:txBody>
+          <a:bodyPr/>
+          <a:p/>
+        </p:txBody>
       </p:sp>
       <p:sp>
         <p:nvSpPr>
@@ -14936,6 +16676,10 @@
             </a:outerShdw>
           </a:effectLst>
         </p:spPr>
+        <p:txBody>
+          <a:bodyPr/>
+          <a:p/>
+        </p:txBody>
       </p:sp>
       <p:sp>
         <p:nvSpPr>
